--- a/GNAT-Presentation.pptx
+++ b/GNAT-Presentation.pptx
@@ -23,9 +23,10 @@
     <p:sldId id="271" r:id="rId17"/>
     <p:sldId id="272" r:id="rId18"/>
     <p:sldId id="273" r:id="rId19"/>
+    <p:sldId id="274" r:id="rId20"/>
   </p:sldIdLst>
   <p:notesMasterIdLst>
-    <p:notesMasterId r:id="rId20"/>
+    <p:notesMasterId r:id="rId21"/>
   </p:notesMasterIdLst>
   <p:sldSz cx="9144000" cy="5143500"/>
   <p:notesSz cx="5143500" cy="9144000"/>
@@ -1353,6 +1354,94 @@
 </p:notes>
 </file>
 
+<file path=ppt/notesSlides/notesSlide19.xml><?xml version="1.0" encoding="utf-8"?>
+<p:notes xmlns:a="http://schemas.openxmlformats.org/drawingml/2006/main" xmlns:r="http://schemas.openxmlformats.org/officeDocument/2006/relationships" xmlns:p="http://schemas.openxmlformats.org/presentationml/2006/main">
+  <p:cSld>
+    <p:spTree>
+      <p:nvGrpSpPr>
+        <p:cNvPr id="1" name=""/>
+        <p:cNvGrpSpPr/>
+        <p:nvPr/>
+      </p:nvGrpSpPr>
+      <p:grpSpPr>
+        <a:xfrm>
+          <a:off x="0" y="0"/>
+          <a:ext cx="0" cy="0"/>
+          <a:chOff x="0" y="0"/>
+          <a:chExt cx="0" cy="0"/>
+        </a:xfrm>
+      </p:grpSpPr>
+      <p:sp>
+        <p:nvSpPr>
+          <p:cNvPr id="2" name="Slide Image Placeholder 1"/>
+          <p:cNvSpPr>
+            <a:spLocks noGrp="1" noRot="1" noChangeAspect="1"/>
+          </p:cNvSpPr>
+          <p:nvPr>
+            <p:ph type="sldImg"/>
+          </p:nvPr>
+        </p:nvSpPr>
+        <p:spPr/>
+      </p:sp>
+      <p:sp>
+        <p:nvSpPr>
+          <p:cNvPr id="3" name="Notes Placeholder 2"/>
+          <p:cNvSpPr>
+            <a:spLocks noGrp="1"/>
+          </p:cNvSpPr>
+          <p:nvPr>
+            <p:ph type="body" idx="1"/>
+          </p:nvPr>
+        </p:nvSpPr>
+        <p:spPr/>
+        <p:txBody>
+          <a:bodyPr/>
+          <a:lstStyle/>
+          <a:p>
+            <a:r>
+              <a:rPr lang="en-US" dirty="0"/>
+              <a:t/>
+            </a:r>
+            <a:endParaRPr lang="en-US" dirty="0"/>
+          </a:p>
+        </p:txBody>
+      </p:sp>
+      <p:sp>
+        <p:nvSpPr>
+          <p:cNvPr id="4" name="Slide Number Placeholder 3"/>
+          <p:cNvSpPr>
+            <a:spLocks noGrp="1"/>
+          </p:cNvSpPr>
+          <p:nvPr>
+            <p:ph type="sldNum" sz="quarter" idx="10"/>
+          </p:nvPr>
+        </p:nvSpPr>
+        <p:spPr/>
+        <p:txBody>
+          <a:bodyPr/>
+          <a:lstStyle/>
+          <a:p>
+            <a:fld id="{F7021451-1387-4CA6-816F-3879F97B5CBC}" type="slidenum">
+              <a:rPr lang="en-US"/>
+              <a:t>19</a:t>
+            </a:fld>
+            <a:endParaRPr lang="en-US"/>
+          </a:p>
+        </p:txBody>
+      </p:sp>
+    </p:spTree>
+    <p:extLst>
+      <p:ext uri="{BB962C8B-B14F-4D97-AF65-F5344CB8AC3E}">
+        <p14:creationId xmlns:p14="http://schemas.microsoft.com/office/powerpoint/2010/main" val="1024086991"/>
+      </p:ext>
+    </p:extLst>
+  </p:cSld>
+  <p:clrMapOvr>
+    <a:masterClrMapping/>
+  </p:clrMapOvr>
+</p:notes>
+</file>
+
 <file path=ppt/notesSlides/notesSlide2.xml><?xml version="1.0" encoding="utf-8"?>
 <p:notes xmlns:a="http://schemas.openxmlformats.org/drawingml/2006/main" xmlns:r="http://schemas.openxmlformats.org/officeDocument/2006/relationships" xmlns:p="http://schemas.openxmlformats.org/presentationml/2006/main">
   <p:cSld>
@@ -2510,7 +2599,7 @@
                 <a:ea typeface="Calibri" pitchFamily="34" charset="-122"/>
                 <a:cs typeface="Calibri" pitchFamily="34" charset="-120"/>
               </a:rPr>
-              <a:t>Cybersecurity Threat Management Swiss Army Knife</a:t>
+              <a:t>GNAT's Not Another TIP</a:t>
             </a:r>
             <a:endParaRPr lang="en-US" sz="2200" dirty="0"/>
           </a:p>
@@ -3220,7 +3309,7 @@
                 <a:ea typeface="Calibri" pitchFamily="34" charset="-122"/>
                 <a:cs typeface="Calibri" pitchFamily="34" charset="-120"/>
               </a:rPr>
-              <a:t>STAGING  (_ctmsak_staging)</a:t>
+              <a:t>STAGING  (_gnat_staging)</a:t>
             </a:r>
             <a:endParaRPr lang="en-US" sz="1100" dirty="0"/>
           </a:p>
@@ -3347,7 +3436,7 @@
                 <a:ea typeface="Calibri" pitchFamily="34" charset="-122"/>
                 <a:cs typeface="Calibri" pitchFamily="34" charset="-120"/>
               </a:rPr>
-              <a:t>LIBRARY  (_ctmsak_library)</a:t>
+              <a:t>LIBRARY  (_gnat_library)</a:t>
             </a:r>
             <a:endParaRPr lang="en-US" sz="1100" dirty="0"/>
           </a:p>
@@ -7641,7 +7730,7 @@
                 <a:ea typeface="Consolas" pitchFamily="34" charset="-122"/>
                 <a:cs typeface="Consolas" pitchFamily="34" charset="-120"/>
               </a:rPr>
-              <a:t>ctmsak-scheduler.service</a:t>
+              <a:t>gnat-scheduler.service</a:t>
             </a:r>
             <a:endParaRPr lang="en-US" sz="1000" dirty="0"/>
           </a:p>
@@ -7786,7 +7875,7 @@
                 <a:ea typeface="Consolas" pitchFamily="34" charset="-122"/>
                 <a:cs typeface="Consolas" pitchFamily="34" charset="-120"/>
               </a:rPr>
-              <a:t>ctmsak-edl.service  :8080</a:t>
+              <a:t>gnat-edl.service  :8080</a:t>
             </a:r>
             <a:endParaRPr lang="en-US" sz="1000" dirty="0"/>
           </a:p>
@@ -7931,7 +8020,7 @@
                 <a:ea typeface="Consolas" pitchFamily="34" charset="-122"/>
                 <a:cs typeface="Consolas" pitchFamily="34" charset="-120"/>
               </a:rPr>
-              <a:t>ctmsak-health.service  :8090</a:t>
+              <a:t>gnat-health.service  :8090</a:t>
             </a:r>
             <a:endParaRPr lang="en-US" sz="1000" dirty="0"/>
           </a:p>
@@ -8894,7 +8983,7 @@
                 <a:ea typeface="Calibri" pitchFamily="34" charset="-122"/>
                 <a:cs typeface="Calibri" pitchFamily="34" charset="-120"/>
               </a:rPr>
-              <a:t>API changes affect one connector file, not every script. Tests cover all 15 connectors uniformly. One library version number covers the entire integration stack.</a:t>
+              <a:t>API changes affect one connector file, not every script. Tests cover all 26 connectors uniformly. One library version number covers the entire integration stack.</a:t>
             </a:r>
             <a:endParaRPr lang="en-US" sz="950" dirty="0"/>
           </a:p>
@@ -9555,7 +9644,7 @@
                 <a:ea typeface="Calibri" pitchFamily="34" charset="-122"/>
                 <a:cs typeface="Calibri" pitchFamily="34" charset="-120"/>
               </a:rPr>
-              <a:t>By the Numbers</a:t>
+              <a:t>Search Sidecar — Solr Full-Text Search</a:t>
             </a:r>
             <a:endParaRPr lang="en-US" sz="2000" dirty="0"/>
           </a:p>
@@ -9563,14 +9652,53 @@
       </p:sp>
       <p:sp>
         <p:nvSpPr>
-          <p:cNvPr id="5" name="Shape 3"/>
-          <p:cNvSpPr/>
-          <p:nvPr/>
-        </p:nvSpPr>
-        <p:spPr>
-          <a:xfrm>
-            <a:off x="502920" y="914400"/>
-            <a:ext cx="2468880" cy="1645920"/>
+          <p:cNvPr id="5" name="Text 3"/>
+          <p:cNvSpPr/>
+          <p:nvPr/>
+        </p:nvSpPr>
+        <p:spPr>
+          <a:xfrm>
+            <a:off x="365760" y="822960"/>
+            <a:ext cx="8412480" cy="320040"/>
+          </a:xfrm>
+          <a:prstGeom prst="rect">
+            <a:avLst/>
+          </a:prstGeom>
+          <a:noFill/>
+          <a:ln/>
+        </p:spPr>
+        <p:txBody>
+          <a:bodyPr wrap="square" lIns="0" tIns="0" rIns="0" bIns="0" rtlCol="0" anchor="ctr"/>
+          <a:lstStyle/>
+          <a:p>
+            <a:pPr algn="l" indent="0" marL="0">
+              <a:buNone/>
+            </a:pPr>
+            <a:r>
+              <a:rPr lang="en-US" sz="1300" i="1" dirty="0">
+                <a:solidFill>
+                  <a:srgbClr val="1E4D8C"/>
+                </a:solidFill>
+                <a:latin typeface="Calibri" pitchFamily="34" charset="0"/>
+                <a:ea typeface="Calibri" pitchFamily="34" charset="-122"/>
+                <a:cs typeface="Calibri" pitchFamily="34" charset="-120"/>
+              </a:rPr>
+              <a:t>Every STIX object indexed in Solr 9.x — search across all connectors simultaneously</a:t>
+            </a:r>
+            <a:endParaRPr lang="en-US" sz="1300" dirty="0"/>
+          </a:p>
+        </p:txBody>
+      </p:sp>
+      <p:sp>
+        <p:nvSpPr>
+          <p:cNvPr id="6" name="Shape 4"/>
+          <p:cNvSpPr/>
+          <p:nvPr/>
+        </p:nvSpPr>
+        <p:spPr>
+          <a:xfrm>
+            <a:off x="274320" y="1325880"/>
+            <a:ext cx="2743200" cy="1600200"/>
           </a:xfrm>
           <a:prstGeom prst="rect">
             <a:avLst/>
@@ -9595,14 +9723,14 @@
       </p:sp>
       <p:sp>
         <p:nvSpPr>
-          <p:cNvPr id="6" name="Shape 4"/>
-          <p:cNvSpPr/>
-          <p:nvPr/>
-        </p:nvSpPr>
-        <p:spPr>
-          <a:xfrm>
-            <a:off x="502920" y="914400"/>
-            <a:ext cx="2468880" cy="91440"/>
+          <p:cNvPr id="7" name="Shape 5"/>
+          <p:cNvSpPr/>
+          <p:nvPr/>
+        </p:nvSpPr>
+        <p:spPr>
+          <a:xfrm>
+            <a:off x="274320" y="1325880"/>
+            <a:ext cx="2743200" cy="73152"/>
           </a:xfrm>
           <a:prstGeom prst="rect">
             <a:avLst/>
@@ -9620,69 +9748,69 @@
       </p:sp>
       <p:sp>
         <p:nvSpPr>
-          <p:cNvPr id="7" name="Text 5"/>
-          <p:cNvSpPr/>
-          <p:nvPr/>
-        </p:nvSpPr>
-        <p:spPr>
-          <a:xfrm>
-            <a:off x="612648" y="1115568"/>
-            <a:ext cx="2249424" cy="822960"/>
-          </a:xfrm>
-          <a:prstGeom prst="rect">
-            <a:avLst/>
-          </a:prstGeom>
-          <a:noFill/>
-          <a:ln/>
-        </p:spPr>
-        <p:txBody>
-          <a:bodyPr wrap="square" lIns="0" tIns="0" rIns="0" bIns="0" rtlCol="0" anchor="ctr"/>
-          <a:lstStyle/>
-          <a:p>
-            <a:pPr algn="ctr" indent="0" marL="0">
-              <a:buNone/>
-            </a:pPr>
-            <a:r>
-              <a:rPr lang="en-US" sz="4400" b="1" dirty="0">
-                <a:solidFill>
-                  <a:srgbClr val="0891B2"/>
-                </a:solidFill>
-                <a:latin typeface="Calibri" pitchFamily="34" charset="0"/>
-                <a:ea typeface="Calibri" pitchFamily="34" charset="-122"/>
-                <a:cs typeface="Calibri" pitchFamily="34" charset="-120"/>
-              </a:rPr>
-              <a:t>15</a:t>
-            </a:r>
-            <a:endParaRPr lang="en-US" sz="4400" dirty="0"/>
-          </a:p>
-        </p:txBody>
-      </p:sp>
-      <p:sp>
-        <p:nvSpPr>
           <p:cNvPr id="8" name="Text 6"/>
           <p:cNvSpPr/>
           <p:nvPr/>
         </p:nvSpPr>
         <p:spPr>
           <a:xfrm>
-            <a:off x="612648" y="1938528"/>
-            <a:ext cx="2249424" cy="475488"/>
-          </a:xfrm>
-          <a:prstGeom prst="rect">
-            <a:avLst/>
-          </a:prstGeom>
-          <a:noFill/>
-          <a:ln/>
-        </p:spPr>
-        <p:txBody>
-          <a:bodyPr wrap="square" lIns="0" tIns="0" rIns="0" bIns="0" rtlCol="0" anchor="ctr"/>
-          <a:lstStyle/>
-          <a:p>
-            <a:pPr algn="ctr" indent="0" marL="0">
-              <a:buNone/>
-            </a:pPr>
-            <a:r>
-              <a:rPr lang="en-US" sz="1000" dirty="0">
+            <a:off x="365760" y="1463040"/>
+            <a:ext cx="2560320" cy="274320"/>
+          </a:xfrm>
+          <a:prstGeom prst="rect">
+            <a:avLst/>
+          </a:prstGeom>
+          <a:noFill/>
+          <a:ln/>
+        </p:spPr>
+        <p:txBody>
+          <a:bodyPr wrap="square" lIns="0" tIns="0" rIns="0" bIns="0" rtlCol="0" anchor="ctr"/>
+          <a:lstStyle/>
+          <a:p>
+            <a:pPr algn="l" indent="0" marL="0">
+              <a:buNone/>
+            </a:pPr>
+            <a:r>
+              <a:rPr lang="en-US" sz="1100" b="1" dirty="0">
+                <a:solidFill>
+                  <a:srgbClr val="1E293B"/>
+                </a:solidFill>
+                <a:latin typeface="Calibri" pitchFamily="34" charset="0"/>
+                <a:ea typeface="Calibri" pitchFamily="34" charset="-122"/>
+                <a:cs typeface="Calibri" pitchFamily="34" charset="-120"/>
+              </a:rPr>
+              <a:t>GNATIndexer</a:t>
+            </a:r>
+            <a:endParaRPr lang="en-US" sz="1100" dirty="0"/>
+          </a:p>
+        </p:txBody>
+      </p:sp>
+      <p:sp>
+        <p:nvSpPr>
+          <p:cNvPr id="9" name="Text 7"/>
+          <p:cNvSpPr/>
+          <p:nvPr/>
+        </p:nvSpPr>
+        <p:spPr>
+          <a:xfrm>
+            <a:off x="365760" y="1737360"/>
+            <a:ext cx="2560320" cy="201168"/>
+          </a:xfrm>
+          <a:prstGeom prst="rect">
+            <a:avLst/>
+          </a:prstGeom>
+          <a:noFill/>
+          <a:ln/>
+        </p:spPr>
+        <p:txBody>
+          <a:bodyPr wrap="square" lIns="0" tIns="0" rIns="0" bIns="0" rtlCol="0" anchor="ctr"/>
+          <a:lstStyle/>
+          <a:p>
+            <a:pPr algn="l" indent="0" marL="0">
+              <a:buNone/>
+            </a:pPr>
+            <a:r>
+              <a:rPr lang="en-US" sz="850" i="1" dirty="0">
                 <a:solidFill>
                   <a:srgbClr val="94A3B8"/>
                 </a:solidFill>
@@ -9690,39 +9818,61 @@
                 <a:ea typeface="Calibri" pitchFamily="34" charset="-122"/>
                 <a:cs typeface="Calibri" pitchFamily="34" charset="-120"/>
               </a:rPr>
-              <a:t>Platform</a:t>
-            </a:r>
-            <a:endParaRPr lang="en-US" sz="1000" dirty="0"/>
-          </a:p>
-          <a:p>
-            <a:pPr algn="ctr" indent="0" marL="0">
-              <a:buNone/>
-            </a:pPr>
-            <a:r>
-              <a:rPr lang="en-US" sz="1000" dirty="0">
-                <a:solidFill>
-                  <a:srgbClr val="94A3B8"/>
-                </a:solidFill>
-                <a:latin typeface="Calibri" pitchFamily="34" charset="0"/>
-                <a:ea typeface="Calibri" pitchFamily="34" charset="-122"/>
-                <a:cs typeface="Calibri" pitchFamily="34" charset="-120"/>
-              </a:rPr>
-              <a:t>Connectors</a:t>
-            </a:r>
-            <a:endParaRPr lang="en-US" sz="1000" dirty="0"/>
-          </a:p>
-        </p:txBody>
-      </p:sp>
-      <p:sp>
-        <p:nvSpPr>
-          <p:cNvPr id="9" name="Shape 7"/>
-          <p:cNvSpPr/>
-          <p:nvPr/>
-        </p:nvSpPr>
-        <p:spPr>
-          <a:xfrm>
-            <a:off x="3246120" y="914400"/>
-            <a:ext cx="2468880" cy="1645920"/>
+              <a:t>gnat/search/index.py</a:t>
+            </a:r>
+            <a:endParaRPr lang="en-US" sz="850" dirty="0"/>
+          </a:p>
+        </p:txBody>
+      </p:sp>
+      <p:sp>
+        <p:nvSpPr>
+          <p:cNvPr id="10" name="Text 8"/>
+          <p:cNvSpPr/>
+          <p:nvPr/>
+        </p:nvSpPr>
+        <p:spPr>
+          <a:xfrm>
+            <a:off x="365760" y="1965960"/>
+            <a:ext cx="2560320" cy="868680"/>
+          </a:xfrm>
+          <a:prstGeom prst="rect">
+            <a:avLst/>
+          </a:prstGeom>
+          <a:noFill/>
+          <a:ln/>
+        </p:spPr>
+        <p:txBody>
+          <a:bodyPr wrap="square" lIns="0" tIns="0" rIns="0" bIns="0" rtlCol="0" anchor="ctr"/>
+          <a:lstStyle/>
+          <a:p>
+            <a:pPr algn="l" indent="0" marL="0">
+              <a:buNone/>
+            </a:pPr>
+            <a:r>
+              <a:rPr lang="en-US" sz="900" dirty="0">
+                <a:solidFill>
+                  <a:srgbClr val="1E293B"/>
+                </a:solidFill>
+                <a:latin typeface="Calibri" pitchFamily="34" charset="0"/>
+                <a:ea typeface="Calibri" pitchFamily="34" charset="-122"/>
+                <a:cs typeface="Calibri" pitchFamily="34" charset="-120"/>
+              </a:rPr>
+              <a:t>Add/update/delete Solr documents. Batch indexing with configurable batch_size. Field-mapped from STIX objects.</a:t>
+            </a:r>
+            <a:endParaRPr lang="en-US" sz="900" dirty="0"/>
+          </a:p>
+        </p:txBody>
+      </p:sp>
+      <p:sp>
+        <p:nvSpPr>
+          <p:cNvPr id="11" name="Shape 9"/>
+          <p:cNvSpPr/>
+          <p:nvPr/>
+        </p:nvSpPr>
+        <p:spPr>
+          <a:xfrm>
+            <a:off x="3154680" y="1325880"/>
+            <a:ext cx="2743200" cy="1600200"/>
           </a:xfrm>
           <a:prstGeom prst="rect">
             <a:avLst/>
@@ -9747,14 +9897,14 @@
       </p:sp>
       <p:sp>
         <p:nvSpPr>
-          <p:cNvPr id="10" name="Shape 8"/>
-          <p:cNvSpPr/>
-          <p:nvPr/>
-        </p:nvSpPr>
-        <p:spPr>
-          <a:xfrm>
-            <a:off x="3246120" y="914400"/>
-            <a:ext cx="2468880" cy="91440"/>
+          <p:cNvPr id="12" name="Shape 10"/>
+          <p:cNvSpPr/>
+          <p:nvPr/>
+        </p:nvSpPr>
+        <p:spPr>
+          <a:xfrm>
+            <a:off x="3154680" y="1325880"/>
+            <a:ext cx="2743200" cy="73152"/>
           </a:xfrm>
           <a:prstGeom prst="rect">
             <a:avLst/>
@@ -9772,69 +9922,69 @@
       </p:sp>
       <p:sp>
         <p:nvSpPr>
-          <p:cNvPr id="11" name="Text 9"/>
-          <p:cNvSpPr/>
-          <p:nvPr/>
-        </p:nvSpPr>
-        <p:spPr>
-          <a:xfrm>
-            <a:off x="3355848" y="1115568"/>
-            <a:ext cx="2249424" cy="822960"/>
-          </a:xfrm>
-          <a:prstGeom prst="rect">
-            <a:avLst/>
-          </a:prstGeom>
-          <a:noFill/>
-          <a:ln/>
-        </p:spPr>
-        <p:txBody>
-          <a:bodyPr wrap="square" lIns="0" tIns="0" rIns="0" bIns="0" rtlCol="0" anchor="ctr"/>
-          <a:lstStyle/>
-          <a:p>
-            <a:pPr algn="ctr" indent="0" marL="0">
-              <a:buNone/>
-            </a:pPr>
-            <a:r>
-              <a:rPr lang="en-US" sz="4400" b="1" dirty="0">
-                <a:solidFill>
-                  <a:srgbClr val="1E4D8C"/>
-                </a:solidFill>
-                <a:latin typeface="Calibri" pitchFamily="34" charset="0"/>
-                <a:ea typeface="Calibri" pitchFamily="34" charset="-122"/>
-                <a:cs typeface="Calibri" pitchFamily="34" charset="-120"/>
-              </a:rPr>
-              <a:t>784</a:t>
-            </a:r>
-            <a:endParaRPr lang="en-US" sz="4400" dirty="0"/>
-          </a:p>
-        </p:txBody>
-      </p:sp>
-      <p:sp>
-        <p:nvSpPr>
-          <p:cNvPr id="12" name="Text 10"/>
-          <p:cNvSpPr/>
-          <p:nvPr/>
-        </p:nvSpPr>
-        <p:spPr>
-          <a:xfrm>
-            <a:off x="3355848" y="1938528"/>
-            <a:ext cx="2249424" cy="475488"/>
-          </a:xfrm>
-          <a:prstGeom prst="rect">
-            <a:avLst/>
-          </a:prstGeom>
-          <a:noFill/>
-          <a:ln/>
-        </p:spPr>
-        <p:txBody>
-          <a:bodyPr wrap="square" lIns="0" tIns="0" rIns="0" bIns="0" rtlCol="0" anchor="ctr"/>
-          <a:lstStyle/>
-          <a:p>
-            <a:pPr algn="ctr" indent="0" marL="0">
-              <a:buNone/>
-            </a:pPr>
-            <a:r>
-              <a:rPr lang="en-US" sz="1000" dirty="0">
+          <p:cNvPr id="13" name="Text 11"/>
+          <p:cNvSpPr/>
+          <p:nvPr/>
+        </p:nvSpPr>
+        <p:spPr>
+          <a:xfrm>
+            <a:off x="3246120" y="1463040"/>
+            <a:ext cx="2560320" cy="274320"/>
+          </a:xfrm>
+          <a:prstGeom prst="rect">
+            <a:avLst/>
+          </a:prstGeom>
+          <a:noFill/>
+          <a:ln/>
+        </p:spPr>
+        <p:txBody>
+          <a:bodyPr wrap="square" lIns="0" tIns="0" rIns="0" bIns="0" rtlCol="0" anchor="ctr"/>
+          <a:lstStyle/>
+          <a:p>
+            <a:pPr algn="l" indent="0" marL="0">
+              <a:buNone/>
+            </a:pPr>
+            <a:r>
+              <a:rPr lang="en-US" sz="1100" b="1" dirty="0">
+                <a:solidFill>
+                  <a:srgbClr val="1E293B"/>
+                </a:solidFill>
+                <a:latin typeface="Calibri" pitchFamily="34" charset="0"/>
+                <a:ea typeface="Calibri" pitchFamily="34" charset="-122"/>
+                <a:cs typeface="Calibri" pitchFamily="34" charset="-120"/>
+              </a:rPr>
+              <a:t>SearchMixin</a:t>
+            </a:r>
+            <a:endParaRPr lang="en-US" sz="1100" dirty="0"/>
+          </a:p>
+        </p:txBody>
+      </p:sp>
+      <p:sp>
+        <p:nvSpPr>
+          <p:cNvPr id="14" name="Text 12"/>
+          <p:cNvSpPr/>
+          <p:nvPr/>
+        </p:nvSpPr>
+        <p:spPr>
+          <a:xfrm>
+            <a:off x="3246120" y="1737360"/>
+            <a:ext cx="2560320" cy="201168"/>
+          </a:xfrm>
+          <a:prstGeom prst="rect">
+            <a:avLst/>
+          </a:prstGeom>
+          <a:noFill/>
+          <a:ln/>
+        </p:spPr>
+        <p:txBody>
+          <a:bodyPr wrap="square" lIns="0" tIns="0" rIns="0" bIns="0" rtlCol="0" anchor="ctr"/>
+          <a:lstStyle/>
+          <a:p>
+            <a:pPr algn="l" indent="0" marL="0">
+              <a:buNone/>
+            </a:pPr>
+            <a:r>
+              <a:rPr lang="en-US" sz="850" i="1" dirty="0">
                 <a:solidFill>
                   <a:srgbClr val="94A3B8"/>
                 </a:solidFill>
@@ -9842,39 +9992,61 @@
                 <a:ea typeface="Calibri" pitchFamily="34" charset="-122"/>
                 <a:cs typeface="Calibri" pitchFamily="34" charset="-120"/>
               </a:rPr>
-              <a:t>Unit</a:t>
-            </a:r>
-            <a:endParaRPr lang="en-US" sz="1000" dirty="0"/>
-          </a:p>
-          <a:p>
-            <a:pPr algn="ctr" indent="0" marL="0">
-              <a:buNone/>
-            </a:pPr>
-            <a:r>
-              <a:rPr lang="en-US" sz="1000" dirty="0">
-                <a:solidFill>
-                  <a:srgbClr val="94A3B8"/>
-                </a:solidFill>
-                <a:latin typeface="Calibri" pitchFamily="34" charset="0"/>
-                <a:ea typeface="Calibri" pitchFamily="34" charset="-122"/>
-                <a:cs typeface="Calibri" pitchFamily="34" charset="-120"/>
-              </a:rPr>
-              <a:t>Tests</a:t>
-            </a:r>
-            <a:endParaRPr lang="en-US" sz="1000" dirty="0"/>
-          </a:p>
-        </p:txBody>
-      </p:sp>
-      <p:sp>
-        <p:nvSpPr>
-          <p:cNvPr id="13" name="Shape 11"/>
-          <p:cNvSpPr/>
-          <p:nvPr/>
-        </p:nvSpPr>
-        <p:spPr>
-          <a:xfrm>
-            <a:off x="5989320" y="914400"/>
-            <a:ext cx="2468880" cy="1645920"/>
+              <a:t>gnat/search/mixin.py</a:t>
+            </a:r>
+            <a:endParaRPr lang="en-US" sz="850" dirty="0"/>
+          </a:p>
+        </p:txBody>
+      </p:sp>
+      <p:sp>
+        <p:nvSpPr>
+          <p:cNvPr id="15" name="Text 13"/>
+          <p:cNvSpPr/>
+          <p:nvPr/>
+        </p:nvSpPr>
+        <p:spPr>
+          <a:xfrm>
+            <a:off x="3246120" y="1965960"/>
+            <a:ext cx="2560320" cy="868680"/>
+          </a:xfrm>
+          <a:prstGeom prst="rect">
+            <a:avLst/>
+          </a:prstGeom>
+          <a:noFill/>
+          <a:ln/>
+        </p:spPr>
+        <p:txBody>
+          <a:bodyPr wrap="square" lIns="0" tIns="0" rIns="0" bIns="0" rtlCol="0" anchor="ctr"/>
+          <a:lstStyle/>
+          <a:p>
+            <a:pPr algn="l" indent="0" marL="0">
+              <a:buNone/>
+            </a:pPr>
+            <a:r>
+              <a:rPr lang="en-US" sz="900" dirty="0">
+                <a:solidFill>
+                  <a:srgbClr val="1E293B"/>
+                </a:solidFill>
+                <a:latin typeface="Calibri" pitchFamily="34" charset="0"/>
+                <a:ea typeface="Calibri" pitchFamily="34" charset="-122"/>
+                <a:cs typeface="Calibri" pitchFamily="34" charset="-120"/>
+              </a:rPr>
+              <a:t>Drop-in connector mixin. Auto-indexes on upsert_object() calls. Zero code change to existing connectors.</a:t>
+            </a:r>
+            <a:endParaRPr lang="en-US" sz="900" dirty="0"/>
+          </a:p>
+        </p:txBody>
+      </p:sp>
+      <p:sp>
+        <p:nvSpPr>
+          <p:cNvPr id="16" name="Shape 14"/>
+          <p:cNvSpPr/>
+          <p:nvPr/>
+        </p:nvSpPr>
+        <p:spPr>
+          <a:xfrm>
+            <a:off x="6035040" y="1325880"/>
+            <a:ext cx="2743200" cy="1600200"/>
           </a:xfrm>
           <a:prstGeom prst="rect">
             <a:avLst/>
@@ -9899,20 +10071,20 @@
       </p:sp>
       <p:sp>
         <p:nvSpPr>
-          <p:cNvPr id="14" name="Shape 12"/>
-          <p:cNvSpPr/>
-          <p:nvPr/>
-        </p:nvSpPr>
-        <p:spPr>
-          <a:xfrm>
-            <a:off x="5989320" y="914400"/>
-            <a:ext cx="2468880" cy="91440"/>
-          </a:xfrm>
-          <a:prstGeom prst="rect">
-            <a:avLst/>
-          </a:prstGeom>
-          <a:solidFill>
-            <a:srgbClr val="0891B2"/>
+          <p:cNvPr id="17" name="Shape 15"/>
+          <p:cNvSpPr/>
+          <p:nvPr/>
+        </p:nvSpPr>
+        <p:spPr>
+          <a:xfrm>
+            <a:off x="6035040" y="1325880"/>
+            <a:ext cx="2743200" cy="73152"/>
+          </a:xfrm>
+          <a:prstGeom prst="rect">
+            <a:avLst/>
+          </a:prstGeom>
+          <a:solidFill>
+            <a:srgbClr val="162952"/>
           </a:solidFill>
           <a:ln w="12700">
             <a:solidFill>
@@ -9924,69 +10096,69 @@
       </p:sp>
       <p:sp>
         <p:nvSpPr>
-          <p:cNvPr id="15" name="Text 13"/>
-          <p:cNvSpPr/>
-          <p:nvPr/>
-        </p:nvSpPr>
-        <p:spPr>
-          <a:xfrm>
-            <a:off x="6099048" y="1115568"/>
-            <a:ext cx="2249424" cy="822960"/>
-          </a:xfrm>
-          <a:prstGeom prst="rect">
-            <a:avLst/>
-          </a:prstGeom>
-          <a:noFill/>
-          <a:ln/>
-        </p:spPr>
-        <p:txBody>
-          <a:bodyPr wrap="square" lIns="0" tIns="0" rIns="0" bIns="0" rtlCol="0" anchor="ctr"/>
-          <a:lstStyle/>
-          <a:p>
-            <a:pPr algn="ctr" indent="0" marL="0">
-              <a:buNone/>
-            </a:pPr>
-            <a:r>
-              <a:rPr lang="en-US" sz="4400" b="1" dirty="0">
-                <a:solidFill>
-                  <a:srgbClr val="0891B2"/>
-                </a:solidFill>
-                <a:latin typeface="Calibri" pitchFamily="34" charset="0"/>
-                <a:ea typeface="Calibri" pitchFamily="34" charset="-122"/>
-                <a:cs typeface="Calibri" pitchFamily="34" charset="-120"/>
-              </a:rPr>
-              <a:t>96</a:t>
-            </a:r>
-            <a:endParaRPr lang="en-US" sz="4400" dirty="0"/>
-          </a:p>
-        </p:txBody>
-      </p:sp>
-      <p:sp>
-        <p:nvSpPr>
-          <p:cNvPr id="16" name="Text 14"/>
-          <p:cNvSpPr/>
-          <p:nvPr/>
-        </p:nvSpPr>
-        <p:spPr>
-          <a:xfrm>
-            <a:off x="6099048" y="1938528"/>
-            <a:ext cx="2249424" cy="475488"/>
-          </a:xfrm>
-          <a:prstGeom prst="rect">
-            <a:avLst/>
-          </a:prstGeom>
-          <a:noFill/>
-          <a:ln/>
-        </p:spPr>
-        <p:txBody>
-          <a:bodyPr wrap="square" lIns="0" tIns="0" rIns="0" bIns="0" rtlCol="0" anchor="ctr"/>
-          <a:lstStyle/>
-          <a:p>
-            <a:pPr algn="ctr" indent="0" marL="0">
-              <a:buNone/>
-            </a:pPr>
-            <a:r>
-              <a:rPr lang="en-US" sz="1000" dirty="0">
+          <p:cNvPr id="18" name="Text 16"/>
+          <p:cNvSpPr/>
+          <p:nvPr/>
+        </p:nvSpPr>
+        <p:spPr>
+          <a:xfrm>
+            <a:off x="6126480" y="1463040"/>
+            <a:ext cx="2560320" cy="274320"/>
+          </a:xfrm>
+          <a:prstGeom prst="rect">
+            <a:avLst/>
+          </a:prstGeom>
+          <a:noFill/>
+          <a:ln/>
+        </p:spPr>
+        <p:txBody>
+          <a:bodyPr wrap="square" lIns="0" tIns="0" rIns="0" bIns="0" rtlCol="0" anchor="ctr"/>
+          <a:lstStyle/>
+          <a:p>
+            <a:pPr algn="l" indent="0" marL="0">
+              <a:buNone/>
+            </a:pPr>
+            <a:r>
+              <a:rPr lang="en-US" sz="1100" b="1" dirty="0">
+                <a:solidFill>
+                  <a:srgbClr val="1E293B"/>
+                </a:solidFill>
+                <a:latin typeface="Calibri" pitchFamily="34" charset="0"/>
+                <a:ea typeface="Calibri" pitchFamily="34" charset="-122"/>
+                <a:cs typeface="Calibri" pitchFamily="34" charset="-120"/>
+              </a:rPr>
+              <a:t>ORM Integration</a:t>
+            </a:r>
+            <a:endParaRPr lang="en-US" sz="1100" dirty="0"/>
+          </a:p>
+        </p:txBody>
+      </p:sp>
+      <p:sp>
+        <p:nvSpPr>
+          <p:cNvPr id="19" name="Text 17"/>
+          <p:cNvSpPr/>
+          <p:nvPr/>
+        </p:nvSpPr>
+        <p:spPr>
+          <a:xfrm>
+            <a:off x="6126480" y="1737360"/>
+            <a:ext cx="2560320" cy="201168"/>
+          </a:xfrm>
+          <a:prstGeom prst="rect">
+            <a:avLst/>
+          </a:prstGeom>
+          <a:noFill/>
+          <a:ln/>
+        </p:spPr>
+        <p:txBody>
+          <a:bodyPr wrap="square" lIns="0" tIns="0" rIns="0" bIns="0" rtlCol="0" anchor="ctr"/>
+          <a:lstStyle/>
+          <a:p>
+            <a:pPr algn="l" indent="0" marL="0">
+              <a:buNone/>
+            </a:pPr>
+            <a:r>
+              <a:rPr lang="en-US" sz="850" i="1" dirty="0">
                 <a:solidFill>
                   <a:srgbClr val="94A3B8"/>
                 </a:solidFill>
@@ -9994,39 +10166,61 @@
                 <a:ea typeface="Calibri" pitchFamily="34" charset="-122"/>
                 <a:cs typeface="Calibri" pitchFamily="34" charset="-120"/>
               </a:rPr>
-              <a:t>Source</a:t>
-            </a:r>
-            <a:endParaRPr lang="en-US" sz="1000" dirty="0"/>
-          </a:p>
-          <a:p>
-            <a:pPr algn="ctr" indent="0" marL="0">
-              <a:buNone/>
-            </a:pPr>
-            <a:r>
-              <a:rPr lang="en-US" sz="1000" dirty="0">
-                <a:solidFill>
-                  <a:srgbClr val="94A3B8"/>
-                </a:solidFill>
-                <a:latin typeface="Calibri" pitchFamily="34" charset="0"/>
-                <a:ea typeface="Calibri" pitchFamily="34" charset="-122"/>
-                <a:cs typeface="Calibri" pitchFamily="34" charset="-120"/>
-              </a:rPr>
-              <a:t>Files</a:t>
-            </a:r>
-            <a:endParaRPr lang="en-US" sz="1000" dirty="0"/>
-          </a:p>
-        </p:txBody>
-      </p:sp>
-      <p:sp>
-        <p:nvSpPr>
-          <p:cNvPr id="17" name="Shape 15"/>
-          <p:cNvSpPr/>
-          <p:nvPr/>
-        </p:nvSpPr>
-        <p:spPr>
-          <a:xfrm>
-            <a:off x="502920" y="2834640"/>
-            <a:ext cx="2468880" cy="1645920"/>
+              <a:t>gnat/search/orm_with_mixin.py</a:t>
+            </a:r>
+            <a:endParaRPr lang="en-US" sz="850" dirty="0"/>
+          </a:p>
+        </p:txBody>
+      </p:sp>
+      <p:sp>
+        <p:nvSpPr>
+          <p:cNvPr id="20" name="Text 18"/>
+          <p:cNvSpPr/>
+          <p:nvPr/>
+        </p:nvSpPr>
+        <p:spPr>
+          <a:xfrm>
+            <a:off x="6126480" y="1965960"/>
+            <a:ext cx="2560320" cy="868680"/>
+          </a:xfrm>
+          <a:prstGeom prst="rect">
+            <a:avLst/>
+          </a:prstGeom>
+          <a:noFill/>
+          <a:ln/>
+        </p:spPr>
+        <p:txBody>
+          <a:bodyPr wrap="square" lIns="0" tIns="0" rIns="0" bIns="0" rtlCol="0" anchor="ctr"/>
+          <a:lstStyle/>
+          <a:p>
+            <a:pPr algn="l" indent="0" marL="0">
+              <a:buNone/>
+            </a:pPr>
+            <a:r>
+              <a:rPr lang="en-US" sz="900" dirty="0">
+                <a:solidFill>
+                  <a:srgbClr val="1E293B"/>
+                </a:solidFill>
+                <a:latin typeface="Calibri" pitchFamily="34" charset="0"/>
+                <a:ea typeface="Calibri" pitchFamily="34" charset="-122"/>
+                <a:cs typeface="Calibri" pitchFamily="34" charset="-120"/>
+              </a:rPr>
+              <a:t>SearchMixin-enhanced STIX objects. Transparent to existing ORM code.</a:t>
+            </a:r>
+            <a:endParaRPr lang="en-US" sz="900" dirty="0"/>
+          </a:p>
+        </p:txBody>
+      </p:sp>
+      <p:sp>
+        <p:nvSpPr>
+          <p:cNvPr id="21" name="Shape 19"/>
+          <p:cNvSpPr/>
+          <p:nvPr/>
+        </p:nvSpPr>
+        <p:spPr>
+          <a:xfrm>
+            <a:off x="274320" y="3108960"/>
+            <a:ext cx="2743200" cy="1600200"/>
           </a:xfrm>
           <a:prstGeom prst="rect">
             <a:avLst/>
@@ -10051,14 +10245,14 @@
       </p:sp>
       <p:sp>
         <p:nvSpPr>
-          <p:cNvPr id="18" name="Shape 16"/>
-          <p:cNvSpPr/>
-          <p:nvPr/>
-        </p:nvSpPr>
-        <p:spPr>
-          <a:xfrm>
-            <a:off x="502920" y="2834640"/>
-            <a:ext cx="2468880" cy="91440"/>
+          <p:cNvPr id="22" name="Shape 20"/>
+          <p:cNvSpPr/>
+          <p:nvPr/>
+        </p:nvSpPr>
+        <p:spPr>
+          <a:xfrm>
+            <a:off x="274320" y="3108960"/>
+            <a:ext cx="2743200" cy="73152"/>
           </a:xfrm>
           <a:prstGeom prst="rect">
             <a:avLst/>
@@ -10076,69 +10270,69 @@
       </p:sp>
       <p:sp>
         <p:nvSpPr>
-          <p:cNvPr id="19" name="Text 17"/>
-          <p:cNvSpPr/>
-          <p:nvPr/>
-        </p:nvSpPr>
-        <p:spPr>
-          <a:xfrm>
-            <a:off x="612648" y="3035808"/>
-            <a:ext cx="2249424" cy="822960"/>
-          </a:xfrm>
-          <a:prstGeom prst="rect">
-            <a:avLst/>
-          </a:prstGeom>
-          <a:noFill/>
-          <a:ln/>
-        </p:spPr>
-        <p:txBody>
-          <a:bodyPr wrap="square" lIns="0" tIns="0" rIns="0" bIns="0" rtlCol="0" anchor="ctr"/>
-          <a:lstStyle/>
-          <a:p>
-            <a:pPr algn="ctr" indent="0" marL="0">
-              <a:buNone/>
-            </a:pPr>
-            <a:r>
-              <a:rPr lang="en-US" sz="4400" b="1" dirty="0">
-                <a:solidFill>
-                  <a:srgbClr val="1E4D8C"/>
-                </a:solidFill>
-                <a:latin typeface="Calibri" pitchFamily="34" charset="0"/>
-                <a:ea typeface="Calibri" pitchFamily="34" charset="-122"/>
-                <a:cs typeface="Calibri" pitchFamily="34" charset="-120"/>
-              </a:rPr>
-              <a:t>~$50</a:t>
-            </a:r>
-            <a:endParaRPr lang="en-US" sz="4400" dirty="0"/>
-          </a:p>
-        </p:txBody>
-      </p:sp>
-      <p:sp>
-        <p:nvSpPr>
-          <p:cNvPr id="20" name="Text 18"/>
-          <p:cNvSpPr/>
-          <p:nvPr/>
-        </p:nvSpPr>
-        <p:spPr>
-          <a:xfrm>
-            <a:off x="612648" y="3858768"/>
-            <a:ext cx="2249424" cy="475488"/>
-          </a:xfrm>
-          <a:prstGeom prst="rect">
-            <a:avLst/>
-          </a:prstGeom>
-          <a:noFill/>
-          <a:ln/>
-        </p:spPr>
-        <p:txBody>
-          <a:bodyPr wrap="square" lIns="0" tIns="0" rIns="0" bIns="0" rtlCol="0" anchor="ctr"/>
-          <a:lstStyle/>
-          <a:p>
-            <a:pPr algn="ctr" indent="0" marL="0">
-              <a:buNone/>
-            </a:pPr>
-            <a:r>
-              <a:rPr lang="en-US" sz="1000" dirty="0">
+          <p:cNvPr id="23" name="Text 21"/>
+          <p:cNvSpPr/>
+          <p:nvPr/>
+        </p:nvSpPr>
+        <p:spPr>
+          <a:xfrm>
+            <a:off x="365760" y="3246120"/>
+            <a:ext cx="2560320" cy="274320"/>
+          </a:xfrm>
+          <a:prstGeom prst="rect">
+            <a:avLst/>
+          </a:prstGeom>
+          <a:noFill/>
+          <a:ln/>
+        </p:spPr>
+        <p:txBody>
+          <a:bodyPr wrap="square" lIns="0" tIns="0" rIns="0" bIns="0" rtlCol="0" anchor="ctr"/>
+          <a:lstStyle/>
+          <a:p>
+            <a:pPr algn="l" indent="0" marL="0">
+              <a:buNone/>
+            </a:pPr>
+            <a:r>
+              <a:rPr lang="en-US" sz="1100" b="1" dirty="0">
+                <a:solidFill>
+                  <a:srgbClr val="1E293B"/>
+                </a:solidFill>
+                <a:latin typeface="Calibri" pitchFamily="34" charset="0"/>
+                <a:ea typeface="Calibri" pitchFamily="34" charset="-122"/>
+                <a:cs typeface="Calibri" pitchFamily="34" charset="-120"/>
+              </a:rPr>
+              <a:t>Pipeline Patch</a:t>
+            </a:r>
+            <a:endParaRPr lang="en-US" sz="1100" dirty="0"/>
+          </a:p>
+        </p:txBody>
+      </p:sp>
+      <p:sp>
+        <p:nvSpPr>
+          <p:cNvPr id="24" name="Text 22"/>
+          <p:cNvSpPr/>
+          <p:nvPr/>
+        </p:nvSpPr>
+        <p:spPr>
+          <a:xfrm>
+            <a:off x="365760" y="3520440"/>
+            <a:ext cx="2560320" cy="201168"/>
+          </a:xfrm>
+          <a:prstGeom prst="rect">
+            <a:avLst/>
+          </a:prstGeom>
+          <a:noFill/>
+          <a:ln/>
+        </p:spPr>
+        <p:txBody>
+          <a:bodyPr wrap="square" lIns="0" tIns="0" rIns="0" bIns="0" rtlCol="0" anchor="ctr"/>
+          <a:lstStyle/>
+          <a:p>
+            <a:pPr algn="l" indent="0" marL="0">
+              <a:buNone/>
+            </a:pPr>
+            <a:r>
+              <a:rPr lang="en-US" sz="850" i="1" dirty="0">
                 <a:solidFill>
                   <a:srgbClr val="94A3B8"/>
                 </a:solidFill>
@@ -10146,39 +10340,61 @@
                 <a:ea typeface="Calibri" pitchFamily="34" charset="-122"/>
                 <a:cs typeface="Calibri" pitchFamily="34" charset="-120"/>
               </a:rPr>
-              <a:t>Monthly Azure</a:t>
-            </a:r>
-            <a:endParaRPr lang="en-US" sz="1000" dirty="0"/>
-          </a:p>
-          <a:p>
-            <a:pPr algn="ctr" indent="0" marL="0">
-              <a:buNone/>
-            </a:pPr>
-            <a:r>
-              <a:rPr lang="en-US" sz="1000" dirty="0">
-                <a:solidFill>
-                  <a:srgbClr val="94A3B8"/>
-                </a:solidFill>
-                <a:latin typeface="Calibri" pitchFamily="34" charset="0"/>
-                <a:ea typeface="Calibri" pitchFamily="34" charset="-122"/>
-                <a:cs typeface="Calibri" pitchFamily="34" charset="-120"/>
-              </a:rPr>
-              <a:t>VM Cost</a:t>
-            </a:r>
-            <a:endParaRPr lang="en-US" sz="1000" dirty="0"/>
-          </a:p>
-        </p:txBody>
-      </p:sp>
-      <p:sp>
-        <p:nvSpPr>
-          <p:cNvPr id="21" name="Shape 19"/>
-          <p:cNvSpPr/>
-          <p:nvPr/>
-        </p:nvSpPr>
-        <p:spPr>
-          <a:xfrm>
-            <a:off x="3246120" y="2834640"/>
-            <a:ext cx="2468880" cy="1645920"/>
+              <a:t>gnat/search/pipeline_patch.py</a:t>
+            </a:r>
+            <a:endParaRPr lang="en-US" sz="850" dirty="0"/>
+          </a:p>
+        </p:txBody>
+      </p:sp>
+      <p:sp>
+        <p:nvSpPr>
+          <p:cNvPr id="25" name="Text 23"/>
+          <p:cNvSpPr/>
+          <p:nvPr/>
+        </p:nvSpPr>
+        <p:spPr>
+          <a:xfrm>
+            <a:off x="365760" y="3749040"/>
+            <a:ext cx="2560320" cy="868680"/>
+          </a:xfrm>
+          <a:prstGeom prst="rect">
+            <a:avLst/>
+          </a:prstGeom>
+          <a:noFill/>
+          <a:ln/>
+        </p:spPr>
+        <p:txBody>
+          <a:bodyPr wrap="square" lIns="0" tIns="0" rIns="0" bIns="0" rtlCol="0" anchor="ctr"/>
+          <a:lstStyle/>
+          <a:p>
+            <a:pPr algn="l" indent="0" marL="0">
+              <a:buNone/>
+            </a:pPr>
+            <a:r>
+              <a:rPr lang="en-US" sz="900" dirty="0">
+                <a:solidFill>
+                  <a:srgbClr val="1E293B"/>
+                </a:solidFill>
+                <a:latin typeface="Calibri" pitchFamily="34" charset="0"/>
+                <a:ea typeface="Calibri" pitchFamily="34" charset="-122"/>
+                <a:cs typeface="Calibri" pitchFamily="34" charset="-120"/>
+              </a:rPr>
+              <a:t>Patches IngestPipeline to route records through Solr indexer post-map.</a:t>
+            </a:r>
+            <a:endParaRPr lang="en-US" sz="900" dirty="0"/>
+          </a:p>
+        </p:txBody>
+      </p:sp>
+      <p:sp>
+        <p:nvSpPr>
+          <p:cNvPr id="26" name="Shape 24"/>
+          <p:cNvSpPr/>
+          <p:nvPr/>
+        </p:nvSpPr>
+        <p:spPr>
+          <a:xfrm>
+            <a:off x="3154680" y="3108960"/>
+            <a:ext cx="2743200" cy="1600200"/>
           </a:xfrm>
           <a:prstGeom prst="rect">
             <a:avLst/>
@@ -10203,20 +10419,20 @@
       </p:sp>
       <p:sp>
         <p:nvSpPr>
-          <p:cNvPr id="22" name="Shape 20"/>
-          <p:cNvSpPr/>
-          <p:nvPr/>
-        </p:nvSpPr>
-        <p:spPr>
-          <a:xfrm>
-            <a:off x="3246120" y="2834640"/>
-            <a:ext cx="2468880" cy="91440"/>
-          </a:xfrm>
-          <a:prstGeom prst="rect">
-            <a:avLst/>
-          </a:prstGeom>
-          <a:solidFill>
-            <a:srgbClr val="F59E0B"/>
+          <p:cNvPr id="27" name="Shape 25"/>
+          <p:cNvSpPr/>
+          <p:nvPr/>
+        </p:nvSpPr>
+        <p:spPr>
+          <a:xfrm>
+            <a:off x="3154680" y="3108960"/>
+            <a:ext cx="2743200" cy="73152"/>
+          </a:xfrm>
+          <a:prstGeom prst="rect">
+            <a:avLst/>
+          </a:prstGeom>
+          <a:solidFill>
+            <a:srgbClr val="162952"/>
           </a:solidFill>
           <a:ln w="12700">
             <a:solidFill>
@@ -10228,69 +10444,69 @@
       </p:sp>
       <p:sp>
         <p:nvSpPr>
-          <p:cNvPr id="23" name="Text 21"/>
-          <p:cNvSpPr/>
-          <p:nvPr/>
-        </p:nvSpPr>
-        <p:spPr>
-          <a:xfrm>
-            <a:off x="3355848" y="3035808"/>
-            <a:ext cx="2249424" cy="822960"/>
-          </a:xfrm>
-          <a:prstGeom prst="rect">
-            <a:avLst/>
-          </a:prstGeom>
-          <a:noFill/>
-          <a:ln/>
-        </p:spPr>
-        <p:txBody>
-          <a:bodyPr wrap="square" lIns="0" tIns="0" rIns="0" bIns="0" rtlCol="0" anchor="ctr"/>
-          <a:lstStyle/>
-          <a:p>
-            <a:pPr algn="ctr" indent="0" marL="0">
-              <a:buNone/>
-            </a:pPr>
-            <a:r>
-              <a:rPr lang="en-US" sz="4400" b="1" dirty="0">
-                <a:solidFill>
-                  <a:srgbClr val="F59E0B"/>
-                </a:solidFill>
-                <a:latin typeface="Calibri" pitchFamily="34" charset="0"/>
-                <a:ea typeface="Calibri" pitchFamily="34" charset="-122"/>
-                <a:cs typeface="Calibri" pitchFamily="34" charset="-120"/>
-              </a:rPr>
-              <a:t>60</a:t>
-            </a:r>
-            <a:endParaRPr lang="en-US" sz="4400" dirty="0"/>
-          </a:p>
-        </p:txBody>
-      </p:sp>
-      <p:sp>
-        <p:nvSpPr>
-          <p:cNvPr id="24" name="Text 22"/>
-          <p:cNvSpPr/>
-          <p:nvPr/>
-        </p:nvSpPr>
-        <p:spPr>
-          <a:xfrm>
-            <a:off x="3355848" y="3858768"/>
-            <a:ext cx="2249424" cy="475488"/>
-          </a:xfrm>
-          <a:prstGeom prst="rect">
-            <a:avLst/>
-          </a:prstGeom>
-          <a:noFill/>
-          <a:ln/>
-        </p:spPr>
-        <p:txBody>
-          <a:bodyPr wrap="square" lIns="0" tIns="0" rIns="0" bIns="0" rtlCol="0" anchor="ctr"/>
-          <a:lstStyle/>
-          <a:p>
-            <a:pPr algn="ctr" indent="0" marL="0">
-              <a:buNone/>
-            </a:pPr>
-            <a:r>
-              <a:rPr lang="en-US" sz="1000" dirty="0">
+          <p:cNvPr id="28" name="Text 26"/>
+          <p:cNvSpPr/>
+          <p:nvPr/>
+        </p:nvSpPr>
+        <p:spPr>
+          <a:xfrm>
+            <a:off x="3246120" y="3246120"/>
+            <a:ext cx="2560320" cy="274320"/>
+          </a:xfrm>
+          <a:prstGeom prst="rect">
+            <a:avLst/>
+          </a:prstGeom>
+          <a:noFill/>
+          <a:ln/>
+        </p:spPr>
+        <p:txBody>
+          <a:bodyPr wrap="square" lIns="0" tIns="0" rIns="0" bIns="0" rtlCol="0" anchor="ctr"/>
+          <a:lstStyle/>
+          <a:p>
+            <a:pPr algn="l" indent="0" marL="0">
+              <a:buNone/>
+            </a:pPr>
+            <a:r>
+              <a:rPr lang="en-US" sz="1100" b="1" dirty="0">
+                <a:solidFill>
+                  <a:srgbClr val="1E293B"/>
+                </a:solidFill>
+                <a:latin typeface="Calibri" pitchFamily="34" charset="0"/>
+                <a:ea typeface="Calibri" pitchFamily="34" charset="-122"/>
+                <a:cs typeface="Calibri" pitchFamily="34" charset="-120"/>
+              </a:rPr>
+              <a:t>Library Patch</a:t>
+            </a:r>
+            <a:endParaRPr lang="en-US" sz="1100" dirty="0"/>
+          </a:p>
+        </p:txBody>
+      </p:sp>
+      <p:sp>
+        <p:nvSpPr>
+          <p:cNvPr id="29" name="Text 27"/>
+          <p:cNvSpPr/>
+          <p:nvPr/>
+        </p:nvSpPr>
+        <p:spPr>
+          <a:xfrm>
+            <a:off x="3246120" y="3520440"/>
+            <a:ext cx="2560320" cy="201168"/>
+          </a:xfrm>
+          <a:prstGeom prst="rect">
+            <a:avLst/>
+          </a:prstGeom>
+          <a:noFill/>
+          <a:ln/>
+        </p:spPr>
+        <p:txBody>
+          <a:bodyPr wrap="square" lIns="0" tIns="0" rIns="0" bIns="0" rtlCol="0" anchor="ctr"/>
+          <a:lstStyle/>
+          <a:p>
+            <a:pPr algn="l" indent="0" marL="0">
+              <a:buNone/>
+            </a:pPr>
+            <a:r>
+              <a:rPr lang="en-US" sz="850" i="1" dirty="0">
                 <a:solidFill>
                   <a:srgbClr val="94A3B8"/>
                 </a:solidFill>
@@ -10298,39 +10514,61 @@
                 <a:ea typeface="Calibri" pitchFamily="34" charset="-122"/>
                 <a:cs typeface="Calibri" pitchFamily="34" charset="-120"/>
               </a:rPr>
-              <a:t>AI Confidence</a:t>
-            </a:r>
-            <a:endParaRPr lang="en-US" sz="1000" dirty="0"/>
-          </a:p>
-          <a:p>
-            <a:pPr algn="ctr" indent="0" marL="0">
-              <a:buNone/>
-            </a:pPr>
-            <a:r>
-              <a:rPr lang="en-US" sz="1000" dirty="0">
-                <a:solidFill>
-                  <a:srgbClr val="94A3B8"/>
-                </a:solidFill>
-                <a:latin typeface="Calibri" pitchFamily="34" charset="0"/>
-                <a:ea typeface="Calibri" pitchFamily="34" charset="-122"/>
-                <a:cs typeface="Calibri" pitchFamily="34" charset="-120"/>
-              </a:rPr>
-              <a:t>Ceiling (default)</a:t>
-            </a:r>
-            <a:endParaRPr lang="en-US" sz="1000" dirty="0"/>
-          </a:p>
-        </p:txBody>
-      </p:sp>
-      <p:sp>
-        <p:nvSpPr>
-          <p:cNvPr id="25" name="Shape 23"/>
-          <p:cNvSpPr/>
-          <p:nvPr/>
-        </p:nvSpPr>
-        <p:spPr>
-          <a:xfrm>
-            <a:off x="5989320" y="2834640"/>
-            <a:ext cx="2468880" cy="1645920"/>
+              <a:t>gnat/search/library_patch.py</a:t>
+            </a:r>
+            <a:endParaRPr lang="en-US" sz="850" dirty="0"/>
+          </a:p>
+        </p:txBody>
+      </p:sp>
+      <p:sp>
+        <p:nvSpPr>
+          <p:cNvPr id="30" name="Text 28"/>
+          <p:cNvSpPr/>
+          <p:nvPr/>
+        </p:nvSpPr>
+        <p:spPr>
+          <a:xfrm>
+            <a:off x="3246120" y="3749040"/>
+            <a:ext cx="2560320" cy="868680"/>
+          </a:xfrm>
+          <a:prstGeom prst="rect">
+            <a:avLst/>
+          </a:prstGeom>
+          <a:noFill/>
+          <a:ln/>
+        </p:spPr>
+        <p:txBody>
+          <a:bodyPr wrap="square" lIns="0" tIns="0" rIns="0" bIns="0" rtlCol="0" anchor="ctr"/>
+          <a:lstStyle/>
+          <a:p>
+            <a:pPr algn="l" indent="0" marL="0">
+              <a:buNone/>
+            </a:pPr>
+            <a:r>
+              <a:rPr lang="en-US" sz="900" dirty="0">
+                <a:solidFill>
+                  <a:srgbClr val="1E293B"/>
+                </a:solidFill>
+                <a:latin typeface="Calibri" pitchFamily="34" charset="0"/>
+                <a:ea typeface="Calibri" pitchFamily="34" charset="-122"/>
+                <a:cs typeface="Calibri" pitchFamily="34" charset="-120"/>
+              </a:rPr>
+              <a:t>ResearchLibrary search-backed lookups. Cross-source correlation at query time.</a:t>
+            </a:r>
+            <a:endParaRPr lang="en-US" sz="900" dirty="0"/>
+          </a:p>
+        </p:txBody>
+      </p:sp>
+      <p:sp>
+        <p:nvSpPr>
+          <p:cNvPr id="31" name="Shape 29"/>
+          <p:cNvSpPr/>
+          <p:nvPr/>
+        </p:nvSpPr>
+        <p:spPr>
+          <a:xfrm>
+            <a:off x="6035040" y="3108960"/>
+            <a:ext cx="2743200" cy="1600200"/>
           </a:xfrm>
           <a:prstGeom prst="rect">
             <a:avLst/>
@@ -10355,14 +10593,14 @@
       </p:sp>
       <p:sp>
         <p:nvSpPr>
-          <p:cNvPr id="26" name="Shape 24"/>
-          <p:cNvSpPr/>
-          <p:nvPr/>
-        </p:nvSpPr>
-        <p:spPr>
-          <a:xfrm>
-            <a:off x="5989320" y="2834640"/>
-            <a:ext cx="2468880" cy="91440"/>
+          <p:cNvPr id="32" name="Shape 30"/>
+          <p:cNvSpPr/>
+          <p:nvPr/>
+        </p:nvSpPr>
+        <p:spPr>
+          <a:xfrm>
+            <a:off x="6035040" y="3108960"/>
+            <a:ext cx="2743200" cy="73152"/>
           </a:xfrm>
           <a:prstGeom prst="rect">
             <a:avLst/>
@@ -10380,14 +10618,156 @@
       </p:sp>
       <p:sp>
         <p:nvSpPr>
-          <p:cNvPr id="27" name="Text 25"/>
-          <p:cNvSpPr/>
-          <p:nvPr/>
-        </p:nvSpPr>
-        <p:spPr>
-          <a:xfrm>
-            <a:off x="6099048" y="3035808"/>
-            <a:ext cx="2249424" cy="822960"/>
+          <p:cNvPr id="33" name="Text 31"/>
+          <p:cNvSpPr/>
+          <p:nvPr/>
+        </p:nvSpPr>
+        <p:spPr>
+          <a:xfrm>
+            <a:off x="6126480" y="3246120"/>
+            <a:ext cx="2560320" cy="274320"/>
+          </a:xfrm>
+          <a:prstGeom prst="rect">
+            <a:avLst/>
+          </a:prstGeom>
+          <a:noFill/>
+          <a:ln/>
+        </p:spPr>
+        <p:txBody>
+          <a:bodyPr wrap="square" lIns="0" tIns="0" rIns="0" bIns="0" rtlCol="0" anchor="ctr"/>
+          <a:lstStyle/>
+          <a:p>
+            <a:pPr algn="l" indent="0" marL="0">
+              <a:buNone/>
+            </a:pPr>
+            <a:r>
+              <a:rPr lang="en-US" sz="1100" b="1" dirty="0">
+                <a:solidFill>
+                  <a:srgbClr val="1E293B"/>
+                </a:solidFill>
+                <a:latin typeface="Calibri" pitchFamily="34" charset="0"/>
+                <a:ea typeface="Calibri" pitchFamily="34" charset="-122"/>
+                <a:cs typeface="Calibri" pitchFamily="34" charset="-120"/>
+              </a:rPr>
+              <a:t>Solr Schema</a:t>
+            </a:r>
+            <a:endParaRPr lang="en-US" sz="1100" dirty="0"/>
+          </a:p>
+        </p:txBody>
+      </p:sp>
+      <p:sp>
+        <p:nvSpPr>
+          <p:cNvPr id="34" name="Text 32"/>
+          <p:cNvSpPr/>
+          <p:nvPr/>
+        </p:nvSpPr>
+        <p:spPr>
+          <a:xfrm>
+            <a:off x="6126480" y="3520440"/>
+            <a:ext cx="2560320" cy="201168"/>
+          </a:xfrm>
+          <a:prstGeom prst="rect">
+            <a:avLst/>
+          </a:prstGeom>
+          <a:noFill/>
+          <a:ln/>
+        </p:spPr>
+        <p:txBody>
+          <a:bodyPr wrap="square" lIns="0" tIns="0" rIns="0" bIns="0" rtlCol="0" anchor="ctr"/>
+          <a:lstStyle/>
+          <a:p>
+            <a:pPr algn="l" indent="0" marL="0">
+              <a:buNone/>
+            </a:pPr>
+            <a:r>
+              <a:rPr lang="en-US" sz="850" i="1" dirty="0">
+                <a:solidFill>
+                  <a:srgbClr val="94A3B8"/>
+                </a:solidFill>
+                <a:latin typeface="Calibri" pitchFamily="34" charset="0"/>
+                <a:ea typeface="Calibri" pitchFamily="34" charset="-122"/>
+                <a:cs typeface="Calibri" pitchFamily="34" charset="-120"/>
+              </a:rPr>
+              <a:t>solr_schema_gnat.xml</a:t>
+            </a:r>
+            <a:endParaRPr lang="en-US" sz="850" dirty="0"/>
+          </a:p>
+        </p:txBody>
+      </p:sp>
+      <p:sp>
+        <p:nvSpPr>
+          <p:cNvPr id="35" name="Text 33"/>
+          <p:cNvSpPr/>
+          <p:nvPr/>
+        </p:nvSpPr>
+        <p:spPr>
+          <a:xfrm>
+            <a:off x="6126480" y="3749040"/>
+            <a:ext cx="2560320" cy="868680"/>
+          </a:xfrm>
+          <a:prstGeom prst="rect">
+            <a:avLst/>
+          </a:prstGeom>
+          <a:noFill/>
+          <a:ln/>
+        </p:spPr>
+        <p:txBody>
+          <a:bodyPr wrap="square" lIns="0" tIns="0" rIns="0" bIns="0" rtlCol="0" anchor="ctr"/>
+          <a:lstStyle/>
+          <a:p>
+            <a:pPr algn="l" indent="0" marL="0">
+              <a:buNone/>
+            </a:pPr>
+            <a:r>
+              <a:rPr lang="en-US" sz="900" dirty="0">
+                <a:solidFill>
+                  <a:srgbClr val="1E293B"/>
+                </a:solidFill>
+                <a:latin typeface="Calibri" pitchFamily="34" charset="0"/>
+                <a:ea typeface="Calibri" pitchFamily="34" charset="-122"/>
+                <a:cs typeface="Calibri" pitchFamily="34" charset="-120"/>
+              </a:rPr>
+              <a:t>Solr 9.x schema for GNAT fields: type, value, confidence, x_target_sectors, tlp, source, timestamp.</a:t>
+            </a:r>
+            <a:endParaRPr lang="en-US" sz="900" dirty="0"/>
+          </a:p>
+        </p:txBody>
+      </p:sp>
+      <p:sp>
+        <p:nvSpPr>
+          <p:cNvPr id="36" name="Shape 34"/>
+          <p:cNvSpPr/>
+          <p:nvPr/>
+        </p:nvSpPr>
+        <p:spPr>
+          <a:xfrm>
+            <a:off x="274320" y="4663440"/>
+            <a:ext cx="8595360" cy="347472"/>
+          </a:xfrm>
+          <a:prstGeom prst="rect">
+            <a:avLst/>
+          </a:prstGeom>
+          <a:solidFill>
+            <a:srgbClr val="F0F4FA"/>
+          </a:solidFill>
+          <a:ln w="6350">
+            <a:solidFill>
+              <a:srgbClr val="CBD5E1"/>
+            </a:solidFill>
+            <a:prstDash val="solid"/>
+          </a:ln>
+        </p:spPr>
+      </p:sp>
+      <p:sp>
+        <p:nvSpPr>
+          <p:cNvPr id="37" name="Text 35"/>
+          <p:cNvSpPr/>
+          <p:nvPr/>
+        </p:nvSpPr>
+        <p:spPr>
+          <a:xfrm>
+            <a:off x="365760" y="4700016"/>
+            <a:ext cx="8412480" cy="274320"/>
           </a:xfrm>
           <a:prstGeom prst="rect">
             <a:avLst/>
@@ -10403,46 +10783,7 @@
               <a:buNone/>
             </a:pPr>
             <a:r>
-              <a:rPr lang="en-US" sz="4400" b="1" dirty="0">
-                <a:solidFill>
-                  <a:srgbClr val="0891B2"/>
-                </a:solidFill>
-                <a:latin typeface="Calibri" pitchFamily="34" charset="0"/>
-                <a:ea typeface="Calibri" pitchFamily="34" charset="-122"/>
-                <a:cs typeface="Calibri" pitchFamily="34" charset="-120"/>
-              </a:rPr>
-              <a:t>4 hrs</a:t>
-            </a:r>
-            <a:endParaRPr lang="en-US" sz="4400" dirty="0"/>
-          </a:p>
-        </p:txBody>
-      </p:sp>
-      <p:sp>
-        <p:nvSpPr>
-          <p:cNvPr id="28" name="Text 26"/>
-          <p:cNvSpPr/>
-          <p:nvPr/>
-        </p:nvSpPr>
-        <p:spPr>
-          <a:xfrm>
-            <a:off x="6099048" y="3858768"/>
-            <a:ext cx="2249424" cy="475488"/>
-          </a:xfrm>
-          <a:prstGeom prst="rect">
-            <a:avLst/>
-          </a:prstGeom>
-          <a:noFill/>
-          <a:ln/>
-        </p:spPr>
-        <p:txBody>
-          <a:bodyPr wrap="square" lIns="0" tIns="0" rIns="0" bIns="0" rtlCol="0" anchor="ctr"/>
-          <a:lstStyle/>
-          <a:p>
-            <a:pPr algn="ctr" indent="0" marL="0">
-              <a:buNone/>
-            </a:pPr>
-            <a:r>
-              <a:rPr lang="en-US" sz="1000" dirty="0">
+              <a:rPr lang="en-US" sz="900" dirty="0">
                 <a:solidFill>
                   <a:srgbClr val="94A3B8"/>
                 </a:solidFill>
@@ -10450,26 +10791,9 @@
                 <a:ea typeface="Calibri" pitchFamily="34" charset="-122"/>
                 <a:cs typeface="Calibri" pitchFamily="34" charset="-120"/>
               </a:rPr>
-              <a:t>Curation Job</a:t>
-            </a:r>
-            <a:endParaRPr lang="en-US" sz="1000" dirty="0"/>
-          </a:p>
-          <a:p>
-            <a:pPr algn="ctr" indent="0" marL="0">
-              <a:buNone/>
-            </a:pPr>
-            <a:r>
-              <a:rPr lang="en-US" sz="1000" dirty="0">
-                <a:solidFill>
-                  <a:srgbClr val="94A3B8"/>
-                </a:solidFill>
-                <a:latin typeface="Calibri" pitchFamily="34" charset="0"/>
-                <a:ea typeface="Calibri" pitchFamily="34" charset="-122"/>
-                <a:cs typeface="Calibri" pitchFamily="34" charset="-120"/>
-              </a:rPr>
-              <a:t>Interval</a:t>
-            </a:r>
-            <a:endParaRPr lang="en-US" sz="1000" dirty="0"/>
+              <a:t>Configure via [search] section in gnat.ini  ·  solr_url = http://localhost:8983/solr/gnat  ·  enabled = true  ·  batch_size = 100</a:t>
+            </a:r>
+            <a:endParaRPr lang="en-US" sz="900" dirty="0"/>
           </a:p>
         </p:txBody>
       </p:sp>
@@ -10588,7 +10912,7 @@
                 <a:ea typeface="Calibri" pitchFamily="34" charset="-122"/>
                 <a:cs typeface="Calibri" pitchFamily="34" charset="-120"/>
               </a:rPr>
-              <a:t>Implementation Sequence</a:t>
+              <a:t>By the Numbers</a:t>
             </a:r>
             <a:endParaRPr lang="en-US" sz="2000" dirty="0"/>
           </a:p>
@@ -10602,8 +10926,40 @@
         </p:nvSpPr>
         <p:spPr>
           <a:xfrm>
-            <a:off x="320040" y="822960"/>
-            <a:ext cx="1325880" cy="502920"/>
+            <a:off x="502920" y="914400"/>
+            <a:ext cx="2468880" cy="1645920"/>
+          </a:xfrm>
+          <a:prstGeom prst="rect">
+            <a:avLst/>
+          </a:prstGeom>
+          <a:solidFill>
+            <a:srgbClr val="FFFFFF"/>
+          </a:solidFill>
+          <a:ln w="6350">
+            <a:solidFill>
+              <a:srgbClr val="CBD5E1"/>
+            </a:solidFill>
+            <a:prstDash val="solid"/>
+          </a:ln>
+          <a:effectLst>
+            <a:outerShdw sx="100000" sy="100000" kx="0" ky="0" algn="bl" rotWithShape="0" blurRad="63500" dist="25400" dir="8100000">
+              <a:srgbClr val="000000">
+                <a:alpha val="12000"/>
+              </a:srgbClr>
+            </a:outerShdw>
+          </a:effectLst>
+        </p:spPr>
+      </p:sp>
+      <p:sp>
+        <p:nvSpPr>
+          <p:cNvPr id="6" name="Shape 4"/>
+          <p:cNvSpPr/>
+          <p:nvPr/>
+        </p:nvSpPr>
+        <p:spPr>
+          <a:xfrm>
+            <a:off x="502920" y="914400"/>
+            <a:ext cx="2468880" cy="91440"/>
           </a:xfrm>
           <a:prstGeom prst="rect">
             <a:avLst/>
@@ -10621,14 +10977,14 @@
       </p:sp>
       <p:sp>
         <p:nvSpPr>
-          <p:cNvPr id="6" name="Text 4"/>
-          <p:cNvSpPr/>
-          <p:nvPr/>
-        </p:nvSpPr>
-        <p:spPr>
-          <a:xfrm>
-            <a:off x="365760" y="850392"/>
-            <a:ext cx="1234440" cy="201168"/>
+          <p:cNvPr id="7" name="Text 5"/>
+          <p:cNvSpPr/>
+          <p:nvPr/>
+        </p:nvSpPr>
+        <p:spPr>
+          <a:xfrm>
+            <a:off x="612648" y="1115568"/>
+            <a:ext cx="2249424" cy="822960"/>
           </a:xfrm>
           <a:prstGeom prst="rect">
             <a:avLst/>
@@ -10644,30 +11000,30 @@
               <a:buNone/>
             </a:pPr>
             <a:r>
-              <a:rPr lang="en-US" sz="900" b="1" dirty="0">
-                <a:solidFill>
-                  <a:srgbClr val="FFFFFF"/>
-                </a:solidFill>
-                <a:latin typeface="Calibri" pitchFamily="34" charset="0"/>
-                <a:ea typeface="Calibri" pitchFamily="34" charset="-122"/>
-                <a:cs typeface="Calibri" pitchFamily="34" charset="-120"/>
-              </a:rPr>
-              <a:t>Phase 1</a:t>
-            </a:r>
-            <a:endParaRPr lang="en-US" sz="900" dirty="0"/>
-          </a:p>
-        </p:txBody>
-      </p:sp>
-      <p:sp>
-        <p:nvSpPr>
-          <p:cNvPr id="7" name="Text 5"/>
-          <p:cNvSpPr/>
-          <p:nvPr/>
-        </p:nvSpPr>
-        <p:spPr>
-          <a:xfrm>
-            <a:off x="365760" y="1051560"/>
-            <a:ext cx="1234440" cy="201168"/>
+              <a:rPr lang="en-US" sz="4400" b="1" dirty="0">
+                <a:solidFill>
+                  <a:srgbClr val="0891B2"/>
+                </a:solidFill>
+                <a:latin typeface="Calibri" pitchFamily="34" charset="0"/>
+                <a:ea typeface="Calibri" pitchFamily="34" charset="-122"/>
+                <a:cs typeface="Calibri" pitchFamily="34" charset="-120"/>
+              </a:rPr>
+              <a:t>26</a:t>
+            </a:r>
+            <a:endParaRPr lang="en-US" sz="4400" dirty="0"/>
+          </a:p>
+        </p:txBody>
+      </p:sp>
+      <p:sp>
+        <p:nvSpPr>
+          <p:cNvPr id="8" name="Text 6"/>
+          <p:cNvSpPr/>
+          <p:nvPr/>
+        </p:nvSpPr>
+        <p:spPr>
+          <a:xfrm>
+            <a:off x="612648" y="1938528"/>
+            <a:ext cx="2249424" cy="475488"/>
           </a:xfrm>
           <a:prstGeom prst="rect">
             <a:avLst/>
@@ -10683,30 +11039,47 @@
               <a:buNone/>
             </a:pPr>
             <a:r>
-              <a:rPr lang="en-US" sz="750" dirty="0">
-                <a:solidFill>
-                  <a:srgbClr val="A5F3FC"/>
-                </a:solidFill>
-                <a:latin typeface="Calibri" pitchFamily="34" charset="0"/>
-                <a:ea typeface="Calibri" pitchFamily="34" charset="-122"/>
-                <a:cs typeface="Calibri" pitchFamily="34" charset="-120"/>
-              </a:rPr>
-              <a:t>Days 1-2</a:t>
-            </a:r>
-            <a:endParaRPr lang="en-US" sz="750" dirty="0"/>
-          </a:p>
-        </p:txBody>
-      </p:sp>
-      <p:sp>
-        <p:nvSpPr>
-          <p:cNvPr id="8" name="Shape 6"/>
-          <p:cNvSpPr/>
-          <p:nvPr/>
-        </p:nvSpPr>
-        <p:spPr>
-          <a:xfrm>
-            <a:off x="320040" y="1417320"/>
-            <a:ext cx="1325880" cy="3200400"/>
+              <a:rPr lang="en-US" sz="1000" dirty="0">
+                <a:solidFill>
+                  <a:srgbClr val="94A3B8"/>
+                </a:solidFill>
+                <a:latin typeface="Calibri" pitchFamily="34" charset="0"/>
+                <a:ea typeface="Calibri" pitchFamily="34" charset="-122"/>
+                <a:cs typeface="Calibri" pitchFamily="34" charset="-120"/>
+              </a:rPr>
+              <a:t>Platform</a:t>
+            </a:r>
+            <a:endParaRPr lang="en-US" sz="1000" dirty="0"/>
+          </a:p>
+          <a:p>
+            <a:pPr algn="ctr" indent="0" marL="0">
+              <a:buNone/>
+            </a:pPr>
+            <a:r>
+              <a:rPr lang="en-US" sz="1000" dirty="0">
+                <a:solidFill>
+                  <a:srgbClr val="94A3B8"/>
+                </a:solidFill>
+                <a:latin typeface="Calibri" pitchFamily="34" charset="0"/>
+                <a:ea typeface="Calibri" pitchFamily="34" charset="-122"/>
+                <a:cs typeface="Calibri" pitchFamily="34" charset="-120"/>
+              </a:rPr>
+              <a:t>Connectors</a:t>
+            </a:r>
+            <a:endParaRPr lang="en-US" sz="1000" dirty="0"/>
+          </a:p>
+        </p:txBody>
+      </p:sp>
+      <p:sp>
+        <p:nvSpPr>
+          <p:cNvPr id="9" name="Shape 7"/>
+          <p:cNvSpPr/>
+          <p:nvPr/>
+        </p:nvSpPr>
+        <p:spPr>
+          <a:xfrm>
+            <a:off x="3246120" y="914400"/>
+            <a:ext cx="2468880" cy="1645920"/>
           </a:xfrm>
           <a:prstGeom prst="rect">
             <a:avLst/>
@@ -10720,18 +11093,50 @@
             </a:solidFill>
             <a:prstDash val="solid"/>
           </a:ln>
-        </p:spPr>
-      </p:sp>
-      <p:sp>
-        <p:nvSpPr>
-          <p:cNvPr id="9" name="Text 7"/>
-          <p:cNvSpPr/>
-          <p:nvPr/>
-        </p:nvSpPr>
-        <p:spPr>
-          <a:xfrm>
-            <a:off x="393192" y="1508760"/>
-            <a:ext cx="1179576" cy="256032"/>
+          <a:effectLst>
+            <a:outerShdw sx="100000" sy="100000" kx="0" ky="0" algn="bl" rotWithShape="0" blurRad="63500" dist="25400" dir="8100000">
+              <a:srgbClr val="000000">
+                <a:alpha val="12000"/>
+              </a:srgbClr>
+            </a:outerShdw>
+          </a:effectLst>
+        </p:spPr>
+      </p:sp>
+      <p:sp>
+        <p:nvSpPr>
+          <p:cNvPr id="10" name="Shape 8"/>
+          <p:cNvSpPr/>
+          <p:nvPr/>
+        </p:nvSpPr>
+        <p:spPr>
+          <a:xfrm>
+            <a:off x="3246120" y="914400"/>
+            <a:ext cx="2468880" cy="91440"/>
+          </a:xfrm>
+          <a:prstGeom prst="rect">
+            <a:avLst/>
+          </a:prstGeom>
+          <a:solidFill>
+            <a:srgbClr val="1E4D8C"/>
+          </a:solidFill>
+          <a:ln w="12700">
+            <a:solidFill>
+              <a:srgbClr val="333333"/>
+            </a:solidFill>
+            <a:prstDash val="solid"/>
+          </a:ln>
+        </p:spPr>
+      </p:sp>
+      <p:sp>
+        <p:nvSpPr>
+          <p:cNvPr id="11" name="Text 9"/>
+          <p:cNvSpPr/>
+          <p:nvPr/>
+        </p:nvSpPr>
+        <p:spPr>
+          <a:xfrm>
+            <a:off x="3355848" y="1115568"/>
+            <a:ext cx="2249424" cy="822960"/>
           </a:xfrm>
           <a:prstGeom prst="rect">
             <a:avLst/>
@@ -10747,7 +11152,159 @@
               <a:buNone/>
             </a:pPr>
             <a:r>
-              <a:rPr lang="en-US" sz="1100" b="1" dirty="0">
+              <a:rPr lang="en-US" sz="4400" b="1" dirty="0">
+                <a:solidFill>
+                  <a:srgbClr val="1E4D8C"/>
+                </a:solidFill>
+                <a:latin typeface="Calibri" pitchFamily="34" charset="0"/>
+                <a:ea typeface="Calibri" pitchFamily="34" charset="-122"/>
+                <a:cs typeface="Calibri" pitchFamily="34" charset="-120"/>
+              </a:rPr>
+              <a:t>784</a:t>
+            </a:r>
+            <a:endParaRPr lang="en-US" sz="4400" dirty="0"/>
+          </a:p>
+        </p:txBody>
+      </p:sp>
+      <p:sp>
+        <p:nvSpPr>
+          <p:cNvPr id="12" name="Text 10"/>
+          <p:cNvSpPr/>
+          <p:nvPr/>
+        </p:nvSpPr>
+        <p:spPr>
+          <a:xfrm>
+            <a:off x="3355848" y="1938528"/>
+            <a:ext cx="2249424" cy="475488"/>
+          </a:xfrm>
+          <a:prstGeom prst="rect">
+            <a:avLst/>
+          </a:prstGeom>
+          <a:noFill/>
+          <a:ln/>
+        </p:spPr>
+        <p:txBody>
+          <a:bodyPr wrap="square" lIns="0" tIns="0" rIns="0" bIns="0" rtlCol="0" anchor="ctr"/>
+          <a:lstStyle/>
+          <a:p>
+            <a:pPr algn="ctr" indent="0" marL="0">
+              <a:buNone/>
+            </a:pPr>
+            <a:r>
+              <a:rPr lang="en-US" sz="1000" dirty="0">
+                <a:solidFill>
+                  <a:srgbClr val="94A3B8"/>
+                </a:solidFill>
+                <a:latin typeface="Calibri" pitchFamily="34" charset="0"/>
+                <a:ea typeface="Calibri" pitchFamily="34" charset="-122"/>
+                <a:cs typeface="Calibri" pitchFamily="34" charset="-120"/>
+              </a:rPr>
+              <a:t>Unit</a:t>
+            </a:r>
+            <a:endParaRPr lang="en-US" sz="1000" dirty="0"/>
+          </a:p>
+          <a:p>
+            <a:pPr algn="ctr" indent="0" marL="0">
+              <a:buNone/>
+            </a:pPr>
+            <a:r>
+              <a:rPr lang="en-US" sz="1000" dirty="0">
+                <a:solidFill>
+                  <a:srgbClr val="94A3B8"/>
+                </a:solidFill>
+                <a:latin typeface="Calibri" pitchFamily="34" charset="0"/>
+                <a:ea typeface="Calibri" pitchFamily="34" charset="-122"/>
+                <a:cs typeface="Calibri" pitchFamily="34" charset="-120"/>
+              </a:rPr>
+              <a:t>Tests</a:t>
+            </a:r>
+            <a:endParaRPr lang="en-US" sz="1000" dirty="0"/>
+          </a:p>
+        </p:txBody>
+      </p:sp>
+      <p:sp>
+        <p:nvSpPr>
+          <p:cNvPr id="13" name="Shape 11"/>
+          <p:cNvSpPr/>
+          <p:nvPr/>
+        </p:nvSpPr>
+        <p:spPr>
+          <a:xfrm>
+            <a:off x="5989320" y="914400"/>
+            <a:ext cx="2468880" cy="1645920"/>
+          </a:xfrm>
+          <a:prstGeom prst="rect">
+            <a:avLst/>
+          </a:prstGeom>
+          <a:solidFill>
+            <a:srgbClr val="FFFFFF"/>
+          </a:solidFill>
+          <a:ln w="6350">
+            <a:solidFill>
+              <a:srgbClr val="CBD5E1"/>
+            </a:solidFill>
+            <a:prstDash val="solid"/>
+          </a:ln>
+          <a:effectLst>
+            <a:outerShdw sx="100000" sy="100000" kx="0" ky="0" algn="bl" rotWithShape="0" blurRad="63500" dist="25400" dir="8100000">
+              <a:srgbClr val="000000">
+                <a:alpha val="12000"/>
+              </a:srgbClr>
+            </a:outerShdw>
+          </a:effectLst>
+        </p:spPr>
+      </p:sp>
+      <p:sp>
+        <p:nvSpPr>
+          <p:cNvPr id="14" name="Shape 12"/>
+          <p:cNvSpPr/>
+          <p:nvPr/>
+        </p:nvSpPr>
+        <p:spPr>
+          <a:xfrm>
+            <a:off x="5989320" y="914400"/>
+            <a:ext cx="2468880" cy="91440"/>
+          </a:xfrm>
+          <a:prstGeom prst="rect">
+            <a:avLst/>
+          </a:prstGeom>
+          <a:solidFill>
+            <a:srgbClr val="0891B2"/>
+          </a:solidFill>
+          <a:ln w="12700">
+            <a:solidFill>
+              <a:srgbClr val="333333"/>
+            </a:solidFill>
+            <a:prstDash val="solid"/>
+          </a:ln>
+        </p:spPr>
+      </p:sp>
+      <p:sp>
+        <p:nvSpPr>
+          <p:cNvPr id="15" name="Text 13"/>
+          <p:cNvSpPr/>
+          <p:nvPr/>
+        </p:nvSpPr>
+        <p:spPr>
+          <a:xfrm>
+            <a:off x="6099048" y="1115568"/>
+            <a:ext cx="2249424" cy="822960"/>
+          </a:xfrm>
+          <a:prstGeom prst="rect">
+            <a:avLst/>
+          </a:prstGeom>
+          <a:noFill/>
+          <a:ln/>
+        </p:spPr>
+        <p:txBody>
+          <a:bodyPr wrap="square" lIns="0" tIns="0" rIns="0" bIns="0" rtlCol="0" anchor="ctr"/>
+          <a:lstStyle/>
+          <a:p>
+            <a:pPr algn="ctr" indent="0" marL="0">
+              <a:buNone/>
+            </a:pPr>
+            <a:r>
+              <a:rPr lang="en-US" sz="4400" b="1" dirty="0">
                 <a:solidFill>
                   <a:srgbClr val="0891B2"/>
                 </a:solidFill>
@@ -10755,128 +11312,268 @@
                 <a:ea typeface="Calibri" pitchFamily="34" charset="-122"/>
                 <a:cs typeface="Calibri" pitchFamily="34" charset="-120"/>
               </a:rPr>
-              <a:t>Foundation</a:t>
-            </a:r>
-            <a:endParaRPr lang="en-US" sz="1100" dirty="0"/>
-          </a:p>
-        </p:txBody>
-      </p:sp>
-      <p:sp>
-        <p:nvSpPr>
-          <p:cNvPr id="10" name="Text 8"/>
-          <p:cNvSpPr/>
-          <p:nvPr/>
-        </p:nvSpPr>
-        <p:spPr>
-          <a:xfrm>
-            <a:off x="393192" y="1847088"/>
-            <a:ext cx="1179576" cy="2651760"/>
-          </a:xfrm>
-          <a:prstGeom prst="rect">
-            <a:avLst/>
-          </a:prstGeom>
-          <a:noFill/>
-          <a:ln/>
-        </p:spPr>
-        <p:txBody>
-          <a:bodyPr wrap="square" rtlCol="0" anchor="ctr"/>
-          <a:lstStyle/>
-          <a:p>
-            <a:pPr marL="342900" indent="-342900">
-              <a:buSzPct val="100000"/>
-              <a:buChar char="•"/>
-            </a:pPr>
-            <a:r>
-              <a:rPr lang="en-US" sz="850" dirty="0">
-                <a:solidFill>
-                  <a:srgbClr val="1E293B"/>
-                </a:solidFill>
-                <a:latin typeface="Calibri" pitchFamily="34" charset="0"/>
-                <a:ea typeface="Calibri" pitchFamily="34" charset="-122"/>
-                <a:cs typeface="Calibri" pitchFamily="34" charset="-120"/>
-              </a:rPr>
-              <a:t>Install + configure config.ini</a:t>
-            </a:r>
-            <a:endParaRPr lang="en-US" sz="850" dirty="0"/>
-          </a:p>
-          <a:p>
-            <a:pPr marL="342900" indent="-342900">
-              <a:buSzPct val="100000"/>
-              <a:buChar char="•"/>
-            </a:pPr>
-            <a:r>
-              <a:rPr lang="en-US" sz="850" dirty="0">
-                <a:solidFill>
-                  <a:srgbClr val="1E293B"/>
-                </a:solidFill>
-                <a:latin typeface="Calibri" pitchFamily="34" charset="0"/>
-                <a:ea typeface="Calibri" pitchFamily="34" charset="-122"/>
-                <a:cs typeface="Calibri" pitchFamily="34" charset="-120"/>
-              </a:rPr>
-              <a:t>Test connectivity: gnat ping</a:t>
-            </a:r>
-            <a:endParaRPr lang="en-US" sz="850" dirty="0"/>
-          </a:p>
-          <a:p>
-            <a:pPr marL="342900" indent="-342900">
-              <a:buSzPct val="100000"/>
-              <a:buChar char="•"/>
-            </a:pPr>
-            <a:r>
-              <a:rPr lang="en-US" sz="850" dirty="0">
-                <a:solidFill>
-                  <a:srgbClr val="1E293B"/>
-                </a:solidFill>
-                <a:latin typeface="Calibri" pitchFamily="34" charset="0"/>
-                <a:ea typeface="Calibri" pitchFamily="34" charset="-122"/>
-                <a:cs typeface="Calibri" pitchFamily="34" charset="-120"/>
-              </a:rPr>
-              <a:t>First ingest dry-run</a:t>
-            </a:r>
-            <a:endParaRPr lang="en-US" sz="850" dirty="0"/>
-          </a:p>
-        </p:txBody>
-      </p:sp>
-      <p:sp>
-        <p:nvSpPr>
-          <p:cNvPr id="11" name="Shape 9"/>
-          <p:cNvSpPr/>
-          <p:nvPr/>
-        </p:nvSpPr>
-        <p:spPr>
-          <a:xfrm>
-            <a:off x="1673352" y="1069848"/>
-            <a:ext cx="91440" cy="0"/>
-          </a:xfrm>
-          <a:prstGeom prst="line">
-            <a:avLst/>
-          </a:prstGeom>
-          <a:noFill/>
+              <a:t>96</a:t>
+            </a:r>
+            <a:endParaRPr lang="en-US" sz="4400" dirty="0"/>
+          </a:p>
+        </p:txBody>
+      </p:sp>
+      <p:sp>
+        <p:nvSpPr>
+          <p:cNvPr id="16" name="Text 14"/>
+          <p:cNvSpPr/>
+          <p:nvPr/>
+        </p:nvSpPr>
+        <p:spPr>
+          <a:xfrm>
+            <a:off x="6099048" y="1938528"/>
+            <a:ext cx="2249424" cy="475488"/>
+          </a:xfrm>
+          <a:prstGeom prst="rect">
+            <a:avLst/>
+          </a:prstGeom>
+          <a:noFill/>
+          <a:ln/>
+        </p:spPr>
+        <p:txBody>
+          <a:bodyPr wrap="square" lIns="0" tIns="0" rIns="0" bIns="0" rtlCol="0" anchor="ctr"/>
+          <a:lstStyle/>
+          <a:p>
+            <a:pPr algn="ctr" indent="0" marL="0">
+              <a:buNone/>
+            </a:pPr>
+            <a:r>
+              <a:rPr lang="en-US" sz="1000" dirty="0">
+                <a:solidFill>
+                  <a:srgbClr val="94A3B8"/>
+                </a:solidFill>
+                <a:latin typeface="Calibri" pitchFamily="34" charset="0"/>
+                <a:ea typeface="Calibri" pitchFamily="34" charset="-122"/>
+                <a:cs typeface="Calibri" pitchFamily="34" charset="-120"/>
+              </a:rPr>
+              <a:t>Source</a:t>
+            </a:r>
+            <a:endParaRPr lang="en-US" sz="1000" dirty="0"/>
+          </a:p>
+          <a:p>
+            <a:pPr algn="ctr" indent="0" marL="0">
+              <a:buNone/>
+            </a:pPr>
+            <a:r>
+              <a:rPr lang="en-US" sz="1000" dirty="0">
+                <a:solidFill>
+                  <a:srgbClr val="94A3B8"/>
+                </a:solidFill>
+                <a:latin typeface="Calibri" pitchFamily="34" charset="0"/>
+                <a:ea typeface="Calibri" pitchFamily="34" charset="-122"/>
+                <a:cs typeface="Calibri" pitchFamily="34" charset="-120"/>
+              </a:rPr>
+              <a:t>Files</a:t>
+            </a:r>
+            <a:endParaRPr lang="en-US" sz="1000" dirty="0"/>
+          </a:p>
+        </p:txBody>
+      </p:sp>
+      <p:sp>
+        <p:nvSpPr>
+          <p:cNvPr id="17" name="Shape 15"/>
+          <p:cNvSpPr/>
+          <p:nvPr/>
+        </p:nvSpPr>
+        <p:spPr>
+          <a:xfrm>
+            <a:off x="502920" y="2834640"/>
+            <a:ext cx="2468880" cy="1645920"/>
+          </a:xfrm>
+          <a:prstGeom prst="rect">
+            <a:avLst/>
+          </a:prstGeom>
+          <a:solidFill>
+            <a:srgbClr val="FFFFFF"/>
+          </a:solidFill>
+          <a:ln w="6350">
+            <a:solidFill>
+              <a:srgbClr val="CBD5E1"/>
+            </a:solidFill>
+            <a:prstDash val="solid"/>
+          </a:ln>
+          <a:effectLst>
+            <a:outerShdw sx="100000" sy="100000" kx="0" ky="0" algn="bl" rotWithShape="0" blurRad="63500" dist="25400" dir="8100000">
+              <a:srgbClr val="000000">
+                <a:alpha val="12000"/>
+              </a:srgbClr>
+            </a:outerShdw>
+          </a:effectLst>
+        </p:spPr>
+      </p:sp>
+      <p:sp>
+        <p:nvSpPr>
+          <p:cNvPr id="18" name="Shape 16"/>
+          <p:cNvSpPr/>
+          <p:nvPr/>
+        </p:nvSpPr>
+        <p:spPr>
+          <a:xfrm>
+            <a:off x="502920" y="2834640"/>
+            <a:ext cx="2468880" cy="91440"/>
+          </a:xfrm>
+          <a:prstGeom prst="rect">
+            <a:avLst/>
+          </a:prstGeom>
+          <a:solidFill>
+            <a:srgbClr val="1E4D8C"/>
+          </a:solidFill>
           <a:ln w="12700">
             <a:solidFill>
+              <a:srgbClr val="333333"/>
+            </a:solidFill>
+            <a:prstDash val="solid"/>
+          </a:ln>
+        </p:spPr>
+      </p:sp>
+      <p:sp>
+        <p:nvSpPr>
+          <p:cNvPr id="19" name="Text 17"/>
+          <p:cNvSpPr/>
+          <p:nvPr/>
+        </p:nvSpPr>
+        <p:spPr>
+          <a:xfrm>
+            <a:off x="612648" y="3035808"/>
+            <a:ext cx="2249424" cy="822960"/>
+          </a:xfrm>
+          <a:prstGeom prst="rect">
+            <a:avLst/>
+          </a:prstGeom>
+          <a:noFill/>
+          <a:ln/>
+        </p:spPr>
+        <p:txBody>
+          <a:bodyPr wrap="square" lIns="0" tIns="0" rIns="0" bIns="0" rtlCol="0" anchor="ctr"/>
+          <a:lstStyle/>
+          <a:p>
+            <a:pPr algn="ctr" indent="0" marL="0">
+              <a:buNone/>
+            </a:pPr>
+            <a:r>
+              <a:rPr lang="en-US" sz="4400" b="1" dirty="0">
+                <a:solidFill>
+                  <a:srgbClr val="1E4D8C"/>
+                </a:solidFill>
+                <a:latin typeface="Calibri" pitchFamily="34" charset="0"/>
+                <a:ea typeface="Calibri" pitchFamily="34" charset="-122"/>
+                <a:cs typeface="Calibri" pitchFamily="34" charset="-120"/>
+              </a:rPr>
+              <a:t>~$50</a:t>
+            </a:r>
+            <a:endParaRPr lang="en-US" sz="4400" dirty="0"/>
+          </a:p>
+        </p:txBody>
+      </p:sp>
+      <p:sp>
+        <p:nvSpPr>
+          <p:cNvPr id="20" name="Text 18"/>
+          <p:cNvSpPr/>
+          <p:nvPr/>
+        </p:nvSpPr>
+        <p:spPr>
+          <a:xfrm>
+            <a:off x="612648" y="3858768"/>
+            <a:ext cx="2249424" cy="475488"/>
+          </a:xfrm>
+          <a:prstGeom prst="rect">
+            <a:avLst/>
+          </a:prstGeom>
+          <a:noFill/>
+          <a:ln/>
+        </p:spPr>
+        <p:txBody>
+          <a:bodyPr wrap="square" lIns="0" tIns="0" rIns="0" bIns="0" rtlCol="0" anchor="ctr"/>
+          <a:lstStyle/>
+          <a:p>
+            <a:pPr algn="ctr" indent="0" marL="0">
+              <a:buNone/>
+            </a:pPr>
+            <a:r>
+              <a:rPr lang="en-US" sz="1000" dirty="0">
+                <a:solidFill>
+                  <a:srgbClr val="94A3B8"/>
+                </a:solidFill>
+                <a:latin typeface="Calibri" pitchFamily="34" charset="0"/>
+                <a:ea typeface="Calibri" pitchFamily="34" charset="-122"/>
+                <a:cs typeface="Calibri" pitchFamily="34" charset="-120"/>
+              </a:rPr>
+              <a:t>Monthly Azure</a:t>
+            </a:r>
+            <a:endParaRPr lang="en-US" sz="1000" dirty="0"/>
+          </a:p>
+          <a:p>
+            <a:pPr algn="ctr" indent="0" marL="0">
+              <a:buNone/>
+            </a:pPr>
+            <a:r>
+              <a:rPr lang="en-US" sz="1000" dirty="0">
+                <a:solidFill>
+                  <a:srgbClr val="94A3B8"/>
+                </a:solidFill>
+                <a:latin typeface="Calibri" pitchFamily="34" charset="0"/>
+                <a:ea typeface="Calibri" pitchFamily="34" charset="-122"/>
+                <a:cs typeface="Calibri" pitchFamily="34" charset="-120"/>
+              </a:rPr>
+              <a:t>VM Cost</a:t>
+            </a:r>
+            <a:endParaRPr lang="en-US" sz="1000" dirty="0"/>
+          </a:p>
+        </p:txBody>
+      </p:sp>
+      <p:sp>
+        <p:nvSpPr>
+          <p:cNvPr id="21" name="Shape 19"/>
+          <p:cNvSpPr/>
+          <p:nvPr/>
+        </p:nvSpPr>
+        <p:spPr>
+          <a:xfrm>
+            <a:off x="3246120" y="2834640"/>
+            <a:ext cx="2468880" cy="1645920"/>
+          </a:xfrm>
+          <a:prstGeom prst="rect">
+            <a:avLst/>
+          </a:prstGeom>
+          <a:solidFill>
+            <a:srgbClr val="FFFFFF"/>
+          </a:solidFill>
+          <a:ln w="6350">
+            <a:solidFill>
               <a:srgbClr val="CBD5E1"/>
             </a:solidFill>
             <a:prstDash val="solid"/>
-            <a:tailEnd type="triangle"/>
-          </a:ln>
-        </p:spPr>
-      </p:sp>
-      <p:sp>
-        <p:nvSpPr>
-          <p:cNvPr id="12" name="Shape 10"/>
-          <p:cNvSpPr/>
-          <p:nvPr/>
-        </p:nvSpPr>
-        <p:spPr>
-          <a:xfrm>
-            <a:off x="1783080" y="822960"/>
-            <a:ext cx="1325880" cy="502920"/>
-          </a:xfrm>
-          <a:prstGeom prst="rect">
-            <a:avLst/>
-          </a:prstGeom>
-          <a:solidFill>
-            <a:srgbClr val="1E4D8C"/>
+          </a:ln>
+          <a:effectLst>
+            <a:outerShdw sx="100000" sy="100000" kx="0" ky="0" algn="bl" rotWithShape="0" blurRad="63500" dist="25400" dir="8100000">
+              <a:srgbClr val="000000">
+                <a:alpha val="12000"/>
+              </a:srgbClr>
+            </a:outerShdw>
+          </a:effectLst>
+        </p:spPr>
+      </p:sp>
+      <p:sp>
+        <p:nvSpPr>
+          <p:cNvPr id="22" name="Shape 20"/>
+          <p:cNvSpPr/>
+          <p:nvPr/>
+        </p:nvSpPr>
+        <p:spPr>
+          <a:xfrm>
+            <a:off x="3246120" y="2834640"/>
+            <a:ext cx="2468880" cy="91440"/>
+          </a:xfrm>
+          <a:prstGeom prst="rect">
+            <a:avLst/>
+          </a:prstGeom>
+          <a:solidFill>
+            <a:srgbClr val="F59E0B"/>
           </a:solidFill>
           <a:ln w="12700">
             <a:solidFill>
@@ -10888,14 +11585,14 @@
       </p:sp>
       <p:sp>
         <p:nvSpPr>
-          <p:cNvPr id="13" name="Text 11"/>
-          <p:cNvSpPr/>
-          <p:nvPr/>
-        </p:nvSpPr>
-        <p:spPr>
-          <a:xfrm>
-            <a:off x="1828800" y="850392"/>
-            <a:ext cx="1234440" cy="201168"/>
+          <p:cNvPr id="23" name="Text 21"/>
+          <p:cNvSpPr/>
+          <p:nvPr/>
+        </p:nvSpPr>
+        <p:spPr>
+          <a:xfrm>
+            <a:off x="3355848" y="3035808"/>
+            <a:ext cx="2249424" cy="822960"/>
           </a:xfrm>
           <a:prstGeom prst="rect">
             <a:avLst/>
@@ -10911,30 +11608,30 @@
               <a:buNone/>
             </a:pPr>
             <a:r>
-              <a:rPr lang="en-US" sz="900" b="1" dirty="0">
-                <a:solidFill>
-                  <a:srgbClr val="FFFFFF"/>
-                </a:solidFill>
-                <a:latin typeface="Calibri" pitchFamily="34" charset="0"/>
-                <a:ea typeface="Calibri" pitchFamily="34" charset="-122"/>
-                <a:cs typeface="Calibri" pitchFamily="34" charset="-120"/>
-              </a:rPr>
-              <a:t>Phase 2</a:t>
-            </a:r>
-            <a:endParaRPr lang="en-US" sz="900" dirty="0"/>
-          </a:p>
-        </p:txBody>
-      </p:sp>
-      <p:sp>
-        <p:nvSpPr>
-          <p:cNvPr id="14" name="Text 12"/>
-          <p:cNvSpPr/>
-          <p:nvPr/>
-        </p:nvSpPr>
-        <p:spPr>
-          <a:xfrm>
-            <a:off x="1828800" y="1051560"/>
-            <a:ext cx="1234440" cy="201168"/>
+              <a:rPr lang="en-US" sz="4400" b="1" dirty="0">
+                <a:solidFill>
+                  <a:srgbClr val="F59E0B"/>
+                </a:solidFill>
+                <a:latin typeface="Calibri" pitchFamily="34" charset="0"/>
+                <a:ea typeface="Calibri" pitchFamily="34" charset="-122"/>
+                <a:cs typeface="Calibri" pitchFamily="34" charset="-120"/>
+              </a:rPr>
+              <a:t>60</a:t>
+            </a:r>
+            <a:endParaRPr lang="en-US" sz="4400" dirty="0"/>
+          </a:p>
+        </p:txBody>
+      </p:sp>
+      <p:sp>
+        <p:nvSpPr>
+          <p:cNvPr id="24" name="Text 22"/>
+          <p:cNvSpPr/>
+          <p:nvPr/>
+        </p:nvSpPr>
+        <p:spPr>
+          <a:xfrm>
+            <a:off x="3355848" y="3858768"/>
+            <a:ext cx="2249424" cy="475488"/>
           </a:xfrm>
           <a:prstGeom prst="rect">
             <a:avLst/>
@@ -10950,30 +11647,47 @@
               <a:buNone/>
             </a:pPr>
             <a:r>
-              <a:rPr lang="en-US" sz="750" dirty="0">
-                <a:solidFill>
-                  <a:srgbClr val="A5F3FC"/>
-                </a:solidFill>
-                <a:latin typeface="Calibri" pitchFamily="34" charset="0"/>
-                <a:ea typeface="Calibri" pitchFamily="34" charset="-122"/>
-                <a:cs typeface="Calibri" pitchFamily="34" charset="-120"/>
-              </a:rPr>
-              <a:t>Days 3-5</a:t>
-            </a:r>
-            <a:endParaRPr lang="en-US" sz="750" dirty="0"/>
-          </a:p>
-        </p:txBody>
-      </p:sp>
-      <p:sp>
-        <p:nvSpPr>
-          <p:cNvPr id="15" name="Shape 13"/>
-          <p:cNvSpPr/>
-          <p:nvPr/>
-        </p:nvSpPr>
-        <p:spPr>
-          <a:xfrm>
-            <a:off x="1783080" y="1417320"/>
-            <a:ext cx="1325880" cy="3200400"/>
+              <a:rPr lang="en-US" sz="1000" dirty="0">
+                <a:solidFill>
+                  <a:srgbClr val="94A3B8"/>
+                </a:solidFill>
+                <a:latin typeface="Calibri" pitchFamily="34" charset="0"/>
+                <a:ea typeface="Calibri" pitchFamily="34" charset="-122"/>
+                <a:cs typeface="Calibri" pitchFamily="34" charset="-120"/>
+              </a:rPr>
+              <a:t>AI Confidence</a:t>
+            </a:r>
+            <a:endParaRPr lang="en-US" sz="1000" dirty="0"/>
+          </a:p>
+          <a:p>
+            <a:pPr algn="ctr" indent="0" marL="0">
+              <a:buNone/>
+            </a:pPr>
+            <a:r>
+              <a:rPr lang="en-US" sz="1000" dirty="0">
+                <a:solidFill>
+                  <a:srgbClr val="94A3B8"/>
+                </a:solidFill>
+                <a:latin typeface="Calibri" pitchFamily="34" charset="0"/>
+                <a:ea typeface="Calibri" pitchFamily="34" charset="-122"/>
+                <a:cs typeface="Calibri" pitchFamily="34" charset="-120"/>
+              </a:rPr>
+              <a:t>Ceiling (default)</a:t>
+            </a:r>
+            <a:endParaRPr lang="en-US" sz="1000" dirty="0"/>
+          </a:p>
+        </p:txBody>
+      </p:sp>
+      <p:sp>
+        <p:nvSpPr>
+          <p:cNvPr id="25" name="Shape 23"/>
+          <p:cNvSpPr/>
+          <p:nvPr/>
+        </p:nvSpPr>
+        <p:spPr>
+          <a:xfrm>
+            <a:off x="5989320" y="2834640"/>
+            <a:ext cx="2468880" cy="1645920"/>
           </a:xfrm>
           <a:prstGeom prst="rect">
             <a:avLst/>
@@ -10987,18 +11701,50 @@
             </a:solidFill>
             <a:prstDash val="solid"/>
           </a:ln>
-        </p:spPr>
-      </p:sp>
-      <p:sp>
-        <p:nvSpPr>
-          <p:cNvPr id="16" name="Text 14"/>
-          <p:cNvSpPr/>
-          <p:nvPr/>
-        </p:nvSpPr>
-        <p:spPr>
-          <a:xfrm>
-            <a:off x="1856232" y="1508760"/>
-            <a:ext cx="1179576" cy="256032"/>
+          <a:effectLst>
+            <a:outerShdw sx="100000" sy="100000" kx="0" ky="0" algn="bl" rotWithShape="0" blurRad="63500" dist="25400" dir="8100000">
+              <a:srgbClr val="000000">
+                <a:alpha val="12000"/>
+              </a:srgbClr>
+            </a:outerShdw>
+          </a:effectLst>
+        </p:spPr>
+      </p:sp>
+      <p:sp>
+        <p:nvSpPr>
+          <p:cNvPr id="26" name="Shape 24"/>
+          <p:cNvSpPr/>
+          <p:nvPr/>
+        </p:nvSpPr>
+        <p:spPr>
+          <a:xfrm>
+            <a:off x="5989320" y="2834640"/>
+            <a:ext cx="2468880" cy="91440"/>
+          </a:xfrm>
+          <a:prstGeom prst="rect">
+            <a:avLst/>
+          </a:prstGeom>
+          <a:solidFill>
+            <a:srgbClr val="0891B2"/>
+          </a:solidFill>
+          <a:ln w="12700">
+            <a:solidFill>
+              <a:srgbClr val="333333"/>
+            </a:solidFill>
+            <a:prstDash val="solid"/>
+          </a:ln>
+        </p:spPr>
+      </p:sp>
+      <p:sp>
+        <p:nvSpPr>
+          <p:cNvPr id="27" name="Text 25"/>
+          <p:cNvSpPr/>
+          <p:nvPr/>
+        </p:nvSpPr>
+        <p:spPr>
+          <a:xfrm>
+            <a:off x="6099048" y="3035808"/>
+            <a:ext cx="2249424" cy="822960"/>
           </a:xfrm>
           <a:prstGeom prst="rect">
             <a:avLst/>
@@ -11014,155 +11760,30 @@
               <a:buNone/>
             </a:pPr>
             <a:r>
-              <a:rPr lang="en-US" sz="1100" b="1" dirty="0">
-                <a:solidFill>
-                  <a:srgbClr val="1E4D8C"/>
-                </a:solidFill>
-                <a:latin typeface="Calibri" pitchFamily="34" charset="0"/>
-                <a:ea typeface="Calibri" pitchFamily="34" charset="-122"/>
-                <a:cs typeface="Calibri" pitchFamily="34" charset="-120"/>
-              </a:rPr>
-              <a:t>Ingest</a:t>
-            </a:r>
-            <a:endParaRPr lang="en-US" sz="1100" dirty="0"/>
-          </a:p>
-        </p:txBody>
-      </p:sp>
-      <p:sp>
-        <p:nvSpPr>
-          <p:cNvPr id="17" name="Text 15"/>
-          <p:cNvSpPr/>
-          <p:nvPr/>
-        </p:nvSpPr>
-        <p:spPr>
-          <a:xfrm>
-            <a:off x="1856232" y="1847088"/>
-            <a:ext cx="1179576" cy="2651760"/>
-          </a:xfrm>
-          <a:prstGeom prst="rect">
-            <a:avLst/>
-          </a:prstGeom>
-          <a:noFill/>
-          <a:ln/>
-        </p:spPr>
-        <p:txBody>
-          <a:bodyPr wrap="square" rtlCol="0" anchor="ctr"/>
-          <a:lstStyle/>
-          <a:p>
-            <a:pPr marL="342900" indent="-342900">
-              <a:buSzPct val="100000"/>
-              <a:buChar char="•"/>
-            </a:pPr>
-            <a:r>
-              <a:rPr lang="en-US" sz="850" dirty="0">
-                <a:solidFill>
-                  <a:srgbClr val="1E293B"/>
-                </a:solidFill>
-                <a:latin typeface="Calibri" pitchFamily="34" charset="0"/>
-                <a:ea typeface="Calibri" pitchFamily="34" charset="-122"/>
-                <a:cs typeface="Calibri" pitchFamily="34" charset="-120"/>
-              </a:rPr>
-              <a:t>All connector configs</a:t>
-            </a:r>
-            <a:endParaRPr lang="en-US" sz="850" dirty="0"/>
-          </a:p>
-          <a:p>
-            <a:pPr marL="342900" indent="-342900">
-              <a:buSzPct val="100000"/>
-              <a:buChar char="•"/>
-            </a:pPr>
-            <a:r>
-              <a:rPr lang="en-US" sz="850" dirty="0">
-                <a:solidFill>
-                  <a:srgbClr val="1E293B"/>
-                </a:solidFill>
-                <a:latin typeface="Calibri" pitchFamily="34" charset="0"/>
-                <a:ea typeface="Calibri" pitchFamily="34" charset="-122"/>
-                <a:cs typeface="Calibri" pitchFamily="34" charset="-120"/>
-              </a:rPr>
-              <a:t>Primary ingest jobs (TQ, RF, CS)</a:t>
-            </a:r>
-            <a:endParaRPr lang="en-US" sz="850" dirty="0"/>
-          </a:p>
-          <a:p>
-            <a:pPr marL="342900" indent="-342900">
-              <a:buSzPct val="100000"/>
-              <a:buChar char="•"/>
-            </a:pPr>
-            <a:r>
-              <a:rPr lang="en-US" sz="850" dirty="0">
-                <a:solidFill>
-                  <a:srgbClr val="1E293B"/>
-                </a:solidFill>
-                <a:latin typeface="Calibri" pitchFamily="34" charset="0"/>
-                <a:ea typeface="Calibri" pitchFamily="34" charset="-122"/>
-                <a:cs typeface="Calibri" pitchFamily="34" charset="-120"/>
-              </a:rPr>
-              <a:t>FeedScheduler running</a:t>
-            </a:r>
-            <a:endParaRPr lang="en-US" sz="850" dirty="0"/>
-          </a:p>
-        </p:txBody>
-      </p:sp>
-      <p:sp>
-        <p:nvSpPr>
-          <p:cNvPr id="18" name="Shape 16"/>
-          <p:cNvSpPr/>
-          <p:nvPr/>
-        </p:nvSpPr>
-        <p:spPr>
-          <a:xfrm>
-            <a:off x="3136392" y="1069848"/>
-            <a:ext cx="91440" cy="0"/>
-          </a:xfrm>
-          <a:prstGeom prst="line">
-            <a:avLst/>
-          </a:prstGeom>
-          <a:noFill/>
-          <a:ln w="12700">
-            <a:solidFill>
-              <a:srgbClr val="CBD5E1"/>
-            </a:solidFill>
-            <a:prstDash val="solid"/>
-            <a:tailEnd type="triangle"/>
-          </a:ln>
-        </p:spPr>
-      </p:sp>
-      <p:sp>
-        <p:nvSpPr>
-          <p:cNvPr id="19" name="Shape 17"/>
-          <p:cNvSpPr/>
-          <p:nvPr/>
-        </p:nvSpPr>
-        <p:spPr>
-          <a:xfrm>
-            <a:off x="3246120" y="822960"/>
-            <a:ext cx="1325880" cy="502920"/>
-          </a:xfrm>
-          <a:prstGeom prst="rect">
-            <a:avLst/>
-          </a:prstGeom>
-          <a:solidFill>
-            <a:srgbClr val="0891B2"/>
-          </a:solidFill>
-          <a:ln w="12700">
-            <a:solidFill>
-              <a:srgbClr val="333333"/>
-            </a:solidFill>
-            <a:prstDash val="solid"/>
-          </a:ln>
-        </p:spPr>
-      </p:sp>
-      <p:sp>
-        <p:nvSpPr>
-          <p:cNvPr id="20" name="Text 18"/>
-          <p:cNvSpPr/>
-          <p:nvPr/>
-        </p:nvSpPr>
-        <p:spPr>
-          <a:xfrm>
-            <a:off x="3291840" y="850392"/>
-            <a:ext cx="1234440" cy="201168"/>
+              <a:rPr lang="en-US" sz="4400" b="1" dirty="0">
+                <a:solidFill>
+                  <a:srgbClr val="0891B2"/>
+                </a:solidFill>
+                <a:latin typeface="Calibri" pitchFamily="34" charset="0"/>
+                <a:ea typeface="Calibri" pitchFamily="34" charset="-122"/>
+                <a:cs typeface="Calibri" pitchFamily="34" charset="-120"/>
+              </a:rPr>
+              <a:t>4 hrs</a:t>
+            </a:r>
+            <a:endParaRPr lang="en-US" sz="4400" dirty="0"/>
+          </a:p>
+        </p:txBody>
+      </p:sp>
+      <p:sp>
+        <p:nvSpPr>
+          <p:cNvPr id="28" name="Text 26"/>
+          <p:cNvSpPr/>
+          <p:nvPr/>
+        </p:nvSpPr>
+        <p:spPr>
+          <a:xfrm>
+            <a:off x="6099048" y="3858768"/>
+            <a:ext cx="2249424" cy="475488"/>
           </a:xfrm>
           <a:prstGeom prst="rect">
             <a:avLst/>
@@ -11178,997 +11799,34 @@
               <a:buNone/>
             </a:pPr>
             <a:r>
-              <a:rPr lang="en-US" sz="900" b="1" dirty="0">
-                <a:solidFill>
-                  <a:srgbClr val="FFFFFF"/>
-                </a:solidFill>
-                <a:latin typeface="Calibri" pitchFamily="34" charset="0"/>
-                <a:ea typeface="Calibri" pitchFamily="34" charset="-122"/>
-                <a:cs typeface="Calibri" pitchFamily="34" charset="-120"/>
-              </a:rPr>
-              <a:t>Phase 3</a:t>
-            </a:r>
-            <a:endParaRPr lang="en-US" sz="900" dirty="0"/>
-          </a:p>
-        </p:txBody>
-      </p:sp>
-      <p:sp>
-        <p:nvSpPr>
-          <p:cNvPr id="21" name="Text 19"/>
-          <p:cNvSpPr/>
-          <p:nvPr/>
-        </p:nvSpPr>
-        <p:spPr>
-          <a:xfrm>
-            <a:off x="3291840" y="1051560"/>
-            <a:ext cx="1234440" cy="201168"/>
-          </a:xfrm>
-          <a:prstGeom prst="rect">
-            <a:avLst/>
-          </a:prstGeom>
-          <a:noFill/>
-          <a:ln/>
-        </p:spPr>
-        <p:txBody>
-          <a:bodyPr wrap="square" lIns="0" tIns="0" rIns="0" bIns="0" rtlCol="0" anchor="ctr"/>
-          <a:lstStyle/>
+              <a:rPr lang="en-US" sz="1000" dirty="0">
+                <a:solidFill>
+                  <a:srgbClr val="94A3B8"/>
+                </a:solidFill>
+                <a:latin typeface="Calibri" pitchFamily="34" charset="0"/>
+                <a:ea typeface="Calibri" pitchFamily="34" charset="-122"/>
+                <a:cs typeface="Calibri" pitchFamily="34" charset="-120"/>
+              </a:rPr>
+              <a:t>Curation Job</a:t>
+            </a:r>
+            <a:endParaRPr lang="en-US" sz="1000" dirty="0"/>
+          </a:p>
           <a:p>
             <a:pPr algn="ctr" indent="0" marL="0">
               <a:buNone/>
             </a:pPr>
             <a:r>
-              <a:rPr lang="en-US" sz="750" dirty="0">
-                <a:solidFill>
-                  <a:srgbClr val="A5F3FC"/>
-                </a:solidFill>
-                <a:latin typeface="Calibri" pitchFamily="34" charset="0"/>
-                <a:ea typeface="Calibri" pitchFamily="34" charset="-122"/>
-                <a:cs typeface="Calibri" pitchFamily="34" charset="-120"/>
-              </a:rPr>
-              <a:t>Days 6-8</a:t>
-            </a:r>
-            <a:endParaRPr lang="en-US" sz="750" dirty="0"/>
-          </a:p>
-        </p:txBody>
-      </p:sp>
-      <p:sp>
-        <p:nvSpPr>
-          <p:cNvPr id="22" name="Shape 20"/>
-          <p:cNvSpPr/>
-          <p:nvPr/>
-        </p:nvSpPr>
-        <p:spPr>
-          <a:xfrm>
-            <a:off x="3246120" y="1417320"/>
-            <a:ext cx="1325880" cy="3200400"/>
-          </a:xfrm>
-          <a:prstGeom prst="rect">
-            <a:avLst/>
-          </a:prstGeom>
-          <a:solidFill>
-            <a:srgbClr val="FFFFFF"/>
-          </a:solidFill>
-          <a:ln w="6350">
-            <a:solidFill>
-              <a:srgbClr val="CBD5E1"/>
-            </a:solidFill>
-            <a:prstDash val="solid"/>
-          </a:ln>
-        </p:spPr>
-      </p:sp>
-      <p:sp>
-        <p:nvSpPr>
-          <p:cNvPr id="23" name="Text 21"/>
-          <p:cNvSpPr/>
-          <p:nvPr/>
-        </p:nvSpPr>
-        <p:spPr>
-          <a:xfrm>
-            <a:off x="3319272" y="1508760"/>
-            <a:ext cx="1179576" cy="256032"/>
-          </a:xfrm>
-          <a:prstGeom prst="rect">
-            <a:avLst/>
-          </a:prstGeom>
-          <a:noFill/>
-          <a:ln/>
-        </p:spPr>
-        <p:txBody>
-          <a:bodyPr wrap="square" lIns="0" tIns="0" rIns="0" bIns="0" rtlCol="0" anchor="ctr"/>
-          <a:lstStyle/>
-          <a:p>
-            <a:pPr algn="ctr" indent="0" marL="0">
-              <a:buNone/>
-            </a:pPr>
-            <a:r>
-              <a:rPr lang="en-US" sz="1100" b="1" dirty="0">
-                <a:solidFill>
-                  <a:srgbClr val="0891B2"/>
-                </a:solidFill>
-                <a:latin typeface="Calibri" pitchFamily="34" charset="0"/>
-                <a:ea typeface="Calibri" pitchFamily="34" charset="-122"/>
-                <a:cs typeface="Calibri" pitchFamily="34" charset="-120"/>
-              </a:rPr>
-              <a:t>Export</a:t>
-            </a:r>
-            <a:endParaRPr lang="en-US" sz="1100" dirty="0"/>
-          </a:p>
-        </p:txBody>
-      </p:sp>
-      <p:sp>
-        <p:nvSpPr>
-          <p:cNvPr id="24" name="Text 22"/>
-          <p:cNvSpPr/>
-          <p:nvPr/>
-        </p:nvSpPr>
-        <p:spPr>
-          <a:xfrm>
-            <a:off x="3319272" y="1847088"/>
-            <a:ext cx="1179576" cy="2651760"/>
-          </a:xfrm>
-          <a:prstGeom prst="rect">
-            <a:avLst/>
-          </a:prstGeom>
-          <a:noFill/>
-          <a:ln/>
-        </p:spPr>
-        <p:txBody>
-          <a:bodyPr wrap="square" rtlCol="0" anchor="ctr"/>
-          <a:lstStyle/>
-          <a:p>
-            <a:pPr marL="342900" indent="-342900">
-              <a:buSzPct val="100000"/>
-              <a:buChar char="•"/>
-            </a:pPr>
-            <a:r>
-              <a:rPr lang="en-US" sz="850" dirty="0">
-                <a:solidFill>
-                  <a:srgbClr val="1E293B"/>
-                </a:solidFill>
-                <a:latin typeface="Calibri" pitchFamily="34" charset="0"/>
-                <a:ea typeface="Calibri" pitchFamily="34" charset="-122"/>
-                <a:cs typeface="Calibri" pitchFamily="34" charset="-120"/>
-              </a:rPr>
-              <a:t>Netskope CE ExportJob (15 min)</a:t>
-            </a:r>
-            <a:endParaRPr lang="en-US" sz="850" dirty="0"/>
-          </a:p>
-          <a:p>
-            <a:pPr marL="342900" indent="-342900">
-              <a:buSzPct val="100000"/>
-              <a:buChar char="•"/>
-            </a:pPr>
-            <a:r>
-              <a:rPr lang="en-US" sz="850" dirty="0">
-                <a:solidFill>
-                  <a:srgbClr val="1E293B"/>
-                </a:solidFill>
-                <a:latin typeface="Calibri" pitchFamily="34" charset="0"/>
-                <a:ea typeface="Calibri" pitchFamily="34" charset="-122"/>
-                <a:cs typeface="Calibri" pitchFamily="34" charset="-120"/>
-              </a:rPr>
-              <a:t>EDL files hourly</a:t>
-            </a:r>
-            <a:endParaRPr lang="en-US" sz="850" dirty="0"/>
-          </a:p>
-          <a:p>
-            <a:pPr marL="342900" indent="-342900">
-              <a:buSzPct val="100000"/>
-              <a:buChar char="•"/>
-            </a:pPr>
-            <a:r>
-              <a:rPr lang="en-US" sz="850" dirty="0">
-                <a:solidFill>
-                  <a:srgbClr val="1E293B"/>
-                </a:solidFill>
-                <a:latin typeface="Calibri" pitchFamily="34" charset="0"/>
-                <a:ea typeface="Calibri" pitchFamily="34" charset="-122"/>
-                <a:cs typeface="Calibri" pitchFamily="34" charset="-120"/>
-              </a:rPr>
-              <a:t>Verify TQ → CE → firewall EDLs</a:t>
-            </a:r>
-            <a:endParaRPr lang="en-US" sz="850" dirty="0"/>
-          </a:p>
-        </p:txBody>
-      </p:sp>
-      <p:sp>
-        <p:nvSpPr>
-          <p:cNvPr id="25" name="Shape 23"/>
-          <p:cNvSpPr/>
-          <p:nvPr/>
-        </p:nvSpPr>
-        <p:spPr>
-          <a:xfrm>
-            <a:off x="4599432" y="1069848"/>
-            <a:ext cx="91440" cy="0"/>
-          </a:xfrm>
-          <a:prstGeom prst="line">
-            <a:avLst/>
-          </a:prstGeom>
-          <a:noFill/>
-          <a:ln w="12700">
-            <a:solidFill>
-              <a:srgbClr val="CBD5E1"/>
-            </a:solidFill>
-            <a:prstDash val="solid"/>
-            <a:tailEnd type="triangle"/>
-          </a:ln>
-        </p:spPr>
-      </p:sp>
-      <p:sp>
-        <p:nvSpPr>
-          <p:cNvPr id="26" name="Shape 24"/>
-          <p:cNvSpPr/>
-          <p:nvPr/>
-        </p:nvSpPr>
-        <p:spPr>
-          <a:xfrm>
-            <a:off x="4709160" y="822960"/>
-            <a:ext cx="1325880" cy="502920"/>
-          </a:xfrm>
-          <a:prstGeom prst="rect">
-            <a:avLst/>
-          </a:prstGeom>
-          <a:solidFill>
-            <a:srgbClr val="1E4D8C"/>
-          </a:solidFill>
-          <a:ln w="12700">
-            <a:solidFill>
-              <a:srgbClr val="333333"/>
-            </a:solidFill>
-            <a:prstDash val="solid"/>
-          </a:ln>
-        </p:spPr>
-      </p:sp>
-      <p:sp>
-        <p:nvSpPr>
-          <p:cNvPr id="27" name="Text 25"/>
-          <p:cNvSpPr/>
-          <p:nvPr/>
-        </p:nvSpPr>
-        <p:spPr>
-          <a:xfrm>
-            <a:off x="4754880" y="850392"/>
-            <a:ext cx="1234440" cy="201168"/>
-          </a:xfrm>
-          <a:prstGeom prst="rect">
-            <a:avLst/>
-          </a:prstGeom>
-          <a:noFill/>
-          <a:ln/>
-        </p:spPr>
-        <p:txBody>
-          <a:bodyPr wrap="square" lIns="0" tIns="0" rIns="0" bIns="0" rtlCol="0" anchor="ctr"/>
-          <a:lstStyle/>
-          <a:p>
-            <a:pPr algn="ctr" indent="0" marL="0">
-              <a:buNone/>
-            </a:pPr>
-            <a:r>
-              <a:rPr lang="en-US" sz="900" b="1" dirty="0">
-                <a:solidFill>
-                  <a:srgbClr val="FFFFFF"/>
-                </a:solidFill>
-                <a:latin typeface="Calibri" pitchFamily="34" charset="0"/>
-                <a:ea typeface="Calibri" pitchFamily="34" charset="-122"/>
-                <a:cs typeface="Calibri" pitchFamily="34" charset="-120"/>
-              </a:rPr>
-              <a:t>Phase 4</a:t>
-            </a:r>
-            <a:endParaRPr lang="en-US" sz="900" dirty="0"/>
-          </a:p>
-        </p:txBody>
-      </p:sp>
-      <p:sp>
-        <p:nvSpPr>
-          <p:cNvPr id="28" name="Text 26"/>
-          <p:cNvSpPr/>
-          <p:nvPr/>
-        </p:nvSpPr>
-        <p:spPr>
-          <a:xfrm>
-            <a:off x="4754880" y="1051560"/>
-            <a:ext cx="1234440" cy="201168"/>
-          </a:xfrm>
-          <a:prstGeom prst="rect">
-            <a:avLst/>
-          </a:prstGeom>
-          <a:noFill/>
-          <a:ln/>
-        </p:spPr>
-        <p:txBody>
-          <a:bodyPr wrap="square" lIns="0" tIns="0" rIns="0" bIns="0" rtlCol="0" anchor="ctr"/>
-          <a:lstStyle/>
-          <a:p>
-            <a:pPr algn="ctr" indent="0" marL="0">
-              <a:buNone/>
-            </a:pPr>
-            <a:r>
-              <a:rPr lang="en-US" sz="750" dirty="0">
-                <a:solidFill>
-                  <a:srgbClr val="A5F3FC"/>
-                </a:solidFill>
-                <a:latin typeface="Calibri" pitchFamily="34" charset="0"/>
-                <a:ea typeface="Calibri" pitchFamily="34" charset="-122"/>
-                <a:cs typeface="Calibri" pitchFamily="34" charset="-120"/>
-              </a:rPr>
-              <a:t>Days 9-10</a:t>
-            </a:r>
-            <a:endParaRPr lang="en-US" sz="750" dirty="0"/>
-          </a:p>
-        </p:txBody>
-      </p:sp>
-      <p:sp>
-        <p:nvSpPr>
-          <p:cNvPr id="29" name="Shape 27"/>
-          <p:cNvSpPr/>
-          <p:nvPr/>
-        </p:nvSpPr>
-        <p:spPr>
-          <a:xfrm>
-            <a:off x="4709160" y="1417320"/>
-            <a:ext cx="1325880" cy="3200400"/>
-          </a:xfrm>
-          <a:prstGeom prst="rect">
-            <a:avLst/>
-          </a:prstGeom>
-          <a:solidFill>
-            <a:srgbClr val="FFFFFF"/>
-          </a:solidFill>
-          <a:ln w="6350">
-            <a:solidFill>
-              <a:srgbClr val="CBD5E1"/>
-            </a:solidFill>
-            <a:prstDash val="solid"/>
-          </a:ln>
-        </p:spPr>
-      </p:sp>
-      <p:sp>
-        <p:nvSpPr>
-          <p:cNvPr id="30" name="Text 28"/>
-          <p:cNvSpPr/>
-          <p:nvPr/>
-        </p:nvSpPr>
-        <p:spPr>
-          <a:xfrm>
-            <a:off x="4782312" y="1508760"/>
-            <a:ext cx="1179576" cy="256032"/>
-          </a:xfrm>
-          <a:prstGeom prst="rect">
-            <a:avLst/>
-          </a:prstGeom>
-          <a:noFill/>
-          <a:ln/>
-        </p:spPr>
-        <p:txBody>
-          <a:bodyPr wrap="square" lIns="0" tIns="0" rIns="0" bIns="0" rtlCol="0" anchor="ctr"/>
-          <a:lstStyle/>
-          <a:p>
-            <a:pPr algn="ctr" indent="0" marL="0">
-              <a:buNone/>
-            </a:pPr>
-            <a:r>
-              <a:rPr lang="en-US" sz="1100" b="1" dirty="0">
-                <a:solidFill>
-                  <a:srgbClr val="1E4D8C"/>
-                </a:solidFill>
-                <a:latin typeface="Calibri" pitchFamily="34" charset="0"/>
-                <a:ea typeface="Calibri" pitchFamily="34" charset="-122"/>
-                <a:cs typeface="Calibri" pitchFamily="34" charset="-120"/>
-              </a:rPr>
-              <a:t>Research</a:t>
-            </a:r>
-            <a:endParaRPr lang="en-US" sz="1100" dirty="0"/>
-          </a:p>
-        </p:txBody>
-      </p:sp>
-      <p:sp>
-        <p:nvSpPr>
-          <p:cNvPr id="31" name="Text 29"/>
-          <p:cNvSpPr/>
-          <p:nvPr/>
-        </p:nvSpPr>
-        <p:spPr>
-          <a:xfrm>
-            <a:off x="4782312" y="1847088"/>
-            <a:ext cx="1179576" cy="2651760"/>
-          </a:xfrm>
-          <a:prstGeom prst="rect">
-            <a:avLst/>
-          </a:prstGeom>
-          <a:noFill/>
-          <a:ln/>
-        </p:spPr>
-        <p:txBody>
-          <a:bodyPr wrap="square" rtlCol="0" anchor="ctr"/>
-          <a:lstStyle/>
-          <a:p>
-            <a:pPr marL="342900" indent="-342900">
-              <a:buSzPct val="100000"/>
-              <a:buChar char="•"/>
-            </a:pPr>
-            <a:r>
-              <a:rPr lang="en-US" sz="850" dirty="0">
-                <a:solidFill>
-                  <a:srgbClr val="1E293B"/>
-                </a:solidFill>
-                <a:latin typeface="Calibri" pitchFamily="34" charset="0"/>
-                <a:ea typeface="Calibri" pitchFamily="34" charset="-122"/>
-                <a:cs typeface="Calibri" pitchFamily="34" charset="-120"/>
-              </a:rPr>
-              <a:t>Configure [claude] in config.ini</a:t>
-            </a:r>
-            <a:endParaRPr lang="en-US" sz="850" dirty="0"/>
-          </a:p>
-          <a:p>
-            <a:pPr marL="342900" indent="-342900">
-              <a:buSzPct val="100000"/>
-              <a:buChar char="•"/>
-            </a:pPr>
-            <a:r>
-              <a:rPr lang="en-US" sz="850" dirty="0">
-                <a:solidFill>
-                  <a:srgbClr val="1E293B"/>
-                </a:solidFill>
-                <a:latin typeface="Calibri" pitchFamily="34" charset="0"/>
-                <a:ea typeface="Calibri" pitchFamily="34" charset="-122"/>
-                <a:cs typeface="Calibri" pitchFamily="34" charset="-120"/>
-              </a:rPr>
-              <a:t>First ResearchAgent query</a:t>
-            </a:r>
-            <a:endParaRPr lang="en-US" sz="850" dirty="0"/>
-          </a:p>
-          <a:p>
-            <a:pPr marL="342900" indent="-342900">
-              <a:buSzPct val="100000"/>
-              <a:buChar char="•"/>
-            </a:pPr>
-            <a:r>
-              <a:rPr lang="en-US" sz="850" dirty="0">
-                <a:solidFill>
-                  <a:srgbClr val="1E293B"/>
-                </a:solidFill>
-                <a:latin typeface="Calibri" pitchFamily="34" charset="0"/>
-                <a:ea typeface="Calibri" pitchFamily="34" charset="-122"/>
-                <a:cs typeface="Calibri" pitchFamily="34" charset="-120"/>
-              </a:rPr>
-              <a:t>CurationJob to scheduler</a:t>
-            </a:r>
-            <a:endParaRPr lang="en-US" sz="850" dirty="0"/>
-          </a:p>
-        </p:txBody>
-      </p:sp>
-      <p:sp>
-        <p:nvSpPr>
-          <p:cNvPr id="32" name="Shape 30"/>
-          <p:cNvSpPr/>
-          <p:nvPr/>
-        </p:nvSpPr>
-        <p:spPr>
-          <a:xfrm>
-            <a:off x="6062472" y="1069848"/>
-            <a:ext cx="91440" cy="0"/>
-          </a:xfrm>
-          <a:prstGeom prst="line">
-            <a:avLst/>
-          </a:prstGeom>
-          <a:noFill/>
-          <a:ln w="12700">
-            <a:solidFill>
-              <a:srgbClr val="CBD5E1"/>
-            </a:solidFill>
-            <a:prstDash val="solid"/>
-            <a:tailEnd type="triangle"/>
-          </a:ln>
-        </p:spPr>
-      </p:sp>
-      <p:sp>
-        <p:nvSpPr>
-          <p:cNvPr id="33" name="Shape 31"/>
-          <p:cNvSpPr/>
-          <p:nvPr/>
-        </p:nvSpPr>
-        <p:spPr>
-          <a:xfrm>
-            <a:off x="6172200" y="822960"/>
-            <a:ext cx="1325880" cy="502920"/>
-          </a:xfrm>
-          <a:prstGeom prst="rect">
-            <a:avLst/>
-          </a:prstGeom>
-          <a:solidFill>
-            <a:srgbClr val="0891B2"/>
-          </a:solidFill>
-          <a:ln w="12700">
-            <a:solidFill>
-              <a:srgbClr val="333333"/>
-            </a:solidFill>
-            <a:prstDash val="solid"/>
-          </a:ln>
-        </p:spPr>
-      </p:sp>
-      <p:sp>
-        <p:nvSpPr>
-          <p:cNvPr id="34" name="Text 32"/>
-          <p:cNvSpPr/>
-          <p:nvPr/>
-        </p:nvSpPr>
-        <p:spPr>
-          <a:xfrm>
-            <a:off x="6217920" y="850392"/>
-            <a:ext cx="1234440" cy="201168"/>
-          </a:xfrm>
-          <a:prstGeom prst="rect">
-            <a:avLst/>
-          </a:prstGeom>
-          <a:noFill/>
-          <a:ln/>
-        </p:spPr>
-        <p:txBody>
-          <a:bodyPr wrap="square" lIns="0" tIns="0" rIns="0" bIns="0" rtlCol="0" anchor="ctr"/>
-          <a:lstStyle/>
-          <a:p>
-            <a:pPr algn="ctr" indent="0" marL="0">
-              <a:buNone/>
-            </a:pPr>
-            <a:r>
-              <a:rPr lang="en-US" sz="900" b="1" dirty="0">
-                <a:solidFill>
-                  <a:srgbClr val="FFFFFF"/>
-                </a:solidFill>
-                <a:latin typeface="Calibri" pitchFamily="34" charset="0"/>
-                <a:ea typeface="Calibri" pitchFamily="34" charset="-122"/>
-                <a:cs typeface="Calibri" pitchFamily="34" charset="-120"/>
-              </a:rPr>
-              <a:t>Phase 5</a:t>
-            </a:r>
-            <a:endParaRPr lang="en-US" sz="900" dirty="0"/>
-          </a:p>
-        </p:txBody>
-      </p:sp>
-      <p:sp>
-        <p:nvSpPr>
-          <p:cNvPr id="35" name="Text 33"/>
-          <p:cNvSpPr/>
-          <p:nvPr/>
-        </p:nvSpPr>
-        <p:spPr>
-          <a:xfrm>
-            <a:off x="6217920" y="1051560"/>
-            <a:ext cx="1234440" cy="201168"/>
-          </a:xfrm>
-          <a:prstGeom prst="rect">
-            <a:avLst/>
-          </a:prstGeom>
-          <a:noFill/>
-          <a:ln/>
-        </p:spPr>
-        <p:txBody>
-          <a:bodyPr wrap="square" lIns="0" tIns="0" rIns="0" bIns="0" rtlCol="0" anchor="ctr"/>
-          <a:lstStyle/>
-          <a:p>
-            <a:pPr algn="ctr" indent="0" marL="0">
-              <a:buNone/>
-            </a:pPr>
-            <a:r>
-              <a:rPr lang="en-US" sz="750" dirty="0">
-                <a:solidFill>
-                  <a:srgbClr val="A5F3FC"/>
-                </a:solidFill>
-                <a:latin typeface="Calibri" pitchFamily="34" charset="0"/>
-                <a:ea typeface="Calibri" pitchFamily="34" charset="-122"/>
-                <a:cs typeface="Calibri" pitchFamily="34" charset="-120"/>
-              </a:rPr>
-              <a:t>Days 11-14</a:t>
-            </a:r>
-            <a:endParaRPr lang="en-US" sz="750" dirty="0"/>
-          </a:p>
-        </p:txBody>
-      </p:sp>
-      <p:sp>
-        <p:nvSpPr>
-          <p:cNvPr id="36" name="Shape 34"/>
-          <p:cNvSpPr/>
-          <p:nvPr/>
-        </p:nvSpPr>
-        <p:spPr>
-          <a:xfrm>
-            <a:off x="6172200" y="1417320"/>
-            <a:ext cx="1325880" cy="3200400"/>
-          </a:xfrm>
-          <a:prstGeom prst="rect">
-            <a:avLst/>
-          </a:prstGeom>
-          <a:solidFill>
-            <a:srgbClr val="FFFFFF"/>
-          </a:solidFill>
-          <a:ln w="6350">
-            <a:solidFill>
-              <a:srgbClr val="CBD5E1"/>
-            </a:solidFill>
-            <a:prstDash val="solid"/>
-          </a:ln>
-        </p:spPr>
-      </p:sp>
-      <p:sp>
-        <p:nvSpPr>
-          <p:cNvPr id="37" name="Text 35"/>
-          <p:cNvSpPr/>
-          <p:nvPr/>
-        </p:nvSpPr>
-        <p:spPr>
-          <a:xfrm>
-            <a:off x="6245352" y="1508760"/>
-            <a:ext cx="1179576" cy="256032"/>
-          </a:xfrm>
-          <a:prstGeom prst="rect">
-            <a:avLst/>
-          </a:prstGeom>
-          <a:noFill/>
-          <a:ln/>
-        </p:spPr>
-        <p:txBody>
-          <a:bodyPr wrap="square" lIns="0" tIns="0" rIns="0" bIns="0" rtlCol="0" anchor="ctr"/>
-          <a:lstStyle/>
-          <a:p>
-            <a:pPr algn="ctr" indent="0" marL="0">
-              <a:buNone/>
-            </a:pPr>
-            <a:r>
-              <a:rPr lang="en-US" sz="1100" b="1" dirty="0">
-                <a:solidFill>
-                  <a:srgbClr val="0891B2"/>
-                </a:solidFill>
-                <a:latin typeface="Calibri" pitchFamily="34" charset="0"/>
-                <a:ea typeface="Calibri" pitchFamily="34" charset="-122"/>
-                <a:cs typeface="Calibri" pitchFamily="34" charset="-120"/>
-              </a:rPr>
-              <a:t>Reports</a:t>
-            </a:r>
-            <a:endParaRPr lang="en-US" sz="1100" dirty="0"/>
-          </a:p>
-        </p:txBody>
-      </p:sp>
-      <p:sp>
-        <p:nvSpPr>
-          <p:cNvPr id="38" name="Text 36"/>
-          <p:cNvSpPr/>
-          <p:nvPr/>
-        </p:nvSpPr>
-        <p:spPr>
-          <a:xfrm>
-            <a:off x="6245352" y="1847088"/>
-            <a:ext cx="1179576" cy="2651760"/>
-          </a:xfrm>
-          <a:prstGeom prst="rect">
-            <a:avLst/>
-          </a:prstGeom>
-          <a:noFill/>
-          <a:ln/>
-        </p:spPr>
-        <p:txBody>
-          <a:bodyPr wrap="square" rtlCol="0" anchor="ctr"/>
-          <a:lstStyle/>
-          <a:p>
-            <a:pPr marL="342900" indent="-342900">
-              <a:buSzPct val="100000"/>
-              <a:buChar char="•"/>
-            </a:pPr>
-            <a:r>
-              <a:rPr lang="en-US" sz="850" dirty="0">
-                <a:solidFill>
-                  <a:srgbClr val="1E293B"/>
-                </a:solidFill>
-                <a:latin typeface="Calibri" pitchFamily="34" charset="0"/>
-                <a:ea typeface="Calibri" pitchFamily="34" charset="-122"/>
-                <a:cs typeface="Calibri" pitchFamily="34" charset="-120"/>
-              </a:rPr>
-              <a:t>Daily report — review PDF/HTML</a:t>
-            </a:r>
-            <a:endParaRPr lang="en-US" sz="850" dirty="0"/>
-          </a:p>
-          <a:p>
-            <a:pPr marL="342900" indent="-342900">
-              <a:buSzPct val="100000"/>
-              <a:buChar char="•"/>
-            </a:pPr>
-            <a:r>
-              <a:rPr lang="en-US" sz="850" dirty="0">
-                <a:solidFill>
-                  <a:srgbClr val="1E293B"/>
-                </a:solidFill>
-                <a:latin typeface="Calibri" pitchFamily="34" charset="0"/>
-                <a:ea typeface="Calibri" pitchFamily="34" charset="-122"/>
-                <a:cs typeface="Calibri" pitchFamily="34" charset="-120"/>
-              </a:rPr>
-              <a:t>Configure email delivery</a:t>
-            </a:r>
-            <a:endParaRPr lang="en-US" sz="850" dirty="0"/>
-          </a:p>
-          <a:p>
-            <a:pPr marL="342900" indent="-342900">
-              <a:buSzPct val="100000"/>
-              <a:buChar char="•"/>
-            </a:pPr>
-            <a:r>
-              <a:rPr lang="en-US" sz="850" dirty="0">
-                <a:solidFill>
-                  <a:srgbClr val="1E293B"/>
-                </a:solidFill>
-                <a:latin typeface="Calibri" pitchFamily="34" charset="0"/>
-                <a:ea typeface="Calibri" pitchFamily="34" charset="-122"/>
-                <a:cs typeface="Calibri" pitchFamily="34" charset="-120"/>
-              </a:rPr>
-              <a:t>ReportJob at 06:00 daily</a:t>
-            </a:r>
-            <a:endParaRPr lang="en-US" sz="850" dirty="0"/>
-          </a:p>
-        </p:txBody>
-      </p:sp>
-      <p:sp>
-        <p:nvSpPr>
-          <p:cNvPr id="39" name="Shape 37"/>
-          <p:cNvSpPr/>
-          <p:nvPr/>
-        </p:nvSpPr>
-        <p:spPr>
-          <a:xfrm>
-            <a:off x="7525512" y="1069848"/>
-            <a:ext cx="91440" cy="0"/>
-          </a:xfrm>
-          <a:prstGeom prst="line">
-            <a:avLst/>
-          </a:prstGeom>
-          <a:noFill/>
-          <a:ln w="12700">
-            <a:solidFill>
-              <a:srgbClr val="CBD5E1"/>
-            </a:solidFill>
-            <a:prstDash val="solid"/>
-            <a:tailEnd type="triangle"/>
-          </a:ln>
-        </p:spPr>
-      </p:sp>
-      <p:sp>
-        <p:nvSpPr>
-          <p:cNvPr id="40" name="Shape 38"/>
-          <p:cNvSpPr/>
-          <p:nvPr/>
-        </p:nvSpPr>
-        <p:spPr>
-          <a:xfrm>
-            <a:off x="7635240" y="822960"/>
-            <a:ext cx="1325880" cy="502920"/>
-          </a:xfrm>
-          <a:prstGeom prst="rect">
-            <a:avLst/>
-          </a:prstGeom>
-          <a:solidFill>
-            <a:srgbClr val="162952"/>
-          </a:solidFill>
-          <a:ln w="12700">
-            <a:solidFill>
-              <a:srgbClr val="333333"/>
-            </a:solidFill>
-            <a:prstDash val="solid"/>
-          </a:ln>
-        </p:spPr>
-      </p:sp>
-      <p:sp>
-        <p:nvSpPr>
-          <p:cNvPr id="41" name="Text 39"/>
-          <p:cNvSpPr/>
-          <p:nvPr/>
-        </p:nvSpPr>
-        <p:spPr>
-          <a:xfrm>
-            <a:off x="7680960" y="850392"/>
-            <a:ext cx="1234440" cy="201168"/>
-          </a:xfrm>
-          <a:prstGeom prst="rect">
-            <a:avLst/>
-          </a:prstGeom>
-          <a:noFill/>
-          <a:ln/>
-        </p:spPr>
-        <p:txBody>
-          <a:bodyPr wrap="square" lIns="0" tIns="0" rIns="0" bIns="0" rtlCol="0" anchor="ctr"/>
-          <a:lstStyle/>
-          <a:p>
-            <a:pPr algn="ctr" indent="0" marL="0">
-              <a:buNone/>
-            </a:pPr>
-            <a:r>
-              <a:rPr lang="en-US" sz="900" b="1" dirty="0">
-                <a:solidFill>
-                  <a:srgbClr val="FFFFFF"/>
-                </a:solidFill>
-                <a:latin typeface="Calibri" pitchFamily="34" charset="0"/>
-                <a:ea typeface="Calibri" pitchFamily="34" charset="-122"/>
-                <a:cs typeface="Calibri" pitchFamily="34" charset="-120"/>
-              </a:rPr>
-              <a:t>Phase 6</a:t>
-            </a:r>
-            <a:endParaRPr lang="en-US" sz="900" dirty="0"/>
-          </a:p>
-        </p:txBody>
-      </p:sp>
-      <p:sp>
-        <p:nvSpPr>
-          <p:cNvPr id="42" name="Text 40"/>
-          <p:cNvSpPr/>
-          <p:nvPr/>
-        </p:nvSpPr>
-        <p:spPr>
-          <a:xfrm>
-            <a:off x="7680960" y="1051560"/>
-            <a:ext cx="1234440" cy="201168"/>
-          </a:xfrm>
-          <a:prstGeom prst="rect">
-            <a:avLst/>
-          </a:prstGeom>
-          <a:noFill/>
-          <a:ln/>
-        </p:spPr>
-        <p:txBody>
-          <a:bodyPr wrap="square" lIns="0" tIns="0" rIns="0" bIns="0" rtlCol="0" anchor="ctr"/>
-          <a:lstStyle/>
-          <a:p>
-            <a:pPr algn="ctr" indent="0" marL="0">
-              <a:buNone/>
-            </a:pPr>
-            <a:r>
-              <a:rPr lang="en-US" sz="750" dirty="0">
-                <a:solidFill>
-                  <a:srgbClr val="A5F3FC"/>
-                </a:solidFill>
-                <a:latin typeface="Calibri" pitchFamily="34" charset="0"/>
-                <a:ea typeface="Calibri" pitchFamily="34" charset="-122"/>
-                <a:cs typeface="Calibri" pitchFamily="34" charset="-120"/>
-              </a:rPr>
-              <a:t>Ongoing</a:t>
-            </a:r>
-            <a:endParaRPr lang="en-US" sz="750" dirty="0"/>
-          </a:p>
-        </p:txBody>
-      </p:sp>
-      <p:sp>
-        <p:nvSpPr>
-          <p:cNvPr id="43" name="Shape 41"/>
-          <p:cNvSpPr/>
-          <p:nvPr/>
-        </p:nvSpPr>
-        <p:spPr>
-          <a:xfrm>
-            <a:off x="7635240" y="1417320"/>
-            <a:ext cx="1325880" cy="3200400"/>
-          </a:xfrm>
-          <a:prstGeom prst="rect">
-            <a:avLst/>
-          </a:prstGeom>
-          <a:solidFill>
-            <a:srgbClr val="FFFFFF"/>
-          </a:solidFill>
-          <a:ln w="6350">
-            <a:solidFill>
-              <a:srgbClr val="CBD5E1"/>
-            </a:solidFill>
-            <a:prstDash val="solid"/>
-          </a:ln>
-        </p:spPr>
-      </p:sp>
-      <p:sp>
-        <p:nvSpPr>
-          <p:cNvPr id="44" name="Text 42"/>
-          <p:cNvSpPr/>
-          <p:nvPr/>
-        </p:nvSpPr>
-        <p:spPr>
-          <a:xfrm>
-            <a:off x="7708392" y="1508760"/>
-            <a:ext cx="1179576" cy="256032"/>
-          </a:xfrm>
-          <a:prstGeom prst="rect">
-            <a:avLst/>
-          </a:prstGeom>
-          <a:noFill/>
-          <a:ln/>
-        </p:spPr>
-        <p:txBody>
-          <a:bodyPr wrap="square" lIns="0" tIns="0" rIns="0" bIns="0" rtlCol="0" anchor="ctr"/>
-          <a:lstStyle/>
-          <a:p>
-            <a:pPr algn="ctr" indent="0" marL="0">
-              <a:buNone/>
-            </a:pPr>
-            <a:r>
-              <a:rPr lang="en-US" sz="1100" b="1" dirty="0">
-                <a:solidFill>
-                  <a:srgbClr val="162952"/>
-                </a:solidFill>
-                <a:latin typeface="Calibri" pitchFamily="34" charset="0"/>
-                <a:ea typeface="Calibri" pitchFamily="34" charset="-122"/>
-                <a:cs typeface="Calibri" pitchFamily="34" charset="-120"/>
-              </a:rPr>
-              <a:t>Rollout</a:t>
-            </a:r>
-            <a:endParaRPr lang="en-US" sz="1100" dirty="0"/>
-          </a:p>
-        </p:txBody>
-      </p:sp>
-      <p:sp>
-        <p:nvSpPr>
-          <p:cNvPr id="45" name="Text 43"/>
-          <p:cNvSpPr/>
-          <p:nvPr/>
-        </p:nvSpPr>
-        <p:spPr>
-          <a:xfrm>
-            <a:off x="7708392" y="1847088"/>
-            <a:ext cx="1179576" cy="2651760"/>
-          </a:xfrm>
-          <a:prstGeom prst="rect">
-            <a:avLst/>
-          </a:prstGeom>
-          <a:noFill/>
-          <a:ln/>
-        </p:spPr>
-        <p:txBody>
-          <a:bodyPr wrap="square" rtlCol="0" anchor="ctr"/>
-          <a:lstStyle/>
-          <a:p>
-            <a:pPr marL="342900" indent="-342900">
-              <a:buSzPct val="100000"/>
-              <a:buChar char="•"/>
-            </a:pPr>
-            <a:r>
-              <a:rPr lang="en-US" sz="850" dirty="0">
-                <a:solidFill>
-                  <a:srgbClr val="1E293B"/>
-                </a:solidFill>
-                <a:latin typeface="Calibri" pitchFamily="34" charset="0"/>
-                <a:ea typeface="Calibri" pitchFamily="34" charset="-122"/>
-                <a:cs typeface="Calibri" pitchFamily="34" charset="-120"/>
-              </a:rPr>
-              <a:t>Analyst config templates</a:t>
-            </a:r>
-            <a:endParaRPr lang="en-US" sz="850" dirty="0"/>
-          </a:p>
-          <a:p>
-            <a:pPr marL="342900" indent="-342900">
-              <a:buSzPct val="100000"/>
-              <a:buChar char="•"/>
-            </a:pPr>
-            <a:r>
-              <a:rPr lang="en-US" sz="850" dirty="0">
-                <a:solidFill>
-                  <a:srgbClr val="1E293B"/>
-                </a:solidFill>
-                <a:latin typeface="Calibri" pitchFamily="34" charset="0"/>
-                <a:ea typeface="Calibri" pitchFamily="34" charset="-122"/>
-                <a:cs typeface="Calibri" pitchFamily="34" charset="-120"/>
-              </a:rPr>
-              <a:t>Share EXAMPLES.md</a:t>
-            </a:r>
-            <a:endParaRPr lang="en-US" sz="850" dirty="0"/>
-          </a:p>
-          <a:p>
-            <a:pPr marL="342900" indent="-342900">
-              <a:buSzPct val="100000"/>
-              <a:buChar char="•"/>
-            </a:pPr>
-            <a:r>
-              <a:rPr lang="en-US" sz="850" dirty="0">
-                <a:solidFill>
-                  <a:srgbClr val="1E293B"/>
-                </a:solidFill>
-                <a:latin typeface="Calibri" pitchFamily="34" charset="0"/>
-                <a:ea typeface="Calibri" pitchFamily="34" charset="-122"/>
-                <a:cs typeface="Calibri" pitchFamily="34" charset="-120"/>
-              </a:rPr>
-              <a:t>Library review process</a:t>
-            </a:r>
-            <a:endParaRPr lang="en-US" sz="850" dirty="0"/>
+              <a:rPr lang="en-US" sz="1000" dirty="0">
+                <a:solidFill>
+                  <a:srgbClr val="94A3B8"/>
+                </a:solidFill>
+                <a:latin typeface="Calibri" pitchFamily="34" charset="0"/>
+                <a:ea typeface="Calibri" pitchFamily="34" charset="-122"/>
+                <a:cs typeface="Calibri" pitchFamily="34" charset="-120"/>
+              </a:rPr>
+              <a:t>Interval</a:t>
+            </a:r>
+            <a:endParaRPr lang="en-US" sz="1000" dirty="0"/>
           </a:p>
         </p:txBody>
       </p:sp>
@@ -12287,7 +11945,7 @@
                 <a:ea typeface="Calibri" pitchFamily="34" charset="-122"/>
                 <a:cs typeface="Calibri" pitchFamily="34" charset="-120"/>
               </a:rPr>
-              <a:t>Pending Items &amp; Roadmap</a:t>
+              <a:t>Implementation Sequence</a:t>
             </a:r>
             <a:endParaRPr lang="en-US" sz="2000" dirty="0"/>
           </a:p>
@@ -12301,14 +11959,14 @@
         </p:nvSpPr>
         <p:spPr>
           <a:xfrm>
-            <a:off x="320040" y="804672"/>
-            <a:ext cx="4206240" cy="320040"/>
-          </a:xfrm>
-          <a:prstGeom prst="rect">
-            <a:avLst/>
-          </a:prstGeom>
-          <a:solidFill>
-            <a:srgbClr val="EF4444"/>
+            <a:off x="320040" y="822960"/>
+            <a:ext cx="1325880" cy="502920"/>
+          </a:xfrm>
+          <a:prstGeom prst="rect">
+            <a:avLst/>
+          </a:prstGeom>
+          <a:solidFill>
+            <a:srgbClr val="0891B2"/>
           </a:solidFill>
           <a:ln w="12700">
             <a:solidFill>
@@ -12326,24 +11984,24 @@
         </p:nvSpPr>
         <p:spPr>
           <a:xfrm>
-            <a:off x="320040" y="804672"/>
-            <a:ext cx="4206240" cy="320040"/>
-          </a:xfrm>
-          <a:prstGeom prst="rect">
-            <a:avLst/>
-          </a:prstGeom>
-          <a:noFill/>
-          <a:ln/>
-        </p:spPr>
-        <p:txBody>
-          <a:bodyPr wrap="square" lIns="0" tIns="0" rIns="0" bIns="0" rtlCol="0" anchor="ctr"/>
-          <a:lstStyle/>
-          <a:p>
-            <a:pPr indent="0" marL="0">
-              <a:buNone/>
-            </a:pPr>
-            <a:r>
-              <a:rPr lang="en-US" sz="1000" b="1" dirty="0">
+            <a:off x="365760" y="850392"/>
+            <a:ext cx="1234440" cy="201168"/>
+          </a:xfrm>
+          <a:prstGeom prst="rect">
+            <a:avLst/>
+          </a:prstGeom>
+          <a:noFill/>
+          <a:ln/>
+        </p:spPr>
+        <p:txBody>
+          <a:bodyPr wrap="square" lIns="0" tIns="0" rIns="0" bIns="0" rtlCol="0" anchor="ctr"/>
+          <a:lstStyle/>
+          <a:p>
+            <a:pPr algn="ctr" indent="0" marL="0">
+              <a:buNone/>
+            </a:pPr>
+            <a:r>
+              <a:rPr lang="en-US" sz="900" b="1" dirty="0">
                 <a:solidFill>
                   <a:srgbClr val="FFFFFF"/>
                 </a:solidFill>
@@ -12351,9 +12009,9 @@
                 <a:ea typeface="Calibri" pitchFamily="34" charset="-122"/>
                 <a:cs typeface="Calibri" pitchFamily="34" charset="-120"/>
               </a:rPr>
-              <a:t>PENDING — VERIFY BEFORE PRODUCTION</a:t>
-            </a:r>
-            <a:endParaRPr lang="en-US" sz="1000" dirty="0"/>
+              <a:t>Phase 1</a:t>
+            </a:r>
+            <a:endParaRPr lang="en-US" sz="900" dirty="0"/>
           </a:p>
         </p:txBody>
       </p:sp>
@@ -12365,8 +12023,111 @@
         </p:nvSpPr>
         <p:spPr>
           <a:xfrm>
-            <a:off x="457200" y="1207008"/>
-            <a:ext cx="3931920" cy="2011680"/>
+            <a:off x="365760" y="1051560"/>
+            <a:ext cx="1234440" cy="201168"/>
+          </a:xfrm>
+          <a:prstGeom prst="rect">
+            <a:avLst/>
+          </a:prstGeom>
+          <a:noFill/>
+          <a:ln/>
+        </p:spPr>
+        <p:txBody>
+          <a:bodyPr wrap="square" lIns="0" tIns="0" rIns="0" bIns="0" rtlCol="0" anchor="ctr"/>
+          <a:lstStyle/>
+          <a:p>
+            <a:pPr algn="ctr" indent="0" marL="0">
+              <a:buNone/>
+            </a:pPr>
+            <a:r>
+              <a:rPr lang="en-US" sz="750" dirty="0">
+                <a:solidFill>
+                  <a:srgbClr val="A5F3FC"/>
+                </a:solidFill>
+                <a:latin typeface="Calibri" pitchFamily="34" charset="0"/>
+                <a:ea typeface="Calibri" pitchFamily="34" charset="-122"/>
+                <a:cs typeface="Calibri" pitchFamily="34" charset="-120"/>
+              </a:rPr>
+              <a:t>Days 1-2</a:t>
+            </a:r>
+            <a:endParaRPr lang="en-US" sz="750" dirty="0"/>
+          </a:p>
+        </p:txBody>
+      </p:sp>
+      <p:sp>
+        <p:nvSpPr>
+          <p:cNvPr id="8" name="Shape 6"/>
+          <p:cNvSpPr/>
+          <p:nvPr/>
+        </p:nvSpPr>
+        <p:spPr>
+          <a:xfrm>
+            <a:off x="320040" y="1417320"/>
+            <a:ext cx="1325880" cy="3200400"/>
+          </a:xfrm>
+          <a:prstGeom prst="rect">
+            <a:avLst/>
+          </a:prstGeom>
+          <a:solidFill>
+            <a:srgbClr val="FFFFFF"/>
+          </a:solidFill>
+          <a:ln w="6350">
+            <a:solidFill>
+              <a:srgbClr val="CBD5E1"/>
+            </a:solidFill>
+            <a:prstDash val="solid"/>
+          </a:ln>
+        </p:spPr>
+      </p:sp>
+      <p:sp>
+        <p:nvSpPr>
+          <p:cNvPr id="9" name="Text 7"/>
+          <p:cNvSpPr/>
+          <p:nvPr/>
+        </p:nvSpPr>
+        <p:spPr>
+          <a:xfrm>
+            <a:off x="393192" y="1508760"/>
+            <a:ext cx="1179576" cy="256032"/>
+          </a:xfrm>
+          <a:prstGeom prst="rect">
+            <a:avLst/>
+          </a:prstGeom>
+          <a:noFill/>
+          <a:ln/>
+        </p:spPr>
+        <p:txBody>
+          <a:bodyPr wrap="square" lIns="0" tIns="0" rIns="0" bIns="0" rtlCol="0" anchor="ctr"/>
+          <a:lstStyle/>
+          <a:p>
+            <a:pPr algn="ctr" indent="0" marL="0">
+              <a:buNone/>
+            </a:pPr>
+            <a:r>
+              <a:rPr lang="en-US" sz="1100" b="1" dirty="0">
+                <a:solidFill>
+                  <a:srgbClr val="0891B2"/>
+                </a:solidFill>
+                <a:latin typeface="Calibri" pitchFamily="34" charset="0"/>
+                <a:ea typeface="Calibri" pitchFamily="34" charset="-122"/>
+                <a:cs typeface="Calibri" pitchFamily="34" charset="-120"/>
+              </a:rPr>
+              <a:t>Foundation</a:t>
+            </a:r>
+            <a:endParaRPr lang="en-US" sz="1100" dirty="0"/>
+          </a:p>
+        </p:txBody>
+      </p:sp>
+      <p:sp>
+        <p:nvSpPr>
+          <p:cNvPr id="10" name="Text 8"/>
+          <p:cNvSpPr/>
+          <p:nvPr/>
+        </p:nvSpPr>
+        <p:spPr>
+          <a:xfrm>
+            <a:off x="393192" y="1847088"/>
+            <a:ext cx="1179576" cy="2651760"/>
           </a:xfrm>
           <a:prstGeom prst="rect">
             <a:avLst/>
@@ -12383,7 +12144,7 @@
               <a:buChar char="•"/>
             </a:pPr>
             <a:r>
-              <a:rPr lang="en-US" sz="950" dirty="0">
+              <a:rPr lang="en-US" sz="850" dirty="0">
                 <a:solidFill>
                   <a:srgbClr val="1E293B"/>
                 </a:solidFill>
@@ -12391,9 +12152,9 @@
                 <a:ea typeface="Calibri" pitchFamily="34" charset="-122"/>
                 <a:cs typeface="Calibri" pitchFamily="34" charset="-120"/>
               </a:rPr>
-              <a:t>ThreatQ: verify x_target_sectors field names in STIX export (see PENDING_ITEMS.md §1)</a:t>
-            </a:r>
-            <a:endParaRPr lang="en-US" sz="950" dirty="0"/>
+              <a:t>Install + configure config.ini</a:t>
+            </a:r>
+            <a:endParaRPr lang="en-US" sz="850" dirty="0"/>
           </a:p>
           <a:p>
             <a:pPr marL="342900" indent="-342900">
@@ -12401,7 +12162,7 @@
               <a:buChar char="•"/>
             </a:pPr>
             <a:r>
-              <a:rPr lang="en-US" sz="950" dirty="0">
+              <a:rPr lang="en-US" sz="850" dirty="0">
                 <a:solidFill>
                   <a:srgbClr val="1E293B"/>
                 </a:solidFill>
@@ -12409,9 +12170,9 @@
                 <a:ea typeface="Calibri" pitchFamily="34" charset="-122"/>
                 <a:cs typeface="Calibri" pitchFamily="34" charset="-120"/>
               </a:rPr>
-              <a:t>RecordedFuture, CrowdStrike, VT, ShadowServer, Nucleus: sector normalization</a:t>
-            </a:r>
-            <a:endParaRPr lang="en-US" sz="950" dirty="0"/>
+              <a:t>Test connectivity: gnat ping</a:t>
+            </a:r>
+            <a:endParaRPr lang="en-US" sz="850" dirty="0"/>
           </a:p>
           <a:p>
             <a:pPr marL="342900" indent="-342900">
@@ -12419,7 +12180,7 @@
               <a:buChar char="•"/>
             </a:pPr>
             <a:r>
-              <a:rPr lang="en-US" sz="950" dirty="0">
+              <a:rPr lang="en-US" sz="850" dirty="0">
                 <a:solidFill>
                   <a:srgbClr val="1E293B"/>
                 </a:solidFill>
@@ -12427,17 +12188,230 @@
                 <a:ea typeface="Calibri" pitchFamily="34" charset="-122"/>
                 <a:cs typeface="Calibri" pitchFamily="34" charset="-120"/>
               </a:rPr>
-              <a:t>DOCX renderer: npm install -g docx required on deployment host</a:t>
-            </a:r>
-            <a:endParaRPr lang="en-US" sz="950" dirty="0"/>
-          </a:p>
+              <a:t>First ingest dry-run</a:t>
+            </a:r>
+            <a:endParaRPr lang="en-US" sz="850" dirty="0"/>
+          </a:p>
+        </p:txBody>
+      </p:sp>
+      <p:sp>
+        <p:nvSpPr>
+          <p:cNvPr id="11" name="Shape 9"/>
+          <p:cNvSpPr/>
+          <p:nvPr/>
+        </p:nvSpPr>
+        <p:spPr>
+          <a:xfrm>
+            <a:off x="1673352" y="1069848"/>
+            <a:ext cx="91440" cy="0"/>
+          </a:xfrm>
+          <a:prstGeom prst="line">
+            <a:avLst/>
+          </a:prstGeom>
+          <a:noFill/>
+          <a:ln w="12700">
+            <a:solidFill>
+              <a:srgbClr val="CBD5E1"/>
+            </a:solidFill>
+            <a:prstDash val="solid"/>
+            <a:tailEnd type="triangle"/>
+          </a:ln>
+        </p:spPr>
+      </p:sp>
+      <p:sp>
+        <p:nvSpPr>
+          <p:cNvPr id="12" name="Shape 10"/>
+          <p:cNvSpPr/>
+          <p:nvPr/>
+        </p:nvSpPr>
+        <p:spPr>
+          <a:xfrm>
+            <a:off x="1783080" y="822960"/>
+            <a:ext cx="1325880" cy="502920"/>
+          </a:xfrm>
+          <a:prstGeom prst="rect">
+            <a:avLst/>
+          </a:prstGeom>
+          <a:solidFill>
+            <a:srgbClr val="1E4D8C"/>
+          </a:solidFill>
+          <a:ln w="12700">
+            <a:solidFill>
+              <a:srgbClr val="333333"/>
+            </a:solidFill>
+            <a:prstDash val="solid"/>
+          </a:ln>
+        </p:spPr>
+      </p:sp>
+      <p:sp>
+        <p:nvSpPr>
+          <p:cNvPr id="13" name="Text 11"/>
+          <p:cNvSpPr/>
+          <p:nvPr/>
+        </p:nvSpPr>
+        <p:spPr>
+          <a:xfrm>
+            <a:off x="1828800" y="850392"/>
+            <a:ext cx="1234440" cy="201168"/>
+          </a:xfrm>
+          <a:prstGeom prst="rect">
+            <a:avLst/>
+          </a:prstGeom>
+          <a:noFill/>
+          <a:ln/>
+        </p:spPr>
+        <p:txBody>
+          <a:bodyPr wrap="square" lIns="0" tIns="0" rIns="0" bIns="0" rtlCol="0" anchor="ctr"/>
+          <a:lstStyle/>
+          <a:p>
+            <a:pPr algn="ctr" indent="0" marL="0">
+              <a:buNone/>
+            </a:pPr>
+            <a:r>
+              <a:rPr lang="en-US" sz="900" b="1" dirty="0">
+                <a:solidFill>
+                  <a:srgbClr val="FFFFFF"/>
+                </a:solidFill>
+                <a:latin typeface="Calibri" pitchFamily="34" charset="0"/>
+                <a:ea typeface="Calibri" pitchFamily="34" charset="-122"/>
+                <a:cs typeface="Calibri" pitchFamily="34" charset="-120"/>
+              </a:rPr>
+              <a:t>Phase 2</a:t>
+            </a:r>
+            <a:endParaRPr lang="en-US" sz="900" dirty="0"/>
+          </a:p>
+        </p:txBody>
+      </p:sp>
+      <p:sp>
+        <p:nvSpPr>
+          <p:cNvPr id="14" name="Text 12"/>
+          <p:cNvSpPr/>
+          <p:nvPr/>
+        </p:nvSpPr>
+        <p:spPr>
+          <a:xfrm>
+            <a:off x="1828800" y="1051560"/>
+            <a:ext cx="1234440" cy="201168"/>
+          </a:xfrm>
+          <a:prstGeom prst="rect">
+            <a:avLst/>
+          </a:prstGeom>
+          <a:noFill/>
+          <a:ln/>
+        </p:spPr>
+        <p:txBody>
+          <a:bodyPr wrap="square" lIns="0" tIns="0" rIns="0" bIns="0" rtlCol="0" anchor="ctr"/>
+          <a:lstStyle/>
+          <a:p>
+            <a:pPr algn="ctr" indent="0" marL="0">
+              <a:buNone/>
+            </a:pPr>
+            <a:r>
+              <a:rPr lang="en-US" sz="750" dirty="0">
+                <a:solidFill>
+                  <a:srgbClr val="A5F3FC"/>
+                </a:solidFill>
+                <a:latin typeface="Calibri" pitchFamily="34" charset="0"/>
+                <a:ea typeface="Calibri" pitchFamily="34" charset="-122"/>
+                <a:cs typeface="Calibri" pitchFamily="34" charset="-120"/>
+              </a:rPr>
+              <a:t>Days 3-5</a:t>
+            </a:r>
+            <a:endParaRPr lang="en-US" sz="750" dirty="0"/>
+          </a:p>
+        </p:txBody>
+      </p:sp>
+      <p:sp>
+        <p:nvSpPr>
+          <p:cNvPr id="15" name="Shape 13"/>
+          <p:cNvSpPr/>
+          <p:nvPr/>
+        </p:nvSpPr>
+        <p:spPr>
+          <a:xfrm>
+            <a:off x="1783080" y="1417320"/>
+            <a:ext cx="1325880" cy="3200400"/>
+          </a:xfrm>
+          <a:prstGeom prst="rect">
+            <a:avLst/>
+          </a:prstGeom>
+          <a:solidFill>
+            <a:srgbClr val="FFFFFF"/>
+          </a:solidFill>
+          <a:ln w="6350">
+            <a:solidFill>
+              <a:srgbClr val="CBD5E1"/>
+            </a:solidFill>
+            <a:prstDash val="solid"/>
+          </a:ln>
+        </p:spPr>
+      </p:sp>
+      <p:sp>
+        <p:nvSpPr>
+          <p:cNvPr id="16" name="Text 14"/>
+          <p:cNvSpPr/>
+          <p:nvPr/>
+        </p:nvSpPr>
+        <p:spPr>
+          <a:xfrm>
+            <a:off x="1856232" y="1508760"/>
+            <a:ext cx="1179576" cy="256032"/>
+          </a:xfrm>
+          <a:prstGeom prst="rect">
+            <a:avLst/>
+          </a:prstGeom>
+          <a:noFill/>
+          <a:ln/>
+        </p:spPr>
+        <p:txBody>
+          <a:bodyPr wrap="square" lIns="0" tIns="0" rIns="0" bIns="0" rtlCol="0" anchor="ctr"/>
+          <a:lstStyle/>
+          <a:p>
+            <a:pPr algn="ctr" indent="0" marL="0">
+              <a:buNone/>
+            </a:pPr>
+            <a:r>
+              <a:rPr lang="en-US" sz="1100" b="1" dirty="0">
+                <a:solidFill>
+                  <a:srgbClr val="1E4D8C"/>
+                </a:solidFill>
+                <a:latin typeface="Calibri" pitchFamily="34" charset="0"/>
+                <a:ea typeface="Calibri" pitchFamily="34" charset="-122"/>
+                <a:cs typeface="Calibri" pitchFamily="34" charset="-120"/>
+              </a:rPr>
+              <a:t>Ingest</a:t>
+            </a:r>
+            <a:endParaRPr lang="en-US" sz="1100" dirty="0"/>
+          </a:p>
+        </p:txBody>
+      </p:sp>
+      <p:sp>
+        <p:nvSpPr>
+          <p:cNvPr id="17" name="Text 15"/>
+          <p:cNvSpPr/>
+          <p:nvPr/>
+        </p:nvSpPr>
+        <p:spPr>
+          <a:xfrm>
+            <a:off x="1856232" y="1847088"/>
+            <a:ext cx="1179576" cy="2651760"/>
+          </a:xfrm>
+          <a:prstGeom prst="rect">
+            <a:avLst/>
+          </a:prstGeom>
+          <a:noFill/>
+          <a:ln/>
+        </p:spPr>
+        <p:txBody>
+          <a:bodyPr wrap="square" rtlCol="0" anchor="ctr"/>
+          <a:lstStyle/>
           <a:p>
             <a:pPr marL="342900" indent="-342900">
               <a:buSzPct val="100000"/>
               <a:buChar char="•"/>
             </a:pPr>
             <a:r>
-              <a:rPr lang="en-US" sz="950" dirty="0">
+              <a:rPr lang="en-US" sz="850" dirty="0">
                 <a:solidFill>
                   <a:srgbClr val="1E293B"/>
                 </a:solidFill>
@@ -12445,9 +12419,9 @@
                 <a:ea typeface="Calibri" pitchFamily="34" charset="-122"/>
                 <a:cs typeface="Calibri" pitchFamily="34" charset="-120"/>
               </a:rPr>
-              <a:t>WorkspaceManager.default() method: verify or add to context/workspace.py</a:t>
-            </a:r>
-            <a:endParaRPr lang="en-US" sz="950" dirty="0"/>
+              <a:t>All connector configs</a:t>
+            </a:r>
+            <a:endParaRPr lang="en-US" sz="850" dirty="0"/>
           </a:p>
           <a:p>
             <a:pPr marL="342900" indent="-342900">
@@ -12455,7 +12429,7 @@
               <a:buChar char="•"/>
             </a:pPr>
             <a:r>
-              <a:rPr lang="en-US" sz="950" dirty="0">
+              <a:rPr lang="en-US" sz="850" dirty="0">
                 <a:solidFill>
                   <a:srgbClr val="1E293B"/>
                 </a:solidFill>
@@ -12463,103 +12437,17 @@
                 <a:ea typeface="Calibri" pitchFamily="34" charset="-122"/>
                 <a:cs typeface="Calibri" pitchFamily="34" charset="-120"/>
               </a:rPr>
-              <a:t>Copilot DirectLine: test token refresh behavior in production Bot Framework setup</a:t>
-            </a:r>
-            <a:endParaRPr lang="en-US" sz="950" dirty="0"/>
-          </a:p>
-        </p:txBody>
-      </p:sp>
-      <p:sp>
-        <p:nvSpPr>
-          <p:cNvPr id="8" name="Shape 6"/>
-          <p:cNvSpPr/>
-          <p:nvPr/>
-        </p:nvSpPr>
-        <p:spPr>
-          <a:xfrm>
-            <a:off x="4754880" y="804672"/>
-            <a:ext cx="4069080" cy="320040"/>
-          </a:xfrm>
-          <a:prstGeom prst="rect">
-            <a:avLst/>
-          </a:prstGeom>
-          <a:solidFill>
-            <a:srgbClr val="0891B2"/>
-          </a:solidFill>
-          <a:ln w="12700">
-            <a:solidFill>
-              <a:srgbClr val="333333"/>
-            </a:solidFill>
-            <a:prstDash val="solid"/>
-          </a:ln>
-        </p:spPr>
-      </p:sp>
-      <p:sp>
-        <p:nvSpPr>
-          <p:cNvPr id="9" name="Text 7"/>
-          <p:cNvSpPr/>
-          <p:nvPr/>
-        </p:nvSpPr>
-        <p:spPr>
-          <a:xfrm>
-            <a:off x="4754880" y="804672"/>
-            <a:ext cx="4069080" cy="320040"/>
-          </a:xfrm>
-          <a:prstGeom prst="rect">
-            <a:avLst/>
-          </a:prstGeom>
-          <a:noFill/>
-          <a:ln/>
-        </p:spPr>
-        <p:txBody>
-          <a:bodyPr wrap="square" lIns="0" tIns="0" rIns="0" bIns="0" rtlCol="0" anchor="ctr"/>
-          <a:lstStyle/>
-          <a:p>
-            <a:pPr indent="0" marL="0">
-              <a:buNone/>
-            </a:pPr>
-            <a:r>
-              <a:rPr lang="en-US" sz="1000" b="1" dirty="0">
-                <a:solidFill>
-                  <a:srgbClr val="FFFFFF"/>
-                </a:solidFill>
-                <a:latin typeface="Calibri" pitchFamily="34" charset="0"/>
-                <a:ea typeface="Calibri" pitchFamily="34" charset="-122"/>
-                <a:cs typeface="Calibri" pitchFamily="34" charset="-120"/>
-              </a:rPr>
-              <a:t>ROADMAP — NEXT ADDITIONS</a:t>
-            </a:r>
-            <a:endParaRPr lang="en-US" sz="1000" dirty="0"/>
-          </a:p>
-        </p:txBody>
-      </p:sp>
-      <p:sp>
-        <p:nvSpPr>
-          <p:cNvPr id="10" name="Text 8"/>
-          <p:cNvSpPr/>
-          <p:nvPr/>
-        </p:nvSpPr>
-        <p:spPr>
-          <a:xfrm>
-            <a:off x="4892040" y="1207008"/>
-            <a:ext cx="3794760" cy="2011680"/>
-          </a:xfrm>
-          <a:prstGeom prst="rect">
-            <a:avLst/>
-          </a:prstGeom>
-          <a:noFill/>
-          <a:ln/>
-        </p:spPr>
-        <p:txBody>
-          <a:bodyPr wrap="square" rtlCol="0" anchor="ctr"/>
-          <a:lstStyle/>
+              <a:t>Primary ingest jobs (TQ, RF, CS)</a:t>
+            </a:r>
+            <a:endParaRPr lang="en-US" sz="850" dirty="0"/>
+          </a:p>
           <a:p>
             <a:pPr marL="342900" indent="-342900">
               <a:buSzPct val="100000"/>
               <a:buChar char="•"/>
             </a:pPr>
             <a:r>
-              <a:rPr lang="en-US" sz="950" dirty="0">
+              <a:rPr lang="en-US" sz="850" dirty="0">
                 <a:solidFill>
                   <a:srgbClr val="1E293B"/>
                 </a:solidFill>
@@ -12567,17 +12455,230 @@
                 <a:ea typeface="Calibri" pitchFamily="34" charset="-122"/>
                 <a:cs typeface="Calibri" pitchFamily="34" charset="-120"/>
               </a:rPr>
-              <a:t>CLI: gnat report run --config report.daily_healthcare</a:t>
-            </a:r>
-            <a:endParaRPr lang="en-US" sz="950" dirty="0"/>
-          </a:p>
+              <a:t>FeedScheduler running</a:t>
+            </a:r>
+            <a:endParaRPr lang="en-US" sz="850" dirty="0"/>
+          </a:p>
+        </p:txBody>
+      </p:sp>
+      <p:sp>
+        <p:nvSpPr>
+          <p:cNvPr id="18" name="Shape 16"/>
+          <p:cNvSpPr/>
+          <p:nvPr/>
+        </p:nvSpPr>
+        <p:spPr>
+          <a:xfrm>
+            <a:off x="3136392" y="1069848"/>
+            <a:ext cx="91440" cy="0"/>
+          </a:xfrm>
+          <a:prstGeom prst="line">
+            <a:avLst/>
+          </a:prstGeom>
+          <a:noFill/>
+          <a:ln w="12700">
+            <a:solidFill>
+              <a:srgbClr val="CBD5E1"/>
+            </a:solidFill>
+            <a:prstDash val="solid"/>
+            <a:tailEnd type="triangle"/>
+          </a:ln>
+        </p:spPr>
+      </p:sp>
+      <p:sp>
+        <p:nvSpPr>
+          <p:cNvPr id="19" name="Shape 17"/>
+          <p:cNvSpPr/>
+          <p:nvPr/>
+        </p:nvSpPr>
+        <p:spPr>
+          <a:xfrm>
+            <a:off x="3246120" y="822960"/>
+            <a:ext cx="1325880" cy="502920"/>
+          </a:xfrm>
+          <a:prstGeom prst="rect">
+            <a:avLst/>
+          </a:prstGeom>
+          <a:solidFill>
+            <a:srgbClr val="0891B2"/>
+          </a:solidFill>
+          <a:ln w="12700">
+            <a:solidFill>
+              <a:srgbClr val="333333"/>
+            </a:solidFill>
+            <a:prstDash val="solid"/>
+          </a:ln>
+        </p:spPr>
+      </p:sp>
+      <p:sp>
+        <p:nvSpPr>
+          <p:cNvPr id="20" name="Text 18"/>
+          <p:cNvSpPr/>
+          <p:nvPr/>
+        </p:nvSpPr>
+        <p:spPr>
+          <a:xfrm>
+            <a:off x="3291840" y="850392"/>
+            <a:ext cx="1234440" cy="201168"/>
+          </a:xfrm>
+          <a:prstGeom prst="rect">
+            <a:avLst/>
+          </a:prstGeom>
+          <a:noFill/>
+          <a:ln/>
+        </p:spPr>
+        <p:txBody>
+          <a:bodyPr wrap="square" lIns="0" tIns="0" rIns="0" bIns="0" rtlCol="0" anchor="ctr"/>
+          <a:lstStyle/>
+          <a:p>
+            <a:pPr algn="ctr" indent="0" marL="0">
+              <a:buNone/>
+            </a:pPr>
+            <a:r>
+              <a:rPr lang="en-US" sz="900" b="1" dirty="0">
+                <a:solidFill>
+                  <a:srgbClr val="FFFFFF"/>
+                </a:solidFill>
+                <a:latin typeface="Calibri" pitchFamily="34" charset="0"/>
+                <a:ea typeface="Calibri" pitchFamily="34" charset="-122"/>
+                <a:cs typeface="Calibri" pitchFamily="34" charset="-120"/>
+              </a:rPr>
+              <a:t>Phase 3</a:t>
+            </a:r>
+            <a:endParaRPr lang="en-US" sz="900" dirty="0"/>
+          </a:p>
+        </p:txBody>
+      </p:sp>
+      <p:sp>
+        <p:nvSpPr>
+          <p:cNvPr id="21" name="Text 19"/>
+          <p:cNvSpPr/>
+          <p:nvPr/>
+        </p:nvSpPr>
+        <p:spPr>
+          <a:xfrm>
+            <a:off x="3291840" y="1051560"/>
+            <a:ext cx="1234440" cy="201168"/>
+          </a:xfrm>
+          <a:prstGeom prst="rect">
+            <a:avLst/>
+          </a:prstGeom>
+          <a:noFill/>
+          <a:ln/>
+        </p:spPr>
+        <p:txBody>
+          <a:bodyPr wrap="square" lIns="0" tIns="0" rIns="0" bIns="0" rtlCol="0" anchor="ctr"/>
+          <a:lstStyle/>
+          <a:p>
+            <a:pPr algn="ctr" indent="0" marL="0">
+              <a:buNone/>
+            </a:pPr>
+            <a:r>
+              <a:rPr lang="en-US" sz="750" dirty="0">
+                <a:solidFill>
+                  <a:srgbClr val="A5F3FC"/>
+                </a:solidFill>
+                <a:latin typeface="Calibri" pitchFamily="34" charset="0"/>
+                <a:ea typeface="Calibri" pitchFamily="34" charset="-122"/>
+                <a:cs typeface="Calibri" pitchFamily="34" charset="-120"/>
+              </a:rPr>
+              <a:t>Days 6-8</a:t>
+            </a:r>
+            <a:endParaRPr lang="en-US" sz="750" dirty="0"/>
+          </a:p>
+        </p:txBody>
+      </p:sp>
+      <p:sp>
+        <p:nvSpPr>
+          <p:cNvPr id="22" name="Shape 20"/>
+          <p:cNvSpPr/>
+          <p:nvPr/>
+        </p:nvSpPr>
+        <p:spPr>
+          <a:xfrm>
+            <a:off x="3246120" y="1417320"/>
+            <a:ext cx="1325880" cy="3200400"/>
+          </a:xfrm>
+          <a:prstGeom prst="rect">
+            <a:avLst/>
+          </a:prstGeom>
+          <a:solidFill>
+            <a:srgbClr val="FFFFFF"/>
+          </a:solidFill>
+          <a:ln w="6350">
+            <a:solidFill>
+              <a:srgbClr val="CBD5E1"/>
+            </a:solidFill>
+            <a:prstDash val="solid"/>
+          </a:ln>
+        </p:spPr>
+      </p:sp>
+      <p:sp>
+        <p:nvSpPr>
+          <p:cNvPr id="23" name="Text 21"/>
+          <p:cNvSpPr/>
+          <p:nvPr/>
+        </p:nvSpPr>
+        <p:spPr>
+          <a:xfrm>
+            <a:off x="3319272" y="1508760"/>
+            <a:ext cx="1179576" cy="256032"/>
+          </a:xfrm>
+          <a:prstGeom prst="rect">
+            <a:avLst/>
+          </a:prstGeom>
+          <a:noFill/>
+          <a:ln/>
+        </p:spPr>
+        <p:txBody>
+          <a:bodyPr wrap="square" lIns="0" tIns="0" rIns="0" bIns="0" rtlCol="0" anchor="ctr"/>
+          <a:lstStyle/>
+          <a:p>
+            <a:pPr algn="ctr" indent="0" marL="0">
+              <a:buNone/>
+            </a:pPr>
+            <a:r>
+              <a:rPr lang="en-US" sz="1100" b="1" dirty="0">
+                <a:solidFill>
+                  <a:srgbClr val="0891B2"/>
+                </a:solidFill>
+                <a:latin typeface="Calibri" pitchFamily="34" charset="0"/>
+                <a:ea typeface="Calibri" pitchFamily="34" charset="-122"/>
+                <a:cs typeface="Calibri" pitchFamily="34" charset="-120"/>
+              </a:rPr>
+              <a:t>Export</a:t>
+            </a:r>
+            <a:endParaRPr lang="en-US" sz="1100" dirty="0"/>
+          </a:p>
+        </p:txBody>
+      </p:sp>
+      <p:sp>
+        <p:nvSpPr>
+          <p:cNvPr id="24" name="Text 22"/>
+          <p:cNvSpPr/>
+          <p:nvPr/>
+        </p:nvSpPr>
+        <p:spPr>
+          <a:xfrm>
+            <a:off x="3319272" y="1847088"/>
+            <a:ext cx="1179576" cy="2651760"/>
+          </a:xfrm>
+          <a:prstGeom prst="rect">
+            <a:avLst/>
+          </a:prstGeom>
+          <a:noFill/>
+          <a:ln/>
+        </p:spPr>
+        <p:txBody>
+          <a:bodyPr wrap="square" rtlCol="0" anchor="ctr"/>
+          <a:lstStyle/>
           <a:p>
             <a:pPr marL="342900" indent="-342900">
               <a:buSzPct val="100000"/>
               <a:buChar char="•"/>
             </a:pPr>
             <a:r>
-              <a:rPr lang="en-US" sz="950" dirty="0">
+              <a:rPr lang="en-US" sz="850" dirty="0">
                 <a:solidFill>
                   <a:srgbClr val="1E293B"/>
                 </a:solidFill>
@@ -12585,9 +12686,9 @@
                 <a:ea typeface="Calibri" pitchFamily="34" charset="-122"/>
                 <a:cs typeface="Calibri" pitchFamily="34" charset="-120"/>
               </a:rPr>
-              <a:t>SectorFilter: move to export/filters.py for use in both export and report layers</a:t>
-            </a:r>
-            <a:endParaRPr lang="en-US" sz="950" dirty="0"/>
+              <a:t>Netskope CE ExportJob (15 min)</a:t>
+            </a:r>
+            <a:endParaRPr lang="en-US" sz="850" dirty="0"/>
           </a:p>
           <a:p>
             <a:pPr marL="342900" indent="-342900">
@@ -12595,7 +12696,7 @@
               <a:buChar char="•"/>
             </a:pPr>
             <a:r>
-              <a:rPr lang="en-US" sz="950" dirty="0">
+              <a:rPr lang="en-US" sz="850" dirty="0">
                 <a:solidFill>
                   <a:srgbClr val="1E293B"/>
                 </a:solidFill>
@@ -12603,9 +12704,9 @@
                 <a:ea typeface="Calibri" pitchFamily="34" charset="-122"/>
                 <a:cs typeface="Calibri" pitchFamily="34" charset="-120"/>
               </a:rPr>
-              <a:t>CHANGELOG: versions 0.6.0 through 1.0.0</a:t>
-            </a:r>
-            <a:endParaRPr lang="en-US" sz="950" dirty="0"/>
+              <a:t>EDL files hourly</a:t>
+            </a:r>
+            <a:endParaRPr lang="en-US" sz="850" dirty="0"/>
           </a:p>
           <a:p>
             <a:pPr marL="342900" indent="-342900">
@@ -12613,7 +12714,7 @@
               <a:buChar char="•"/>
             </a:pPr>
             <a:r>
-              <a:rPr lang="en-US" sz="950" dirty="0">
+              <a:rPr lang="en-US" sz="850" dirty="0">
                 <a:solidFill>
                   <a:srgbClr val="1E293B"/>
                 </a:solidFill>
@@ -12621,17 +12722,230 @@
                 <a:ea typeface="Calibri" pitchFamily="34" charset="-122"/>
                 <a:cs typeface="Calibri" pitchFamily="34" charset="-120"/>
               </a:rPr>
-              <a:t>Email body: use rendered HTML report as email body (not generic text)</a:t>
-            </a:r>
-            <a:endParaRPr lang="en-US" sz="950" dirty="0"/>
-          </a:p>
+              <a:t>Verify TQ → CE → firewall EDLs</a:t>
+            </a:r>
+            <a:endParaRPr lang="en-US" sz="850" dirty="0"/>
+          </a:p>
+        </p:txBody>
+      </p:sp>
+      <p:sp>
+        <p:nvSpPr>
+          <p:cNvPr id="25" name="Shape 23"/>
+          <p:cNvSpPr/>
+          <p:nvPr/>
+        </p:nvSpPr>
+        <p:spPr>
+          <a:xfrm>
+            <a:off x="4599432" y="1069848"/>
+            <a:ext cx="91440" cy="0"/>
+          </a:xfrm>
+          <a:prstGeom prst="line">
+            <a:avLst/>
+          </a:prstGeom>
+          <a:noFill/>
+          <a:ln w="12700">
+            <a:solidFill>
+              <a:srgbClr val="CBD5E1"/>
+            </a:solidFill>
+            <a:prstDash val="solid"/>
+            <a:tailEnd type="triangle"/>
+          </a:ln>
+        </p:spPr>
+      </p:sp>
+      <p:sp>
+        <p:nvSpPr>
+          <p:cNvPr id="26" name="Shape 24"/>
+          <p:cNvSpPr/>
+          <p:nvPr/>
+        </p:nvSpPr>
+        <p:spPr>
+          <a:xfrm>
+            <a:off x="4709160" y="822960"/>
+            <a:ext cx="1325880" cy="502920"/>
+          </a:xfrm>
+          <a:prstGeom prst="rect">
+            <a:avLst/>
+          </a:prstGeom>
+          <a:solidFill>
+            <a:srgbClr val="1E4D8C"/>
+          </a:solidFill>
+          <a:ln w="12700">
+            <a:solidFill>
+              <a:srgbClr val="333333"/>
+            </a:solidFill>
+            <a:prstDash val="solid"/>
+          </a:ln>
+        </p:spPr>
+      </p:sp>
+      <p:sp>
+        <p:nvSpPr>
+          <p:cNvPr id="27" name="Text 25"/>
+          <p:cNvSpPr/>
+          <p:nvPr/>
+        </p:nvSpPr>
+        <p:spPr>
+          <a:xfrm>
+            <a:off x="4754880" y="850392"/>
+            <a:ext cx="1234440" cy="201168"/>
+          </a:xfrm>
+          <a:prstGeom prst="rect">
+            <a:avLst/>
+          </a:prstGeom>
+          <a:noFill/>
+          <a:ln/>
+        </p:spPr>
+        <p:txBody>
+          <a:bodyPr wrap="square" lIns="0" tIns="0" rIns="0" bIns="0" rtlCol="0" anchor="ctr"/>
+          <a:lstStyle/>
+          <a:p>
+            <a:pPr algn="ctr" indent="0" marL="0">
+              <a:buNone/>
+            </a:pPr>
+            <a:r>
+              <a:rPr lang="en-US" sz="900" b="1" dirty="0">
+                <a:solidFill>
+                  <a:srgbClr val="FFFFFF"/>
+                </a:solidFill>
+                <a:latin typeface="Calibri" pitchFamily="34" charset="0"/>
+                <a:ea typeface="Calibri" pitchFamily="34" charset="-122"/>
+                <a:cs typeface="Calibri" pitchFamily="34" charset="-120"/>
+              </a:rPr>
+              <a:t>Phase 4</a:t>
+            </a:r>
+            <a:endParaRPr lang="en-US" sz="900" dirty="0"/>
+          </a:p>
+        </p:txBody>
+      </p:sp>
+      <p:sp>
+        <p:nvSpPr>
+          <p:cNvPr id="28" name="Text 26"/>
+          <p:cNvSpPr/>
+          <p:nvPr/>
+        </p:nvSpPr>
+        <p:spPr>
+          <a:xfrm>
+            <a:off x="4754880" y="1051560"/>
+            <a:ext cx="1234440" cy="201168"/>
+          </a:xfrm>
+          <a:prstGeom prst="rect">
+            <a:avLst/>
+          </a:prstGeom>
+          <a:noFill/>
+          <a:ln/>
+        </p:spPr>
+        <p:txBody>
+          <a:bodyPr wrap="square" lIns="0" tIns="0" rIns="0" bIns="0" rtlCol="0" anchor="ctr"/>
+          <a:lstStyle/>
+          <a:p>
+            <a:pPr algn="ctr" indent="0" marL="0">
+              <a:buNone/>
+            </a:pPr>
+            <a:r>
+              <a:rPr lang="en-US" sz="750" dirty="0">
+                <a:solidFill>
+                  <a:srgbClr val="A5F3FC"/>
+                </a:solidFill>
+                <a:latin typeface="Calibri" pitchFamily="34" charset="0"/>
+                <a:ea typeface="Calibri" pitchFamily="34" charset="-122"/>
+                <a:cs typeface="Calibri" pitchFamily="34" charset="-120"/>
+              </a:rPr>
+              <a:t>Days 9-10</a:t>
+            </a:r>
+            <a:endParaRPr lang="en-US" sz="750" dirty="0"/>
+          </a:p>
+        </p:txBody>
+      </p:sp>
+      <p:sp>
+        <p:nvSpPr>
+          <p:cNvPr id="29" name="Shape 27"/>
+          <p:cNvSpPr/>
+          <p:nvPr/>
+        </p:nvSpPr>
+        <p:spPr>
+          <a:xfrm>
+            <a:off x="4709160" y="1417320"/>
+            <a:ext cx="1325880" cy="3200400"/>
+          </a:xfrm>
+          <a:prstGeom prst="rect">
+            <a:avLst/>
+          </a:prstGeom>
+          <a:solidFill>
+            <a:srgbClr val="FFFFFF"/>
+          </a:solidFill>
+          <a:ln w="6350">
+            <a:solidFill>
+              <a:srgbClr val="CBD5E1"/>
+            </a:solidFill>
+            <a:prstDash val="solid"/>
+          </a:ln>
+        </p:spPr>
+      </p:sp>
+      <p:sp>
+        <p:nvSpPr>
+          <p:cNvPr id="30" name="Text 28"/>
+          <p:cNvSpPr/>
+          <p:nvPr/>
+        </p:nvSpPr>
+        <p:spPr>
+          <a:xfrm>
+            <a:off x="4782312" y="1508760"/>
+            <a:ext cx="1179576" cy="256032"/>
+          </a:xfrm>
+          <a:prstGeom prst="rect">
+            <a:avLst/>
+          </a:prstGeom>
+          <a:noFill/>
+          <a:ln/>
+        </p:spPr>
+        <p:txBody>
+          <a:bodyPr wrap="square" lIns="0" tIns="0" rIns="0" bIns="0" rtlCol="0" anchor="ctr"/>
+          <a:lstStyle/>
+          <a:p>
+            <a:pPr algn="ctr" indent="0" marL="0">
+              <a:buNone/>
+            </a:pPr>
+            <a:r>
+              <a:rPr lang="en-US" sz="1100" b="1" dirty="0">
+                <a:solidFill>
+                  <a:srgbClr val="1E4D8C"/>
+                </a:solidFill>
+                <a:latin typeface="Calibri" pitchFamily="34" charset="0"/>
+                <a:ea typeface="Calibri" pitchFamily="34" charset="-122"/>
+                <a:cs typeface="Calibri" pitchFamily="34" charset="-120"/>
+              </a:rPr>
+              <a:t>Research</a:t>
+            </a:r>
+            <a:endParaRPr lang="en-US" sz="1100" dirty="0"/>
+          </a:p>
+        </p:txBody>
+      </p:sp>
+      <p:sp>
+        <p:nvSpPr>
+          <p:cNvPr id="31" name="Text 29"/>
+          <p:cNvSpPr/>
+          <p:nvPr/>
+        </p:nvSpPr>
+        <p:spPr>
+          <a:xfrm>
+            <a:off x="4782312" y="1847088"/>
+            <a:ext cx="1179576" cy="2651760"/>
+          </a:xfrm>
+          <a:prstGeom prst="rect">
+            <a:avLst/>
+          </a:prstGeom>
+          <a:noFill/>
+          <a:ln/>
+        </p:spPr>
+        <p:txBody>
+          <a:bodyPr wrap="square" rtlCol="0" anchor="ctr"/>
+          <a:lstStyle/>
           <a:p>
             <a:pPr marL="342900" indent="-342900">
               <a:buSzPct val="100000"/>
               <a:buChar char="•"/>
             </a:pPr>
             <a:r>
-              <a:rPr lang="en-US" sz="950" dirty="0">
+              <a:rPr lang="en-US" sz="850" dirty="0">
                 <a:solidFill>
                   <a:srgbClr val="1E293B"/>
                 </a:solidFill>
@@ -12639,9 +12953,9 @@
                 <a:ea typeface="Calibri" pitchFamily="34" charset="-122"/>
                 <a:cs typeface="Calibri" pitchFamily="34" charset="-120"/>
               </a:rPr>
-              <a:t>Yearly reports: calendar-anchored cron (0 6 1 1 *) vs 365-day interval</a:t>
-            </a:r>
-            <a:endParaRPr lang="en-US" sz="950" dirty="0"/>
+              <a:t>Configure [claude] in config.ini</a:t>
+            </a:r>
+            <a:endParaRPr lang="en-US" sz="850" dirty="0"/>
           </a:p>
           <a:p>
             <a:pPr marL="342900" indent="-342900">
@@ -12649,7 +12963,7 @@
               <a:buChar char="•"/>
             </a:pPr>
             <a:r>
-              <a:rPr lang="en-US" sz="950" dirty="0">
+              <a:rPr lang="en-US" sz="850" dirty="0">
                 <a:solidFill>
                   <a:srgbClr val="1E293B"/>
                 </a:solidFill>
@@ -12657,103 +12971,17 @@
                 <a:ea typeface="Calibri" pitchFamily="34" charset="-122"/>
                 <a:cs typeface="Calibri" pitchFamily="34" charset="-120"/>
               </a:rPr>
-              <a:t>Juno.build / Internet Computer: Rust-based serverless agent (future exploration)</a:t>
-            </a:r>
-            <a:endParaRPr lang="en-US" sz="950" dirty="0"/>
-          </a:p>
-        </p:txBody>
-      </p:sp>
-      <p:sp>
-        <p:nvSpPr>
-          <p:cNvPr id="11" name="Shape 9"/>
-          <p:cNvSpPr/>
-          <p:nvPr/>
-        </p:nvSpPr>
-        <p:spPr>
-          <a:xfrm>
-            <a:off x="320040" y="3401568"/>
-            <a:ext cx="8503920" cy="1389888"/>
-          </a:xfrm>
-          <a:prstGeom prst="rect">
-            <a:avLst/>
-          </a:prstGeom>
-          <a:solidFill>
-            <a:srgbClr val="EBF2FB"/>
-          </a:solidFill>
-          <a:ln w="6350">
-            <a:solidFill>
-              <a:srgbClr val="CBD5E1"/>
-            </a:solidFill>
-            <a:prstDash val="solid"/>
-          </a:ln>
-        </p:spPr>
-      </p:sp>
-      <p:sp>
-        <p:nvSpPr>
-          <p:cNvPr id="12" name="Text 10"/>
-          <p:cNvSpPr/>
-          <p:nvPr/>
-        </p:nvSpPr>
-        <p:spPr>
-          <a:xfrm>
-            <a:off x="502920" y="3493008"/>
-            <a:ext cx="2743200" cy="256032"/>
-          </a:xfrm>
-          <a:prstGeom prst="rect">
-            <a:avLst/>
-          </a:prstGeom>
-          <a:noFill/>
-          <a:ln/>
-        </p:spPr>
-        <p:txBody>
-          <a:bodyPr wrap="square" lIns="0" tIns="0" rIns="0" bIns="0" rtlCol="0" anchor="ctr"/>
-          <a:lstStyle/>
-          <a:p>
-            <a:pPr indent="0" marL="0">
-              <a:buNone/>
-            </a:pPr>
-            <a:r>
-              <a:rPr lang="en-US" sz="1000" b="1" dirty="0">
-                <a:solidFill>
-                  <a:srgbClr val="1E293B"/>
-                </a:solidFill>
-                <a:latin typeface="Calibri" pitchFamily="34" charset="0"/>
-                <a:ea typeface="Calibri" pitchFamily="34" charset="-122"/>
-                <a:cs typeface="Calibri" pitchFamily="34" charset="-120"/>
-              </a:rPr>
-              <a:t>Reference Documents</a:t>
-            </a:r>
-            <a:endParaRPr lang="en-US" sz="1000" dirty="0"/>
-          </a:p>
-        </p:txBody>
-      </p:sp>
-      <p:sp>
-        <p:nvSpPr>
-          <p:cNvPr id="13" name="Text 11"/>
-          <p:cNvSpPr/>
-          <p:nvPr/>
-        </p:nvSpPr>
-        <p:spPr>
-          <a:xfrm>
-            <a:off x="502920" y="3794760"/>
-            <a:ext cx="8229600" cy="914400"/>
-          </a:xfrm>
-          <a:prstGeom prst="rect">
-            <a:avLst/>
-          </a:prstGeom>
-          <a:noFill/>
-          <a:ln/>
-        </p:spPr>
-        <p:txBody>
-          <a:bodyPr wrap="square" rtlCol="0" anchor="ctr"/>
-          <a:lstStyle/>
+              <a:t>First ResearchAgent query</a:t>
+            </a:r>
+            <a:endParaRPr lang="en-US" sz="850" dirty="0"/>
+          </a:p>
           <a:p>
             <a:pPr marL="342900" indent="-342900">
               <a:buSzPct val="100000"/>
               <a:buChar char="•"/>
             </a:pPr>
             <a:r>
-              <a:rPr lang="en-US" sz="950" dirty="0">
+              <a:rPr lang="en-US" sz="850" dirty="0">
                 <a:solidFill>
                   <a:srgbClr val="1E293B"/>
                 </a:solidFill>
@@ -12761,17 +12989,230 @@
                 <a:ea typeface="Calibri" pitchFamily="34" charset="-122"/>
                 <a:cs typeface="Calibri" pitchFamily="34" charset="-120"/>
               </a:rPr>
-              <a:t>EXAMPLES.md  —  907-line code snippet reference for all modules</a:t>
-            </a:r>
-            <a:endParaRPr lang="en-US" sz="950" dirty="0"/>
-          </a:p>
+              <a:t>CurationJob to scheduler</a:t>
+            </a:r>
+            <a:endParaRPr lang="en-US" sz="850" dirty="0"/>
+          </a:p>
+        </p:txBody>
+      </p:sp>
+      <p:sp>
+        <p:nvSpPr>
+          <p:cNvPr id="32" name="Shape 30"/>
+          <p:cNvSpPr/>
+          <p:nvPr/>
+        </p:nvSpPr>
+        <p:spPr>
+          <a:xfrm>
+            <a:off x="6062472" y="1069848"/>
+            <a:ext cx="91440" cy="0"/>
+          </a:xfrm>
+          <a:prstGeom prst="line">
+            <a:avLst/>
+          </a:prstGeom>
+          <a:noFill/>
+          <a:ln w="12700">
+            <a:solidFill>
+              <a:srgbClr val="CBD5E1"/>
+            </a:solidFill>
+            <a:prstDash val="solid"/>
+            <a:tailEnd type="triangle"/>
+          </a:ln>
+        </p:spPr>
+      </p:sp>
+      <p:sp>
+        <p:nvSpPr>
+          <p:cNvPr id="33" name="Shape 31"/>
+          <p:cNvSpPr/>
+          <p:nvPr/>
+        </p:nvSpPr>
+        <p:spPr>
+          <a:xfrm>
+            <a:off x="6172200" y="822960"/>
+            <a:ext cx="1325880" cy="502920"/>
+          </a:xfrm>
+          <a:prstGeom prst="rect">
+            <a:avLst/>
+          </a:prstGeom>
+          <a:solidFill>
+            <a:srgbClr val="0891B2"/>
+          </a:solidFill>
+          <a:ln w="12700">
+            <a:solidFill>
+              <a:srgbClr val="333333"/>
+            </a:solidFill>
+            <a:prstDash val="solid"/>
+          </a:ln>
+        </p:spPr>
+      </p:sp>
+      <p:sp>
+        <p:nvSpPr>
+          <p:cNvPr id="34" name="Text 32"/>
+          <p:cNvSpPr/>
+          <p:nvPr/>
+        </p:nvSpPr>
+        <p:spPr>
+          <a:xfrm>
+            <a:off x="6217920" y="850392"/>
+            <a:ext cx="1234440" cy="201168"/>
+          </a:xfrm>
+          <a:prstGeom prst="rect">
+            <a:avLst/>
+          </a:prstGeom>
+          <a:noFill/>
+          <a:ln/>
+        </p:spPr>
+        <p:txBody>
+          <a:bodyPr wrap="square" lIns="0" tIns="0" rIns="0" bIns="0" rtlCol="0" anchor="ctr"/>
+          <a:lstStyle/>
+          <a:p>
+            <a:pPr algn="ctr" indent="0" marL="0">
+              <a:buNone/>
+            </a:pPr>
+            <a:r>
+              <a:rPr lang="en-US" sz="900" b="1" dirty="0">
+                <a:solidFill>
+                  <a:srgbClr val="FFFFFF"/>
+                </a:solidFill>
+                <a:latin typeface="Calibri" pitchFamily="34" charset="0"/>
+                <a:ea typeface="Calibri" pitchFamily="34" charset="-122"/>
+                <a:cs typeface="Calibri" pitchFamily="34" charset="-120"/>
+              </a:rPr>
+              <a:t>Phase 5</a:t>
+            </a:r>
+            <a:endParaRPr lang="en-US" sz="900" dirty="0"/>
+          </a:p>
+        </p:txBody>
+      </p:sp>
+      <p:sp>
+        <p:nvSpPr>
+          <p:cNvPr id="35" name="Text 33"/>
+          <p:cNvSpPr/>
+          <p:nvPr/>
+        </p:nvSpPr>
+        <p:spPr>
+          <a:xfrm>
+            <a:off x="6217920" y="1051560"/>
+            <a:ext cx="1234440" cy="201168"/>
+          </a:xfrm>
+          <a:prstGeom prst="rect">
+            <a:avLst/>
+          </a:prstGeom>
+          <a:noFill/>
+          <a:ln/>
+        </p:spPr>
+        <p:txBody>
+          <a:bodyPr wrap="square" lIns="0" tIns="0" rIns="0" bIns="0" rtlCol="0" anchor="ctr"/>
+          <a:lstStyle/>
+          <a:p>
+            <a:pPr algn="ctr" indent="0" marL="0">
+              <a:buNone/>
+            </a:pPr>
+            <a:r>
+              <a:rPr lang="en-US" sz="750" dirty="0">
+                <a:solidFill>
+                  <a:srgbClr val="A5F3FC"/>
+                </a:solidFill>
+                <a:latin typeface="Calibri" pitchFamily="34" charset="0"/>
+                <a:ea typeface="Calibri" pitchFamily="34" charset="-122"/>
+                <a:cs typeface="Calibri" pitchFamily="34" charset="-120"/>
+              </a:rPr>
+              <a:t>Days 11-14</a:t>
+            </a:r>
+            <a:endParaRPr lang="en-US" sz="750" dirty="0"/>
+          </a:p>
+        </p:txBody>
+      </p:sp>
+      <p:sp>
+        <p:nvSpPr>
+          <p:cNvPr id="36" name="Shape 34"/>
+          <p:cNvSpPr/>
+          <p:nvPr/>
+        </p:nvSpPr>
+        <p:spPr>
+          <a:xfrm>
+            <a:off x="6172200" y="1417320"/>
+            <a:ext cx="1325880" cy="3200400"/>
+          </a:xfrm>
+          <a:prstGeom prst="rect">
+            <a:avLst/>
+          </a:prstGeom>
+          <a:solidFill>
+            <a:srgbClr val="FFFFFF"/>
+          </a:solidFill>
+          <a:ln w="6350">
+            <a:solidFill>
+              <a:srgbClr val="CBD5E1"/>
+            </a:solidFill>
+            <a:prstDash val="solid"/>
+          </a:ln>
+        </p:spPr>
+      </p:sp>
+      <p:sp>
+        <p:nvSpPr>
+          <p:cNvPr id="37" name="Text 35"/>
+          <p:cNvSpPr/>
+          <p:nvPr/>
+        </p:nvSpPr>
+        <p:spPr>
+          <a:xfrm>
+            <a:off x="6245352" y="1508760"/>
+            <a:ext cx="1179576" cy="256032"/>
+          </a:xfrm>
+          <a:prstGeom prst="rect">
+            <a:avLst/>
+          </a:prstGeom>
+          <a:noFill/>
+          <a:ln/>
+        </p:spPr>
+        <p:txBody>
+          <a:bodyPr wrap="square" lIns="0" tIns="0" rIns="0" bIns="0" rtlCol="0" anchor="ctr"/>
+          <a:lstStyle/>
+          <a:p>
+            <a:pPr algn="ctr" indent="0" marL="0">
+              <a:buNone/>
+            </a:pPr>
+            <a:r>
+              <a:rPr lang="en-US" sz="1100" b="1" dirty="0">
+                <a:solidFill>
+                  <a:srgbClr val="0891B2"/>
+                </a:solidFill>
+                <a:latin typeface="Calibri" pitchFamily="34" charset="0"/>
+                <a:ea typeface="Calibri" pitchFamily="34" charset="-122"/>
+                <a:cs typeface="Calibri" pitchFamily="34" charset="-120"/>
+              </a:rPr>
+              <a:t>Reports</a:t>
+            </a:r>
+            <a:endParaRPr lang="en-US" sz="1100" dirty="0"/>
+          </a:p>
+        </p:txBody>
+      </p:sp>
+      <p:sp>
+        <p:nvSpPr>
+          <p:cNvPr id="38" name="Text 36"/>
+          <p:cNvSpPr/>
+          <p:nvPr/>
+        </p:nvSpPr>
+        <p:spPr>
+          <a:xfrm>
+            <a:off x="6245352" y="1847088"/>
+            <a:ext cx="1179576" cy="2651760"/>
+          </a:xfrm>
+          <a:prstGeom prst="rect">
+            <a:avLst/>
+          </a:prstGeom>
+          <a:noFill/>
+          <a:ln/>
+        </p:spPr>
+        <p:txBody>
+          <a:bodyPr wrap="square" rtlCol="0" anchor="ctr"/>
+          <a:lstStyle/>
           <a:p>
             <a:pPr marL="342900" indent="-342900">
               <a:buSzPct val="100000"/>
               <a:buChar char="•"/>
             </a:pPr>
             <a:r>
-              <a:rPr lang="en-US" sz="950" dirty="0">
+              <a:rPr lang="en-US" sz="850" dirty="0">
                 <a:solidFill>
                   <a:srgbClr val="1E293B"/>
                 </a:solidFill>
@@ -12779,9 +13220,9 @@
                 <a:ea typeface="Calibri" pitchFamily="34" charset="-122"/>
                 <a:cs typeface="Calibri" pitchFamily="34" charset="-120"/>
               </a:rPr>
-              <a:t>IMPLEMENTATION_PLAN.md  —  Architecture, deployment, cost model, runbook</a:t>
-            </a:r>
-            <a:endParaRPr lang="en-US" sz="950" dirty="0"/>
+              <a:t>Daily report — review PDF/HTML</a:t>
+            </a:r>
+            <a:endParaRPr lang="en-US" sz="850" dirty="0"/>
           </a:p>
           <a:p>
             <a:pPr marL="342900" indent="-342900">
@@ -12789,7 +13230,7 @@
               <a:buChar char="•"/>
             </a:pPr>
             <a:r>
-              <a:rPr lang="en-US" sz="950" dirty="0">
+              <a:rPr lang="en-US" sz="850" dirty="0">
                 <a:solidFill>
                   <a:srgbClr val="1E293B"/>
                 </a:solidFill>
@@ -12797,9 +13238,9 @@
                 <a:ea typeface="Calibri" pitchFamily="34" charset="-122"/>
                 <a:cs typeface="Calibri" pitchFamily="34" charset="-120"/>
               </a:rPr>
-              <a:t>PENDING_ITEMS.md  —  Detailed action items with exact file locations</a:t>
-            </a:r>
-            <a:endParaRPr lang="en-US" sz="950" dirty="0"/>
+              <a:t>Configure email delivery</a:t>
+            </a:r>
+            <a:endParaRPr lang="en-US" sz="850" dirty="0"/>
           </a:p>
           <a:p>
             <a:pPr marL="342900" indent="-342900">
@@ -12807,7 +13248,7 @@
               <a:buChar char="•"/>
             </a:pPr>
             <a:r>
-              <a:rPr lang="en-US" sz="950" dirty="0">
+              <a:rPr lang="en-US" sz="850" dirty="0">
                 <a:solidFill>
                   <a:srgbClr val="1E293B"/>
                 </a:solidFill>
@@ -12815,9 +13256,276 @@
                 <a:ea typeface="Calibri" pitchFamily="34" charset="-122"/>
                 <a:cs typeface="Calibri" pitchFamily="34" charset="-120"/>
               </a:rPr>
-              <a:t>ARCHITECTURE_DECISIONS.md  —  18 sections covering every major design decision</a:t>
-            </a:r>
-            <a:endParaRPr lang="en-US" sz="950" dirty="0"/>
+              <a:t>ReportJob at 06:00 daily</a:t>
+            </a:r>
+            <a:endParaRPr lang="en-US" sz="850" dirty="0"/>
+          </a:p>
+        </p:txBody>
+      </p:sp>
+      <p:sp>
+        <p:nvSpPr>
+          <p:cNvPr id="39" name="Shape 37"/>
+          <p:cNvSpPr/>
+          <p:nvPr/>
+        </p:nvSpPr>
+        <p:spPr>
+          <a:xfrm>
+            <a:off x="7525512" y="1069848"/>
+            <a:ext cx="91440" cy="0"/>
+          </a:xfrm>
+          <a:prstGeom prst="line">
+            <a:avLst/>
+          </a:prstGeom>
+          <a:noFill/>
+          <a:ln w="12700">
+            <a:solidFill>
+              <a:srgbClr val="CBD5E1"/>
+            </a:solidFill>
+            <a:prstDash val="solid"/>
+            <a:tailEnd type="triangle"/>
+          </a:ln>
+        </p:spPr>
+      </p:sp>
+      <p:sp>
+        <p:nvSpPr>
+          <p:cNvPr id="40" name="Shape 38"/>
+          <p:cNvSpPr/>
+          <p:nvPr/>
+        </p:nvSpPr>
+        <p:spPr>
+          <a:xfrm>
+            <a:off x="7635240" y="822960"/>
+            <a:ext cx="1325880" cy="502920"/>
+          </a:xfrm>
+          <a:prstGeom prst="rect">
+            <a:avLst/>
+          </a:prstGeom>
+          <a:solidFill>
+            <a:srgbClr val="162952"/>
+          </a:solidFill>
+          <a:ln w="12700">
+            <a:solidFill>
+              <a:srgbClr val="333333"/>
+            </a:solidFill>
+            <a:prstDash val="solid"/>
+          </a:ln>
+        </p:spPr>
+      </p:sp>
+      <p:sp>
+        <p:nvSpPr>
+          <p:cNvPr id="41" name="Text 39"/>
+          <p:cNvSpPr/>
+          <p:nvPr/>
+        </p:nvSpPr>
+        <p:spPr>
+          <a:xfrm>
+            <a:off x="7680960" y="850392"/>
+            <a:ext cx="1234440" cy="201168"/>
+          </a:xfrm>
+          <a:prstGeom prst="rect">
+            <a:avLst/>
+          </a:prstGeom>
+          <a:noFill/>
+          <a:ln/>
+        </p:spPr>
+        <p:txBody>
+          <a:bodyPr wrap="square" lIns="0" tIns="0" rIns="0" bIns="0" rtlCol="0" anchor="ctr"/>
+          <a:lstStyle/>
+          <a:p>
+            <a:pPr algn="ctr" indent="0" marL="0">
+              <a:buNone/>
+            </a:pPr>
+            <a:r>
+              <a:rPr lang="en-US" sz="900" b="1" dirty="0">
+                <a:solidFill>
+                  <a:srgbClr val="FFFFFF"/>
+                </a:solidFill>
+                <a:latin typeface="Calibri" pitchFamily="34" charset="0"/>
+                <a:ea typeface="Calibri" pitchFamily="34" charset="-122"/>
+                <a:cs typeface="Calibri" pitchFamily="34" charset="-120"/>
+              </a:rPr>
+              <a:t>Phase 6</a:t>
+            </a:r>
+            <a:endParaRPr lang="en-US" sz="900" dirty="0"/>
+          </a:p>
+        </p:txBody>
+      </p:sp>
+      <p:sp>
+        <p:nvSpPr>
+          <p:cNvPr id="42" name="Text 40"/>
+          <p:cNvSpPr/>
+          <p:nvPr/>
+        </p:nvSpPr>
+        <p:spPr>
+          <a:xfrm>
+            <a:off x="7680960" y="1051560"/>
+            <a:ext cx="1234440" cy="201168"/>
+          </a:xfrm>
+          <a:prstGeom prst="rect">
+            <a:avLst/>
+          </a:prstGeom>
+          <a:noFill/>
+          <a:ln/>
+        </p:spPr>
+        <p:txBody>
+          <a:bodyPr wrap="square" lIns="0" tIns="0" rIns="0" bIns="0" rtlCol="0" anchor="ctr"/>
+          <a:lstStyle/>
+          <a:p>
+            <a:pPr algn="ctr" indent="0" marL="0">
+              <a:buNone/>
+            </a:pPr>
+            <a:r>
+              <a:rPr lang="en-US" sz="750" dirty="0">
+                <a:solidFill>
+                  <a:srgbClr val="A5F3FC"/>
+                </a:solidFill>
+                <a:latin typeface="Calibri" pitchFamily="34" charset="0"/>
+                <a:ea typeface="Calibri" pitchFamily="34" charset="-122"/>
+                <a:cs typeface="Calibri" pitchFamily="34" charset="-120"/>
+              </a:rPr>
+              <a:t>Ongoing</a:t>
+            </a:r>
+            <a:endParaRPr lang="en-US" sz="750" dirty="0"/>
+          </a:p>
+        </p:txBody>
+      </p:sp>
+      <p:sp>
+        <p:nvSpPr>
+          <p:cNvPr id="43" name="Shape 41"/>
+          <p:cNvSpPr/>
+          <p:nvPr/>
+        </p:nvSpPr>
+        <p:spPr>
+          <a:xfrm>
+            <a:off x="7635240" y="1417320"/>
+            <a:ext cx="1325880" cy="3200400"/>
+          </a:xfrm>
+          <a:prstGeom prst="rect">
+            <a:avLst/>
+          </a:prstGeom>
+          <a:solidFill>
+            <a:srgbClr val="FFFFFF"/>
+          </a:solidFill>
+          <a:ln w="6350">
+            <a:solidFill>
+              <a:srgbClr val="CBD5E1"/>
+            </a:solidFill>
+            <a:prstDash val="solid"/>
+          </a:ln>
+        </p:spPr>
+      </p:sp>
+      <p:sp>
+        <p:nvSpPr>
+          <p:cNvPr id="44" name="Text 42"/>
+          <p:cNvSpPr/>
+          <p:nvPr/>
+        </p:nvSpPr>
+        <p:spPr>
+          <a:xfrm>
+            <a:off x="7708392" y="1508760"/>
+            <a:ext cx="1179576" cy="256032"/>
+          </a:xfrm>
+          <a:prstGeom prst="rect">
+            <a:avLst/>
+          </a:prstGeom>
+          <a:noFill/>
+          <a:ln/>
+        </p:spPr>
+        <p:txBody>
+          <a:bodyPr wrap="square" lIns="0" tIns="0" rIns="0" bIns="0" rtlCol="0" anchor="ctr"/>
+          <a:lstStyle/>
+          <a:p>
+            <a:pPr algn="ctr" indent="0" marL="0">
+              <a:buNone/>
+            </a:pPr>
+            <a:r>
+              <a:rPr lang="en-US" sz="1100" b="1" dirty="0">
+                <a:solidFill>
+                  <a:srgbClr val="162952"/>
+                </a:solidFill>
+                <a:latin typeface="Calibri" pitchFamily="34" charset="0"/>
+                <a:ea typeface="Calibri" pitchFamily="34" charset="-122"/>
+                <a:cs typeface="Calibri" pitchFamily="34" charset="-120"/>
+              </a:rPr>
+              <a:t>Rollout</a:t>
+            </a:r>
+            <a:endParaRPr lang="en-US" sz="1100" dirty="0"/>
+          </a:p>
+        </p:txBody>
+      </p:sp>
+      <p:sp>
+        <p:nvSpPr>
+          <p:cNvPr id="45" name="Text 43"/>
+          <p:cNvSpPr/>
+          <p:nvPr/>
+        </p:nvSpPr>
+        <p:spPr>
+          <a:xfrm>
+            <a:off x="7708392" y="1847088"/>
+            <a:ext cx="1179576" cy="2651760"/>
+          </a:xfrm>
+          <a:prstGeom prst="rect">
+            <a:avLst/>
+          </a:prstGeom>
+          <a:noFill/>
+          <a:ln/>
+        </p:spPr>
+        <p:txBody>
+          <a:bodyPr wrap="square" rtlCol="0" anchor="ctr"/>
+          <a:lstStyle/>
+          <a:p>
+            <a:pPr marL="342900" indent="-342900">
+              <a:buSzPct val="100000"/>
+              <a:buChar char="•"/>
+            </a:pPr>
+            <a:r>
+              <a:rPr lang="en-US" sz="850" dirty="0">
+                <a:solidFill>
+                  <a:srgbClr val="1E293B"/>
+                </a:solidFill>
+                <a:latin typeface="Calibri" pitchFamily="34" charset="0"/>
+                <a:ea typeface="Calibri" pitchFamily="34" charset="-122"/>
+                <a:cs typeface="Calibri" pitchFamily="34" charset="-120"/>
+              </a:rPr>
+              <a:t>Analyst config templates</a:t>
+            </a:r>
+            <a:endParaRPr lang="en-US" sz="850" dirty="0"/>
+          </a:p>
+          <a:p>
+            <a:pPr marL="342900" indent="-342900">
+              <a:buSzPct val="100000"/>
+              <a:buChar char="•"/>
+            </a:pPr>
+            <a:r>
+              <a:rPr lang="en-US" sz="850" dirty="0">
+                <a:solidFill>
+                  <a:srgbClr val="1E293B"/>
+                </a:solidFill>
+                <a:latin typeface="Calibri" pitchFamily="34" charset="0"/>
+                <a:ea typeface="Calibri" pitchFamily="34" charset="-122"/>
+                <a:cs typeface="Calibri" pitchFamily="34" charset="-120"/>
+              </a:rPr>
+              <a:t>Share EXAMPLES.md</a:t>
+            </a:r>
+            <a:endParaRPr lang="en-US" sz="850" dirty="0"/>
+          </a:p>
+          <a:p>
+            <a:pPr marL="342900" indent="-342900">
+              <a:buSzPct val="100000"/>
+              <a:buChar char="•"/>
+            </a:pPr>
+            <a:r>
+              <a:rPr lang="en-US" sz="850" dirty="0">
+                <a:solidFill>
+                  <a:srgbClr val="1E293B"/>
+                </a:solidFill>
+                <a:latin typeface="Calibri" pitchFamily="34" charset="0"/>
+                <a:ea typeface="Calibri" pitchFamily="34" charset="-122"/>
+                <a:cs typeface="Calibri" pitchFamily="34" charset="-120"/>
+              </a:rPr>
+              <a:t>Library review process</a:t>
+            </a:r>
+            <a:endParaRPr lang="en-US" sz="850" dirty="0"/>
           </a:p>
         </p:txBody>
       </p:sp>
@@ -12832,6 +13540,655 @@
 <file path=ppt/slides/slide18.xml><?xml version="1.0" encoding="utf-8"?>
 <p:sld xmlns:a="http://schemas.openxmlformats.org/drawingml/2006/main" xmlns:r="http://schemas.openxmlformats.org/officeDocument/2006/relationships" xmlns:p="http://schemas.openxmlformats.org/presentationml/2006/main">
   <p:cSld name="Slide 18">
+    <p:bg>
+      <p:bgPr>
+        <a:solidFill>
+          <a:srgbClr val="F0F4FA"/>
+        </a:solidFill>
+      </p:bgPr>
+    </p:bg>
+    <p:spTree>
+      <p:nvGrpSpPr>
+        <p:cNvPr id="1" name=""/>
+        <p:cNvGrpSpPr/>
+        <p:nvPr/>
+      </p:nvGrpSpPr>
+      <p:grpSpPr>
+        <a:xfrm>
+          <a:off x="0" y="0"/>
+          <a:ext cx="0" cy="0"/>
+          <a:chOff x="0" y="0"/>
+          <a:chExt cx="0" cy="0"/>
+        </a:xfrm>
+      </p:grpSpPr>
+      <p:sp>
+        <p:nvSpPr>
+          <p:cNvPr id="2" name="Shape 0"/>
+          <p:cNvSpPr/>
+          <p:nvPr/>
+        </p:nvSpPr>
+        <p:spPr>
+          <a:xfrm>
+            <a:off x="0" y="0"/>
+            <a:ext cx="9144000" cy="658368"/>
+          </a:xfrm>
+          <a:prstGeom prst="rect">
+            <a:avLst/>
+          </a:prstGeom>
+          <a:solidFill>
+            <a:srgbClr val="0F2044"/>
+          </a:solidFill>
+          <a:ln w="12700">
+            <a:solidFill>
+              <a:srgbClr val="333333"/>
+            </a:solidFill>
+            <a:prstDash val="solid"/>
+          </a:ln>
+        </p:spPr>
+      </p:sp>
+      <p:sp>
+        <p:nvSpPr>
+          <p:cNvPr id="3" name="Shape 1"/>
+          <p:cNvSpPr/>
+          <p:nvPr/>
+        </p:nvSpPr>
+        <p:spPr>
+          <a:xfrm>
+            <a:off x="0" y="658368"/>
+            <a:ext cx="9144000" cy="54864"/>
+          </a:xfrm>
+          <a:prstGeom prst="rect">
+            <a:avLst/>
+          </a:prstGeom>
+          <a:solidFill>
+            <a:srgbClr val="0891B2"/>
+          </a:solidFill>
+          <a:ln w="12700">
+            <a:solidFill>
+              <a:srgbClr val="333333"/>
+            </a:solidFill>
+            <a:prstDash val="solid"/>
+          </a:ln>
+        </p:spPr>
+      </p:sp>
+      <p:sp>
+        <p:nvSpPr>
+          <p:cNvPr id="4" name="Text 2"/>
+          <p:cNvSpPr/>
+          <p:nvPr/>
+        </p:nvSpPr>
+        <p:spPr>
+          <a:xfrm>
+            <a:off x="365760" y="91440"/>
+            <a:ext cx="8412480" cy="475488"/>
+          </a:xfrm>
+          <a:prstGeom prst="rect">
+            <a:avLst/>
+          </a:prstGeom>
+          <a:noFill/>
+          <a:ln/>
+        </p:spPr>
+        <p:txBody>
+          <a:bodyPr wrap="square" lIns="0" tIns="0" rIns="0" bIns="0" rtlCol="0" anchor="ctr"/>
+          <a:lstStyle/>
+          <a:p>
+            <a:pPr algn="l" indent="0" marL="0">
+              <a:buNone/>
+            </a:pPr>
+            <a:r>
+              <a:rPr lang="en-US" sz="2000" b="1" dirty="0">
+                <a:solidFill>
+                  <a:srgbClr val="FFFFFF"/>
+                </a:solidFill>
+                <a:latin typeface="Calibri" pitchFamily="34" charset="0"/>
+                <a:ea typeface="Calibri" pitchFamily="34" charset="-122"/>
+                <a:cs typeface="Calibri" pitchFamily="34" charset="-120"/>
+              </a:rPr>
+              <a:t>Pending Items &amp; Roadmap</a:t>
+            </a:r>
+            <a:endParaRPr lang="en-US" sz="2000" dirty="0"/>
+          </a:p>
+        </p:txBody>
+      </p:sp>
+      <p:sp>
+        <p:nvSpPr>
+          <p:cNvPr id="5" name="Shape 3"/>
+          <p:cNvSpPr/>
+          <p:nvPr/>
+        </p:nvSpPr>
+        <p:spPr>
+          <a:xfrm>
+            <a:off x="320040" y="804672"/>
+            <a:ext cx="4206240" cy="320040"/>
+          </a:xfrm>
+          <a:prstGeom prst="rect">
+            <a:avLst/>
+          </a:prstGeom>
+          <a:solidFill>
+            <a:srgbClr val="EF4444"/>
+          </a:solidFill>
+          <a:ln w="12700">
+            <a:solidFill>
+              <a:srgbClr val="333333"/>
+            </a:solidFill>
+            <a:prstDash val="solid"/>
+          </a:ln>
+        </p:spPr>
+      </p:sp>
+      <p:sp>
+        <p:nvSpPr>
+          <p:cNvPr id="6" name="Text 4"/>
+          <p:cNvSpPr/>
+          <p:nvPr/>
+        </p:nvSpPr>
+        <p:spPr>
+          <a:xfrm>
+            <a:off x="320040" y="804672"/>
+            <a:ext cx="4206240" cy="320040"/>
+          </a:xfrm>
+          <a:prstGeom prst="rect">
+            <a:avLst/>
+          </a:prstGeom>
+          <a:noFill/>
+          <a:ln/>
+        </p:spPr>
+        <p:txBody>
+          <a:bodyPr wrap="square" lIns="0" tIns="0" rIns="0" bIns="0" rtlCol="0" anchor="ctr"/>
+          <a:lstStyle/>
+          <a:p>
+            <a:pPr indent="0" marL="0">
+              <a:buNone/>
+            </a:pPr>
+            <a:r>
+              <a:rPr lang="en-US" sz="1000" b="1" dirty="0">
+                <a:solidFill>
+                  <a:srgbClr val="FFFFFF"/>
+                </a:solidFill>
+                <a:latin typeface="Calibri" pitchFamily="34" charset="0"/>
+                <a:ea typeface="Calibri" pitchFamily="34" charset="-122"/>
+                <a:cs typeface="Calibri" pitchFamily="34" charset="-120"/>
+              </a:rPr>
+              <a:t>PENDING — VERIFY BEFORE PRODUCTION</a:t>
+            </a:r>
+            <a:endParaRPr lang="en-US" sz="1000" dirty="0"/>
+          </a:p>
+        </p:txBody>
+      </p:sp>
+      <p:sp>
+        <p:nvSpPr>
+          <p:cNvPr id="7" name="Text 5"/>
+          <p:cNvSpPr/>
+          <p:nvPr/>
+        </p:nvSpPr>
+        <p:spPr>
+          <a:xfrm>
+            <a:off x="457200" y="1207008"/>
+            <a:ext cx="3931920" cy="2011680"/>
+          </a:xfrm>
+          <a:prstGeom prst="rect">
+            <a:avLst/>
+          </a:prstGeom>
+          <a:noFill/>
+          <a:ln/>
+        </p:spPr>
+        <p:txBody>
+          <a:bodyPr wrap="square" rtlCol="0" anchor="ctr"/>
+          <a:lstStyle/>
+          <a:p>
+            <a:pPr marL="342900" indent="-342900">
+              <a:buSzPct val="100000"/>
+              <a:buChar char="•"/>
+            </a:pPr>
+            <a:r>
+              <a:rPr lang="en-US" sz="950" dirty="0">
+                <a:solidFill>
+                  <a:srgbClr val="1E293B"/>
+                </a:solidFill>
+                <a:latin typeface="Calibri" pitchFamily="34" charset="0"/>
+                <a:ea typeface="Calibri" pitchFamily="34" charset="-122"/>
+                <a:cs typeface="Calibri" pitchFamily="34" charset="-120"/>
+              </a:rPr>
+              <a:t>ThreatQ: verify x_target_sectors field names in STIX export (see PENDING_ITEMS.md §1)</a:t>
+            </a:r>
+            <a:endParaRPr lang="en-US" sz="950" dirty="0"/>
+          </a:p>
+          <a:p>
+            <a:pPr marL="342900" indent="-342900">
+              <a:buSzPct val="100000"/>
+              <a:buChar char="•"/>
+            </a:pPr>
+            <a:r>
+              <a:rPr lang="en-US" sz="950" dirty="0">
+                <a:solidFill>
+                  <a:srgbClr val="1E293B"/>
+                </a:solidFill>
+                <a:latin typeface="Calibri" pitchFamily="34" charset="0"/>
+                <a:ea typeface="Calibri" pitchFamily="34" charset="-122"/>
+                <a:cs typeface="Calibri" pitchFamily="34" charset="-120"/>
+              </a:rPr>
+              <a:t>RecordedFuture, CrowdStrike, VT, ShadowServer, Nucleus: sector normalization</a:t>
+            </a:r>
+            <a:endParaRPr lang="en-US" sz="950" dirty="0"/>
+          </a:p>
+          <a:p>
+            <a:pPr marL="342900" indent="-342900">
+              <a:buSzPct val="100000"/>
+              <a:buChar char="•"/>
+            </a:pPr>
+            <a:r>
+              <a:rPr lang="en-US" sz="950" dirty="0">
+                <a:solidFill>
+                  <a:srgbClr val="1E293B"/>
+                </a:solidFill>
+                <a:latin typeface="Calibri" pitchFamily="34" charset="0"/>
+                <a:ea typeface="Calibri" pitchFamily="34" charset="-122"/>
+                <a:cs typeface="Calibri" pitchFamily="34" charset="-120"/>
+              </a:rPr>
+              <a:t>DOCX renderer: npm install -g docx required on deployment host</a:t>
+            </a:r>
+            <a:endParaRPr lang="en-US" sz="950" dirty="0"/>
+          </a:p>
+          <a:p>
+            <a:pPr marL="342900" indent="-342900">
+              <a:buSzPct val="100000"/>
+              <a:buChar char="•"/>
+            </a:pPr>
+            <a:r>
+              <a:rPr lang="en-US" sz="950" dirty="0">
+                <a:solidFill>
+                  <a:srgbClr val="1E293B"/>
+                </a:solidFill>
+                <a:latin typeface="Calibri" pitchFamily="34" charset="0"/>
+                <a:ea typeface="Calibri" pitchFamily="34" charset="-122"/>
+                <a:cs typeface="Calibri" pitchFamily="34" charset="-120"/>
+              </a:rPr>
+              <a:t>WorkspaceManager.default() method: verify or add to context/workspace.py</a:t>
+            </a:r>
+            <a:endParaRPr lang="en-US" sz="950" dirty="0"/>
+          </a:p>
+          <a:p>
+            <a:pPr marL="342900" indent="-342900">
+              <a:buSzPct val="100000"/>
+              <a:buChar char="•"/>
+            </a:pPr>
+            <a:r>
+              <a:rPr lang="en-US" sz="950" dirty="0">
+                <a:solidFill>
+                  <a:srgbClr val="1E293B"/>
+                </a:solidFill>
+                <a:latin typeface="Calibri" pitchFamily="34" charset="0"/>
+                <a:ea typeface="Calibri" pitchFamily="34" charset="-122"/>
+                <a:cs typeface="Calibri" pitchFamily="34" charset="-120"/>
+              </a:rPr>
+              <a:t>Copilot DirectLine: test token refresh behavior in production Bot Framework setup</a:t>
+            </a:r>
+            <a:endParaRPr lang="en-US" sz="950" dirty="0"/>
+          </a:p>
+        </p:txBody>
+      </p:sp>
+      <p:sp>
+        <p:nvSpPr>
+          <p:cNvPr id="8" name="Shape 6"/>
+          <p:cNvSpPr/>
+          <p:nvPr/>
+        </p:nvSpPr>
+        <p:spPr>
+          <a:xfrm>
+            <a:off x="4754880" y="804672"/>
+            <a:ext cx="4069080" cy="320040"/>
+          </a:xfrm>
+          <a:prstGeom prst="rect">
+            <a:avLst/>
+          </a:prstGeom>
+          <a:solidFill>
+            <a:srgbClr val="0891B2"/>
+          </a:solidFill>
+          <a:ln w="12700">
+            <a:solidFill>
+              <a:srgbClr val="333333"/>
+            </a:solidFill>
+            <a:prstDash val="solid"/>
+          </a:ln>
+        </p:spPr>
+      </p:sp>
+      <p:sp>
+        <p:nvSpPr>
+          <p:cNvPr id="9" name="Text 7"/>
+          <p:cNvSpPr/>
+          <p:nvPr/>
+        </p:nvSpPr>
+        <p:spPr>
+          <a:xfrm>
+            <a:off x="4754880" y="804672"/>
+            <a:ext cx="4069080" cy="320040"/>
+          </a:xfrm>
+          <a:prstGeom prst="rect">
+            <a:avLst/>
+          </a:prstGeom>
+          <a:noFill/>
+          <a:ln/>
+        </p:spPr>
+        <p:txBody>
+          <a:bodyPr wrap="square" lIns="0" tIns="0" rIns="0" bIns="0" rtlCol="0" anchor="ctr"/>
+          <a:lstStyle/>
+          <a:p>
+            <a:pPr indent="0" marL="0">
+              <a:buNone/>
+            </a:pPr>
+            <a:r>
+              <a:rPr lang="en-US" sz="1000" b="1" dirty="0">
+                <a:solidFill>
+                  <a:srgbClr val="FFFFFF"/>
+                </a:solidFill>
+                <a:latin typeface="Calibri" pitchFamily="34" charset="0"/>
+                <a:ea typeface="Calibri" pitchFamily="34" charset="-122"/>
+                <a:cs typeface="Calibri" pitchFamily="34" charset="-120"/>
+              </a:rPr>
+              <a:t>ROADMAP — NEXT ADDITIONS</a:t>
+            </a:r>
+            <a:endParaRPr lang="en-US" sz="1000" dirty="0"/>
+          </a:p>
+        </p:txBody>
+      </p:sp>
+      <p:sp>
+        <p:nvSpPr>
+          <p:cNvPr id="10" name="Text 8"/>
+          <p:cNvSpPr/>
+          <p:nvPr/>
+        </p:nvSpPr>
+        <p:spPr>
+          <a:xfrm>
+            <a:off x="4892040" y="1207008"/>
+            <a:ext cx="3794760" cy="2011680"/>
+          </a:xfrm>
+          <a:prstGeom prst="rect">
+            <a:avLst/>
+          </a:prstGeom>
+          <a:noFill/>
+          <a:ln/>
+        </p:spPr>
+        <p:txBody>
+          <a:bodyPr wrap="square" rtlCol="0" anchor="ctr"/>
+          <a:lstStyle/>
+          <a:p>
+            <a:pPr marL="342900" indent="-342900">
+              <a:buSzPct val="100000"/>
+              <a:buChar char="•"/>
+            </a:pPr>
+            <a:r>
+              <a:rPr lang="en-US" sz="950" dirty="0">
+                <a:solidFill>
+                  <a:srgbClr val="1E293B"/>
+                </a:solidFill>
+                <a:latin typeface="Calibri" pitchFamily="34" charset="0"/>
+                <a:ea typeface="Calibri" pitchFamily="34" charset="-122"/>
+                <a:cs typeface="Calibri" pitchFamily="34" charset="-120"/>
+              </a:rPr>
+              <a:t>CLI: gnat report run --config report.daily_healthcare</a:t>
+            </a:r>
+            <a:endParaRPr lang="en-US" sz="950" dirty="0"/>
+          </a:p>
+          <a:p>
+            <a:pPr marL="342900" indent="-342900">
+              <a:buSzPct val="100000"/>
+              <a:buChar char="•"/>
+            </a:pPr>
+            <a:r>
+              <a:rPr lang="en-US" sz="950" dirty="0">
+                <a:solidFill>
+                  <a:srgbClr val="1E293B"/>
+                </a:solidFill>
+                <a:latin typeface="Calibri" pitchFamily="34" charset="0"/>
+                <a:ea typeface="Calibri" pitchFamily="34" charset="-122"/>
+                <a:cs typeface="Calibri" pitchFamily="34" charset="-120"/>
+              </a:rPr>
+              <a:t>SectorFilter: move to export/filters.py for use in both export and report layers</a:t>
+            </a:r>
+            <a:endParaRPr lang="en-US" sz="950" dirty="0"/>
+          </a:p>
+          <a:p>
+            <a:pPr marL="342900" indent="-342900">
+              <a:buSzPct val="100000"/>
+              <a:buChar char="•"/>
+            </a:pPr>
+            <a:r>
+              <a:rPr lang="en-US" sz="950" dirty="0">
+                <a:solidFill>
+                  <a:srgbClr val="1E293B"/>
+                </a:solidFill>
+                <a:latin typeface="Calibri" pitchFamily="34" charset="0"/>
+                <a:ea typeface="Calibri" pitchFamily="34" charset="-122"/>
+                <a:cs typeface="Calibri" pitchFamily="34" charset="-120"/>
+              </a:rPr>
+              <a:t>CHANGELOG: versions 0.6.0 through 1.0.0</a:t>
+            </a:r>
+            <a:endParaRPr lang="en-US" sz="950" dirty="0"/>
+          </a:p>
+          <a:p>
+            <a:pPr marL="342900" indent="-342900">
+              <a:buSzPct val="100000"/>
+              <a:buChar char="•"/>
+            </a:pPr>
+            <a:r>
+              <a:rPr lang="en-US" sz="950" dirty="0">
+                <a:solidFill>
+                  <a:srgbClr val="1E293B"/>
+                </a:solidFill>
+                <a:latin typeface="Calibri" pitchFamily="34" charset="0"/>
+                <a:ea typeface="Calibri" pitchFamily="34" charset="-122"/>
+                <a:cs typeface="Calibri" pitchFamily="34" charset="-120"/>
+              </a:rPr>
+              <a:t>Email body: use rendered HTML report as email body (not generic text)</a:t>
+            </a:r>
+            <a:endParaRPr lang="en-US" sz="950" dirty="0"/>
+          </a:p>
+          <a:p>
+            <a:pPr marL="342900" indent="-342900">
+              <a:buSzPct val="100000"/>
+              <a:buChar char="•"/>
+            </a:pPr>
+            <a:r>
+              <a:rPr lang="en-US" sz="950" dirty="0">
+                <a:solidFill>
+                  <a:srgbClr val="1E293B"/>
+                </a:solidFill>
+                <a:latin typeface="Calibri" pitchFamily="34" charset="0"/>
+                <a:ea typeface="Calibri" pitchFamily="34" charset="-122"/>
+                <a:cs typeface="Calibri" pitchFamily="34" charset="-120"/>
+              </a:rPr>
+              <a:t>Solr search UI / Grafana dashboard integration for gnat/search sidecar</a:t>
+            </a:r>
+            <a:endParaRPr lang="en-US" sz="950" dirty="0"/>
+          </a:p>
+          <a:p>
+            <a:pPr marL="342900" indent="-342900">
+              <a:buSzPct val="100000"/>
+              <a:buChar char="•"/>
+            </a:pPr>
+            <a:r>
+              <a:rPr lang="en-US" sz="950" dirty="0">
+                <a:solidFill>
+                  <a:srgbClr val="1E293B"/>
+                </a:solidFill>
+                <a:latin typeface="Calibri" pitchFamily="34" charset="0"/>
+                <a:ea typeface="Calibri" pitchFamily="34" charset="-122"/>
+                <a:cs typeface="Calibri" pitchFamily="34" charset="-120"/>
+              </a:rPr>
+              <a:t>Multi-tenant workspace isolation for MSP deployments</a:t>
+            </a:r>
+            <a:endParaRPr lang="en-US" sz="950" dirty="0"/>
+          </a:p>
+        </p:txBody>
+      </p:sp>
+      <p:sp>
+        <p:nvSpPr>
+          <p:cNvPr id="11" name="Shape 9"/>
+          <p:cNvSpPr/>
+          <p:nvPr/>
+        </p:nvSpPr>
+        <p:spPr>
+          <a:xfrm>
+            <a:off x="320040" y="3401568"/>
+            <a:ext cx="8503920" cy="1389888"/>
+          </a:xfrm>
+          <a:prstGeom prst="rect">
+            <a:avLst/>
+          </a:prstGeom>
+          <a:solidFill>
+            <a:srgbClr val="EBF2FB"/>
+          </a:solidFill>
+          <a:ln w="6350">
+            <a:solidFill>
+              <a:srgbClr val="CBD5E1"/>
+            </a:solidFill>
+            <a:prstDash val="solid"/>
+          </a:ln>
+        </p:spPr>
+      </p:sp>
+      <p:sp>
+        <p:nvSpPr>
+          <p:cNvPr id="12" name="Text 10"/>
+          <p:cNvSpPr/>
+          <p:nvPr/>
+        </p:nvSpPr>
+        <p:spPr>
+          <a:xfrm>
+            <a:off x="502920" y="3493008"/>
+            <a:ext cx="2743200" cy="256032"/>
+          </a:xfrm>
+          <a:prstGeom prst="rect">
+            <a:avLst/>
+          </a:prstGeom>
+          <a:noFill/>
+          <a:ln/>
+        </p:spPr>
+        <p:txBody>
+          <a:bodyPr wrap="square" lIns="0" tIns="0" rIns="0" bIns="0" rtlCol="0" anchor="ctr"/>
+          <a:lstStyle/>
+          <a:p>
+            <a:pPr indent="0" marL="0">
+              <a:buNone/>
+            </a:pPr>
+            <a:r>
+              <a:rPr lang="en-US" sz="1000" b="1" dirty="0">
+                <a:solidFill>
+                  <a:srgbClr val="1E293B"/>
+                </a:solidFill>
+                <a:latin typeface="Calibri" pitchFamily="34" charset="0"/>
+                <a:ea typeface="Calibri" pitchFamily="34" charset="-122"/>
+                <a:cs typeface="Calibri" pitchFamily="34" charset="-120"/>
+              </a:rPr>
+              <a:t>Reference Documents</a:t>
+            </a:r>
+            <a:endParaRPr lang="en-US" sz="1000" dirty="0"/>
+          </a:p>
+        </p:txBody>
+      </p:sp>
+      <p:sp>
+        <p:nvSpPr>
+          <p:cNvPr id="13" name="Text 11"/>
+          <p:cNvSpPr/>
+          <p:nvPr/>
+        </p:nvSpPr>
+        <p:spPr>
+          <a:xfrm>
+            <a:off x="502920" y="3794760"/>
+            <a:ext cx="8229600" cy="914400"/>
+          </a:xfrm>
+          <a:prstGeom prst="rect">
+            <a:avLst/>
+          </a:prstGeom>
+          <a:noFill/>
+          <a:ln/>
+        </p:spPr>
+        <p:txBody>
+          <a:bodyPr wrap="square" rtlCol="0" anchor="ctr"/>
+          <a:lstStyle/>
+          <a:p>
+            <a:pPr marL="342900" indent="-342900">
+              <a:buSzPct val="100000"/>
+              <a:buChar char="•"/>
+            </a:pPr>
+            <a:r>
+              <a:rPr lang="en-US" sz="950" dirty="0">
+                <a:solidFill>
+                  <a:srgbClr val="1E293B"/>
+                </a:solidFill>
+                <a:latin typeface="Calibri" pitchFamily="34" charset="0"/>
+                <a:ea typeface="Calibri" pitchFamily="34" charset="-122"/>
+                <a:cs typeface="Calibri" pitchFamily="34" charset="-120"/>
+              </a:rPr>
+              <a:t>EXAMPLES.md  —  907-line code snippet reference for all modules</a:t>
+            </a:r>
+            <a:endParaRPr lang="en-US" sz="950" dirty="0"/>
+          </a:p>
+          <a:p>
+            <a:pPr marL="342900" indent="-342900">
+              <a:buSzPct val="100000"/>
+              <a:buChar char="•"/>
+            </a:pPr>
+            <a:r>
+              <a:rPr lang="en-US" sz="950" dirty="0">
+                <a:solidFill>
+                  <a:srgbClr val="1E293B"/>
+                </a:solidFill>
+                <a:latin typeface="Calibri" pitchFamily="34" charset="0"/>
+                <a:ea typeface="Calibri" pitchFamily="34" charset="-122"/>
+                <a:cs typeface="Calibri" pitchFamily="34" charset="-120"/>
+              </a:rPr>
+              <a:t>IMPLEMENTATION_PLAN.md  —  Architecture, deployment, cost model, runbook</a:t>
+            </a:r>
+            <a:endParaRPr lang="en-US" sz="950" dirty="0"/>
+          </a:p>
+          <a:p>
+            <a:pPr marL="342900" indent="-342900">
+              <a:buSzPct val="100000"/>
+              <a:buChar char="•"/>
+            </a:pPr>
+            <a:r>
+              <a:rPr lang="en-US" sz="950" dirty="0">
+                <a:solidFill>
+                  <a:srgbClr val="1E293B"/>
+                </a:solidFill>
+                <a:latin typeface="Calibri" pitchFamily="34" charset="0"/>
+                <a:ea typeface="Calibri" pitchFamily="34" charset="-122"/>
+                <a:cs typeface="Calibri" pitchFamily="34" charset="-120"/>
+              </a:rPr>
+              <a:t>PENDING_ITEMS.md  —  Detailed action items with exact file locations</a:t>
+            </a:r>
+            <a:endParaRPr lang="en-US" sz="950" dirty="0"/>
+          </a:p>
+          <a:p>
+            <a:pPr marL="342900" indent="-342900">
+              <a:buSzPct val="100000"/>
+              <a:buChar char="•"/>
+            </a:pPr>
+            <a:r>
+              <a:rPr lang="en-US" sz="950" dirty="0">
+                <a:solidFill>
+                  <a:srgbClr val="1E293B"/>
+                </a:solidFill>
+                <a:latin typeface="Calibri" pitchFamily="34" charset="0"/>
+                <a:ea typeface="Calibri" pitchFamily="34" charset="-122"/>
+                <a:cs typeface="Calibri" pitchFamily="34" charset="-120"/>
+              </a:rPr>
+              <a:t>ARCHITECTURE_DECISIONS.md  —  18 sections covering every major design decision</a:t>
+            </a:r>
+            <a:endParaRPr lang="en-US" sz="950" dirty="0"/>
+          </a:p>
+        </p:txBody>
+      </p:sp>
+    </p:spTree>
+  </p:cSld>
+  <p:clrMapOvr>
+    <a:masterClrMapping/>
+  </p:clrMapOvr>
+</p:sld>
+</file>
+
+<file path=ppt/slides/slide19.xml><?xml version="1.0" encoding="utf-8"?>
+<p:sld xmlns:a="http://schemas.openxmlformats.org/drawingml/2006/main" xmlns:r="http://schemas.openxmlformats.org/officeDocument/2006/relationships" xmlns:p="http://schemas.openxmlformats.org/presentationml/2006/main">
+  <p:cSld name="Slide 19">
     <p:bg>
       <p:bgPr>
         <a:solidFill>
@@ -12990,7 +14347,7 @@
                 <a:ea typeface="Calibri" pitchFamily="34" charset="-122"/>
                 <a:cs typeface="Calibri" pitchFamily="34" charset="-120"/>
               </a:rPr>
-              <a:t>15 connectors · STIX 2.1 · Ingest + Export pipelines</a:t>
+              <a:t>26 connectors · STIX 2.1 · Ingest + Export pipelines</a:t>
             </a:r>
             <a:endParaRPr lang="en-US" sz="1400" dirty="0"/>
           </a:p>
@@ -13344,7 +14701,7 @@
                 <a:ea typeface="Calibri" pitchFamily="34" charset="-122"/>
                 <a:cs typeface="Calibri" pitchFamily="34" charset="-120"/>
               </a:rPr>
-              <a:t>15 Different APIs</a:t>
+              <a:t>26 Different APIs</a:t>
             </a:r>
             <a:endParaRPr lang="en-US" sz="1200" dirty="0"/>
           </a:p>
@@ -14998,7 +16355,7 @@
                 <a:ea typeface="Calibri" pitchFamily="34" charset="-122"/>
                 <a:cs typeface="Calibri" pitchFamily="34" charset="-120"/>
               </a:rPr>
-              <a:t>CONNECTOR LAYER (15 platforms)</a:t>
+              <a:t>CONNECTOR LAYER (26 platforms)</a:t>
             </a:r>
             <a:endParaRPr lang="en-US" sz="1000" dirty="0"/>
           </a:p>
@@ -15037,7 +16394,7 @@
                 <a:ea typeface="Calibri" pitchFamily="34" charset="-122"/>
                 <a:cs typeface="Calibri" pitchFamily="34" charset="-120"/>
               </a:rPr>
-              <a:t>ThreatQ · CrowdStrike · Splunk · RF · Netskope · VT · ShadowServer · Rapid7 · Nucleus · …</a:t>
+              <a:t>ThreatQ · CrowdStrike · Splunk · Elastic · Wazuh · QRadar · Sentinel · Zeek · Suricata · Snort · MISP · OTX · Graylog · …</a:t>
             </a:r>
             <a:endParaRPr lang="en-US" sz="900" dirty="0"/>
           </a:p>
@@ -15324,7 +16681,7 @@
                 <a:ea typeface="Calibri" pitchFamily="34" charset="-122"/>
                 <a:cs typeface="Calibri" pitchFamily="34" charset="-120"/>
               </a:rPr>
-              <a:t>15 Platform Connectors — One Interface</a:t>
+              <a:t>26 Platform Connectors — One Interface</a:t>
             </a:r>
             <a:endParaRPr lang="en-US" sz="2000" dirty="0"/>
           </a:p>
@@ -15338,8 +16695,8 @@
         </p:nvSpPr>
         <p:spPr>
           <a:xfrm>
-            <a:off x="320040" y="914400"/>
-            <a:ext cx="1600200" cy="1005840"/>
+            <a:off x="182880" y="777240"/>
+            <a:ext cx="1399032" cy="749808"/>
           </a:xfrm>
           <a:prstGeom prst="rect">
             <a:avLst/>
@@ -15370,8 +16727,8 @@
         </p:nvSpPr>
         <p:spPr>
           <a:xfrm>
-            <a:off x="320040" y="914400"/>
-            <a:ext cx="1600200" cy="73152"/>
+            <a:off x="182880" y="777240"/>
+            <a:ext cx="1399032" cy="54864"/>
           </a:xfrm>
           <a:prstGeom prst="rect">
             <a:avLst/>
@@ -15395,8 +16752,8 @@
         </p:nvSpPr>
         <p:spPr>
           <a:xfrm>
-            <a:off x="393192" y="1078992"/>
-            <a:ext cx="1453896" cy="292608"/>
+            <a:off x="228600" y="868680"/>
+            <a:ext cx="1307592" cy="256032"/>
           </a:xfrm>
           <a:prstGeom prst="rect">
             <a:avLst/>
@@ -15412,7 +16769,7 @@
               <a:buNone/>
             </a:pPr>
             <a:r>
-              <a:rPr lang="en-US" sz="1100" b="1" dirty="0">
+              <a:rPr lang="en-US" sz="900" b="1" dirty="0">
                 <a:solidFill>
                   <a:srgbClr val="1E293B"/>
                 </a:solidFill>
@@ -15422,7 +16779,7 @@
               </a:rPr>
               <a:t>ThreatQ</a:t>
             </a:r>
-            <a:endParaRPr lang="en-US" sz="1100" dirty="0"/>
+            <a:endParaRPr lang="en-US" sz="900" dirty="0"/>
           </a:p>
         </p:txBody>
       </p:sp>
@@ -15434,8 +16791,8 @@
         </p:nvSpPr>
         <p:spPr>
           <a:xfrm>
-            <a:off x="374904" y="1389888"/>
-            <a:ext cx="1490472" cy="365760"/>
+            <a:off x="219456" y="1143000"/>
+            <a:ext cx="1325880" cy="320040"/>
           </a:xfrm>
           <a:prstGeom prst="rect">
             <a:avLst/>
@@ -15451,7 +16808,7 @@
               <a:buNone/>
             </a:pPr>
             <a:r>
-              <a:rPr lang="en-US" sz="850" dirty="0">
+              <a:rPr lang="en-US" sz="750" dirty="0">
                 <a:solidFill>
                   <a:srgbClr val="94A3B8"/>
                 </a:solidFill>
@@ -15461,7 +16818,7 @@
               </a:rPr>
               <a:t>OAuth2 · Full CRUD</a:t>
             </a:r>
-            <a:endParaRPr lang="en-US" sz="850" dirty="0"/>
+            <a:endParaRPr lang="en-US" sz="750" dirty="0"/>
           </a:p>
         </p:txBody>
       </p:sp>
@@ -15473,8 +16830,8 @@
         </p:nvSpPr>
         <p:spPr>
           <a:xfrm>
-            <a:off x="2029968" y="914400"/>
-            <a:ext cx="1600200" cy="1005840"/>
+            <a:off x="1618488" y="777240"/>
+            <a:ext cx="1399032" cy="749808"/>
           </a:xfrm>
           <a:prstGeom prst="rect">
             <a:avLst/>
@@ -15505,8 +16862,8 @@
         </p:nvSpPr>
         <p:spPr>
           <a:xfrm>
-            <a:off x="2029968" y="914400"/>
-            <a:ext cx="1600200" cy="73152"/>
+            <a:off x="1618488" y="777240"/>
+            <a:ext cx="1399032" cy="54864"/>
           </a:xfrm>
           <a:prstGeom prst="rect">
             <a:avLst/>
@@ -15530,8 +16887,8 @@
         </p:nvSpPr>
         <p:spPr>
           <a:xfrm>
-            <a:off x="2103120" y="1078992"/>
-            <a:ext cx="1453896" cy="292608"/>
+            <a:off x="1664208" y="868680"/>
+            <a:ext cx="1307592" cy="256032"/>
           </a:xfrm>
           <a:prstGeom prst="rect">
             <a:avLst/>
@@ -15547,7 +16904,7 @@
               <a:buNone/>
             </a:pPr>
             <a:r>
-              <a:rPr lang="en-US" sz="1100" b="1" dirty="0">
+              <a:rPr lang="en-US" sz="900" b="1" dirty="0">
                 <a:solidFill>
                   <a:srgbClr val="1E293B"/>
                 </a:solidFill>
@@ -15557,7 +16914,7 @@
               </a:rPr>
               <a:t>CrowdStrike</a:t>
             </a:r>
-            <a:endParaRPr lang="en-US" sz="1100" dirty="0"/>
+            <a:endParaRPr lang="en-US" sz="900" dirty="0"/>
           </a:p>
         </p:txBody>
       </p:sp>
@@ -15569,8 +16926,8 @@
         </p:nvSpPr>
         <p:spPr>
           <a:xfrm>
-            <a:off x="2084832" y="1389888"/>
-            <a:ext cx="1490472" cy="365760"/>
+            <a:off x="1655064" y="1143000"/>
+            <a:ext cx="1325880" cy="320040"/>
           </a:xfrm>
           <a:prstGeom prst="rect">
             <a:avLst/>
@@ -15586,7 +16943,7 @@
               <a:buNone/>
             </a:pPr>
             <a:r>
-              <a:rPr lang="en-US" sz="850" dirty="0">
+              <a:rPr lang="en-US" sz="750" dirty="0">
                 <a:solidFill>
                   <a:srgbClr val="94A3B8"/>
                 </a:solidFill>
@@ -15596,7 +16953,7 @@
               </a:rPr>
               <a:t>OAuth2 · Full CRUD</a:t>
             </a:r>
-            <a:endParaRPr lang="en-US" sz="850" dirty="0"/>
+            <a:endParaRPr lang="en-US" sz="750" dirty="0"/>
           </a:p>
         </p:txBody>
       </p:sp>
@@ -15608,8 +16965,8 @@
         </p:nvSpPr>
         <p:spPr>
           <a:xfrm>
-            <a:off x="3739896" y="914400"/>
-            <a:ext cx="1600200" cy="1005840"/>
+            <a:off x="3054096" y="777240"/>
+            <a:ext cx="1399032" cy="749808"/>
           </a:xfrm>
           <a:prstGeom prst="rect">
             <a:avLst/>
@@ -15640,8 +16997,8 @@
         </p:nvSpPr>
         <p:spPr>
           <a:xfrm>
-            <a:off x="3739896" y="914400"/>
-            <a:ext cx="1600200" cy="73152"/>
+            <a:off x="3054096" y="777240"/>
+            <a:ext cx="1399032" cy="54864"/>
           </a:xfrm>
           <a:prstGeom prst="rect">
             <a:avLst/>
@@ -15665,8 +17022,8 @@
         </p:nvSpPr>
         <p:spPr>
           <a:xfrm>
-            <a:off x="3813048" y="1078992"/>
-            <a:ext cx="1453896" cy="292608"/>
+            <a:off x="3099816" y="868680"/>
+            <a:ext cx="1307592" cy="256032"/>
           </a:xfrm>
           <a:prstGeom prst="rect">
             <a:avLst/>
@@ -15682,7 +17039,7 @@
               <a:buNone/>
             </a:pPr>
             <a:r>
-              <a:rPr lang="en-US" sz="1100" b="1" dirty="0">
+              <a:rPr lang="en-US" sz="900" b="1" dirty="0">
                 <a:solidFill>
                   <a:srgbClr val="1E293B"/>
                 </a:solidFill>
@@ -15692,7 +17049,7 @@
               </a:rPr>
               <a:t>Splunk</a:t>
             </a:r>
-            <a:endParaRPr lang="en-US" sz="1100" dirty="0"/>
+            <a:endParaRPr lang="en-US" sz="900" dirty="0"/>
           </a:p>
         </p:txBody>
       </p:sp>
@@ -15704,8 +17061,8 @@
         </p:nvSpPr>
         <p:spPr>
           <a:xfrm>
-            <a:off x="3794760" y="1389888"/>
-            <a:ext cx="1490472" cy="365760"/>
+            <a:off x="3090672" y="1143000"/>
+            <a:ext cx="1325880" cy="320040"/>
           </a:xfrm>
           <a:prstGeom prst="rect">
             <a:avLst/>
@@ -15721,7 +17078,7 @@
               <a:buNone/>
             </a:pPr>
             <a:r>
-              <a:rPr lang="en-US" sz="850" dirty="0">
+              <a:rPr lang="en-US" sz="750" dirty="0">
                 <a:solidFill>
                   <a:srgbClr val="94A3B8"/>
                 </a:solidFill>
@@ -15731,7 +17088,7 @@
               </a:rPr>
               <a:t>Token · Search/KVStore</a:t>
             </a:r>
-            <a:endParaRPr lang="en-US" sz="850" dirty="0"/>
+            <a:endParaRPr lang="en-US" sz="750" dirty="0"/>
           </a:p>
         </p:txBody>
       </p:sp>
@@ -15743,8 +17100,8 @@
         </p:nvSpPr>
         <p:spPr>
           <a:xfrm>
-            <a:off x="5449824" y="914400"/>
-            <a:ext cx="1600200" cy="1005840"/>
+            <a:off x="4489704" y="777240"/>
+            <a:ext cx="1399032" cy="749808"/>
           </a:xfrm>
           <a:prstGeom prst="rect">
             <a:avLst/>
@@ -15775,8 +17132,8 @@
         </p:nvSpPr>
         <p:spPr>
           <a:xfrm>
-            <a:off x="5449824" y="914400"/>
-            <a:ext cx="1600200" cy="73152"/>
+            <a:off x="4489704" y="777240"/>
+            <a:ext cx="1399032" cy="54864"/>
           </a:xfrm>
           <a:prstGeom prst="rect">
             <a:avLst/>
@@ -15800,8 +17157,8 @@
         </p:nvSpPr>
         <p:spPr>
           <a:xfrm>
-            <a:off x="5522976" y="1078992"/>
-            <a:ext cx="1453896" cy="292608"/>
+            <a:off x="4535424" y="868680"/>
+            <a:ext cx="1307592" cy="256032"/>
           </a:xfrm>
           <a:prstGeom prst="rect">
             <a:avLst/>
@@ -15817,7 +17174,7 @@
               <a:buNone/>
             </a:pPr>
             <a:r>
-              <a:rPr lang="en-US" sz="1100" b="1" dirty="0">
+              <a:rPr lang="en-US" sz="900" b="1" dirty="0">
                 <a:solidFill>
                   <a:srgbClr val="1E293B"/>
                 </a:solidFill>
@@ -15827,7 +17184,7 @@
               </a:rPr>
               <a:t>Recorded Future</a:t>
             </a:r>
-            <a:endParaRPr lang="en-US" sz="1100" dirty="0"/>
+            <a:endParaRPr lang="en-US" sz="900" dirty="0"/>
           </a:p>
         </p:txBody>
       </p:sp>
@@ -15839,8 +17196,8 @@
         </p:nvSpPr>
         <p:spPr>
           <a:xfrm>
-            <a:off x="5504688" y="1389888"/>
-            <a:ext cx="1490472" cy="365760"/>
+            <a:off x="4526280" y="1143000"/>
+            <a:ext cx="1325880" cy="320040"/>
           </a:xfrm>
           <a:prstGeom prst="rect">
             <a:avLst/>
@@ -15856,7 +17213,7 @@
               <a:buNone/>
             </a:pPr>
             <a:r>
-              <a:rPr lang="en-US" sz="850" dirty="0">
+              <a:rPr lang="en-US" sz="750" dirty="0">
                 <a:solidFill>
                   <a:srgbClr val="94A3B8"/>
                 </a:solidFill>
@@ -15866,7 +17223,7 @@
               </a:rPr>
               <a:t>Token · Alert API v3</a:t>
             </a:r>
-            <a:endParaRPr lang="en-US" sz="850" dirty="0"/>
+            <a:endParaRPr lang="en-US" sz="750" dirty="0"/>
           </a:p>
         </p:txBody>
       </p:sp>
@@ -15878,8 +17235,8 @@
         </p:nvSpPr>
         <p:spPr>
           <a:xfrm>
-            <a:off x="7159752" y="914400"/>
-            <a:ext cx="1600200" cy="1005840"/>
+            <a:off x="5925312" y="777240"/>
+            <a:ext cx="1399032" cy="749808"/>
           </a:xfrm>
           <a:prstGeom prst="rect">
             <a:avLst/>
@@ -15910,8 +17267,8 @@
         </p:nvSpPr>
         <p:spPr>
           <a:xfrm>
-            <a:off x="7159752" y="914400"/>
-            <a:ext cx="1600200" cy="73152"/>
+            <a:off x="5925312" y="777240"/>
+            <a:ext cx="1399032" cy="54864"/>
           </a:xfrm>
           <a:prstGeom prst="rect">
             <a:avLst/>
@@ -15935,8 +17292,8 @@
         </p:nvSpPr>
         <p:spPr>
           <a:xfrm>
-            <a:off x="7232904" y="1078992"/>
-            <a:ext cx="1453896" cy="292608"/>
+            <a:off x="5971032" y="868680"/>
+            <a:ext cx="1307592" cy="256032"/>
           </a:xfrm>
           <a:prstGeom prst="rect">
             <a:avLst/>
@@ -15952,7 +17309,7 @@
               <a:buNone/>
             </a:pPr>
             <a:r>
-              <a:rPr lang="en-US" sz="1100" b="1" dirty="0">
+              <a:rPr lang="en-US" sz="900" b="1" dirty="0">
                 <a:solidFill>
                   <a:srgbClr val="1E293B"/>
                 </a:solidFill>
@@ -15962,7 +17319,7 @@
               </a:rPr>
               <a:t>Netskope</a:t>
             </a:r>
-            <a:endParaRPr lang="en-US" sz="1100" dirty="0"/>
+            <a:endParaRPr lang="en-US" sz="900" dirty="0"/>
           </a:p>
         </p:txBody>
       </p:sp>
@@ -15974,8 +17331,8 @@
         </p:nvSpPr>
         <p:spPr>
           <a:xfrm>
-            <a:off x="7214616" y="1389888"/>
-            <a:ext cx="1490472" cy="365760"/>
+            <a:off x="5961888" y="1143000"/>
+            <a:ext cx="1325880" cy="320040"/>
           </a:xfrm>
           <a:prstGeom prst="rect">
             <a:avLst/>
@@ -15991,7 +17348,7 @@
               <a:buNone/>
             </a:pPr>
             <a:r>
-              <a:rPr lang="en-US" sz="850" dirty="0">
+              <a:rPr lang="en-US" sz="750" dirty="0">
                 <a:solidFill>
                   <a:srgbClr val="94A3B8"/>
                 </a:solidFill>
@@ -16001,7 +17358,7 @@
               </a:rPr>
               <a:t>Token · CE API</a:t>
             </a:r>
-            <a:endParaRPr lang="en-US" sz="850" dirty="0"/>
+            <a:endParaRPr lang="en-US" sz="750" dirty="0"/>
           </a:p>
         </p:txBody>
       </p:sp>
@@ -16013,8 +17370,8 @@
         </p:nvSpPr>
         <p:spPr>
           <a:xfrm>
-            <a:off x="320040" y="2103120"/>
-            <a:ext cx="1600200" cy="1005840"/>
+            <a:off x="7360920" y="777240"/>
+            <a:ext cx="1399032" cy="749808"/>
           </a:xfrm>
           <a:prstGeom prst="rect">
             <a:avLst/>
@@ -16045,8 +17402,8 @@
         </p:nvSpPr>
         <p:spPr>
           <a:xfrm>
-            <a:off x="320040" y="2103120"/>
-            <a:ext cx="1600200" cy="73152"/>
+            <a:off x="7360920" y="777240"/>
+            <a:ext cx="1399032" cy="54864"/>
           </a:xfrm>
           <a:prstGeom prst="rect">
             <a:avLst/>
@@ -16070,8 +17427,8 @@
         </p:nvSpPr>
         <p:spPr>
           <a:xfrm>
-            <a:off x="393192" y="2267712"/>
-            <a:ext cx="1453896" cy="292608"/>
+            <a:off x="7406640" y="868680"/>
+            <a:ext cx="1307592" cy="256032"/>
           </a:xfrm>
           <a:prstGeom prst="rect">
             <a:avLst/>
@@ -16087,7 +17444,7 @@
               <a:buNone/>
             </a:pPr>
             <a:r>
-              <a:rPr lang="en-US" sz="1100" b="1" dirty="0">
+              <a:rPr lang="en-US" sz="900" b="1" dirty="0">
                 <a:solidFill>
                   <a:srgbClr val="1E293B"/>
                 </a:solidFill>
@@ -16097,7 +17454,7 @@
               </a:rPr>
               <a:t>Proofpoint</a:t>
             </a:r>
-            <a:endParaRPr lang="en-US" sz="1100" dirty="0"/>
+            <a:endParaRPr lang="en-US" sz="900" dirty="0"/>
           </a:p>
         </p:txBody>
       </p:sp>
@@ -16109,8 +17466,8 @@
         </p:nvSpPr>
         <p:spPr>
           <a:xfrm>
-            <a:off x="374904" y="2578608"/>
-            <a:ext cx="1490472" cy="365760"/>
+            <a:off x="7397496" y="1143000"/>
+            <a:ext cx="1325880" cy="320040"/>
           </a:xfrm>
           <a:prstGeom prst="rect">
             <a:avLst/>
@@ -16126,7 +17483,7 @@
               <a:buNone/>
             </a:pPr>
             <a:r>
-              <a:rPr lang="en-US" sz="850" dirty="0">
+              <a:rPr lang="en-US" sz="750" dirty="0">
                 <a:solidFill>
                   <a:srgbClr val="94A3B8"/>
                 </a:solidFill>
@@ -16136,7 +17493,7 @@
               </a:rPr>
               <a:t>Basic auth</a:t>
             </a:r>
-            <a:endParaRPr lang="en-US" sz="850" dirty="0"/>
+            <a:endParaRPr lang="en-US" sz="750" dirty="0"/>
           </a:p>
         </p:txBody>
       </p:sp>
@@ -16148,8 +17505,8 @@
         </p:nvSpPr>
         <p:spPr>
           <a:xfrm>
-            <a:off x="2029968" y="2103120"/>
-            <a:ext cx="1600200" cy="1005840"/>
+            <a:off x="182880" y="1581912"/>
+            <a:ext cx="1399032" cy="749808"/>
           </a:xfrm>
           <a:prstGeom prst="rect">
             <a:avLst/>
@@ -16180,8 +17537,8 @@
         </p:nvSpPr>
         <p:spPr>
           <a:xfrm>
-            <a:off x="2029968" y="2103120"/>
-            <a:ext cx="1600200" cy="73152"/>
+            <a:off x="182880" y="1581912"/>
+            <a:ext cx="1399032" cy="54864"/>
           </a:xfrm>
           <a:prstGeom prst="rect">
             <a:avLst/>
@@ -16205,8 +17562,8 @@
         </p:nvSpPr>
         <p:spPr>
           <a:xfrm>
-            <a:off x="2103120" y="2267712"/>
-            <a:ext cx="1453896" cy="292608"/>
+            <a:off x="228600" y="1673352"/>
+            <a:ext cx="1307592" cy="256032"/>
           </a:xfrm>
           <a:prstGeom prst="rect">
             <a:avLst/>
@@ -16222,7 +17579,7 @@
               <a:buNone/>
             </a:pPr>
             <a:r>
-              <a:rPr lang="en-US" sz="1100" b="1" dirty="0">
+              <a:rPr lang="en-US" sz="900" b="1" dirty="0">
                 <a:solidFill>
                   <a:srgbClr val="1E293B"/>
                 </a:solidFill>
@@ -16232,7 +17589,7 @@
               </a:rPr>
               <a:t>XSOAR</a:t>
             </a:r>
-            <a:endParaRPr lang="en-US" sz="1100" dirty="0"/>
+            <a:endParaRPr lang="en-US" sz="900" dirty="0"/>
           </a:p>
         </p:txBody>
       </p:sp>
@@ -16244,8 +17601,8 @@
         </p:nvSpPr>
         <p:spPr>
           <a:xfrm>
-            <a:off x="2084832" y="2578608"/>
-            <a:ext cx="1490472" cy="365760"/>
+            <a:off x="219456" y="1947672"/>
+            <a:ext cx="1325880" cy="320040"/>
           </a:xfrm>
           <a:prstGeom prst="rect">
             <a:avLst/>
@@ -16261,7 +17618,7 @@
               <a:buNone/>
             </a:pPr>
             <a:r>
-              <a:rPr lang="en-US" sz="850" dirty="0">
+              <a:rPr lang="en-US" sz="750" dirty="0">
                 <a:solidFill>
                   <a:srgbClr val="94A3B8"/>
                 </a:solidFill>
@@ -16271,7 +17628,7 @@
               </a:rPr>
               <a:t>API key · Incidents</a:t>
             </a:r>
-            <a:endParaRPr lang="en-US" sz="850" dirty="0"/>
+            <a:endParaRPr lang="en-US" sz="750" dirty="0"/>
           </a:p>
         </p:txBody>
       </p:sp>
@@ -16283,8 +17640,8 @@
         </p:nvSpPr>
         <p:spPr>
           <a:xfrm>
-            <a:off x="3739896" y="2103120"/>
-            <a:ext cx="1600200" cy="1005840"/>
+            <a:off x="1618488" y="1581912"/>
+            <a:ext cx="1399032" cy="749808"/>
           </a:xfrm>
           <a:prstGeom prst="rect">
             <a:avLst/>
@@ -16315,8 +17672,8 @@
         </p:nvSpPr>
         <p:spPr>
           <a:xfrm>
-            <a:off x="3739896" y="2103120"/>
-            <a:ext cx="1600200" cy="73152"/>
+            <a:off x="1618488" y="1581912"/>
+            <a:ext cx="1399032" cy="54864"/>
           </a:xfrm>
           <a:prstGeom prst="rect">
             <a:avLst/>
@@ -16340,8 +17697,8 @@
         </p:nvSpPr>
         <p:spPr>
           <a:xfrm>
-            <a:off x="3813048" y="2267712"/>
-            <a:ext cx="1453896" cy="292608"/>
+            <a:off x="1664208" y="1673352"/>
+            <a:ext cx="1307592" cy="256032"/>
           </a:xfrm>
           <a:prstGeom prst="rect">
             <a:avLst/>
@@ -16357,7 +17714,7 @@
               <a:buNone/>
             </a:pPr>
             <a:r>
-              <a:rPr lang="en-US" sz="1100" b="1" dirty="0">
+              <a:rPr lang="en-US" sz="900" b="1" dirty="0">
                 <a:solidFill>
                   <a:srgbClr val="1E293B"/>
                 </a:solidFill>
@@ -16367,7 +17724,7 @@
               </a:rPr>
               <a:t>RiskRecon</a:t>
             </a:r>
-            <a:endParaRPr lang="en-US" sz="1100" dirty="0"/>
+            <a:endParaRPr lang="en-US" sz="900" dirty="0"/>
           </a:p>
         </p:txBody>
       </p:sp>
@@ -16379,8 +17736,8 @@
         </p:nvSpPr>
         <p:spPr>
           <a:xfrm>
-            <a:off x="3794760" y="2578608"/>
-            <a:ext cx="1490472" cy="365760"/>
+            <a:off x="1655064" y="1947672"/>
+            <a:ext cx="1325880" cy="320040"/>
           </a:xfrm>
           <a:prstGeom prst="rect">
             <a:avLst/>
@@ -16396,7 +17753,7 @@
               <a:buNone/>
             </a:pPr>
             <a:r>
-              <a:rPr lang="en-US" sz="850" dirty="0">
+              <a:rPr lang="en-US" sz="750" dirty="0">
                 <a:solidFill>
                   <a:srgbClr val="94A3B8"/>
                 </a:solidFill>
@@ -16406,7 +17763,7 @@
               </a:rPr>
               <a:t>OAuth2 · Findings</a:t>
             </a:r>
-            <a:endParaRPr lang="en-US" sz="850" dirty="0"/>
+            <a:endParaRPr lang="en-US" sz="750" dirty="0"/>
           </a:p>
         </p:txBody>
       </p:sp>
@@ -16418,8 +17775,8 @@
         </p:nvSpPr>
         <p:spPr>
           <a:xfrm>
-            <a:off x="5449824" y="2103120"/>
-            <a:ext cx="1600200" cy="1005840"/>
+            <a:off x="3054096" y="1581912"/>
+            <a:ext cx="1399032" cy="749808"/>
           </a:xfrm>
           <a:prstGeom prst="rect">
             <a:avLst/>
@@ -16450,8 +17807,8 @@
         </p:nvSpPr>
         <p:spPr>
           <a:xfrm>
-            <a:off x="5449824" y="2103120"/>
-            <a:ext cx="1600200" cy="73152"/>
+            <a:off x="3054096" y="1581912"/>
+            <a:ext cx="1399032" cy="54864"/>
           </a:xfrm>
           <a:prstGeom prst="rect">
             <a:avLst/>
@@ -16475,8 +17832,8 @@
         </p:nvSpPr>
         <p:spPr>
           <a:xfrm>
-            <a:off x="5522976" y="2267712"/>
-            <a:ext cx="1453896" cy="292608"/>
+            <a:off x="3099816" y="1673352"/>
+            <a:ext cx="1307592" cy="256032"/>
           </a:xfrm>
           <a:prstGeom prst="rect">
             <a:avLst/>
@@ -16492,7 +17849,7 @@
               <a:buNone/>
             </a:pPr>
             <a:r>
-              <a:rPr lang="en-US" sz="1100" b="1" dirty="0">
+              <a:rPr lang="en-US" sz="900" b="1" dirty="0">
                 <a:solidFill>
                   <a:srgbClr val="1E293B"/>
                 </a:solidFill>
@@ -16502,7 +17859,7 @@
               </a:rPr>
               <a:t>Whistic</a:t>
             </a:r>
-            <a:endParaRPr lang="en-US" sz="1100" dirty="0"/>
+            <a:endParaRPr lang="en-US" sz="900" dirty="0"/>
           </a:p>
         </p:txBody>
       </p:sp>
@@ -16514,8 +17871,8 @@
         </p:nvSpPr>
         <p:spPr>
           <a:xfrm>
-            <a:off x="5504688" y="2578608"/>
-            <a:ext cx="1490472" cy="365760"/>
+            <a:off x="3090672" y="1947672"/>
+            <a:ext cx="1325880" cy="320040"/>
           </a:xfrm>
           <a:prstGeom prst="rect">
             <a:avLst/>
@@ -16531,7 +17888,7 @@
               <a:buNone/>
             </a:pPr>
             <a:r>
-              <a:rPr lang="en-US" sz="850" dirty="0">
+              <a:rPr lang="en-US" sz="750" dirty="0">
                 <a:solidFill>
                   <a:srgbClr val="94A3B8"/>
                 </a:solidFill>
@@ -16541,7 +17898,7 @@
               </a:rPr>
               <a:t>API key · Vendor risk</a:t>
             </a:r>
-            <a:endParaRPr lang="en-US" sz="850" dirty="0"/>
+            <a:endParaRPr lang="en-US" sz="750" dirty="0"/>
           </a:p>
         </p:txBody>
       </p:sp>
@@ -16553,8 +17910,8 @@
         </p:nvSpPr>
         <p:spPr>
           <a:xfrm>
-            <a:off x="7159752" y="2103120"/>
-            <a:ext cx="1600200" cy="1005840"/>
+            <a:off x="4489704" y="1581912"/>
+            <a:ext cx="1399032" cy="749808"/>
           </a:xfrm>
           <a:prstGeom prst="rect">
             <a:avLst/>
@@ -16585,8 +17942,8 @@
         </p:nvSpPr>
         <p:spPr>
           <a:xfrm>
-            <a:off x="7159752" y="2103120"/>
-            <a:ext cx="1600200" cy="73152"/>
+            <a:off x="4489704" y="1581912"/>
+            <a:ext cx="1399032" cy="54864"/>
           </a:xfrm>
           <a:prstGeom prst="rect">
             <a:avLst/>
@@ -16610,8 +17967,8 @@
         </p:nvSpPr>
         <p:spPr>
           <a:xfrm>
-            <a:off x="7232904" y="2267712"/>
-            <a:ext cx="1453896" cy="292608"/>
+            <a:off x="4535424" y="1673352"/>
+            <a:ext cx="1307592" cy="256032"/>
           </a:xfrm>
           <a:prstGeom prst="rect">
             <a:avLst/>
@@ -16627,7 +17984,7 @@
               <a:buNone/>
             </a:pPr>
             <a:r>
-              <a:rPr lang="en-US" sz="1100" b="1" dirty="0">
+              <a:rPr lang="en-US" sz="900" b="1" dirty="0">
                 <a:solidFill>
                   <a:srgbClr val="1E293B"/>
                 </a:solidFill>
@@ -16637,7 +17994,7 @@
               </a:rPr>
               <a:t>Feedly</a:t>
             </a:r>
-            <a:endParaRPr lang="en-US" sz="1100" dirty="0"/>
+            <a:endParaRPr lang="en-US" sz="900" dirty="0"/>
           </a:p>
         </p:txBody>
       </p:sp>
@@ -16649,8 +18006,8 @@
         </p:nvSpPr>
         <p:spPr>
           <a:xfrm>
-            <a:off x="7214616" y="2578608"/>
-            <a:ext cx="1490472" cy="365760"/>
+            <a:off x="4526280" y="1947672"/>
+            <a:ext cx="1325880" cy="320040"/>
           </a:xfrm>
           <a:prstGeom prst="rect">
             <a:avLst/>
@@ -16666,7 +18023,7 @@
               <a:buNone/>
             </a:pPr>
             <a:r>
-              <a:rPr lang="en-US" sz="850" dirty="0">
+              <a:rPr lang="en-US" sz="750" dirty="0">
                 <a:solidFill>
                   <a:srgbClr val="94A3B8"/>
                 </a:solidFill>
@@ -16676,7 +18033,7 @@
               </a:rPr>
               <a:t>Bearer · IOC/TTP feeds</a:t>
             </a:r>
-            <a:endParaRPr lang="en-US" sz="850" dirty="0"/>
+            <a:endParaRPr lang="en-US" sz="750" dirty="0"/>
           </a:p>
         </p:txBody>
       </p:sp>
@@ -16688,8 +18045,8 @@
         </p:nvSpPr>
         <p:spPr>
           <a:xfrm>
-            <a:off x="320040" y="3291840"/>
-            <a:ext cx="1600200" cy="1005840"/>
+            <a:off x="5925312" y="1581912"/>
+            <a:ext cx="1399032" cy="749808"/>
           </a:xfrm>
           <a:prstGeom prst="rect">
             <a:avLst/>
@@ -16720,8 +18077,8 @@
         </p:nvSpPr>
         <p:spPr>
           <a:xfrm>
-            <a:off x="320040" y="3291840"/>
-            <a:ext cx="1600200" cy="73152"/>
+            <a:off x="5925312" y="1581912"/>
+            <a:ext cx="1399032" cy="54864"/>
           </a:xfrm>
           <a:prstGeom prst="rect">
             <a:avLst/>
@@ -16745,8 +18102,8 @@
         </p:nvSpPr>
         <p:spPr>
           <a:xfrm>
-            <a:off x="393192" y="3456432"/>
-            <a:ext cx="1453896" cy="292608"/>
+            <a:off x="5971032" y="1673352"/>
+            <a:ext cx="1307592" cy="256032"/>
           </a:xfrm>
           <a:prstGeom prst="rect">
             <a:avLst/>
@@ -16762,7 +18119,7 @@
               <a:buNone/>
             </a:pPr>
             <a:r>
-              <a:rPr lang="en-US" sz="1100" b="1" dirty="0">
+              <a:rPr lang="en-US" sz="900" b="1" dirty="0">
                 <a:solidFill>
                   <a:srgbClr val="1E293B"/>
                 </a:solidFill>
@@ -16772,7 +18129,7 @@
               </a:rPr>
               <a:t>GreyMatter</a:t>
             </a:r>
-            <a:endParaRPr lang="en-US" sz="1100" dirty="0"/>
+            <a:endParaRPr lang="en-US" sz="900" dirty="0"/>
           </a:p>
         </p:txBody>
       </p:sp>
@@ -16784,8 +18141,8 @@
         </p:nvSpPr>
         <p:spPr>
           <a:xfrm>
-            <a:off x="374904" y="3767328"/>
-            <a:ext cx="1490472" cy="365760"/>
+            <a:off x="5961888" y="1947672"/>
+            <a:ext cx="1325880" cy="320040"/>
           </a:xfrm>
           <a:prstGeom prst="rect">
             <a:avLst/>
@@ -16801,7 +18158,7 @@
               <a:buNone/>
             </a:pPr>
             <a:r>
-              <a:rPr lang="en-US" sz="850" dirty="0">
+              <a:rPr lang="en-US" sz="750" dirty="0">
                 <a:solidFill>
                   <a:srgbClr val="94A3B8"/>
                 </a:solidFill>
@@ -16811,7 +18168,7 @@
               </a:rPr>
               <a:t>OAuth2 · Full CRUD</a:t>
             </a:r>
-            <a:endParaRPr lang="en-US" sz="850" dirty="0"/>
+            <a:endParaRPr lang="en-US" sz="750" dirty="0"/>
           </a:p>
         </p:txBody>
       </p:sp>
@@ -16823,8 +18180,8 @@
         </p:nvSpPr>
         <p:spPr>
           <a:xfrm>
-            <a:off x="2029968" y="3291840"/>
-            <a:ext cx="1600200" cy="1005840"/>
+            <a:off x="7360920" y="1581912"/>
+            <a:ext cx="1399032" cy="749808"/>
           </a:xfrm>
           <a:prstGeom prst="rect">
             <a:avLst/>
@@ -16855,8 +18212,8 @@
         </p:nvSpPr>
         <p:spPr>
           <a:xfrm>
-            <a:off x="2029968" y="3291840"/>
-            <a:ext cx="1600200" cy="73152"/>
+            <a:off x="7360920" y="1581912"/>
+            <a:ext cx="1399032" cy="54864"/>
           </a:xfrm>
           <a:prstGeom prst="rect">
             <a:avLst/>
@@ -16880,8 +18237,8 @@
         </p:nvSpPr>
         <p:spPr>
           <a:xfrm>
-            <a:off x="2103120" y="3456432"/>
-            <a:ext cx="1453896" cy="292608"/>
+            <a:off x="7406640" y="1673352"/>
+            <a:ext cx="1307592" cy="256032"/>
           </a:xfrm>
           <a:prstGeom prst="rect">
             <a:avLst/>
@@ -16897,7 +18254,7 @@
               <a:buNone/>
             </a:pPr>
             <a:r>
-              <a:rPr lang="en-US" sz="1100" b="1" dirty="0">
+              <a:rPr lang="en-US" sz="900" b="1" dirty="0">
                 <a:solidFill>
                   <a:srgbClr val="1E293B"/>
                 </a:solidFill>
@@ -16907,7 +18264,7 @@
               </a:rPr>
               <a:t>VirusTotal</a:t>
             </a:r>
-            <a:endParaRPr lang="en-US" sz="1100" dirty="0"/>
+            <a:endParaRPr lang="en-US" sz="900" dirty="0"/>
           </a:p>
         </p:txBody>
       </p:sp>
@@ -16919,8 +18276,8 @@
         </p:nvSpPr>
         <p:spPr>
           <a:xfrm>
-            <a:off x="2084832" y="3767328"/>
-            <a:ext cx="1490472" cy="365760"/>
+            <a:off x="7397496" y="1947672"/>
+            <a:ext cx="1325880" cy="320040"/>
           </a:xfrm>
           <a:prstGeom prst="rect">
             <a:avLst/>
@@ -16936,7 +18293,7 @@
               <a:buNone/>
             </a:pPr>
             <a:r>
-              <a:rPr lang="en-US" sz="850" dirty="0">
+              <a:rPr lang="en-US" sz="750" dirty="0">
                 <a:solidFill>
                   <a:srgbClr val="94A3B8"/>
                 </a:solidFill>
@@ -16946,7 +18303,7 @@
               </a:rPr>
               <a:t>API key · File/IP/URL</a:t>
             </a:r>
-            <a:endParaRPr lang="en-US" sz="850" dirty="0"/>
+            <a:endParaRPr lang="en-US" sz="750" dirty="0"/>
           </a:p>
         </p:txBody>
       </p:sp>
@@ -16958,8 +18315,8 @@
         </p:nvSpPr>
         <p:spPr>
           <a:xfrm>
-            <a:off x="3739896" y="3291840"/>
-            <a:ext cx="1600200" cy="1005840"/>
+            <a:off x="182880" y="2386584"/>
+            <a:ext cx="1399032" cy="749808"/>
           </a:xfrm>
           <a:prstGeom prst="rect">
             <a:avLst/>
@@ -16990,8 +18347,8 @@
         </p:nvSpPr>
         <p:spPr>
           <a:xfrm>
-            <a:off x="3739896" y="3291840"/>
-            <a:ext cx="1600200" cy="73152"/>
+            <a:off x="182880" y="2386584"/>
+            <a:ext cx="1399032" cy="54864"/>
           </a:xfrm>
           <a:prstGeom prst="rect">
             <a:avLst/>
@@ -17015,8 +18372,8 @@
         </p:nvSpPr>
         <p:spPr>
           <a:xfrm>
-            <a:off x="3813048" y="3456432"/>
-            <a:ext cx="1453896" cy="292608"/>
+            <a:off x="228600" y="2478024"/>
+            <a:ext cx="1307592" cy="256032"/>
           </a:xfrm>
           <a:prstGeom prst="rect">
             <a:avLst/>
@@ -17032,7 +18389,7 @@
               <a:buNone/>
             </a:pPr>
             <a:r>
-              <a:rPr lang="en-US" sz="1100" b="1" dirty="0">
+              <a:rPr lang="en-US" sz="900" b="1" dirty="0">
                 <a:solidFill>
                   <a:srgbClr val="1E293B"/>
                 </a:solidFill>
@@ -17042,7 +18399,7 @@
               </a:rPr>
               <a:t>ShadowServer</a:t>
             </a:r>
-            <a:endParaRPr lang="en-US" sz="1100" dirty="0"/>
+            <a:endParaRPr lang="en-US" sz="900" dirty="0"/>
           </a:p>
         </p:txBody>
       </p:sp>
@@ -17054,8 +18411,8 @@
         </p:nvSpPr>
         <p:spPr>
           <a:xfrm>
-            <a:off x="3794760" y="3767328"/>
-            <a:ext cx="1490472" cy="365760"/>
+            <a:off x="219456" y="2752344"/>
+            <a:ext cx="1325880" cy="320040"/>
           </a:xfrm>
           <a:prstGeom prst="rect">
             <a:avLst/>
@@ -17071,7 +18428,7 @@
               <a:buNone/>
             </a:pPr>
             <a:r>
-              <a:rPr lang="en-US" sz="850" dirty="0">
+              <a:rPr lang="en-US" sz="750" dirty="0">
                 <a:solidFill>
                   <a:srgbClr val="94A3B8"/>
                 </a:solidFill>
@@ -17081,7 +18438,7 @@
               </a:rPr>
               <a:t>API key · Scan/ASN</a:t>
             </a:r>
-            <a:endParaRPr lang="en-US" sz="850" dirty="0"/>
+            <a:endParaRPr lang="en-US" sz="750" dirty="0"/>
           </a:p>
         </p:txBody>
       </p:sp>
@@ -17093,8 +18450,8 @@
         </p:nvSpPr>
         <p:spPr>
           <a:xfrm>
-            <a:off x="5449824" y="3291840"/>
-            <a:ext cx="1600200" cy="1005840"/>
+            <a:off x="1618488" y="2386584"/>
+            <a:ext cx="1399032" cy="749808"/>
           </a:xfrm>
           <a:prstGeom prst="rect">
             <a:avLst/>
@@ -17125,8 +18482,8 @@
         </p:nvSpPr>
         <p:spPr>
           <a:xfrm>
-            <a:off x="5449824" y="3291840"/>
-            <a:ext cx="1600200" cy="73152"/>
+            <a:off x="1618488" y="2386584"/>
+            <a:ext cx="1399032" cy="54864"/>
           </a:xfrm>
           <a:prstGeom prst="rect">
             <a:avLst/>
@@ -17150,8 +18507,8 @@
         </p:nvSpPr>
         <p:spPr>
           <a:xfrm>
-            <a:off x="5522976" y="3456432"/>
-            <a:ext cx="1453896" cy="292608"/>
+            <a:off x="1664208" y="2478024"/>
+            <a:ext cx="1307592" cy="256032"/>
           </a:xfrm>
           <a:prstGeom prst="rect">
             <a:avLst/>
@@ -17167,7 +18524,7 @@
               <a:buNone/>
             </a:pPr>
             <a:r>
-              <a:rPr lang="en-US" sz="1100" b="1" dirty="0">
+              <a:rPr lang="en-US" sz="900" b="1" dirty="0">
                 <a:solidFill>
                   <a:srgbClr val="1E293B"/>
                 </a:solidFill>
@@ -17177,7 +18534,7 @@
               </a:rPr>
               <a:t>Rapid7</a:t>
             </a:r>
-            <a:endParaRPr lang="en-US" sz="1100" dirty="0"/>
+            <a:endParaRPr lang="en-US" sz="900" dirty="0"/>
           </a:p>
         </p:txBody>
       </p:sp>
@@ -17189,8 +18546,8 @@
         </p:nvSpPr>
         <p:spPr>
           <a:xfrm>
-            <a:off x="5504688" y="3767328"/>
-            <a:ext cx="1490472" cy="365760"/>
+            <a:off x="1655064" y="2752344"/>
+            <a:ext cx="1325880" cy="320040"/>
           </a:xfrm>
           <a:prstGeom prst="rect">
             <a:avLst/>
@@ -17206,7 +18563,7 @@
               <a:buNone/>
             </a:pPr>
             <a:r>
-              <a:rPr lang="en-US" sz="850" dirty="0">
+              <a:rPr lang="en-US" sz="750" dirty="0">
                 <a:solidFill>
                   <a:srgbClr val="94A3B8"/>
                 </a:solidFill>
@@ -17216,7 +18573,7 @@
               </a:rPr>
               <a:t>API key · Vuln/Asset</a:t>
             </a:r>
-            <a:endParaRPr lang="en-US" sz="850" dirty="0"/>
+            <a:endParaRPr lang="en-US" sz="750" dirty="0"/>
           </a:p>
         </p:txBody>
       </p:sp>
@@ -17228,8 +18585,8 @@
         </p:nvSpPr>
         <p:spPr>
           <a:xfrm>
-            <a:off x="7159752" y="3291840"/>
-            <a:ext cx="1600200" cy="1005840"/>
+            <a:off x="3054096" y="2386584"/>
+            <a:ext cx="1399032" cy="749808"/>
           </a:xfrm>
           <a:prstGeom prst="rect">
             <a:avLst/>
@@ -17260,8 +18617,8 @@
         </p:nvSpPr>
         <p:spPr>
           <a:xfrm>
-            <a:off x="7159752" y="3291840"/>
-            <a:ext cx="1600200" cy="73152"/>
+            <a:off x="3054096" y="2386584"/>
+            <a:ext cx="1399032" cy="54864"/>
           </a:xfrm>
           <a:prstGeom prst="rect">
             <a:avLst/>
@@ -17285,8 +18642,8 @@
         </p:nvSpPr>
         <p:spPr>
           <a:xfrm>
-            <a:off x="7232904" y="3456432"/>
-            <a:ext cx="1453896" cy="292608"/>
+            <a:off x="3099816" y="2478024"/>
+            <a:ext cx="1307592" cy="256032"/>
           </a:xfrm>
           <a:prstGeom prst="rect">
             <a:avLst/>
@@ -17302,7 +18659,7 @@
               <a:buNone/>
             </a:pPr>
             <a:r>
-              <a:rPr lang="en-US" sz="1100" b="1" dirty="0">
+              <a:rPr lang="en-US" sz="900" b="1" dirty="0">
                 <a:solidFill>
                   <a:srgbClr val="1E293B"/>
                 </a:solidFill>
@@ -17312,7 +18669,7 @@
               </a:rPr>
               <a:t>Nucleus</a:t>
             </a:r>
-            <a:endParaRPr lang="en-US" sz="1100" dirty="0"/>
+            <a:endParaRPr lang="en-US" sz="900" dirty="0"/>
           </a:p>
         </p:txBody>
       </p:sp>
@@ -17324,8 +18681,8 @@
         </p:nvSpPr>
         <p:spPr>
           <a:xfrm>
-            <a:off x="7214616" y="3767328"/>
-            <a:ext cx="1490472" cy="365760"/>
+            <a:off x="3090672" y="2752344"/>
+            <a:ext cx="1325880" cy="320040"/>
           </a:xfrm>
           <a:prstGeom prst="rect">
             <a:avLst/>
@@ -17341,7 +18698,7 @@
               <a:buNone/>
             </a:pPr>
             <a:r>
-              <a:rPr lang="en-US" sz="850" dirty="0">
+              <a:rPr lang="en-US" sz="750" dirty="0">
                 <a:solidFill>
                   <a:srgbClr val="94A3B8"/>
                 </a:solidFill>
@@ -17351,13 +18708,1903 @@
               </a:rPr>
               <a:t>API key · Asset/Vuln</a:t>
             </a:r>
-            <a:endParaRPr lang="en-US" sz="850" dirty="0"/>
+            <a:endParaRPr lang="en-US" sz="750" dirty="0"/>
           </a:p>
         </p:txBody>
       </p:sp>
       <p:sp>
         <p:nvSpPr>
           <p:cNvPr id="65" name="Shape 63"/>
+          <p:cNvSpPr/>
+          <p:nvPr/>
+        </p:nvSpPr>
+        <p:spPr>
+          <a:xfrm>
+            <a:off x="4489704" y="2386584"/>
+            <a:ext cx="1399032" cy="749808"/>
+          </a:xfrm>
+          <a:prstGeom prst="rect">
+            <a:avLst/>
+          </a:prstGeom>
+          <a:solidFill>
+            <a:srgbClr val="FFFFFF"/>
+          </a:solidFill>
+          <a:ln w="6350">
+            <a:solidFill>
+              <a:srgbClr val="CBD5E1"/>
+            </a:solidFill>
+            <a:prstDash val="solid"/>
+          </a:ln>
+          <a:effectLst>
+            <a:outerShdw sx="100000" sy="100000" kx="0" ky="0" algn="bl" rotWithShape="0" blurRad="63500" dist="25400" dir="8100000">
+              <a:srgbClr val="000000">
+                <a:alpha val="12000"/>
+              </a:srgbClr>
+            </a:outerShdw>
+          </a:effectLst>
+        </p:spPr>
+      </p:sp>
+      <p:sp>
+        <p:nvSpPr>
+          <p:cNvPr id="66" name="Shape 64"/>
+          <p:cNvSpPr/>
+          <p:nvPr/>
+        </p:nvSpPr>
+        <p:spPr>
+          <a:xfrm>
+            <a:off x="4489704" y="2386584"/>
+            <a:ext cx="1399032" cy="54864"/>
+          </a:xfrm>
+          <a:prstGeom prst="rect">
+            <a:avLst/>
+          </a:prstGeom>
+          <a:solidFill>
+            <a:srgbClr val="0891B2"/>
+          </a:solidFill>
+          <a:ln w="12700">
+            <a:solidFill>
+              <a:srgbClr val="333333"/>
+            </a:solidFill>
+            <a:prstDash val="solid"/>
+          </a:ln>
+        </p:spPr>
+      </p:sp>
+      <p:sp>
+        <p:nvSpPr>
+          <p:cNvPr id="67" name="Text 65"/>
+          <p:cNvSpPr/>
+          <p:nvPr/>
+        </p:nvSpPr>
+        <p:spPr>
+          <a:xfrm>
+            <a:off x="4535424" y="2478024"/>
+            <a:ext cx="1307592" cy="256032"/>
+          </a:xfrm>
+          <a:prstGeom prst="rect">
+            <a:avLst/>
+          </a:prstGeom>
+          <a:noFill/>
+          <a:ln/>
+        </p:spPr>
+        <p:txBody>
+          <a:bodyPr wrap="square" lIns="0" tIns="0" rIns="0" bIns="0" rtlCol="0" anchor="ctr"/>
+          <a:lstStyle/>
+          <a:p>
+            <a:pPr algn="ctr" indent="0" marL="0">
+              <a:buNone/>
+            </a:pPr>
+            <a:r>
+              <a:rPr lang="en-US" sz="900" b="1" dirty="0">
+                <a:solidFill>
+                  <a:srgbClr val="1E293B"/>
+                </a:solidFill>
+                <a:latin typeface="Calibri" pitchFamily="34" charset="0"/>
+                <a:ea typeface="Calibri" pitchFamily="34" charset="-122"/>
+                <a:cs typeface="Calibri" pitchFamily="34" charset="-120"/>
+              </a:rPr>
+              <a:t>ControlUp DEX</a:t>
+            </a:r>
+            <a:endParaRPr lang="en-US" sz="900" dirty="0"/>
+          </a:p>
+        </p:txBody>
+      </p:sp>
+      <p:sp>
+        <p:nvSpPr>
+          <p:cNvPr id="68" name="Text 66"/>
+          <p:cNvSpPr/>
+          <p:nvPr/>
+        </p:nvSpPr>
+        <p:spPr>
+          <a:xfrm>
+            <a:off x="4526280" y="2752344"/>
+            <a:ext cx="1325880" cy="320040"/>
+          </a:xfrm>
+          <a:prstGeom prst="rect">
+            <a:avLst/>
+          </a:prstGeom>
+          <a:noFill/>
+          <a:ln/>
+        </p:spPr>
+        <p:txBody>
+          <a:bodyPr wrap="square" lIns="0" tIns="0" rIns="0" bIns="0" rtlCol="0" anchor="ctr"/>
+          <a:lstStyle/>
+          <a:p>
+            <a:pPr algn="ctr" indent="0" marL="0">
+              <a:buNone/>
+            </a:pPr>
+            <a:r>
+              <a:rPr lang="en-US" sz="750" dirty="0">
+                <a:solidFill>
+                  <a:srgbClr val="94A3B8"/>
+                </a:solidFill>
+                <a:latin typeface="Calibri" pitchFamily="34" charset="0"/>
+                <a:ea typeface="Calibri" pitchFamily="34" charset="-122"/>
+                <a:cs typeface="Calibri" pitchFamily="34" charset="-120"/>
+              </a:rPr>
+              <a:t>Bearer · Endpoint UX</a:t>
+            </a:r>
+            <a:endParaRPr lang="en-US" sz="750" dirty="0"/>
+          </a:p>
+        </p:txBody>
+      </p:sp>
+      <p:sp>
+        <p:nvSpPr>
+          <p:cNvPr id="69" name="Shape 67"/>
+          <p:cNvSpPr/>
+          <p:nvPr/>
+        </p:nvSpPr>
+        <p:spPr>
+          <a:xfrm>
+            <a:off x="5925312" y="2386584"/>
+            <a:ext cx="1399032" cy="749808"/>
+          </a:xfrm>
+          <a:prstGeom prst="rect">
+            <a:avLst/>
+          </a:prstGeom>
+          <a:solidFill>
+            <a:srgbClr val="FFFFFF"/>
+          </a:solidFill>
+          <a:ln w="6350">
+            <a:solidFill>
+              <a:srgbClr val="CBD5E1"/>
+            </a:solidFill>
+            <a:prstDash val="solid"/>
+          </a:ln>
+          <a:effectLst>
+            <a:outerShdw sx="100000" sy="100000" kx="0" ky="0" algn="bl" rotWithShape="0" blurRad="63500" dist="25400" dir="8100000">
+              <a:srgbClr val="000000">
+                <a:alpha val="12000"/>
+              </a:srgbClr>
+            </a:outerShdw>
+          </a:effectLst>
+        </p:spPr>
+      </p:sp>
+      <p:sp>
+        <p:nvSpPr>
+          <p:cNvPr id="70" name="Shape 68"/>
+          <p:cNvSpPr/>
+          <p:nvPr/>
+        </p:nvSpPr>
+        <p:spPr>
+          <a:xfrm>
+            <a:off x="5925312" y="2386584"/>
+            <a:ext cx="1399032" cy="54864"/>
+          </a:xfrm>
+          <a:prstGeom prst="rect">
+            <a:avLst/>
+          </a:prstGeom>
+          <a:solidFill>
+            <a:srgbClr val="0891B2"/>
+          </a:solidFill>
+          <a:ln w="12700">
+            <a:solidFill>
+              <a:srgbClr val="333333"/>
+            </a:solidFill>
+            <a:prstDash val="solid"/>
+          </a:ln>
+        </p:spPr>
+      </p:sp>
+      <p:sp>
+        <p:nvSpPr>
+          <p:cNvPr id="71" name="Text 69"/>
+          <p:cNvSpPr/>
+          <p:nvPr/>
+        </p:nvSpPr>
+        <p:spPr>
+          <a:xfrm>
+            <a:off x="5971032" y="2478024"/>
+            <a:ext cx="1307592" cy="256032"/>
+          </a:xfrm>
+          <a:prstGeom prst="rect">
+            <a:avLst/>
+          </a:prstGeom>
+          <a:noFill/>
+          <a:ln/>
+        </p:spPr>
+        <p:txBody>
+          <a:bodyPr wrap="square" lIns="0" tIns="0" rIns="0" bIns="0" rtlCol="0" anchor="ctr"/>
+          <a:lstStyle/>
+          <a:p>
+            <a:pPr algn="ctr" indent="0" marL="0">
+              <a:buNone/>
+            </a:pPr>
+            <a:r>
+              <a:rPr lang="en-US" sz="900" b="1" dirty="0">
+                <a:solidFill>
+                  <a:srgbClr val="1E293B"/>
+                </a:solidFill>
+                <a:latin typeface="Calibri" pitchFamily="34" charset="0"/>
+                <a:ea typeface="Calibri" pitchFamily="34" charset="-122"/>
+                <a:cs typeface="Calibri" pitchFamily="34" charset="-120"/>
+              </a:rPr>
+              <a:t>AlienVault OTX</a:t>
+            </a:r>
+            <a:endParaRPr lang="en-US" sz="900" dirty="0"/>
+          </a:p>
+        </p:txBody>
+      </p:sp>
+      <p:sp>
+        <p:nvSpPr>
+          <p:cNvPr id="72" name="Text 70"/>
+          <p:cNvSpPr/>
+          <p:nvPr/>
+        </p:nvSpPr>
+        <p:spPr>
+          <a:xfrm>
+            <a:off x="5961888" y="2752344"/>
+            <a:ext cx="1325880" cy="320040"/>
+          </a:xfrm>
+          <a:prstGeom prst="rect">
+            <a:avLst/>
+          </a:prstGeom>
+          <a:noFill/>
+          <a:ln/>
+        </p:spPr>
+        <p:txBody>
+          <a:bodyPr wrap="square" lIns="0" tIns="0" rIns="0" bIns="0" rtlCol="0" anchor="ctr"/>
+          <a:lstStyle/>
+          <a:p>
+            <a:pPr algn="ctr" indent="0" marL="0">
+              <a:buNone/>
+            </a:pPr>
+            <a:r>
+              <a:rPr lang="en-US" sz="750" dirty="0">
+                <a:solidFill>
+                  <a:srgbClr val="94A3B8"/>
+                </a:solidFill>
+                <a:latin typeface="Calibri" pitchFamily="34" charset="0"/>
+                <a:ea typeface="Calibri" pitchFamily="34" charset="-122"/>
+                <a:cs typeface="Calibri" pitchFamily="34" charset="-120"/>
+              </a:rPr>
+              <a:t>API key · IOC/Pulses</a:t>
+            </a:r>
+            <a:endParaRPr lang="en-US" sz="750" dirty="0"/>
+          </a:p>
+        </p:txBody>
+      </p:sp>
+      <p:sp>
+        <p:nvSpPr>
+          <p:cNvPr id="73" name="Shape 71"/>
+          <p:cNvSpPr/>
+          <p:nvPr/>
+        </p:nvSpPr>
+        <p:spPr>
+          <a:xfrm>
+            <a:off x="7360920" y="2386584"/>
+            <a:ext cx="1399032" cy="749808"/>
+          </a:xfrm>
+          <a:prstGeom prst="rect">
+            <a:avLst/>
+          </a:prstGeom>
+          <a:solidFill>
+            <a:srgbClr val="FFFFFF"/>
+          </a:solidFill>
+          <a:ln w="6350">
+            <a:solidFill>
+              <a:srgbClr val="CBD5E1"/>
+            </a:solidFill>
+            <a:prstDash val="solid"/>
+          </a:ln>
+          <a:effectLst>
+            <a:outerShdw sx="100000" sy="100000" kx="0" ky="0" algn="bl" rotWithShape="0" blurRad="63500" dist="25400" dir="8100000">
+              <a:srgbClr val="000000">
+                <a:alpha val="12000"/>
+              </a:srgbClr>
+            </a:outerShdw>
+          </a:effectLst>
+        </p:spPr>
+      </p:sp>
+      <p:sp>
+        <p:nvSpPr>
+          <p:cNvPr id="74" name="Shape 72"/>
+          <p:cNvSpPr/>
+          <p:nvPr/>
+        </p:nvSpPr>
+        <p:spPr>
+          <a:xfrm>
+            <a:off x="7360920" y="2386584"/>
+            <a:ext cx="1399032" cy="54864"/>
+          </a:xfrm>
+          <a:prstGeom prst="rect">
+            <a:avLst/>
+          </a:prstGeom>
+          <a:solidFill>
+            <a:srgbClr val="0891B2"/>
+          </a:solidFill>
+          <a:ln w="12700">
+            <a:solidFill>
+              <a:srgbClr val="333333"/>
+            </a:solidFill>
+            <a:prstDash val="solid"/>
+          </a:ln>
+        </p:spPr>
+      </p:sp>
+      <p:sp>
+        <p:nvSpPr>
+          <p:cNvPr id="75" name="Text 73"/>
+          <p:cNvSpPr/>
+          <p:nvPr/>
+        </p:nvSpPr>
+        <p:spPr>
+          <a:xfrm>
+            <a:off x="7406640" y="2478024"/>
+            <a:ext cx="1307592" cy="256032"/>
+          </a:xfrm>
+          <a:prstGeom prst="rect">
+            <a:avLst/>
+          </a:prstGeom>
+          <a:noFill/>
+          <a:ln/>
+        </p:spPr>
+        <p:txBody>
+          <a:bodyPr wrap="square" lIns="0" tIns="0" rIns="0" bIns="0" rtlCol="0" anchor="ctr"/>
+          <a:lstStyle/>
+          <a:p>
+            <a:pPr algn="ctr" indent="0" marL="0">
+              <a:buNone/>
+            </a:pPr>
+            <a:r>
+              <a:rPr lang="en-US" sz="900" b="1" dirty="0">
+                <a:solidFill>
+                  <a:srgbClr val="1E293B"/>
+                </a:solidFill>
+                <a:latin typeface="Calibri" pitchFamily="34" charset="0"/>
+                <a:ea typeface="Calibri" pitchFamily="34" charset="-122"/>
+                <a:cs typeface="Calibri" pitchFamily="34" charset="-120"/>
+              </a:rPr>
+              <a:t>Elastic SIEM</a:t>
+            </a:r>
+            <a:endParaRPr lang="en-US" sz="900" dirty="0"/>
+          </a:p>
+        </p:txBody>
+      </p:sp>
+      <p:sp>
+        <p:nvSpPr>
+          <p:cNvPr id="76" name="Text 74"/>
+          <p:cNvSpPr/>
+          <p:nvPr/>
+        </p:nvSpPr>
+        <p:spPr>
+          <a:xfrm>
+            <a:off x="7397496" y="2752344"/>
+            <a:ext cx="1325880" cy="320040"/>
+          </a:xfrm>
+          <a:prstGeom prst="rect">
+            <a:avLst/>
+          </a:prstGeom>
+          <a:noFill/>
+          <a:ln/>
+        </p:spPr>
+        <p:txBody>
+          <a:bodyPr wrap="square" lIns="0" tIns="0" rIns="0" bIns="0" rtlCol="0" anchor="ctr"/>
+          <a:lstStyle/>
+          <a:p>
+            <a:pPr algn="ctr" indent="0" marL="0">
+              <a:buNone/>
+            </a:pPr>
+            <a:r>
+              <a:rPr lang="en-US" sz="750" dirty="0">
+                <a:solidFill>
+                  <a:srgbClr val="94A3B8"/>
+                </a:solidFill>
+                <a:latin typeface="Calibri" pitchFamily="34" charset="0"/>
+                <a:ea typeface="Calibri" pitchFamily="34" charset="-122"/>
+                <a:cs typeface="Calibri" pitchFamily="34" charset="-120"/>
+              </a:rPr>
+              <a:t>API key/Basic · ECS</a:t>
+            </a:r>
+            <a:endParaRPr lang="en-US" sz="750" dirty="0"/>
+          </a:p>
+        </p:txBody>
+      </p:sp>
+      <p:sp>
+        <p:nvSpPr>
+          <p:cNvPr id="77" name="Shape 75"/>
+          <p:cNvSpPr/>
+          <p:nvPr/>
+        </p:nvSpPr>
+        <p:spPr>
+          <a:xfrm>
+            <a:off x="182880" y="3191256"/>
+            <a:ext cx="1399032" cy="749808"/>
+          </a:xfrm>
+          <a:prstGeom prst="rect">
+            <a:avLst/>
+          </a:prstGeom>
+          <a:solidFill>
+            <a:srgbClr val="FFFFFF"/>
+          </a:solidFill>
+          <a:ln w="6350">
+            <a:solidFill>
+              <a:srgbClr val="CBD5E1"/>
+            </a:solidFill>
+            <a:prstDash val="solid"/>
+          </a:ln>
+          <a:effectLst>
+            <a:outerShdw sx="100000" sy="100000" kx="0" ky="0" algn="bl" rotWithShape="0" blurRad="63500" dist="25400" dir="8100000">
+              <a:srgbClr val="000000">
+                <a:alpha val="12000"/>
+              </a:srgbClr>
+            </a:outerShdw>
+          </a:effectLst>
+        </p:spPr>
+      </p:sp>
+      <p:sp>
+        <p:nvSpPr>
+          <p:cNvPr id="78" name="Shape 76"/>
+          <p:cNvSpPr/>
+          <p:nvPr/>
+        </p:nvSpPr>
+        <p:spPr>
+          <a:xfrm>
+            <a:off x="182880" y="3191256"/>
+            <a:ext cx="1399032" cy="54864"/>
+          </a:xfrm>
+          <a:prstGeom prst="rect">
+            <a:avLst/>
+          </a:prstGeom>
+          <a:solidFill>
+            <a:srgbClr val="0891B2"/>
+          </a:solidFill>
+          <a:ln w="12700">
+            <a:solidFill>
+              <a:srgbClr val="333333"/>
+            </a:solidFill>
+            <a:prstDash val="solid"/>
+          </a:ln>
+        </p:spPr>
+      </p:sp>
+      <p:sp>
+        <p:nvSpPr>
+          <p:cNvPr id="79" name="Text 77"/>
+          <p:cNvSpPr/>
+          <p:nvPr/>
+        </p:nvSpPr>
+        <p:spPr>
+          <a:xfrm>
+            <a:off x="228600" y="3282696"/>
+            <a:ext cx="1307592" cy="256032"/>
+          </a:xfrm>
+          <a:prstGeom prst="rect">
+            <a:avLst/>
+          </a:prstGeom>
+          <a:noFill/>
+          <a:ln/>
+        </p:spPr>
+        <p:txBody>
+          <a:bodyPr wrap="square" lIns="0" tIns="0" rIns="0" bIns="0" rtlCol="0" anchor="ctr"/>
+          <a:lstStyle/>
+          <a:p>
+            <a:pPr algn="ctr" indent="0" marL="0">
+              <a:buNone/>
+            </a:pPr>
+            <a:r>
+              <a:rPr lang="en-US" sz="900" b="1" dirty="0">
+                <a:solidFill>
+                  <a:srgbClr val="1E293B"/>
+                </a:solidFill>
+                <a:latin typeface="Calibri" pitchFamily="34" charset="0"/>
+                <a:ea typeface="Calibri" pitchFamily="34" charset="-122"/>
+                <a:cs typeface="Calibri" pitchFamily="34" charset="-120"/>
+              </a:rPr>
+              <a:t>Graylog</a:t>
+            </a:r>
+            <a:endParaRPr lang="en-US" sz="900" dirty="0"/>
+          </a:p>
+        </p:txBody>
+      </p:sp>
+      <p:sp>
+        <p:nvSpPr>
+          <p:cNvPr id="80" name="Text 78"/>
+          <p:cNvSpPr/>
+          <p:nvPr/>
+        </p:nvSpPr>
+        <p:spPr>
+          <a:xfrm>
+            <a:off x="219456" y="3557016"/>
+            <a:ext cx="1325880" cy="320040"/>
+          </a:xfrm>
+          <a:prstGeom prst="rect">
+            <a:avLst/>
+          </a:prstGeom>
+          <a:noFill/>
+          <a:ln/>
+        </p:spPr>
+        <p:txBody>
+          <a:bodyPr wrap="square" lIns="0" tIns="0" rIns="0" bIns="0" rtlCol="0" anchor="ctr"/>
+          <a:lstStyle/>
+          <a:p>
+            <a:pPr algn="ctr" indent="0" marL="0">
+              <a:buNone/>
+            </a:pPr>
+            <a:r>
+              <a:rPr lang="en-US" sz="750" dirty="0">
+                <a:solidFill>
+                  <a:srgbClr val="94A3B8"/>
+                </a:solidFill>
+                <a:latin typeface="Calibri" pitchFamily="34" charset="0"/>
+                <a:ea typeface="Calibri" pitchFamily="34" charset="-122"/>
+                <a:cs typeface="Calibri" pitchFamily="34" charset="-120"/>
+              </a:rPr>
+              <a:t>API key · Log alerts</a:t>
+            </a:r>
+            <a:endParaRPr lang="en-US" sz="750" dirty="0"/>
+          </a:p>
+        </p:txBody>
+      </p:sp>
+      <p:sp>
+        <p:nvSpPr>
+          <p:cNvPr id="81" name="Shape 79"/>
+          <p:cNvSpPr/>
+          <p:nvPr/>
+        </p:nvSpPr>
+        <p:spPr>
+          <a:xfrm>
+            <a:off x="1618488" y="3191256"/>
+            <a:ext cx="1399032" cy="749808"/>
+          </a:xfrm>
+          <a:prstGeom prst="rect">
+            <a:avLst/>
+          </a:prstGeom>
+          <a:solidFill>
+            <a:srgbClr val="FFFFFF"/>
+          </a:solidFill>
+          <a:ln w="6350">
+            <a:solidFill>
+              <a:srgbClr val="CBD5E1"/>
+            </a:solidFill>
+            <a:prstDash val="solid"/>
+          </a:ln>
+          <a:effectLst>
+            <a:outerShdw sx="100000" sy="100000" kx="0" ky="0" algn="bl" rotWithShape="0" blurRad="63500" dist="25400" dir="8100000">
+              <a:srgbClr val="000000">
+                <a:alpha val="12000"/>
+              </a:srgbClr>
+            </a:outerShdw>
+          </a:effectLst>
+        </p:spPr>
+      </p:sp>
+      <p:sp>
+        <p:nvSpPr>
+          <p:cNvPr id="82" name="Shape 80"/>
+          <p:cNvSpPr/>
+          <p:nvPr/>
+        </p:nvSpPr>
+        <p:spPr>
+          <a:xfrm>
+            <a:off x="1618488" y="3191256"/>
+            <a:ext cx="1399032" cy="54864"/>
+          </a:xfrm>
+          <a:prstGeom prst="rect">
+            <a:avLst/>
+          </a:prstGeom>
+          <a:solidFill>
+            <a:srgbClr val="0891B2"/>
+          </a:solidFill>
+          <a:ln w="12700">
+            <a:solidFill>
+              <a:srgbClr val="333333"/>
+            </a:solidFill>
+            <a:prstDash val="solid"/>
+          </a:ln>
+        </p:spPr>
+      </p:sp>
+      <p:sp>
+        <p:nvSpPr>
+          <p:cNvPr id="83" name="Text 81"/>
+          <p:cNvSpPr/>
+          <p:nvPr/>
+        </p:nvSpPr>
+        <p:spPr>
+          <a:xfrm>
+            <a:off x="1664208" y="3282696"/>
+            <a:ext cx="1307592" cy="256032"/>
+          </a:xfrm>
+          <a:prstGeom prst="rect">
+            <a:avLst/>
+          </a:prstGeom>
+          <a:noFill/>
+          <a:ln/>
+        </p:spPr>
+        <p:txBody>
+          <a:bodyPr wrap="square" lIns="0" tIns="0" rIns="0" bIns="0" rtlCol="0" anchor="ctr"/>
+          <a:lstStyle/>
+          <a:p>
+            <a:pPr algn="ctr" indent="0" marL="0">
+              <a:buNone/>
+            </a:pPr>
+            <a:r>
+              <a:rPr lang="en-US" sz="900" b="1" dirty="0">
+                <a:solidFill>
+                  <a:srgbClr val="1E293B"/>
+                </a:solidFill>
+                <a:latin typeface="Calibri" pitchFamily="34" charset="0"/>
+                <a:ea typeface="Calibri" pitchFamily="34" charset="-122"/>
+                <a:cs typeface="Calibri" pitchFamily="34" charset="-120"/>
+              </a:rPr>
+              <a:t>MISP</a:t>
+            </a:r>
+            <a:endParaRPr lang="en-US" sz="900" dirty="0"/>
+          </a:p>
+        </p:txBody>
+      </p:sp>
+      <p:sp>
+        <p:nvSpPr>
+          <p:cNvPr id="84" name="Text 82"/>
+          <p:cNvSpPr/>
+          <p:nvPr/>
+        </p:nvSpPr>
+        <p:spPr>
+          <a:xfrm>
+            <a:off x="1655064" y="3557016"/>
+            <a:ext cx="1325880" cy="320040"/>
+          </a:xfrm>
+          <a:prstGeom prst="rect">
+            <a:avLst/>
+          </a:prstGeom>
+          <a:noFill/>
+          <a:ln/>
+        </p:spPr>
+        <p:txBody>
+          <a:bodyPr wrap="square" lIns="0" tIns="0" rIns="0" bIns="0" rtlCol="0" anchor="ctr"/>
+          <a:lstStyle/>
+          <a:p>
+            <a:pPr algn="ctr" indent="0" marL="0">
+              <a:buNone/>
+            </a:pPr>
+            <a:r>
+              <a:rPr lang="en-US" sz="750" dirty="0">
+                <a:solidFill>
+                  <a:srgbClr val="94A3B8"/>
+                </a:solidFill>
+                <a:latin typeface="Calibri" pitchFamily="34" charset="0"/>
+                <a:ea typeface="Calibri" pitchFamily="34" charset="-122"/>
+                <a:cs typeface="Calibri" pitchFamily="34" charset="-120"/>
+              </a:rPr>
+              <a:t>API key · Full CRUD</a:t>
+            </a:r>
+            <a:endParaRPr lang="en-US" sz="750" dirty="0"/>
+          </a:p>
+        </p:txBody>
+      </p:sp>
+      <p:sp>
+        <p:nvSpPr>
+          <p:cNvPr id="85" name="Shape 83"/>
+          <p:cNvSpPr/>
+          <p:nvPr/>
+        </p:nvSpPr>
+        <p:spPr>
+          <a:xfrm>
+            <a:off x="3054096" y="3191256"/>
+            <a:ext cx="1399032" cy="749808"/>
+          </a:xfrm>
+          <a:prstGeom prst="rect">
+            <a:avLst/>
+          </a:prstGeom>
+          <a:solidFill>
+            <a:srgbClr val="FFFFFF"/>
+          </a:solidFill>
+          <a:ln w="6350">
+            <a:solidFill>
+              <a:srgbClr val="CBD5E1"/>
+            </a:solidFill>
+            <a:prstDash val="solid"/>
+          </a:ln>
+          <a:effectLst>
+            <a:outerShdw sx="100000" sy="100000" kx="0" ky="0" algn="bl" rotWithShape="0" blurRad="63500" dist="25400" dir="8100000">
+              <a:srgbClr val="000000">
+                <a:alpha val="12000"/>
+              </a:srgbClr>
+            </a:outerShdw>
+          </a:effectLst>
+        </p:spPr>
+      </p:sp>
+      <p:sp>
+        <p:nvSpPr>
+          <p:cNvPr id="86" name="Shape 84"/>
+          <p:cNvSpPr/>
+          <p:nvPr/>
+        </p:nvSpPr>
+        <p:spPr>
+          <a:xfrm>
+            <a:off x="3054096" y="3191256"/>
+            <a:ext cx="1399032" cy="54864"/>
+          </a:xfrm>
+          <a:prstGeom prst="rect">
+            <a:avLst/>
+          </a:prstGeom>
+          <a:solidFill>
+            <a:srgbClr val="0891B2"/>
+          </a:solidFill>
+          <a:ln w="12700">
+            <a:solidFill>
+              <a:srgbClr val="333333"/>
+            </a:solidFill>
+            <a:prstDash val="solid"/>
+          </a:ln>
+        </p:spPr>
+      </p:sp>
+      <p:sp>
+        <p:nvSpPr>
+          <p:cNvPr id="87" name="Text 85"/>
+          <p:cNvSpPr/>
+          <p:nvPr/>
+        </p:nvSpPr>
+        <p:spPr>
+          <a:xfrm>
+            <a:off x="3099816" y="3282696"/>
+            <a:ext cx="1307592" cy="256032"/>
+          </a:xfrm>
+          <a:prstGeom prst="rect">
+            <a:avLst/>
+          </a:prstGeom>
+          <a:noFill/>
+          <a:ln/>
+        </p:spPr>
+        <p:txBody>
+          <a:bodyPr wrap="square" lIns="0" tIns="0" rIns="0" bIns="0" rtlCol="0" anchor="ctr"/>
+          <a:lstStyle/>
+          <a:p>
+            <a:pPr algn="ctr" indent="0" marL="0">
+              <a:buNone/>
+            </a:pPr>
+            <a:r>
+              <a:rPr lang="en-US" sz="900" b="1" dirty="0">
+                <a:solidFill>
+                  <a:srgbClr val="1E293B"/>
+                </a:solidFill>
+                <a:latin typeface="Calibri" pitchFamily="34" charset="0"/>
+                <a:ea typeface="Calibri" pitchFamily="34" charset="-122"/>
+                <a:cs typeface="Calibri" pitchFamily="34" charset="-120"/>
+              </a:rPr>
+              <a:t>OpenCTI</a:t>
+            </a:r>
+            <a:endParaRPr lang="en-US" sz="900" dirty="0"/>
+          </a:p>
+        </p:txBody>
+      </p:sp>
+      <p:sp>
+        <p:nvSpPr>
+          <p:cNvPr id="88" name="Text 86"/>
+          <p:cNvSpPr/>
+          <p:nvPr/>
+        </p:nvSpPr>
+        <p:spPr>
+          <a:xfrm>
+            <a:off x="3090672" y="3557016"/>
+            <a:ext cx="1325880" cy="320040"/>
+          </a:xfrm>
+          <a:prstGeom prst="rect">
+            <a:avLst/>
+          </a:prstGeom>
+          <a:noFill/>
+          <a:ln/>
+        </p:spPr>
+        <p:txBody>
+          <a:bodyPr wrap="square" lIns="0" tIns="0" rIns="0" bIns="0" rtlCol="0" anchor="ctr"/>
+          <a:lstStyle/>
+          <a:p>
+            <a:pPr algn="ctr" indent="0" marL="0">
+              <a:buNone/>
+            </a:pPr>
+            <a:r>
+              <a:rPr lang="en-US" sz="750" dirty="0">
+                <a:solidFill>
+                  <a:srgbClr val="94A3B8"/>
+                </a:solidFill>
+                <a:latin typeface="Calibri" pitchFamily="34" charset="0"/>
+                <a:ea typeface="Calibri" pitchFamily="34" charset="-122"/>
+                <a:cs typeface="Calibri" pitchFamily="34" charset="-120"/>
+              </a:rPr>
+              <a:t>API key · GraphQL</a:t>
+            </a:r>
+            <a:endParaRPr lang="en-US" sz="750" dirty="0"/>
+          </a:p>
+        </p:txBody>
+      </p:sp>
+      <p:sp>
+        <p:nvSpPr>
+          <p:cNvPr id="89" name="Shape 87"/>
+          <p:cNvSpPr/>
+          <p:nvPr/>
+        </p:nvSpPr>
+        <p:spPr>
+          <a:xfrm>
+            <a:off x="4489704" y="3191256"/>
+            <a:ext cx="1399032" cy="749808"/>
+          </a:xfrm>
+          <a:prstGeom prst="rect">
+            <a:avLst/>
+          </a:prstGeom>
+          <a:solidFill>
+            <a:srgbClr val="FFFFFF"/>
+          </a:solidFill>
+          <a:ln w="6350">
+            <a:solidFill>
+              <a:srgbClr val="CBD5E1"/>
+            </a:solidFill>
+            <a:prstDash val="solid"/>
+          </a:ln>
+          <a:effectLst>
+            <a:outerShdw sx="100000" sy="100000" kx="0" ky="0" algn="bl" rotWithShape="0" blurRad="63500" dist="25400" dir="8100000">
+              <a:srgbClr val="000000">
+                <a:alpha val="12000"/>
+              </a:srgbClr>
+            </a:outerShdw>
+          </a:effectLst>
+        </p:spPr>
+      </p:sp>
+      <p:sp>
+        <p:nvSpPr>
+          <p:cNvPr id="90" name="Shape 88"/>
+          <p:cNvSpPr/>
+          <p:nvPr/>
+        </p:nvSpPr>
+        <p:spPr>
+          <a:xfrm>
+            <a:off x="4489704" y="3191256"/>
+            <a:ext cx="1399032" cy="54864"/>
+          </a:xfrm>
+          <a:prstGeom prst="rect">
+            <a:avLst/>
+          </a:prstGeom>
+          <a:solidFill>
+            <a:srgbClr val="0891B2"/>
+          </a:solidFill>
+          <a:ln w="12700">
+            <a:solidFill>
+              <a:srgbClr val="333333"/>
+            </a:solidFill>
+            <a:prstDash val="solid"/>
+          </a:ln>
+        </p:spPr>
+      </p:sp>
+      <p:sp>
+        <p:nvSpPr>
+          <p:cNvPr id="91" name="Text 89"/>
+          <p:cNvSpPr/>
+          <p:nvPr/>
+        </p:nvSpPr>
+        <p:spPr>
+          <a:xfrm>
+            <a:off x="4535424" y="3282696"/>
+            <a:ext cx="1307592" cy="256032"/>
+          </a:xfrm>
+          <a:prstGeom prst="rect">
+            <a:avLst/>
+          </a:prstGeom>
+          <a:noFill/>
+          <a:ln/>
+        </p:spPr>
+        <p:txBody>
+          <a:bodyPr wrap="square" lIns="0" tIns="0" rIns="0" bIns="0" rtlCol="0" anchor="ctr"/>
+          <a:lstStyle/>
+          <a:p>
+            <a:pPr algn="ctr" indent="0" marL="0">
+              <a:buNone/>
+            </a:pPr>
+            <a:r>
+              <a:rPr lang="en-US" sz="900" b="1" dirty="0">
+                <a:solidFill>
+                  <a:srgbClr val="1E293B"/>
+                </a:solidFill>
+                <a:latin typeface="Calibri" pitchFamily="34" charset="0"/>
+                <a:ea typeface="Calibri" pitchFamily="34" charset="-122"/>
+                <a:cs typeface="Calibri" pitchFamily="34" charset="-120"/>
+              </a:rPr>
+              <a:t>OSSIM</a:t>
+            </a:r>
+            <a:endParaRPr lang="en-US" sz="900" dirty="0"/>
+          </a:p>
+        </p:txBody>
+      </p:sp>
+      <p:sp>
+        <p:nvSpPr>
+          <p:cNvPr id="92" name="Text 90"/>
+          <p:cNvSpPr/>
+          <p:nvPr/>
+        </p:nvSpPr>
+        <p:spPr>
+          <a:xfrm>
+            <a:off x="4526280" y="3557016"/>
+            <a:ext cx="1325880" cy="320040"/>
+          </a:xfrm>
+          <a:prstGeom prst="rect">
+            <a:avLst/>
+          </a:prstGeom>
+          <a:noFill/>
+          <a:ln/>
+        </p:spPr>
+        <p:txBody>
+          <a:bodyPr wrap="square" lIns="0" tIns="0" rIns="0" bIns="0" rtlCol="0" anchor="ctr"/>
+          <a:lstStyle/>
+          <a:p>
+            <a:pPr algn="ctr" indent="0" marL="0">
+              <a:buNone/>
+            </a:pPr>
+            <a:r>
+              <a:rPr lang="en-US" sz="750" dirty="0">
+                <a:solidFill>
+                  <a:srgbClr val="94A3B8"/>
+                </a:solidFill>
+                <a:latin typeface="Calibri" pitchFamily="34" charset="0"/>
+                <a:ea typeface="Calibri" pitchFamily="34" charset="-122"/>
+                <a:cs typeface="Calibri" pitchFamily="34" charset="-120"/>
+              </a:rPr>
+              <a:t>Basic auth · Events</a:t>
+            </a:r>
+            <a:endParaRPr lang="en-US" sz="750" dirty="0"/>
+          </a:p>
+        </p:txBody>
+      </p:sp>
+      <p:sp>
+        <p:nvSpPr>
+          <p:cNvPr id="93" name="Shape 91"/>
+          <p:cNvSpPr/>
+          <p:nvPr/>
+        </p:nvSpPr>
+        <p:spPr>
+          <a:xfrm>
+            <a:off x="5925312" y="3191256"/>
+            <a:ext cx="1399032" cy="749808"/>
+          </a:xfrm>
+          <a:prstGeom prst="rect">
+            <a:avLst/>
+          </a:prstGeom>
+          <a:solidFill>
+            <a:srgbClr val="FFFFFF"/>
+          </a:solidFill>
+          <a:ln w="6350">
+            <a:solidFill>
+              <a:srgbClr val="CBD5E1"/>
+            </a:solidFill>
+            <a:prstDash val="solid"/>
+          </a:ln>
+          <a:effectLst>
+            <a:outerShdw sx="100000" sy="100000" kx="0" ky="0" algn="bl" rotWithShape="0" blurRad="63500" dist="25400" dir="8100000">
+              <a:srgbClr val="000000">
+                <a:alpha val="12000"/>
+              </a:srgbClr>
+            </a:outerShdw>
+          </a:effectLst>
+        </p:spPr>
+      </p:sp>
+      <p:sp>
+        <p:nvSpPr>
+          <p:cNvPr id="94" name="Shape 92"/>
+          <p:cNvSpPr/>
+          <p:nvPr/>
+        </p:nvSpPr>
+        <p:spPr>
+          <a:xfrm>
+            <a:off x="5925312" y="3191256"/>
+            <a:ext cx="1399032" cy="54864"/>
+          </a:xfrm>
+          <a:prstGeom prst="rect">
+            <a:avLst/>
+          </a:prstGeom>
+          <a:solidFill>
+            <a:srgbClr val="0891B2"/>
+          </a:solidFill>
+          <a:ln w="12700">
+            <a:solidFill>
+              <a:srgbClr val="333333"/>
+            </a:solidFill>
+            <a:prstDash val="solid"/>
+          </a:ln>
+        </p:spPr>
+      </p:sp>
+      <p:sp>
+        <p:nvSpPr>
+          <p:cNvPr id="95" name="Text 93"/>
+          <p:cNvSpPr/>
+          <p:nvPr/>
+        </p:nvSpPr>
+        <p:spPr>
+          <a:xfrm>
+            <a:off x="5971032" y="3282696"/>
+            <a:ext cx="1307592" cy="256032"/>
+          </a:xfrm>
+          <a:prstGeom prst="rect">
+            <a:avLst/>
+          </a:prstGeom>
+          <a:noFill/>
+          <a:ln/>
+        </p:spPr>
+        <p:txBody>
+          <a:bodyPr wrap="square" lIns="0" tIns="0" rIns="0" bIns="0" rtlCol="0" anchor="ctr"/>
+          <a:lstStyle/>
+          <a:p>
+            <a:pPr algn="ctr" indent="0" marL="0">
+              <a:buNone/>
+            </a:pPr>
+            <a:r>
+              <a:rPr lang="en-US" sz="900" b="1" dirty="0">
+                <a:solidFill>
+                  <a:srgbClr val="1E293B"/>
+                </a:solidFill>
+                <a:latin typeface="Calibri" pitchFamily="34" charset="0"/>
+                <a:ea typeface="Calibri" pitchFamily="34" charset="-122"/>
+                <a:cs typeface="Calibri" pitchFamily="34" charset="-120"/>
+              </a:rPr>
+              <a:t>IBM QRadar</a:t>
+            </a:r>
+            <a:endParaRPr lang="en-US" sz="900" dirty="0"/>
+          </a:p>
+        </p:txBody>
+      </p:sp>
+      <p:sp>
+        <p:nvSpPr>
+          <p:cNvPr id="96" name="Text 94"/>
+          <p:cNvSpPr/>
+          <p:nvPr/>
+        </p:nvSpPr>
+        <p:spPr>
+          <a:xfrm>
+            <a:off x="5961888" y="3557016"/>
+            <a:ext cx="1325880" cy="320040"/>
+          </a:xfrm>
+          <a:prstGeom prst="rect">
+            <a:avLst/>
+          </a:prstGeom>
+          <a:noFill/>
+          <a:ln/>
+        </p:spPr>
+        <p:txBody>
+          <a:bodyPr wrap="square" lIns="0" tIns="0" rIns="0" bIns="0" rtlCol="0" anchor="ctr"/>
+          <a:lstStyle/>
+          <a:p>
+            <a:pPr algn="ctr" indent="0" marL="0">
+              <a:buNone/>
+            </a:pPr>
+            <a:r>
+              <a:rPr lang="en-US" sz="750" dirty="0">
+                <a:solidFill>
+                  <a:srgbClr val="94A3B8"/>
+                </a:solidFill>
+                <a:latin typeface="Calibri" pitchFamily="34" charset="0"/>
+                <a:ea typeface="Calibri" pitchFamily="34" charset="-122"/>
+                <a:cs typeface="Calibri" pitchFamily="34" charset="-120"/>
+              </a:rPr>
+              <a:t>API token · Offenses</a:t>
+            </a:r>
+            <a:endParaRPr lang="en-US" sz="750" dirty="0"/>
+          </a:p>
+        </p:txBody>
+      </p:sp>
+      <p:sp>
+        <p:nvSpPr>
+          <p:cNvPr id="97" name="Shape 95"/>
+          <p:cNvSpPr/>
+          <p:nvPr/>
+        </p:nvSpPr>
+        <p:spPr>
+          <a:xfrm>
+            <a:off x="7360920" y="3191256"/>
+            <a:ext cx="1399032" cy="749808"/>
+          </a:xfrm>
+          <a:prstGeom prst="rect">
+            <a:avLst/>
+          </a:prstGeom>
+          <a:solidFill>
+            <a:srgbClr val="FFFFFF"/>
+          </a:solidFill>
+          <a:ln w="6350">
+            <a:solidFill>
+              <a:srgbClr val="CBD5E1"/>
+            </a:solidFill>
+            <a:prstDash val="solid"/>
+          </a:ln>
+          <a:effectLst>
+            <a:outerShdw sx="100000" sy="100000" kx="0" ky="0" algn="bl" rotWithShape="0" blurRad="63500" dist="25400" dir="8100000">
+              <a:srgbClr val="000000">
+                <a:alpha val="12000"/>
+              </a:srgbClr>
+            </a:outerShdw>
+          </a:effectLst>
+        </p:spPr>
+      </p:sp>
+      <p:sp>
+        <p:nvSpPr>
+          <p:cNvPr id="98" name="Shape 96"/>
+          <p:cNvSpPr/>
+          <p:nvPr/>
+        </p:nvSpPr>
+        <p:spPr>
+          <a:xfrm>
+            <a:off x="7360920" y="3191256"/>
+            <a:ext cx="1399032" cy="54864"/>
+          </a:xfrm>
+          <a:prstGeom prst="rect">
+            <a:avLst/>
+          </a:prstGeom>
+          <a:solidFill>
+            <a:srgbClr val="0891B2"/>
+          </a:solidFill>
+          <a:ln w="12700">
+            <a:solidFill>
+              <a:srgbClr val="333333"/>
+            </a:solidFill>
+            <a:prstDash val="solid"/>
+          </a:ln>
+        </p:spPr>
+      </p:sp>
+      <p:sp>
+        <p:nvSpPr>
+          <p:cNvPr id="99" name="Text 97"/>
+          <p:cNvSpPr/>
+          <p:nvPr/>
+        </p:nvSpPr>
+        <p:spPr>
+          <a:xfrm>
+            <a:off x="7406640" y="3282696"/>
+            <a:ext cx="1307592" cy="256032"/>
+          </a:xfrm>
+          <a:prstGeom prst="rect">
+            <a:avLst/>
+          </a:prstGeom>
+          <a:noFill/>
+          <a:ln/>
+        </p:spPr>
+        <p:txBody>
+          <a:bodyPr wrap="square" lIns="0" tIns="0" rIns="0" bIns="0" rtlCol="0" anchor="ctr"/>
+          <a:lstStyle/>
+          <a:p>
+            <a:pPr algn="ctr" indent="0" marL="0">
+              <a:buNone/>
+            </a:pPr>
+            <a:r>
+              <a:rPr lang="en-US" sz="900" b="1" dirty="0">
+                <a:solidFill>
+                  <a:srgbClr val="1E293B"/>
+                </a:solidFill>
+                <a:latin typeface="Calibri" pitchFamily="34" charset="0"/>
+                <a:ea typeface="Calibri" pitchFamily="34" charset="-122"/>
+                <a:cs typeface="Calibri" pitchFamily="34" charset="-120"/>
+              </a:rPr>
+              <a:t>Security Onion</a:t>
+            </a:r>
+            <a:endParaRPr lang="en-US" sz="900" dirty="0"/>
+          </a:p>
+        </p:txBody>
+      </p:sp>
+      <p:sp>
+        <p:nvSpPr>
+          <p:cNvPr id="100" name="Text 98"/>
+          <p:cNvSpPr/>
+          <p:nvPr/>
+        </p:nvSpPr>
+        <p:spPr>
+          <a:xfrm>
+            <a:off x="7397496" y="3557016"/>
+            <a:ext cx="1325880" cy="320040"/>
+          </a:xfrm>
+          <a:prstGeom prst="rect">
+            <a:avLst/>
+          </a:prstGeom>
+          <a:noFill/>
+          <a:ln/>
+        </p:spPr>
+        <p:txBody>
+          <a:bodyPr wrap="square" lIns="0" tIns="0" rIns="0" bIns="0" rtlCol="0" anchor="ctr"/>
+          <a:lstStyle/>
+          <a:p>
+            <a:pPr algn="ctr" indent="0" marL="0">
+              <a:buNone/>
+            </a:pPr>
+            <a:r>
+              <a:rPr lang="en-US" sz="750" dirty="0">
+                <a:solidFill>
+                  <a:srgbClr val="94A3B8"/>
+                </a:solidFill>
+                <a:latin typeface="Calibri" pitchFamily="34" charset="0"/>
+                <a:ea typeface="Calibri" pitchFamily="34" charset="-122"/>
+                <a:cs typeface="Calibri" pitchFamily="34" charset="-120"/>
+              </a:rPr>
+              <a:t>API key · Alerts</a:t>
+            </a:r>
+            <a:endParaRPr lang="en-US" sz="750" dirty="0"/>
+          </a:p>
+        </p:txBody>
+      </p:sp>
+      <p:sp>
+        <p:nvSpPr>
+          <p:cNvPr id="101" name="Shape 99"/>
+          <p:cNvSpPr/>
+          <p:nvPr/>
+        </p:nvSpPr>
+        <p:spPr>
+          <a:xfrm>
+            <a:off x="182880" y="3995928"/>
+            <a:ext cx="1399032" cy="749808"/>
+          </a:xfrm>
+          <a:prstGeom prst="rect">
+            <a:avLst/>
+          </a:prstGeom>
+          <a:solidFill>
+            <a:srgbClr val="FFFFFF"/>
+          </a:solidFill>
+          <a:ln w="6350">
+            <a:solidFill>
+              <a:srgbClr val="CBD5E1"/>
+            </a:solidFill>
+            <a:prstDash val="solid"/>
+          </a:ln>
+          <a:effectLst>
+            <a:outerShdw sx="100000" sy="100000" kx="0" ky="0" algn="bl" rotWithShape="0" blurRad="63500" dist="25400" dir="8100000">
+              <a:srgbClr val="000000">
+                <a:alpha val="12000"/>
+              </a:srgbClr>
+            </a:outerShdw>
+          </a:effectLst>
+        </p:spPr>
+      </p:sp>
+      <p:sp>
+        <p:nvSpPr>
+          <p:cNvPr id="102" name="Shape 100"/>
+          <p:cNvSpPr/>
+          <p:nvPr/>
+        </p:nvSpPr>
+        <p:spPr>
+          <a:xfrm>
+            <a:off x="182880" y="3995928"/>
+            <a:ext cx="1399032" cy="54864"/>
+          </a:xfrm>
+          <a:prstGeom prst="rect">
+            <a:avLst/>
+          </a:prstGeom>
+          <a:solidFill>
+            <a:srgbClr val="0891B2"/>
+          </a:solidFill>
+          <a:ln w="12700">
+            <a:solidFill>
+              <a:srgbClr val="333333"/>
+            </a:solidFill>
+            <a:prstDash val="solid"/>
+          </a:ln>
+        </p:spPr>
+      </p:sp>
+      <p:sp>
+        <p:nvSpPr>
+          <p:cNvPr id="103" name="Text 101"/>
+          <p:cNvSpPr/>
+          <p:nvPr/>
+        </p:nvSpPr>
+        <p:spPr>
+          <a:xfrm>
+            <a:off x="228600" y="4087368"/>
+            <a:ext cx="1307592" cy="256032"/>
+          </a:xfrm>
+          <a:prstGeom prst="rect">
+            <a:avLst/>
+          </a:prstGeom>
+          <a:noFill/>
+          <a:ln/>
+        </p:spPr>
+        <p:txBody>
+          <a:bodyPr wrap="square" lIns="0" tIns="0" rIns="0" bIns="0" rtlCol="0" anchor="ctr"/>
+          <a:lstStyle/>
+          <a:p>
+            <a:pPr algn="ctr" indent="0" marL="0">
+              <a:buNone/>
+            </a:pPr>
+            <a:r>
+              <a:rPr lang="en-US" sz="900" b="1" dirty="0">
+                <a:solidFill>
+                  <a:srgbClr val="1E293B"/>
+                </a:solidFill>
+                <a:latin typeface="Calibri" pitchFamily="34" charset="0"/>
+                <a:ea typeface="Calibri" pitchFamily="34" charset="-122"/>
+                <a:cs typeface="Calibri" pitchFamily="34" charset="-120"/>
+              </a:rPr>
+              <a:t>MS Sentinel</a:t>
+            </a:r>
+            <a:endParaRPr lang="en-US" sz="900" dirty="0"/>
+          </a:p>
+        </p:txBody>
+      </p:sp>
+      <p:sp>
+        <p:nvSpPr>
+          <p:cNvPr id="104" name="Text 102"/>
+          <p:cNvSpPr/>
+          <p:nvPr/>
+        </p:nvSpPr>
+        <p:spPr>
+          <a:xfrm>
+            <a:off x="219456" y="4361688"/>
+            <a:ext cx="1325880" cy="320040"/>
+          </a:xfrm>
+          <a:prstGeom prst="rect">
+            <a:avLst/>
+          </a:prstGeom>
+          <a:noFill/>
+          <a:ln/>
+        </p:spPr>
+        <p:txBody>
+          <a:bodyPr wrap="square" lIns="0" tIns="0" rIns="0" bIns="0" rtlCol="0" anchor="ctr"/>
+          <a:lstStyle/>
+          <a:p>
+            <a:pPr algn="ctr" indent="0" marL="0">
+              <a:buNone/>
+            </a:pPr>
+            <a:r>
+              <a:rPr lang="en-US" sz="750" dirty="0">
+                <a:solidFill>
+                  <a:srgbClr val="94A3B8"/>
+                </a:solidFill>
+                <a:latin typeface="Calibri" pitchFamily="34" charset="0"/>
+                <a:ea typeface="Calibri" pitchFamily="34" charset="-122"/>
+                <a:cs typeface="Calibri" pitchFamily="34" charset="-120"/>
+              </a:rPr>
+              <a:t>OAuth2/AAD · Incidents</a:t>
+            </a:r>
+            <a:endParaRPr lang="en-US" sz="750" dirty="0"/>
+          </a:p>
+        </p:txBody>
+      </p:sp>
+      <p:sp>
+        <p:nvSpPr>
+          <p:cNvPr id="105" name="Shape 103"/>
+          <p:cNvSpPr/>
+          <p:nvPr/>
+        </p:nvSpPr>
+        <p:spPr>
+          <a:xfrm>
+            <a:off x="1618488" y="3995928"/>
+            <a:ext cx="1399032" cy="749808"/>
+          </a:xfrm>
+          <a:prstGeom prst="rect">
+            <a:avLst/>
+          </a:prstGeom>
+          <a:solidFill>
+            <a:srgbClr val="FFFFFF"/>
+          </a:solidFill>
+          <a:ln w="6350">
+            <a:solidFill>
+              <a:srgbClr val="CBD5E1"/>
+            </a:solidFill>
+            <a:prstDash val="solid"/>
+          </a:ln>
+          <a:effectLst>
+            <a:outerShdw sx="100000" sy="100000" kx="0" ky="0" algn="bl" rotWithShape="0" blurRad="63500" dist="25400" dir="8100000">
+              <a:srgbClr val="000000">
+                <a:alpha val="12000"/>
+              </a:srgbClr>
+            </a:outerShdw>
+          </a:effectLst>
+        </p:spPr>
+      </p:sp>
+      <p:sp>
+        <p:nvSpPr>
+          <p:cNvPr id="106" name="Shape 104"/>
+          <p:cNvSpPr/>
+          <p:nvPr/>
+        </p:nvSpPr>
+        <p:spPr>
+          <a:xfrm>
+            <a:off x="1618488" y="3995928"/>
+            <a:ext cx="1399032" cy="54864"/>
+          </a:xfrm>
+          <a:prstGeom prst="rect">
+            <a:avLst/>
+          </a:prstGeom>
+          <a:solidFill>
+            <a:srgbClr val="0891B2"/>
+          </a:solidFill>
+          <a:ln w="12700">
+            <a:solidFill>
+              <a:srgbClr val="333333"/>
+            </a:solidFill>
+            <a:prstDash val="solid"/>
+          </a:ln>
+        </p:spPr>
+      </p:sp>
+      <p:sp>
+        <p:nvSpPr>
+          <p:cNvPr id="107" name="Text 105"/>
+          <p:cNvSpPr/>
+          <p:nvPr/>
+        </p:nvSpPr>
+        <p:spPr>
+          <a:xfrm>
+            <a:off x="1664208" y="4087368"/>
+            <a:ext cx="1307592" cy="256032"/>
+          </a:xfrm>
+          <a:prstGeom prst="rect">
+            <a:avLst/>
+          </a:prstGeom>
+          <a:noFill/>
+          <a:ln/>
+        </p:spPr>
+        <p:txBody>
+          <a:bodyPr wrap="square" lIns="0" tIns="0" rIns="0" bIns="0" rtlCol="0" anchor="ctr"/>
+          <a:lstStyle/>
+          <a:p>
+            <a:pPr algn="ctr" indent="0" marL="0">
+              <a:buNone/>
+            </a:pPr>
+            <a:r>
+              <a:rPr lang="en-US" sz="900" b="1" dirty="0">
+                <a:solidFill>
+                  <a:srgbClr val="1E293B"/>
+                </a:solidFill>
+                <a:latin typeface="Calibri" pitchFamily="34" charset="0"/>
+                <a:ea typeface="Calibri" pitchFamily="34" charset="-122"/>
+                <a:cs typeface="Calibri" pitchFamily="34" charset="-120"/>
+              </a:rPr>
+              <a:t>Snort IDS</a:t>
+            </a:r>
+            <a:endParaRPr lang="en-US" sz="900" dirty="0"/>
+          </a:p>
+        </p:txBody>
+      </p:sp>
+      <p:sp>
+        <p:nvSpPr>
+          <p:cNvPr id="108" name="Text 106"/>
+          <p:cNvSpPr/>
+          <p:nvPr/>
+        </p:nvSpPr>
+        <p:spPr>
+          <a:xfrm>
+            <a:off x="1655064" y="4361688"/>
+            <a:ext cx="1325880" cy="320040"/>
+          </a:xfrm>
+          <a:prstGeom prst="rect">
+            <a:avLst/>
+          </a:prstGeom>
+          <a:noFill/>
+          <a:ln/>
+        </p:spPr>
+        <p:txBody>
+          <a:bodyPr wrap="square" lIns="0" tIns="0" rIns="0" bIns="0" rtlCol="0" anchor="ctr"/>
+          <a:lstStyle/>
+          <a:p>
+            <a:pPr algn="ctr" indent="0" marL="0">
+              <a:buNone/>
+            </a:pPr>
+            <a:r>
+              <a:rPr lang="en-US" sz="750" dirty="0">
+                <a:solidFill>
+                  <a:srgbClr val="94A3B8"/>
+                </a:solidFill>
+                <a:latin typeface="Calibri" pitchFamily="34" charset="0"/>
+                <a:ea typeface="Calibri" pitchFamily="34" charset="-122"/>
+                <a:cs typeface="Calibri" pitchFamily="34" charset="-120"/>
+              </a:rPr>
+              <a:t>File/Syslog · Rules</a:t>
+            </a:r>
+            <a:endParaRPr lang="en-US" sz="750" dirty="0"/>
+          </a:p>
+        </p:txBody>
+      </p:sp>
+      <p:sp>
+        <p:nvSpPr>
+          <p:cNvPr id="109" name="Shape 107"/>
+          <p:cNvSpPr/>
+          <p:nvPr/>
+        </p:nvSpPr>
+        <p:spPr>
+          <a:xfrm>
+            <a:off x="3054096" y="3995928"/>
+            <a:ext cx="1399032" cy="749808"/>
+          </a:xfrm>
+          <a:prstGeom prst="rect">
+            <a:avLst/>
+          </a:prstGeom>
+          <a:solidFill>
+            <a:srgbClr val="FFFFFF"/>
+          </a:solidFill>
+          <a:ln w="6350">
+            <a:solidFill>
+              <a:srgbClr val="CBD5E1"/>
+            </a:solidFill>
+            <a:prstDash val="solid"/>
+          </a:ln>
+          <a:effectLst>
+            <a:outerShdw sx="100000" sy="100000" kx="0" ky="0" algn="bl" rotWithShape="0" blurRad="63500" dist="25400" dir="8100000">
+              <a:srgbClr val="000000">
+                <a:alpha val="12000"/>
+              </a:srgbClr>
+            </a:outerShdw>
+          </a:effectLst>
+        </p:spPr>
+      </p:sp>
+      <p:sp>
+        <p:nvSpPr>
+          <p:cNvPr id="110" name="Shape 108"/>
+          <p:cNvSpPr/>
+          <p:nvPr/>
+        </p:nvSpPr>
+        <p:spPr>
+          <a:xfrm>
+            <a:off x="3054096" y="3995928"/>
+            <a:ext cx="1399032" cy="54864"/>
+          </a:xfrm>
+          <a:prstGeom prst="rect">
+            <a:avLst/>
+          </a:prstGeom>
+          <a:solidFill>
+            <a:srgbClr val="0891B2"/>
+          </a:solidFill>
+          <a:ln w="12700">
+            <a:solidFill>
+              <a:srgbClr val="333333"/>
+            </a:solidFill>
+            <a:prstDash val="solid"/>
+          </a:ln>
+        </p:spPr>
+      </p:sp>
+      <p:sp>
+        <p:nvSpPr>
+          <p:cNvPr id="111" name="Text 109"/>
+          <p:cNvSpPr/>
+          <p:nvPr/>
+        </p:nvSpPr>
+        <p:spPr>
+          <a:xfrm>
+            <a:off x="3099816" y="4087368"/>
+            <a:ext cx="1307592" cy="256032"/>
+          </a:xfrm>
+          <a:prstGeom prst="rect">
+            <a:avLst/>
+          </a:prstGeom>
+          <a:noFill/>
+          <a:ln/>
+        </p:spPr>
+        <p:txBody>
+          <a:bodyPr wrap="square" lIns="0" tIns="0" rIns="0" bIns="0" rtlCol="0" anchor="ctr"/>
+          <a:lstStyle/>
+          <a:p>
+            <a:pPr algn="ctr" indent="0" marL="0">
+              <a:buNone/>
+            </a:pPr>
+            <a:r>
+              <a:rPr lang="en-US" sz="900" b="1" dirty="0">
+                <a:solidFill>
+                  <a:srgbClr val="1E293B"/>
+                </a:solidFill>
+                <a:latin typeface="Calibri" pitchFamily="34" charset="0"/>
+                <a:ea typeface="Calibri" pitchFamily="34" charset="-122"/>
+                <a:cs typeface="Calibri" pitchFamily="34" charset="-120"/>
+              </a:rPr>
+              <a:t>Suricata</a:t>
+            </a:r>
+            <a:endParaRPr lang="en-US" sz="900" dirty="0"/>
+          </a:p>
+        </p:txBody>
+      </p:sp>
+      <p:sp>
+        <p:nvSpPr>
+          <p:cNvPr id="112" name="Text 110"/>
+          <p:cNvSpPr/>
+          <p:nvPr/>
+        </p:nvSpPr>
+        <p:spPr>
+          <a:xfrm>
+            <a:off x="3090672" y="4361688"/>
+            <a:ext cx="1325880" cy="320040"/>
+          </a:xfrm>
+          <a:prstGeom prst="rect">
+            <a:avLst/>
+          </a:prstGeom>
+          <a:noFill/>
+          <a:ln/>
+        </p:spPr>
+        <p:txBody>
+          <a:bodyPr wrap="square" lIns="0" tIns="0" rIns="0" bIns="0" rtlCol="0" anchor="ctr"/>
+          <a:lstStyle/>
+          <a:p>
+            <a:pPr algn="ctr" indent="0" marL="0">
+              <a:buNone/>
+            </a:pPr>
+            <a:r>
+              <a:rPr lang="en-US" sz="750" dirty="0">
+                <a:solidFill>
+                  <a:srgbClr val="94A3B8"/>
+                </a:solidFill>
+                <a:latin typeface="Calibri" pitchFamily="34" charset="0"/>
+                <a:ea typeface="Calibri" pitchFamily="34" charset="-122"/>
+                <a:cs typeface="Calibri" pitchFamily="34" charset="-120"/>
+              </a:rPr>
+              <a:t>File/Syslog · EVE JSON</a:t>
+            </a:r>
+            <a:endParaRPr lang="en-US" sz="750" dirty="0"/>
+          </a:p>
+        </p:txBody>
+      </p:sp>
+      <p:sp>
+        <p:nvSpPr>
+          <p:cNvPr id="113" name="Shape 111"/>
+          <p:cNvSpPr/>
+          <p:nvPr/>
+        </p:nvSpPr>
+        <p:spPr>
+          <a:xfrm>
+            <a:off x="4489704" y="3995928"/>
+            <a:ext cx="1399032" cy="749808"/>
+          </a:xfrm>
+          <a:prstGeom prst="rect">
+            <a:avLst/>
+          </a:prstGeom>
+          <a:solidFill>
+            <a:srgbClr val="FFFFFF"/>
+          </a:solidFill>
+          <a:ln w="6350">
+            <a:solidFill>
+              <a:srgbClr val="CBD5E1"/>
+            </a:solidFill>
+            <a:prstDash val="solid"/>
+          </a:ln>
+          <a:effectLst>
+            <a:outerShdw sx="100000" sy="100000" kx="0" ky="0" algn="bl" rotWithShape="0" blurRad="63500" dist="25400" dir="8100000">
+              <a:srgbClr val="000000">
+                <a:alpha val="12000"/>
+              </a:srgbClr>
+            </a:outerShdw>
+          </a:effectLst>
+        </p:spPr>
+      </p:sp>
+      <p:sp>
+        <p:nvSpPr>
+          <p:cNvPr id="114" name="Shape 112"/>
+          <p:cNvSpPr/>
+          <p:nvPr/>
+        </p:nvSpPr>
+        <p:spPr>
+          <a:xfrm>
+            <a:off x="4489704" y="3995928"/>
+            <a:ext cx="1399032" cy="54864"/>
+          </a:xfrm>
+          <a:prstGeom prst="rect">
+            <a:avLst/>
+          </a:prstGeom>
+          <a:solidFill>
+            <a:srgbClr val="0891B2"/>
+          </a:solidFill>
+          <a:ln w="12700">
+            <a:solidFill>
+              <a:srgbClr val="333333"/>
+            </a:solidFill>
+            <a:prstDash val="solid"/>
+          </a:ln>
+        </p:spPr>
+      </p:sp>
+      <p:sp>
+        <p:nvSpPr>
+          <p:cNvPr id="115" name="Text 113"/>
+          <p:cNvSpPr/>
+          <p:nvPr/>
+        </p:nvSpPr>
+        <p:spPr>
+          <a:xfrm>
+            <a:off x="4535424" y="4087368"/>
+            <a:ext cx="1307592" cy="256032"/>
+          </a:xfrm>
+          <a:prstGeom prst="rect">
+            <a:avLst/>
+          </a:prstGeom>
+          <a:noFill/>
+          <a:ln/>
+        </p:spPr>
+        <p:txBody>
+          <a:bodyPr wrap="square" lIns="0" tIns="0" rIns="0" bIns="0" rtlCol="0" anchor="ctr"/>
+          <a:lstStyle/>
+          <a:p>
+            <a:pPr algn="ctr" indent="0" marL="0">
+              <a:buNone/>
+            </a:pPr>
+            <a:r>
+              <a:rPr lang="en-US" sz="900" b="1" dirty="0">
+                <a:solidFill>
+                  <a:srgbClr val="1E293B"/>
+                </a:solidFill>
+                <a:latin typeface="Calibri" pitchFamily="34" charset="0"/>
+                <a:ea typeface="Calibri" pitchFamily="34" charset="-122"/>
+                <a:cs typeface="Calibri" pitchFamily="34" charset="-120"/>
+              </a:rPr>
+              <a:t>Wazuh</a:t>
+            </a:r>
+            <a:endParaRPr lang="en-US" sz="900" dirty="0"/>
+          </a:p>
+        </p:txBody>
+      </p:sp>
+      <p:sp>
+        <p:nvSpPr>
+          <p:cNvPr id="116" name="Text 114"/>
+          <p:cNvSpPr/>
+          <p:nvPr/>
+        </p:nvSpPr>
+        <p:spPr>
+          <a:xfrm>
+            <a:off x="4526280" y="4361688"/>
+            <a:ext cx="1325880" cy="320040"/>
+          </a:xfrm>
+          <a:prstGeom prst="rect">
+            <a:avLst/>
+          </a:prstGeom>
+          <a:noFill/>
+          <a:ln/>
+        </p:spPr>
+        <p:txBody>
+          <a:bodyPr wrap="square" lIns="0" tIns="0" rIns="0" bIns="0" rtlCol="0" anchor="ctr"/>
+          <a:lstStyle/>
+          <a:p>
+            <a:pPr algn="ctr" indent="0" marL="0">
+              <a:buNone/>
+            </a:pPr>
+            <a:r>
+              <a:rPr lang="en-US" sz="750" dirty="0">
+                <a:solidFill>
+                  <a:srgbClr val="94A3B8"/>
+                </a:solidFill>
+                <a:latin typeface="Calibri" pitchFamily="34" charset="0"/>
+                <a:ea typeface="Calibri" pitchFamily="34" charset="-122"/>
+                <a:cs typeface="Calibri" pitchFamily="34" charset="-120"/>
+              </a:rPr>
+              <a:t>API key/Basic · Alerts</a:t>
+            </a:r>
+            <a:endParaRPr lang="en-US" sz="750" dirty="0"/>
+          </a:p>
+        </p:txBody>
+      </p:sp>
+      <p:sp>
+        <p:nvSpPr>
+          <p:cNvPr id="117" name="Shape 115"/>
+          <p:cNvSpPr/>
+          <p:nvPr/>
+        </p:nvSpPr>
+        <p:spPr>
+          <a:xfrm>
+            <a:off x="5925312" y="3995928"/>
+            <a:ext cx="1399032" cy="749808"/>
+          </a:xfrm>
+          <a:prstGeom prst="rect">
+            <a:avLst/>
+          </a:prstGeom>
+          <a:solidFill>
+            <a:srgbClr val="FFFFFF"/>
+          </a:solidFill>
+          <a:ln w="6350">
+            <a:solidFill>
+              <a:srgbClr val="CBD5E1"/>
+            </a:solidFill>
+            <a:prstDash val="solid"/>
+          </a:ln>
+          <a:effectLst>
+            <a:outerShdw sx="100000" sy="100000" kx="0" ky="0" algn="bl" rotWithShape="0" blurRad="63500" dist="25400" dir="8100000">
+              <a:srgbClr val="000000">
+                <a:alpha val="12000"/>
+              </a:srgbClr>
+            </a:outerShdw>
+          </a:effectLst>
+        </p:spPr>
+      </p:sp>
+      <p:sp>
+        <p:nvSpPr>
+          <p:cNvPr id="118" name="Shape 116"/>
+          <p:cNvSpPr/>
+          <p:nvPr/>
+        </p:nvSpPr>
+        <p:spPr>
+          <a:xfrm>
+            <a:off x="5925312" y="3995928"/>
+            <a:ext cx="1399032" cy="54864"/>
+          </a:xfrm>
+          <a:prstGeom prst="rect">
+            <a:avLst/>
+          </a:prstGeom>
+          <a:solidFill>
+            <a:srgbClr val="0891B2"/>
+          </a:solidFill>
+          <a:ln w="12700">
+            <a:solidFill>
+              <a:srgbClr val="333333"/>
+            </a:solidFill>
+            <a:prstDash val="solid"/>
+          </a:ln>
+        </p:spPr>
+      </p:sp>
+      <p:sp>
+        <p:nvSpPr>
+          <p:cNvPr id="119" name="Text 117"/>
+          <p:cNvSpPr/>
+          <p:nvPr/>
+        </p:nvSpPr>
+        <p:spPr>
+          <a:xfrm>
+            <a:off x="5971032" y="4087368"/>
+            <a:ext cx="1307592" cy="256032"/>
+          </a:xfrm>
+          <a:prstGeom prst="rect">
+            <a:avLst/>
+          </a:prstGeom>
+          <a:noFill/>
+          <a:ln/>
+        </p:spPr>
+        <p:txBody>
+          <a:bodyPr wrap="square" lIns="0" tIns="0" rIns="0" bIns="0" rtlCol="0" anchor="ctr"/>
+          <a:lstStyle/>
+          <a:p>
+            <a:pPr algn="ctr" indent="0" marL="0">
+              <a:buNone/>
+            </a:pPr>
+            <a:r>
+              <a:rPr lang="en-US" sz="900" b="1" dirty="0">
+                <a:solidFill>
+                  <a:srgbClr val="1E293B"/>
+                </a:solidFill>
+                <a:latin typeface="Calibri" pitchFamily="34" charset="0"/>
+                <a:ea typeface="Calibri" pitchFamily="34" charset="-122"/>
+                <a:cs typeface="Calibri" pitchFamily="34" charset="-120"/>
+              </a:rPr>
+              <a:t>Zeek</a:t>
+            </a:r>
+            <a:endParaRPr lang="en-US" sz="900" dirty="0"/>
+          </a:p>
+        </p:txBody>
+      </p:sp>
+      <p:sp>
+        <p:nvSpPr>
+          <p:cNvPr id="120" name="Text 118"/>
+          <p:cNvSpPr/>
+          <p:nvPr/>
+        </p:nvSpPr>
+        <p:spPr>
+          <a:xfrm>
+            <a:off x="5961888" y="4361688"/>
+            <a:ext cx="1325880" cy="320040"/>
+          </a:xfrm>
+          <a:prstGeom prst="rect">
+            <a:avLst/>
+          </a:prstGeom>
+          <a:noFill/>
+          <a:ln/>
+        </p:spPr>
+        <p:txBody>
+          <a:bodyPr wrap="square" lIns="0" tIns="0" rIns="0" bIns="0" rtlCol="0" anchor="ctr"/>
+          <a:lstStyle/>
+          <a:p>
+            <a:pPr algn="ctr" indent="0" marL="0">
+              <a:buNone/>
+            </a:pPr>
+            <a:r>
+              <a:rPr lang="en-US" sz="750" dirty="0">
+                <a:solidFill>
+                  <a:srgbClr val="94A3B8"/>
+                </a:solidFill>
+                <a:latin typeface="Calibri" pitchFamily="34" charset="0"/>
+                <a:ea typeface="Calibri" pitchFamily="34" charset="-122"/>
+                <a:cs typeface="Calibri" pitchFamily="34" charset="-120"/>
+              </a:rPr>
+              <a:t>File/Syslog · Conn logs</a:t>
+            </a:r>
+            <a:endParaRPr lang="en-US" sz="750" dirty="0"/>
+          </a:p>
+        </p:txBody>
+      </p:sp>
+      <p:sp>
+        <p:nvSpPr>
+          <p:cNvPr id="121" name="Shape 119"/>
           <p:cNvSpPr/>
           <p:nvPr/>
         </p:nvSpPr>
@@ -17382,7 +20629,7 @@
       </p:sp>
       <p:sp>
         <p:nvSpPr>
-          <p:cNvPr id="66" name="Text 64"/>
+          <p:cNvPr id="122" name="Text 120"/>
           <p:cNvSpPr/>
           <p:nvPr/>
         </p:nvSpPr>
@@ -17421,7 +20668,7 @@
       </p:sp>
       <p:sp>
         <p:nvSpPr>
-          <p:cNvPr id="67" name="Shape 65"/>
+          <p:cNvPr id="123" name="Shape 121"/>
           <p:cNvSpPr/>
           <p:nvPr/>
         </p:nvSpPr>
@@ -17446,7 +20693,7 @@
       </p:sp>
       <p:sp>
         <p:nvSpPr>
-          <p:cNvPr id="68" name="Text 66"/>
+          <p:cNvPr id="124" name="Text 122"/>
           <p:cNvSpPr/>
           <p:nvPr/>
         </p:nvSpPr>
@@ -17485,7 +20732,7 @@
       </p:sp>
       <p:sp>
         <p:nvSpPr>
-          <p:cNvPr id="69" name="Shape 67"/>
+          <p:cNvPr id="125" name="Shape 123"/>
           <p:cNvSpPr/>
           <p:nvPr/>
         </p:nvSpPr>
@@ -17510,7 +20757,7 @@
       </p:sp>
       <p:sp>
         <p:nvSpPr>
-          <p:cNvPr id="70" name="Text 68"/>
+          <p:cNvPr id="126" name="Text 124"/>
           <p:cNvSpPr/>
           <p:nvPr/>
         </p:nvSpPr>

--- a/GNAT-Presentation.pptx
+++ b/GNAT-Presentation.pptx
@@ -8983,7 +8983,7 @@
                 <a:ea typeface="Calibri" pitchFamily="34" charset="-122"/>
                 <a:cs typeface="Calibri" pitchFamily="34" charset="-120"/>
               </a:rPr>
-              <a:t>API changes affect one connector file, not every script. Tests cover all 26 connectors uniformly. One library version number covers the entire integration stack.</a:t>
+              <a:t>API changes affect one connector file, not every script. Tests cover all 29 connectors uniformly. One library version number covers the entire integration stack.</a:t>
             </a:r>
             <a:endParaRPr lang="en-US" sz="950" dirty="0"/>
           </a:p>
@@ -11008,7 +11008,7 @@
                 <a:ea typeface="Calibri" pitchFamily="34" charset="-122"/>
                 <a:cs typeface="Calibri" pitchFamily="34" charset="-120"/>
               </a:rPr>
-              <a:t>26</a:t>
+              <a:t>29</a:t>
             </a:r>
             <a:endParaRPr lang="en-US" sz="4400" dirty="0"/>
           </a:p>
@@ -14347,7 +14347,7 @@
                 <a:ea typeface="Calibri" pitchFamily="34" charset="-122"/>
                 <a:cs typeface="Calibri" pitchFamily="34" charset="-120"/>
               </a:rPr>
-              <a:t>26 connectors · STIX 2.1 · Ingest + Export pipelines</a:t>
+              <a:t>29 connectors · STIX 2.1 · Ingest + Export pipelines</a:t>
             </a:r>
             <a:endParaRPr lang="en-US" sz="1400" dirty="0"/>
           </a:p>
@@ -14701,7 +14701,7 @@
                 <a:ea typeface="Calibri" pitchFamily="34" charset="-122"/>
                 <a:cs typeface="Calibri" pitchFamily="34" charset="-120"/>
               </a:rPr>
-              <a:t>26 Different APIs</a:t>
+              <a:t>29 Different APIs</a:t>
             </a:r>
             <a:endParaRPr lang="en-US" sz="1200" dirty="0"/>
           </a:p>
@@ -16355,7 +16355,7 @@
                 <a:ea typeface="Calibri" pitchFamily="34" charset="-122"/>
                 <a:cs typeface="Calibri" pitchFamily="34" charset="-120"/>
               </a:rPr>
-              <a:t>CONNECTOR LAYER (26 platforms)</a:t>
+              <a:t>CONNECTOR LAYER (29 platforms)</a:t>
             </a:r>
             <a:endParaRPr lang="en-US" sz="1000" dirty="0"/>
           </a:p>
@@ -16681,7 +16681,7 @@
                 <a:ea typeface="Calibri" pitchFamily="34" charset="-122"/>
                 <a:cs typeface="Calibri" pitchFamily="34" charset="-120"/>
               </a:rPr>
-              <a:t>26 Platform Connectors — One Interface</a:t>
+              <a:t>29 Platform Connectors — One Interface</a:t>
             </a:r>
             <a:endParaRPr lang="en-US" sz="2000" dirty="0"/>
           </a:p>

--- a/GNAT-Presentation.pptx
+++ b/GNAT-Presentation.pptx
@@ -3375,7 +3375,7 @@
                 <a:ea typeface="Calibri" pitchFamily="34" charset="-122"/>
                 <a:cs typeface="Calibri" pitchFamily="34" charset="-120"/>
               </a:rPr>
-              <a:t>60+ Connectors</a:t>
+              <a:t>95 Connectors</a:t>
             </a:r>
             <a:endParaRPr lang="en-US" sz="1000" dirty="0"/>
           </a:p>
@@ -3709,7 +3709,7 @@
                 <a:ea typeface="Calibri" pitchFamily="34" charset="-122"/>
                 <a:cs typeface="Calibri" pitchFamily="34" charset="-120"/>
               </a:rPr>
-              <a:t>Version 1.1  ·  Python 3.9+  ·  STIX 2.1  ·  60+ Platform Connectors  ·  1,500+ Tests</a:t>
+              <a:t>Version 1.1  ·  Python 3.9+  ·  STIX 2.1  ·  95 Platform Connectors  ·  1,500+ Tests</a:t>
             </a:r>
             <a:endParaRPr lang="en-US" sz="1000" dirty="0"/>
           </a:p>
@@ -4888,30 +4888,6 @@
         </p:nvSpPr>
         <p:spPr>
           <a:xfrm>
-            <a:off x="2468880" y="1645920"/>
-            <a:ext cx="0" cy="182880"/>
-          </a:xfrm>
-          <a:prstGeom prst="line">
-            <a:avLst/>
-          </a:prstGeom>
-          <a:noFill/>
-          <a:ln w="25400">
-            <a:solidFill>
-              <a:srgbClr val="06B6D4"/>
-            </a:solidFill>
-            <a:prstDash val="solid"/>
-            <a:tailEnd type="triangle"/>
-          </a:ln>
-        </p:spPr>
-      </p:sp>
-      <p:sp>
-        <p:nvSpPr>
-          <p:cNvPr id="9" name="Shape 7"/>
-          <p:cNvSpPr/>
-          <p:nvPr/>
-        </p:nvSpPr>
-        <p:spPr>
-          <a:xfrm>
             <a:off x="320040" y="1828800"/>
             <a:ext cx="5029200" cy="777240"/>
           </a:xfrm>
@@ -4931,7 +4907,7 @@
       </p:sp>
       <p:sp>
         <p:nvSpPr>
-          <p:cNvPr id="10" name="Text 8"/>
+          <p:cNvPr id="9" name="Text 7"/>
           <p:cNvSpPr/>
           <p:nvPr/>
         </p:nvSpPr>
@@ -4970,7 +4946,7 @@
       </p:sp>
       <p:sp>
         <p:nvSpPr>
-          <p:cNvPr id="11" name="Text 9"/>
+          <p:cNvPr id="10" name="Text 8"/>
           <p:cNvSpPr/>
           <p:nvPr/>
         </p:nvSpPr>
@@ -5009,31 +4985,7 @@
       </p:sp>
       <p:sp>
         <p:nvSpPr>
-          <p:cNvPr id="12" name="Shape 10"/>
-          <p:cNvSpPr/>
-          <p:nvPr/>
-        </p:nvSpPr>
-        <p:spPr>
-          <a:xfrm>
-            <a:off x="2468880" y="2606040"/>
-            <a:ext cx="0" cy="182880"/>
-          </a:xfrm>
-          <a:prstGeom prst="line">
-            <a:avLst/>
-          </a:prstGeom>
-          <a:noFill/>
-          <a:ln w="25400">
-            <a:solidFill>
-              <a:srgbClr val="06B6D4"/>
-            </a:solidFill>
-            <a:prstDash val="solid"/>
-            <a:tailEnd type="triangle"/>
-          </a:ln>
-        </p:spPr>
-      </p:sp>
-      <p:sp>
-        <p:nvSpPr>
-          <p:cNvPr id="13" name="Shape 11"/>
+          <p:cNvPr id="11" name="Shape 9"/>
           <p:cNvSpPr/>
           <p:nvPr/>
         </p:nvSpPr>
@@ -5058,7 +5010,7 @@
       </p:sp>
       <p:sp>
         <p:nvSpPr>
-          <p:cNvPr id="14" name="Text 12"/>
+          <p:cNvPr id="12" name="Text 10"/>
           <p:cNvSpPr/>
           <p:nvPr/>
         </p:nvSpPr>
@@ -5097,7 +5049,7 @@
       </p:sp>
       <p:sp>
         <p:nvSpPr>
-          <p:cNvPr id="15" name="Text 13"/>
+          <p:cNvPr id="13" name="Text 11"/>
           <p:cNvSpPr/>
           <p:nvPr/>
         </p:nvSpPr>
@@ -5136,7 +5088,7 @@
       </p:sp>
       <p:sp>
         <p:nvSpPr>
-          <p:cNvPr id="16" name="Text 14"/>
+          <p:cNvPr id="14" name="Text 12"/>
           <p:cNvSpPr/>
           <p:nvPr/>
         </p:nvSpPr>
@@ -6442,7 +6394,7 @@
       </p:graphicFrame>
       <p:sp>
         <p:nvSpPr>
-          <p:cNvPr id="18" name="Text 15"/>
+          <p:cNvPr id="16" name="Text 13"/>
           <p:cNvSpPr/>
           <p:nvPr/>
         </p:nvSpPr>
@@ -7954,30 +7906,6 @@
         </p:nvSpPr>
         <p:spPr>
           <a:xfrm>
-            <a:off x="2221992" y="4160520"/>
-            <a:ext cx="219456" cy="0"/>
-          </a:xfrm>
-          <a:prstGeom prst="line">
-            <a:avLst/>
-          </a:prstGeom>
-          <a:noFill/>
-          <a:ln w="19050">
-            <a:solidFill>
-              <a:srgbClr val="06B6D4"/>
-            </a:solidFill>
-            <a:prstDash val="solid"/>
-            <a:tailEnd type="triangle"/>
-          </a:ln>
-        </p:spPr>
-      </p:sp>
-      <p:sp>
-        <p:nvSpPr>
-          <p:cNvPr id="42" name="Shape 40"/>
-          <p:cNvSpPr/>
-          <p:nvPr/>
-        </p:nvSpPr>
-        <p:spPr>
-          <a:xfrm>
             <a:off x="2468880" y="3794760"/>
             <a:ext cx="1874520" cy="731520"/>
           </a:xfrm>
@@ -7997,7 +7925,7 @@
       </p:sp>
       <p:sp>
         <p:nvSpPr>
-          <p:cNvPr id="43" name="Text 41"/>
+          <p:cNvPr id="42" name="Text 40"/>
           <p:cNvSpPr/>
           <p:nvPr/>
         </p:nvSpPr>
@@ -8053,31 +7981,7 @@
       </p:sp>
       <p:sp>
         <p:nvSpPr>
-          <p:cNvPr id="44" name="Shape 42"/>
-          <p:cNvSpPr/>
-          <p:nvPr/>
-        </p:nvSpPr>
-        <p:spPr>
-          <a:xfrm>
-            <a:off x="4370832" y="4160520"/>
-            <a:ext cx="219456" cy="0"/>
-          </a:xfrm>
-          <a:prstGeom prst="line">
-            <a:avLst/>
-          </a:prstGeom>
-          <a:noFill/>
-          <a:ln w="19050">
-            <a:solidFill>
-              <a:srgbClr val="06B6D4"/>
-            </a:solidFill>
-            <a:prstDash val="solid"/>
-            <a:tailEnd type="triangle"/>
-          </a:ln>
-        </p:spPr>
-      </p:sp>
-      <p:sp>
-        <p:nvSpPr>
-          <p:cNvPr id="45" name="Shape 43"/>
+          <p:cNvPr id="43" name="Shape 41"/>
           <p:cNvSpPr/>
           <p:nvPr/>
         </p:nvSpPr>
@@ -8102,7 +8006,7 @@
       </p:sp>
       <p:sp>
         <p:nvSpPr>
-          <p:cNvPr id="46" name="Text 44"/>
+          <p:cNvPr id="44" name="Text 42"/>
           <p:cNvSpPr/>
           <p:nvPr/>
         </p:nvSpPr>
@@ -8158,31 +8062,7 @@
       </p:sp>
       <p:sp>
         <p:nvSpPr>
-          <p:cNvPr id="47" name="Shape 45"/>
-          <p:cNvSpPr/>
-          <p:nvPr/>
-        </p:nvSpPr>
-        <p:spPr>
-          <a:xfrm>
-            <a:off x="6519672" y="4160520"/>
-            <a:ext cx="219456" cy="0"/>
-          </a:xfrm>
-          <a:prstGeom prst="line">
-            <a:avLst/>
-          </a:prstGeom>
-          <a:noFill/>
-          <a:ln w="19050">
-            <a:solidFill>
-              <a:srgbClr val="06B6D4"/>
-            </a:solidFill>
-            <a:prstDash val="solid"/>
-            <a:tailEnd type="triangle"/>
-          </a:ln>
-        </p:spPr>
-      </p:sp>
-      <p:sp>
-        <p:nvSpPr>
-          <p:cNvPr id="48" name="Shape 46"/>
+          <p:cNvPr id="45" name="Shape 43"/>
           <p:cNvSpPr/>
           <p:nvPr/>
         </p:nvSpPr>
@@ -8207,7 +8087,7 @@
       </p:sp>
       <p:sp>
         <p:nvSpPr>
-          <p:cNvPr id="49" name="Text 47"/>
+          <p:cNvPr id="46" name="Text 44"/>
           <p:cNvSpPr/>
           <p:nvPr/>
         </p:nvSpPr>
@@ -19069,7 +18949,7 @@
                 <a:ea typeface="Calibri" pitchFamily="34" charset="-122"/>
                 <a:cs typeface="Calibri" pitchFamily="34" charset="-120"/>
               </a:rPr>
-              <a:t>Every platform exposes get_object(), list_objects(), upsert_object(), to_stix(), from_stix(). Analysts learn one mental model once and it works across 60+ platforms.</a:t>
+              <a:t>Every platform exposes get_object(), list_objects(), upsert_object(), to_stix(), from_stix(). Analysts learn one mental model once and it works across 95 platforms.</a:t>
             </a:r>
             <a:endParaRPr lang="en-US" sz="950" dirty="0"/>
           </a:p>
@@ -20992,7 +20872,7 @@
                 <a:ea typeface="Calibri" pitchFamily="34" charset="-122"/>
                 <a:cs typeface="Calibri" pitchFamily="34" charset="-120"/>
               </a:rPr>
-              <a:t>60+</a:t>
+              <a:t>95</a:t>
             </a:r>
             <a:endParaRPr lang="en-US" sz="4200" dirty="0"/>
           </a:p>
@@ -22186,30 +22066,6 @@
         </p:nvSpPr>
         <p:spPr>
           <a:xfrm>
-            <a:off x="1673352" y="1069848"/>
-            <a:ext cx="91440" cy="0"/>
-          </a:xfrm>
-          <a:prstGeom prst="line">
-            <a:avLst/>
-          </a:prstGeom>
-          <a:noFill/>
-          <a:ln w="12700">
-            <a:solidFill>
-              <a:srgbClr val="1E4D8C"/>
-            </a:solidFill>
-            <a:prstDash val="solid"/>
-            <a:tailEnd type="triangle"/>
-          </a:ln>
-        </p:spPr>
-      </p:sp>
-      <p:sp>
-        <p:nvSpPr>
-          <p:cNvPr id="12" name="Shape 10"/>
-          <p:cNvSpPr/>
-          <p:nvPr/>
-        </p:nvSpPr>
-        <p:spPr>
-          <a:xfrm>
             <a:off x="1783080" y="822960"/>
             <a:ext cx="1325880" cy="502920"/>
           </a:xfrm>
@@ -22229,7 +22085,7 @@
       </p:sp>
       <p:sp>
         <p:nvSpPr>
-          <p:cNvPr id="13" name="Text 11"/>
+          <p:cNvPr id="12" name="Text 10"/>
           <p:cNvSpPr/>
           <p:nvPr/>
         </p:nvSpPr>
@@ -22268,7 +22124,7 @@
       </p:sp>
       <p:sp>
         <p:nvSpPr>
-          <p:cNvPr id="14" name="Text 12"/>
+          <p:cNvPr id="13" name="Text 11"/>
           <p:cNvSpPr/>
           <p:nvPr/>
         </p:nvSpPr>
@@ -22307,7 +22163,7 @@
       </p:sp>
       <p:sp>
         <p:nvSpPr>
-          <p:cNvPr id="15" name="Shape 13"/>
+          <p:cNvPr id="14" name="Shape 12"/>
           <p:cNvSpPr/>
           <p:nvPr/>
         </p:nvSpPr>
@@ -22332,7 +22188,7 @@
       </p:sp>
       <p:sp>
         <p:nvSpPr>
-          <p:cNvPr id="16" name="Text 14"/>
+          <p:cNvPr id="15" name="Text 13"/>
           <p:cNvSpPr/>
           <p:nvPr/>
         </p:nvSpPr>
@@ -22371,7 +22227,7 @@
       </p:sp>
       <p:sp>
         <p:nvSpPr>
-          <p:cNvPr id="17" name="Text 15"/>
+          <p:cNvPr id="16" name="Text 14"/>
           <p:cNvSpPr/>
           <p:nvPr/>
         </p:nvSpPr>
@@ -22447,31 +22303,7 @@
       </p:sp>
       <p:sp>
         <p:nvSpPr>
-          <p:cNvPr id="18" name="Shape 16"/>
-          <p:cNvSpPr/>
-          <p:nvPr/>
-        </p:nvSpPr>
-        <p:spPr>
-          <a:xfrm>
-            <a:off x="3136392" y="1069848"/>
-            <a:ext cx="91440" cy="0"/>
-          </a:xfrm>
-          <a:prstGeom prst="line">
-            <a:avLst/>
-          </a:prstGeom>
-          <a:noFill/>
-          <a:ln w="12700">
-            <a:solidFill>
-              <a:srgbClr val="1E4D8C"/>
-            </a:solidFill>
-            <a:prstDash val="solid"/>
-            <a:tailEnd type="triangle"/>
-          </a:ln>
-        </p:spPr>
-      </p:sp>
-      <p:sp>
-        <p:nvSpPr>
-          <p:cNvPr id="19" name="Shape 17"/>
+          <p:cNvPr id="17" name="Shape 15"/>
           <p:cNvSpPr/>
           <p:nvPr/>
         </p:nvSpPr>
@@ -22496,7 +22328,7 @@
       </p:sp>
       <p:sp>
         <p:nvSpPr>
-          <p:cNvPr id="20" name="Text 18"/>
+          <p:cNvPr id="18" name="Text 16"/>
           <p:cNvSpPr/>
           <p:nvPr/>
         </p:nvSpPr>
@@ -22535,7 +22367,7 @@
       </p:sp>
       <p:sp>
         <p:nvSpPr>
-          <p:cNvPr id="21" name="Text 19"/>
+          <p:cNvPr id="19" name="Text 17"/>
           <p:cNvSpPr/>
           <p:nvPr/>
         </p:nvSpPr>
@@ -22574,7 +22406,7 @@
       </p:sp>
       <p:sp>
         <p:nvSpPr>
-          <p:cNvPr id="22" name="Shape 20"/>
+          <p:cNvPr id="20" name="Shape 18"/>
           <p:cNvSpPr/>
           <p:nvPr/>
         </p:nvSpPr>
@@ -22599,7 +22431,7 @@
       </p:sp>
       <p:sp>
         <p:nvSpPr>
-          <p:cNvPr id="23" name="Text 21"/>
+          <p:cNvPr id="21" name="Text 19"/>
           <p:cNvSpPr/>
           <p:nvPr/>
         </p:nvSpPr>
@@ -22638,7 +22470,7 @@
       </p:sp>
       <p:sp>
         <p:nvSpPr>
-          <p:cNvPr id="24" name="Text 22"/>
+          <p:cNvPr id="22" name="Text 20"/>
           <p:cNvSpPr/>
           <p:nvPr/>
         </p:nvSpPr>
@@ -22714,31 +22546,7 @@
       </p:sp>
       <p:sp>
         <p:nvSpPr>
-          <p:cNvPr id="25" name="Shape 23"/>
-          <p:cNvSpPr/>
-          <p:nvPr/>
-        </p:nvSpPr>
-        <p:spPr>
-          <a:xfrm>
-            <a:off x="4599432" y="1069848"/>
-            <a:ext cx="91440" cy="0"/>
-          </a:xfrm>
-          <a:prstGeom prst="line">
-            <a:avLst/>
-          </a:prstGeom>
-          <a:noFill/>
-          <a:ln w="12700">
-            <a:solidFill>
-              <a:srgbClr val="1E4D8C"/>
-            </a:solidFill>
-            <a:prstDash val="solid"/>
-            <a:tailEnd type="triangle"/>
-          </a:ln>
-        </p:spPr>
-      </p:sp>
-      <p:sp>
-        <p:nvSpPr>
-          <p:cNvPr id="26" name="Shape 24"/>
+          <p:cNvPr id="23" name="Shape 21"/>
           <p:cNvSpPr/>
           <p:nvPr/>
         </p:nvSpPr>
@@ -22763,7 +22571,7 @@
       </p:sp>
       <p:sp>
         <p:nvSpPr>
-          <p:cNvPr id="27" name="Text 25"/>
+          <p:cNvPr id="24" name="Text 22"/>
           <p:cNvSpPr/>
           <p:nvPr/>
         </p:nvSpPr>
@@ -22802,7 +22610,7 @@
       </p:sp>
       <p:sp>
         <p:nvSpPr>
-          <p:cNvPr id="28" name="Text 26"/>
+          <p:cNvPr id="25" name="Text 23"/>
           <p:cNvSpPr/>
           <p:nvPr/>
         </p:nvSpPr>
@@ -22841,7 +22649,7 @@
       </p:sp>
       <p:sp>
         <p:nvSpPr>
-          <p:cNvPr id="29" name="Shape 27"/>
+          <p:cNvPr id="26" name="Shape 24"/>
           <p:cNvSpPr/>
           <p:nvPr/>
         </p:nvSpPr>
@@ -22866,7 +22674,7 @@
       </p:sp>
       <p:sp>
         <p:nvSpPr>
-          <p:cNvPr id="30" name="Text 28"/>
+          <p:cNvPr id="27" name="Text 25"/>
           <p:cNvSpPr/>
           <p:nvPr/>
         </p:nvSpPr>
@@ -22905,7 +22713,7 @@
       </p:sp>
       <p:sp>
         <p:nvSpPr>
-          <p:cNvPr id="31" name="Text 29"/>
+          <p:cNvPr id="28" name="Text 26"/>
           <p:cNvSpPr/>
           <p:nvPr/>
         </p:nvSpPr>
@@ -22981,31 +22789,7 @@
       </p:sp>
       <p:sp>
         <p:nvSpPr>
-          <p:cNvPr id="32" name="Shape 30"/>
-          <p:cNvSpPr/>
-          <p:nvPr/>
-        </p:nvSpPr>
-        <p:spPr>
-          <a:xfrm>
-            <a:off x="6062472" y="1069848"/>
-            <a:ext cx="91440" cy="0"/>
-          </a:xfrm>
-          <a:prstGeom prst="line">
-            <a:avLst/>
-          </a:prstGeom>
-          <a:noFill/>
-          <a:ln w="12700">
-            <a:solidFill>
-              <a:srgbClr val="1E4D8C"/>
-            </a:solidFill>
-            <a:prstDash val="solid"/>
-            <a:tailEnd type="triangle"/>
-          </a:ln>
-        </p:spPr>
-      </p:sp>
-      <p:sp>
-        <p:nvSpPr>
-          <p:cNvPr id="33" name="Shape 31"/>
+          <p:cNvPr id="29" name="Shape 27"/>
           <p:cNvSpPr/>
           <p:nvPr/>
         </p:nvSpPr>
@@ -23030,7 +22814,7 @@
       </p:sp>
       <p:sp>
         <p:nvSpPr>
-          <p:cNvPr id="34" name="Text 32"/>
+          <p:cNvPr id="30" name="Text 28"/>
           <p:cNvSpPr/>
           <p:nvPr/>
         </p:nvSpPr>
@@ -23069,7 +22853,7 @@
       </p:sp>
       <p:sp>
         <p:nvSpPr>
-          <p:cNvPr id="35" name="Text 33"/>
+          <p:cNvPr id="31" name="Text 29"/>
           <p:cNvSpPr/>
           <p:nvPr/>
         </p:nvSpPr>
@@ -23108,7 +22892,7 @@
       </p:sp>
       <p:sp>
         <p:nvSpPr>
-          <p:cNvPr id="36" name="Shape 34"/>
+          <p:cNvPr id="32" name="Shape 30"/>
           <p:cNvSpPr/>
           <p:nvPr/>
         </p:nvSpPr>
@@ -23133,7 +22917,7 @@
       </p:sp>
       <p:sp>
         <p:nvSpPr>
-          <p:cNvPr id="37" name="Text 35"/>
+          <p:cNvPr id="33" name="Text 31"/>
           <p:cNvSpPr/>
           <p:nvPr/>
         </p:nvSpPr>
@@ -23172,7 +22956,7 @@
       </p:sp>
       <p:sp>
         <p:nvSpPr>
-          <p:cNvPr id="38" name="Text 36"/>
+          <p:cNvPr id="34" name="Text 32"/>
           <p:cNvSpPr/>
           <p:nvPr/>
         </p:nvSpPr>
@@ -23248,31 +23032,7 @@
       </p:sp>
       <p:sp>
         <p:nvSpPr>
-          <p:cNvPr id="39" name="Shape 37"/>
-          <p:cNvSpPr/>
-          <p:nvPr/>
-        </p:nvSpPr>
-        <p:spPr>
-          <a:xfrm>
-            <a:off x="7525512" y="1069848"/>
-            <a:ext cx="91440" cy="0"/>
-          </a:xfrm>
-          <a:prstGeom prst="line">
-            <a:avLst/>
-          </a:prstGeom>
-          <a:noFill/>
-          <a:ln w="12700">
-            <a:solidFill>
-              <a:srgbClr val="1E4D8C"/>
-            </a:solidFill>
-            <a:prstDash val="solid"/>
-            <a:tailEnd type="triangle"/>
-          </a:ln>
-        </p:spPr>
-      </p:sp>
-      <p:sp>
-        <p:nvSpPr>
-          <p:cNvPr id="40" name="Shape 38"/>
+          <p:cNvPr id="35" name="Shape 33"/>
           <p:cNvSpPr/>
           <p:nvPr/>
         </p:nvSpPr>
@@ -23297,7 +23057,7 @@
       </p:sp>
       <p:sp>
         <p:nvSpPr>
-          <p:cNvPr id="41" name="Text 39"/>
+          <p:cNvPr id="36" name="Text 34"/>
           <p:cNvSpPr/>
           <p:nvPr/>
         </p:nvSpPr>
@@ -23336,7 +23096,7 @@
       </p:sp>
       <p:sp>
         <p:nvSpPr>
-          <p:cNvPr id="42" name="Text 40"/>
+          <p:cNvPr id="37" name="Text 35"/>
           <p:cNvSpPr/>
           <p:nvPr/>
         </p:nvSpPr>
@@ -23375,7 +23135,7 @@
       </p:sp>
       <p:sp>
         <p:nvSpPr>
-          <p:cNvPr id="43" name="Shape 41"/>
+          <p:cNvPr id="38" name="Shape 36"/>
           <p:cNvSpPr/>
           <p:nvPr/>
         </p:nvSpPr>
@@ -23400,7 +23160,7 @@
       </p:sp>
       <p:sp>
         <p:nvSpPr>
-          <p:cNvPr id="44" name="Text 42"/>
+          <p:cNvPr id="39" name="Text 37"/>
           <p:cNvSpPr/>
           <p:nvPr/>
         </p:nvSpPr>
@@ -23439,7 +23199,7 @@
       </p:sp>
       <p:sp>
         <p:nvSpPr>
-          <p:cNvPr id="45" name="Text 43"/>
+          <p:cNvPr id="40" name="Text 38"/>
           <p:cNvSpPr/>
           <p:nvPr/>
         </p:nvSpPr>
@@ -26139,7 +25899,7 @@
                 <a:ea typeface="Calibri" pitchFamily="34" charset="-122"/>
                 <a:cs typeface="Calibri" pitchFamily="34" charset="-120"/>
               </a:rPr>
-              <a:t>60+ connectors total in CLIENT_REGISTRY</a:t>
+              <a:t>95 connectors total in CLIENT_REGISTRY</a:t>
             </a:r>
             <a:endParaRPr lang="en-US" sz="850" dirty="0"/>
           </a:p>
@@ -26584,7 +26344,7 @@
                 <a:ea typeface="Calibri" pitchFamily="34" charset="-122"/>
                 <a:cs typeface="Calibri" pitchFamily="34" charset="-120"/>
               </a:rPr>
-              <a:t>60+ connectors · STIX 2.1 ORM · Ingest + Export pipelines</a:t>
+              <a:t>95 connectors · STIX 2.1 ORM · Ingest + Export pipelines</a:t>
             </a:r>
             <a:endParaRPr lang="en-US" sz="1300" dirty="0"/>
           </a:p>
@@ -27910,7 +27670,7 @@
                 <a:ea typeface="Calibri" pitchFamily="34" charset="-122"/>
                 <a:cs typeface="Calibri" pitchFamily="34" charset="-120"/>
               </a:rPr>
-              <a:t>CONNECTOR LAYER (60+ platforms)</a:t>
+              <a:t>CONNECTOR LAYER (95 platforms)</a:t>
             </a:r>
             <a:endParaRPr lang="en-US" sz="1000" dirty="0"/>
           </a:p>
@@ -28236,7 +27996,7 @@
                 <a:ea typeface="Calibri" pitchFamily="34" charset="-122"/>
                 <a:cs typeface="Calibri" pitchFamily="34" charset="-120"/>
               </a:rPr>
-              <a:t>60+ Platform Connectors — One Interface</a:t>
+              <a:t>95 Platform Connectors — One Interface</a:t>
             </a:r>
             <a:endParaRPr lang="en-US" sz="2000" dirty="0"/>
           </a:p>
@@ -30770,30 +30530,6 @@
         </p:nvSpPr>
         <p:spPr>
           <a:xfrm>
-            <a:off x="1581912" y="2075688"/>
-            <a:ext cx="109728" cy="0"/>
-          </a:xfrm>
-          <a:prstGeom prst="line">
-            <a:avLst/>
-          </a:prstGeom>
-          <a:noFill/>
-          <a:ln w="19050">
-            <a:solidFill>
-              <a:srgbClr val="0891B2"/>
-            </a:solidFill>
-            <a:prstDash val="solid"/>
-            <a:tailEnd type="triangle"/>
-          </a:ln>
-        </p:spPr>
-      </p:sp>
-      <p:sp>
-        <p:nvSpPr>
-          <p:cNvPr id="11" name="Shape 9"/>
-          <p:cNvSpPr/>
-          <p:nvPr/>
-        </p:nvSpPr>
-        <p:spPr>
-          <a:xfrm>
             <a:off x="1691640" y="1234440"/>
             <a:ext cx="1234440" cy="1691640"/>
           </a:xfrm>
@@ -30820,7 +30556,7 @@
       </p:sp>
       <p:sp>
         <p:nvSpPr>
-          <p:cNvPr id="12" name="Text 10"/>
+          <p:cNvPr id="11" name="Text 9"/>
           <p:cNvSpPr/>
           <p:nvPr/>
         </p:nvSpPr>
@@ -30859,7 +30595,7 @@
       </p:sp>
       <p:sp>
         <p:nvSpPr>
-          <p:cNvPr id="13" name="Text 11"/>
+          <p:cNvPr id="12" name="Text 10"/>
           <p:cNvSpPr/>
           <p:nvPr/>
         </p:nvSpPr>
@@ -30932,31 +30668,7 @@
       </p:sp>
       <p:sp>
         <p:nvSpPr>
-          <p:cNvPr id="14" name="Shape 12"/>
-          <p:cNvSpPr/>
-          <p:nvPr/>
-        </p:nvSpPr>
-        <p:spPr>
-          <a:xfrm>
-            <a:off x="2953512" y="2075688"/>
-            <a:ext cx="109728" cy="0"/>
-          </a:xfrm>
-          <a:prstGeom prst="line">
-            <a:avLst/>
-          </a:prstGeom>
-          <a:noFill/>
-          <a:ln w="19050">
-            <a:solidFill>
-              <a:srgbClr val="0891B2"/>
-            </a:solidFill>
-            <a:prstDash val="solid"/>
-            <a:tailEnd type="triangle"/>
-          </a:ln>
-        </p:spPr>
-      </p:sp>
-      <p:sp>
-        <p:nvSpPr>
-          <p:cNvPr id="15" name="Shape 13"/>
+          <p:cNvPr id="13" name="Shape 11"/>
           <p:cNvSpPr/>
           <p:nvPr/>
         </p:nvSpPr>
@@ -30988,7 +30700,7 @@
       </p:sp>
       <p:sp>
         <p:nvSpPr>
-          <p:cNvPr id="16" name="Text 14"/>
+          <p:cNvPr id="14" name="Text 12"/>
           <p:cNvSpPr/>
           <p:nvPr/>
         </p:nvSpPr>
@@ -31027,7 +30739,7 @@
       </p:sp>
       <p:sp>
         <p:nvSpPr>
-          <p:cNvPr id="17" name="Text 15"/>
+          <p:cNvPr id="15" name="Text 13"/>
           <p:cNvSpPr/>
           <p:nvPr/>
         </p:nvSpPr>
@@ -31100,7 +30812,7 @@
       </p:sp>
       <p:sp>
         <p:nvSpPr>
-          <p:cNvPr id="18" name="Shape 16"/>
+          <p:cNvPr id="16" name="Shape 14"/>
           <p:cNvSpPr/>
           <p:nvPr/>
         </p:nvSpPr>
@@ -31125,7 +30837,7 @@
       </p:sp>
       <p:sp>
         <p:nvSpPr>
-          <p:cNvPr id="19" name="Text 17"/>
+          <p:cNvPr id="17" name="Text 15"/>
           <p:cNvSpPr/>
           <p:nvPr/>
         </p:nvSpPr>
@@ -31164,7 +30876,7 @@
       </p:sp>
       <p:sp>
         <p:nvSpPr>
-          <p:cNvPr id="20" name="Shape 18"/>
+          <p:cNvPr id="18" name="Shape 16"/>
           <p:cNvSpPr/>
           <p:nvPr/>
         </p:nvSpPr>
@@ -31196,7 +30908,7 @@
       </p:sp>
       <p:sp>
         <p:nvSpPr>
-          <p:cNvPr id="21" name="Text 19"/>
+          <p:cNvPr id="19" name="Text 17"/>
           <p:cNvSpPr/>
           <p:nvPr/>
         </p:nvSpPr>
@@ -31235,7 +30947,7 @@
       </p:sp>
       <p:sp>
         <p:nvSpPr>
-          <p:cNvPr id="22" name="Text 20"/>
+          <p:cNvPr id="20" name="Text 18"/>
           <p:cNvSpPr/>
           <p:nvPr/>
         </p:nvSpPr>
@@ -31308,31 +31020,7 @@
       </p:sp>
       <p:sp>
         <p:nvSpPr>
-          <p:cNvPr id="23" name="Shape 21"/>
-          <p:cNvSpPr/>
-          <p:nvPr/>
-        </p:nvSpPr>
-        <p:spPr>
-          <a:xfrm>
-            <a:off x="6062472" y="2075688"/>
-            <a:ext cx="109728" cy="0"/>
-          </a:xfrm>
-          <a:prstGeom prst="line">
-            <a:avLst/>
-          </a:prstGeom>
-          <a:noFill/>
-          <a:ln w="19050">
-            <a:solidFill>
-              <a:srgbClr val="0891B2"/>
-            </a:solidFill>
-            <a:prstDash val="solid"/>
-            <a:tailEnd type="triangle"/>
-          </a:ln>
-        </p:spPr>
-      </p:sp>
-      <p:sp>
-        <p:nvSpPr>
-          <p:cNvPr id="24" name="Shape 22"/>
+          <p:cNvPr id="21" name="Shape 19"/>
           <p:cNvSpPr/>
           <p:nvPr/>
         </p:nvSpPr>
@@ -31364,7 +31052,7 @@
       </p:sp>
       <p:sp>
         <p:nvSpPr>
-          <p:cNvPr id="25" name="Text 23"/>
+          <p:cNvPr id="22" name="Text 20"/>
           <p:cNvSpPr/>
           <p:nvPr/>
         </p:nvSpPr>
@@ -31403,7 +31091,7 @@
       </p:sp>
       <p:sp>
         <p:nvSpPr>
-          <p:cNvPr id="26" name="Text 24"/>
+          <p:cNvPr id="23" name="Text 21"/>
           <p:cNvSpPr/>
           <p:nvPr/>
         </p:nvSpPr>
@@ -31476,31 +31164,7 @@
       </p:sp>
       <p:sp>
         <p:nvSpPr>
-          <p:cNvPr id="27" name="Shape 25"/>
-          <p:cNvSpPr/>
-          <p:nvPr/>
-        </p:nvSpPr>
-        <p:spPr>
-          <a:xfrm>
-            <a:off x="7434072" y="2075688"/>
-            <a:ext cx="109728" cy="0"/>
-          </a:xfrm>
-          <a:prstGeom prst="line">
-            <a:avLst/>
-          </a:prstGeom>
-          <a:noFill/>
-          <a:ln w="19050">
-            <a:solidFill>
-              <a:srgbClr val="0891B2"/>
-            </a:solidFill>
-            <a:prstDash val="solid"/>
-            <a:tailEnd type="triangle"/>
-          </a:ln>
-        </p:spPr>
-      </p:sp>
-      <p:sp>
-        <p:nvSpPr>
-          <p:cNvPr id="28" name="Shape 26"/>
+          <p:cNvPr id="24" name="Shape 22"/>
           <p:cNvSpPr/>
           <p:nvPr/>
         </p:nvSpPr>
@@ -31532,7 +31196,7 @@
       </p:sp>
       <p:sp>
         <p:nvSpPr>
-          <p:cNvPr id="29" name="Text 27"/>
+          <p:cNvPr id="25" name="Text 23"/>
           <p:cNvSpPr/>
           <p:nvPr/>
         </p:nvSpPr>
@@ -31571,7 +31235,7 @@
       </p:sp>
       <p:sp>
         <p:nvSpPr>
-          <p:cNvPr id="30" name="Text 28"/>
+          <p:cNvPr id="26" name="Text 24"/>
           <p:cNvSpPr/>
           <p:nvPr/>
         </p:nvSpPr>
@@ -31661,7 +31325,7 @@
       </p:sp>
       <p:sp>
         <p:nvSpPr>
-          <p:cNvPr id="31" name="Text 29"/>
+          <p:cNvPr id="27" name="Text 25"/>
           <p:cNvSpPr/>
           <p:nvPr/>
         </p:nvSpPr>
@@ -31700,7 +31364,7 @@
       </p:sp>
       <p:sp>
         <p:nvSpPr>
-          <p:cNvPr id="32" name="Shape 30"/>
+          <p:cNvPr id="28" name="Shape 26"/>
           <p:cNvSpPr/>
           <p:nvPr/>
         </p:nvSpPr>
@@ -31725,7 +31389,7 @@
       </p:sp>
       <p:sp>
         <p:nvSpPr>
-          <p:cNvPr id="33" name="Text 31"/>
+          <p:cNvPr id="29" name="Text 27"/>
           <p:cNvSpPr/>
           <p:nvPr/>
         </p:nvSpPr>

--- a/GNAT-Presentation.pptx
+++ b/GNAT-Presentation.pptx
@@ -5088,7 +5088,55 @@
       </p:sp>
       <p:sp>
         <p:nvSpPr>
-          <p:cNvPr id="14" name="Text 12"/>
+          <p:cNvPr id="14" name="Shape 12"/>
+          <p:cNvSpPr/>
+          <p:nvPr/>
+        </p:nvSpPr>
+        <p:spPr>
+          <a:xfrm>
+            <a:off x="2834640" y="1655064"/>
+            <a:ext cx="0" cy="164592"/>
+          </a:xfrm>
+          <a:prstGeom prst="line">
+            <a:avLst/>
+          </a:prstGeom>
+          <a:noFill/>
+          <a:ln w="19050">
+            <a:solidFill>
+              <a:srgbClr val="0891B2"/>
+            </a:solidFill>
+            <a:prstDash val="solid"/>
+            <a:tailEnd type="triangle"/>
+          </a:ln>
+        </p:spPr>
+      </p:sp>
+      <p:sp>
+        <p:nvSpPr>
+          <p:cNvPr id="15" name="Shape 13"/>
+          <p:cNvSpPr/>
+          <p:nvPr/>
+        </p:nvSpPr>
+        <p:spPr>
+          <a:xfrm>
+            <a:off x="2834640" y="2615184"/>
+            <a:ext cx="0" cy="164592"/>
+          </a:xfrm>
+          <a:prstGeom prst="line">
+            <a:avLst/>
+          </a:prstGeom>
+          <a:noFill/>
+          <a:ln w="19050">
+            <a:solidFill>
+              <a:srgbClr val="0891B2"/>
+            </a:solidFill>
+            <a:prstDash val="solid"/>
+            <a:tailEnd type="triangle"/>
+          </a:ln>
+        </p:spPr>
+      </p:sp>
+      <p:sp>
+        <p:nvSpPr>
+          <p:cNvPr id="16" name="Text 14"/>
           <p:cNvSpPr/>
           <p:nvPr/>
         </p:nvSpPr>
@@ -6394,7 +6442,7 @@
       </p:graphicFrame>
       <p:sp>
         <p:nvSpPr>
-          <p:cNvPr id="16" name="Text 13"/>
+          <p:cNvPr id="18" name="Text 15"/>
           <p:cNvSpPr/>
           <p:nvPr/>
         </p:nvSpPr>
@@ -8141,6 +8189,78 @@
           </a:p>
         </p:txBody>
       </p:sp>
+      <p:sp>
+        <p:nvSpPr>
+          <p:cNvPr id="47" name="Shape 45"/>
+          <p:cNvSpPr/>
+          <p:nvPr/>
+        </p:nvSpPr>
+        <p:spPr>
+          <a:xfrm>
+            <a:off x="2212848" y="4160520"/>
+            <a:ext cx="237744" cy="0"/>
+          </a:xfrm>
+          <a:prstGeom prst="line">
+            <a:avLst/>
+          </a:prstGeom>
+          <a:noFill/>
+          <a:ln w="19050">
+            <a:solidFill>
+              <a:srgbClr val="0891B2"/>
+            </a:solidFill>
+            <a:prstDash val="solid"/>
+            <a:tailEnd type="triangle"/>
+          </a:ln>
+        </p:spPr>
+      </p:sp>
+      <p:sp>
+        <p:nvSpPr>
+          <p:cNvPr id="48" name="Shape 46"/>
+          <p:cNvSpPr/>
+          <p:nvPr/>
+        </p:nvSpPr>
+        <p:spPr>
+          <a:xfrm>
+            <a:off x="4361688" y="4160520"/>
+            <a:ext cx="237744" cy="0"/>
+          </a:xfrm>
+          <a:prstGeom prst="line">
+            <a:avLst/>
+          </a:prstGeom>
+          <a:noFill/>
+          <a:ln w="19050">
+            <a:solidFill>
+              <a:srgbClr val="0891B2"/>
+            </a:solidFill>
+            <a:prstDash val="solid"/>
+            <a:tailEnd type="triangle"/>
+          </a:ln>
+        </p:spPr>
+      </p:sp>
+      <p:sp>
+        <p:nvSpPr>
+          <p:cNvPr id="49" name="Shape 47"/>
+          <p:cNvSpPr/>
+          <p:nvPr/>
+        </p:nvSpPr>
+        <p:spPr>
+          <a:xfrm>
+            <a:off x="6510528" y="4160520"/>
+            <a:ext cx="237744" cy="0"/>
+          </a:xfrm>
+          <a:prstGeom prst="line">
+            <a:avLst/>
+          </a:prstGeom>
+          <a:noFill/>
+          <a:ln w="19050">
+            <a:solidFill>
+              <a:srgbClr val="0891B2"/>
+            </a:solidFill>
+            <a:prstDash val="solid"/>
+            <a:tailEnd type="triangle"/>
+          </a:ln>
+        </p:spPr>
+      </p:sp>
     </p:spTree>
   </p:cSld>
   <p:clrMapOvr>
@@ -28184,7 +28304,7 @@
             <a:avLst/>
           </a:prstGeom>
           <a:solidFill>
-            <a:srgbClr val="1E4D8C"/>
+            <a:srgbClr val="5B93D9"/>
           </a:solidFill>
           <a:ln w="12700">
             <a:solidFill>
@@ -28221,7 +28341,7 @@
             <a:r>
               <a:rPr lang="en-US" sz="850" b="1" dirty="0">
                 <a:solidFill>
-                  <a:srgbClr val="1E4D8C"/>
+                  <a:srgbClr val="5B93D9"/>
                 </a:solidFill>
                 <a:latin typeface="Calibri" pitchFamily="34" charset="0"/>
                 <a:ea typeface="Calibri" pitchFamily="34" charset="-122"/>
@@ -28454,7 +28574,7 @@
             <a:avLst/>
           </a:prstGeom>
           <a:solidFill>
-            <a:srgbClr val="1E4D8C"/>
+            <a:srgbClr val="5B93D9"/>
           </a:solidFill>
           <a:ln w="12700">
             <a:solidFill>
@@ -28491,7 +28611,7 @@
             <a:r>
               <a:rPr lang="en-US" sz="850" b="1" dirty="0">
                 <a:solidFill>
-                  <a:srgbClr val="1E4D8C"/>
+                  <a:srgbClr val="5B93D9"/>
                 </a:solidFill>
                 <a:latin typeface="Calibri" pitchFamily="34" charset="0"/>
                 <a:ea typeface="Calibri" pitchFamily="34" charset="-122"/>
@@ -28724,7 +28844,7 @@
             <a:avLst/>
           </a:prstGeom>
           <a:solidFill>
-            <a:srgbClr val="1E4D8C"/>
+            <a:srgbClr val="5B93D9"/>
           </a:solidFill>
           <a:ln w="12700">
             <a:solidFill>
@@ -28761,7 +28881,7 @@
             <a:r>
               <a:rPr lang="en-US" sz="850" b="1" dirty="0">
                 <a:solidFill>
-                  <a:srgbClr val="1E4D8C"/>
+                  <a:srgbClr val="5B93D9"/>
                 </a:solidFill>
                 <a:latin typeface="Calibri" pitchFamily="34" charset="0"/>
                 <a:ea typeface="Calibri" pitchFamily="34" charset="-122"/>
@@ -30088,7 +30208,7 @@
             <a:avLst/>
           </a:prstGeom>
           <a:solidFill>
-            <a:srgbClr val="162952"/>
+            <a:srgbClr val="06B6D4"/>
           </a:solidFill>
           <a:ln w="12700">
             <a:solidFill>

--- a/GNAT-Presentation.pptx
+++ b/GNAT-Presentation.pptx
@@ -3375,7 +3375,7 @@
                 <a:ea typeface="Calibri" pitchFamily="34" charset="-122"/>
                 <a:cs typeface="Calibri" pitchFamily="34" charset="-120"/>
               </a:rPr>
-              <a:t>95 Connectors</a:t>
+              <a:t>99 Connectors</a:t>
             </a:r>
             <a:endParaRPr lang="en-US" sz="1000" dirty="0"/>
           </a:p>
@@ -3709,7 +3709,7 @@
                 <a:ea typeface="Calibri" pitchFamily="34" charset="-122"/>
                 <a:cs typeface="Calibri" pitchFamily="34" charset="-120"/>
               </a:rPr>
-              <a:t>Version 1.1  ·  Python 3.9+  ·  STIX 2.1  ·  95 Platform Connectors  ·  1,500+ Tests</a:t>
+              <a:t>Version 1.3.1  ·  Python 3.9+  ·  STIX 2.1  ·  99 Platform Connectors  ·  1,500+ Tests</a:t>
             </a:r>
             <a:endParaRPr lang="en-US" sz="1000" dirty="0"/>
           </a:p>
@@ -19069,7 +19069,7 @@
                 <a:ea typeface="Calibri" pitchFamily="34" charset="-122"/>
                 <a:cs typeface="Calibri" pitchFamily="34" charset="-120"/>
               </a:rPr>
-              <a:t>Every platform exposes get_object(), list_objects(), upsert_object(), to_stix(), from_stix(). Analysts learn one mental model once and it works across 95 platforms.</a:t>
+              <a:t>Every platform exposes get_object(), list_objects(), upsert_object(), to_stix(), from_stix(). Analysts learn one mental model once and it works across 99 platforms.</a:t>
             </a:r>
             <a:endParaRPr lang="en-US" sz="950" dirty="0"/>
           </a:p>
@@ -19747,7 +19747,7 @@
                 <a:ea typeface="Calibri" pitchFamily="34" charset="-122"/>
                 <a:cs typeface="Calibri" pitchFamily="34" charset="-120"/>
               </a:rPr>
-              <a:t>Python 3.8 / 3.9 / 3.10 matrix</a:t>
+              <a:t>Python 3.9 / 3.10 / 3.11 / 3.12 matrix</a:t>
             </a:r>
             <a:endParaRPr lang="en-US" sz="950" dirty="0"/>
           </a:p>
@@ -20992,7 +20992,7 @@
                 <a:ea typeface="Calibri" pitchFamily="34" charset="-122"/>
                 <a:cs typeface="Calibri" pitchFamily="34" charset="-120"/>
               </a:rPr>
-              <a:t>95</a:t>
+              <a:t>99</a:t>
             </a:r>
             <a:endParaRPr lang="en-US" sz="4200" dirty="0"/>
           </a:p>
@@ -24268,7 +24268,7 @@
                 <a:ea typeface="Calibri" pitchFamily="34" charset="-122"/>
                 <a:cs typeface="Calibri" pitchFamily="34" charset="-120"/>
               </a:rPr>
-              <a:t>CHANGELOG versions 0.6.0 – 1.1.0</a:t>
+              <a:t>CHANGELOG versions 0.6.0 – 1.3.1</a:t>
             </a:r>
             <a:endParaRPr lang="en-US" sz="850" dirty="0"/>
           </a:p>
@@ -24680,7 +24680,7 @@
                 <a:ea typeface="Calibri" pitchFamily="34" charset="-122"/>
                 <a:cs typeface="Calibri" pitchFamily="34" charset="-120"/>
               </a:rPr>
-              <a:t>Connectors Batch 2 — 11 new platforms</a:t>
+              <a:t>Connectors Batch 2 — 11 new platforms (v1.0)</a:t>
             </a:r>
             <a:endParaRPr lang="en-US" sz="850" dirty="0"/>
           </a:p>
@@ -24989,7 +24989,7 @@
                 <a:ea typeface="Calibri" pitchFamily="34" charset="-122"/>
                 <a:cs typeface="Calibri" pitchFamily="34" charset="-120"/>
               </a:rPr>
-              <a:t>Terminal UI (Textual, SSH-safe, 4 screens)</a:t>
+              <a:t>Terminal UI (Textual, SSH-safe, F1–F6 screens)</a:t>
             </a:r>
             <a:endParaRPr lang="en-US" sz="850" dirty="0"/>
           </a:p>
@@ -25916,7 +25916,7 @@
                 <a:ea typeface="Calibri" pitchFamily="34" charset="-122"/>
                 <a:cs typeface="Calibri" pitchFamily="34" charset="-120"/>
               </a:rPr>
-              <a:t>13 additional platform connectors (v1.1)</a:t>
+              <a:t>13 new connectors in v1.1 — 25 in v1.2 — 9 in v1.3</a:t>
             </a:r>
             <a:endParaRPr lang="en-US" sz="850" dirty="0"/>
           </a:p>
@@ -26019,7 +26019,7 @@
                 <a:ea typeface="Calibri" pitchFamily="34" charset="-122"/>
                 <a:cs typeface="Calibri" pitchFamily="34" charset="-120"/>
               </a:rPr>
-              <a:t>95 connectors total in CLIENT_REGISTRY</a:t>
+              <a:t>99 connectors total in CLIENT_REGISTRY</a:t>
             </a:r>
             <a:endParaRPr lang="en-US" sz="850" dirty="0"/>
           </a:p>
@@ -26122,7 +26122,7 @@
                 <a:ea typeface="Calibri" pitchFamily="34" charset="-122"/>
                 <a:cs typeface="Calibri" pitchFamily="34" charset="-120"/>
               </a:rPr>
-              <a:t>STIX validator ORM integration (validate=True)</a:t>
+              <a:t>LLMClient: Claude · OpenAI · Grok · Gemini (v1.3)</a:t>
             </a:r>
             <a:endParaRPr lang="en-US" sz="850" dirty="0"/>
           </a:p>
@@ -26289,7 +26289,7 @@
                 <a:ea typeface="Calibri" pitchFamily="34" charset="-122"/>
                 <a:cs typeface="Calibri" pitchFamily="34" charset="-120"/>
               </a:rPr>
-              <a:t>Reference: EXAMPLES.md  ·  IMPLEMENTATION_PLAN.md  ·  ARCHITECTURE_DECISIONS.md  ·  CHANGELOG.md  ·  PENDING_ITEMS.md</a:t>
+              <a:t>Reference: EXAMPLES.md  ·  IMPLEMENTATION_PLAN.md  ·  ARCHITECTURE_DECISIONS.md  ·  CHANGELOG.md</a:t>
             </a:r>
             <a:endParaRPr lang="en-US" sz="800" dirty="0"/>
           </a:p>
@@ -26464,7 +26464,7 @@
                 <a:ea typeface="Calibri" pitchFamily="34" charset="-122"/>
                 <a:cs typeface="Calibri" pitchFamily="34" charset="-120"/>
               </a:rPr>
-              <a:t>95 connectors · STIX 2.1 ORM · Ingest + Export pipelines</a:t>
+              <a:t>99 connectors · STIX 2.1 ORM · Ingest + Export pipelines</a:t>
             </a:r>
             <a:endParaRPr lang="en-US" sz="1300" dirty="0"/>
           </a:p>
@@ -26482,7 +26482,7 @@
                 <a:ea typeface="Calibri" pitchFamily="34" charset="-122"/>
                 <a:cs typeface="Calibri" pitchFamily="34" charset="-120"/>
               </a:rPr>
-              <a:t>AI agents (Claude + Copilot) · NLP queries · Research library · Report generation</a:t>
+              <a:t>AI agents (LLMClient: Claude · OpenAI · Grok · Gemini) · NLP queries · Research library · Report generation</a:t>
             </a:r>
             <a:endParaRPr lang="en-US" sz="1300" dirty="0"/>
           </a:p>
@@ -26580,7 +26580,7 @@
                 <a:ea typeface="Calibri" pitchFamily="34" charset="-122"/>
                 <a:cs typeface="Calibri" pitchFamily="34" charset="-120"/>
               </a:rPr>
-              <a:t>Version 1.1  |  Python 3.9+  |  Apache 2.0  |  EXAMPLES.md · IMPLEMENTATION_PLAN.md · README.md</a:t>
+              <a:t>Version 1.3.1  |  Python 3.9+  |  Apache 2.0  |  EXAMPLES.md · IMPLEMENTATION_PLAN.md · README.md</a:t>
             </a:r>
             <a:endParaRPr lang="en-US" sz="1000" dirty="0"/>
           </a:p>
@@ -27790,7 +27790,7 @@
                 <a:ea typeface="Calibri" pitchFamily="34" charset="-122"/>
                 <a:cs typeface="Calibri" pitchFamily="34" charset="-120"/>
               </a:rPr>
-              <a:t>CONNECTOR LAYER (95 platforms)</a:t>
+              <a:t>CONNECTOR LAYER (99 platforms)</a:t>
             </a:r>
             <a:endParaRPr lang="en-US" sz="1000" dirty="0"/>
           </a:p>
@@ -28116,7 +28116,7 @@
                 <a:ea typeface="Calibri" pitchFamily="34" charset="-122"/>
                 <a:cs typeface="Calibri" pitchFamily="34" charset="-120"/>
               </a:rPr>
-              <a:t>95 Platform Connectors — One Interface</a:t>
+              <a:t>99 Platform Connectors — One Interface</a:t>
             </a:r>
             <a:endParaRPr lang="en-US" sz="2000" dirty="0"/>
           </a:p>
@@ -28251,7 +28251,7 @@
                 <a:ea typeface="Calibri" pitchFamily="34" charset="-122"/>
                 <a:cs typeface="Calibri" pitchFamily="34" charset="-120"/>
               </a:rPr>
-              <a:t>ThreatQ · CrowdStrike · Recorded Future · AlienVault OTX · VirusTotal · ThreatConnect · Mandiant · MS Defender TI · ThreatStream · SOCRadar · PulseDive · FLARE · Yeti · CloudSEK · Feedly · MISP · OpenCTI · Group-IB · Cyble Vision · ZeroFox · ShadowServer</a:t>
+              <a:t>ThreatQ · CrowdStrike · Recorded Future · AlienVault OTX · VirusTotal · ThreatConnect · Mandiant · MS Defender TI · ThreatStream · SOCRadar · PulseDive · FLARE · Yeti · CloudSEK · Feedly · MISP · OpenCTI · Group-IB · Cyble Vision · ZeroFox · ShadowServer · BitSight · Flashpoint · HudsonRock · Intel 471 · UpGuard · Shodan · GreyNoise · CISA KEV · OSINT Feed</a:t>
             </a:r>
             <a:endParaRPr lang="en-US" sz="800" dirty="0"/>
           </a:p>
@@ -28386,7 +28386,7 @@
                 <a:ea typeface="Calibri" pitchFamily="34" charset="-122"/>
                 <a:cs typeface="Calibri" pitchFamily="34" charset="-120"/>
               </a:rPr>
-              <a:t>Splunk · Elastic SIEM · IBM QRadar · Microsoft Sentinel · Graylog · OSSIM · Security Onion · Wazuh</a:t>
+              <a:t>Splunk · Elastic SIEM · IBM QRadar · Microsoft Sentinel · Graylog · OSSIM · Security Onion · Wazuh · Google Chronicle · LogRhythm · Datadog</a:t>
             </a:r>
             <a:endParaRPr lang="en-US" sz="800" dirty="0"/>
           </a:p>
@@ -28521,7 +28521,7 @@
                 <a:ea typeface="Calibri" pitchFamily="34" charset="-122"/>
                 <a:cs typeface="Calibri" pitchFamily="34" charset="-120"/>
               </a:rPr>
-              <a:t>Palo Alto XSOAR · TheHive · GreyMatter · ServiceNow · Jira</a:t>
+              <a:t>Palo Alto XSOAR · TheHive · GreyMatter · ServiceNow · Jira · Synapse · FortiSOAR</a:t>
             </a:r>
             <a:endParaRPr lang="en-US" sz="800" dirty="0"/>
           </a:p>
@@ -28617,7 +28617,7 @@
                 <a:ea typeface="Calibri" pitchFamily="34" charset="-122"/>
                 <a:cs typeface="Calibri" pitchFamily="34" charset="-120"/>
               </a:rPr>
-              <a:t>VULNERABILITY MANAGEMENT</a:t>
+              <a:t>VULNERABILITY &amp; CLOUD SECURITY</a:t>
             </a:r>
             <a:endParaRPr lang="en-US" sz="850" dirty="0"/>
           </a:p>
@@ -28656,7 +28656,7 @@
                 <a:ea typeface="Calibri" pitchFamily="34" charset="-122"/>
                 <a:cs typeface="Calibri" pitchFamily="34" charset="-120"/>
               </a:rPr>
-              <a:t>Rapid7 InsightVM/IDR · Nucleus Security · Tenable One · Qualys VMDR · Greenbone/OpenVAS · DefectDojo</a:t>
+              <a:t>Rapid7 InsightVM/IDR · Nucleus Security · Tenable One · Qualys VMDR · Greenbone/OpenVAS · DefectDojo · Orca Security · Wiz CNAPP · Cortex Xpanse · CyCognito · RiskRecon · Armis Centrix · Axonius · Prisma Cloud · AWS Security Hub · JupiterOne · SecurityScorecard · Censys</a:t>
             </a:r>
             <a:endParaRPr lang="en-US" sz="800" dirty="0"/>
           </a:p>
@@ -28752,7 +28752,7 @@
                 <a:ea typeface="Calibri" pitchFamily="34" charset="-122"/>
                 <a:cs typeface="Calibri" pitchFamily="34" charset="-120"/>
               </a:rPr>
-              <a:t>CLOUD SECURITY &amp; ASM</a:t>
+              <a:t>NETWORK DETECTION &amp; ENDPOINT</a:t>
             </a:r>
             <a:endParaRPr lang="en-US" sz="850" dirty="0"/>
           </a:p>
@@ -28791,7 +28791,7 @@
                 <a:ea typeface="Calibri" pitchFamily="34" charset="-122"/>
                 <a:cs typeface="Calibri" pitchFamily="34" charset="-120"/>
               </a:rPr>
-              <a:t>Orca Security · Wiz CNAPP · Cortex Xpanse · CyCognito · RiskRecon · Armis Centrix · Axonius</a:t>
+              <a:t>Snort IDS · Suricata · Zeek · SentinelOne · Stellar Cyber · Netskope · ControlUp DEX · Whistic · Proofpoint · Darktrace · ExtraHop · Lansweeper · Vectra AI · Sophos · Trellix · Carbon Black · Tanium · Trend Micro Vision One · Cisco Umbrella · Cortex XDR · FortiEDR · FortiSIEM</a:t>
             </a:r>
             <a:endParaRPr lang="en-US" sz="800" dirty="0"/>
           </a:p>
@@ -28887,7 +28887,7 @@
                 <a:ea typeface="Calibri" pitchFamily="34" charset="-122"/>
                 <a:cs typeface="Calibri" pitchFamily="34" charset="-120"/>
               </a:rPr>
-              <a:t>NETWORK DETECTION &amp; ENDPOINT</a:t>
+              <a:t>OT/ICS &amp; INDUSTRY</a:t>
             </a:r>
             <a:endParaRPr lang="en-US" sz="850" dirty="0"/>
           </a:p>
@@ -28926,7 +28926,7 @@
                 <a:ea typeface="Calibri" pitchFamily="34" charset="-122"/>
                 <a:cs typeface="Calibri" pitchFamily="34" charset="-120"/>
               </a:rPr>
-              <a:t>Snort IDS · Suricata · Zeek · SentinelOne · Stellar Cyber · Netskope · ControlUp DEX · Whistic · Proofpoint</a:t>
+              <a:t>Dragos Platform · Claroty · Nozomi Networks · Cribl Stream</a:t>
             </a:r>
             <a:endParaRPr lang="en-US" sz="800" dirty="0"/>
           </a:p>
@@ -29061,7 +29061,7 @@
                 <a:ea typeface="Calibri" pitchFamily="34" charset="-122"/>
                 <a:cs typeface="Calibri" pitchFamily="34" charset="-120"/>
               </a:rPr>
-              <a:t>Microsoft Copilot for Security · OpenAI ChatGPT · Google Gemini · Grok AI</a:t>
+              <a:t>Microsoft Copilot for Security · OpenAI ChatGPT · Google Gemini · Grok AI · Discord</a:t>
             </a:r>
             <a:endParaRPr lang="en-US" sz="800" dirty="0"/>
           </a:p>
@@ -33197,7 +33197,7 @@
                 <a:ea typeface="Calibri" pitchFamily="34" charset="-122"/>
                 <a:cs typeface="Calibri" pitchFamily="34" charset="-120"/>
               </a:rPr>
-              <a:t>AI Agents — Claude-Powered Threat Research</a:t>
+              <a:t>AI Agents — Multi-LLM Threat Research</a:t>
             </a:r>
             <a:endParaRPr lang="en-US" sz="2000" dirty="0"/>
           </a:p>
@@ -33405,7 +33405,7 @@
                 <a:ea typeface="Calibri" pitchFamily="34" charset="-122"/>
                 <a:cs typeface="Calibri" pitchFamily="34" charset="-120"/>
               </a:rPr>
-              <a:t>Uses Claude API with web_search tool.</a:t>
+              <a:t>Backed by LLMClient (Claude / OpenAI / Grok / Gemini).</a:t>
             </a:r>
             <a:endParaRPr lang="en-US" sz="950" dirty="0"/>
           </a:p>
@@ -33666,7 +33666,7 @@
             <a:avLst/>
           </a:prstGeom>
           <a:solidFill>
-            <a:srgbClr val="162952"/>
+            <a:srgbClr val="06B6D4"/>
           </a:solidFill>
           <a:ln w="12700">
             <a:solidFill>
@@ -33709,7 +33709,7 @@
                 <a:ea typeface="Calibri" pitchFamily="34" charset="-122"/>
                 <a:cs typeface="Calibri" pitchFamily="34" charset="-120"/>
               </a:rPr>
-              <a:t>CopilotReader</a:t>
+              <a:t>LLMClient</a:t>
             </a:r>
             <a:endParaRPr lang="en-US" sz="1300" dirty="0"/>
           </a:p>
@@ -33748,7 +33748,7 @@
                 <a:ea typeface="Calibri" pitchFamily="34" charset="-122"/>
                 <a:cs typeface="Calibri" pitchFamily="34" charset="-120"/>
               </a:rPr>
-              <a:t>SourceReader</a:t>
+              <a:t>Unified Multi-LLM Facade</a:t>
             </a:r>
             <a:endParaRPr lang="en-US" sz="900" dirty="0"/>
           </a:p>
@@ -33787,7 +33787,7 @@
                 <a:ea typeface="Calibri" pitchFamily="34" charset="-122"/>
                 <a:cs typeface="Calibri" pitchFamily="34" charset="-120"/>
               </a:rPr>
-              <a:t>Query Microsoft Copilot via DirectLine for M365 content.</a:t>
+              <a:t>Single interface for Claude, OpenAI, Grok (xAI), and Gemini.</a:t>
             </a:r>
             <a:endParaRPr lang="en-US" sz="950" dirty="0"/>
           </a:p>
@@ -33804,7 +33804,7 @@
                 <a:ea typeface="Calibri" pitchFamily="34" charset="-122"/>
                 <a:cs typeface="Calibri" pitchFamily="34" charset="-120"/>
               </a:rPr>
-              <a:t>Sources: SharePoint libraries, mailboxes, Teams channels.</a:t>
+              <a:t>Automatic provider fallback on errors or rate limits.</a:t>
             </a:r>
             <a:endParaRPr lang="en-US" sz="950" dirty="0"/>
           </a:p>
@@ -33821,7 +33821,24 @@
                 <a:ea typeface="Calibri" pitchFamily="34" charset="-122"/>
                 <a:cs typeface="Calibri" pitchFamily="34" charset="-120"/>
               </a:rPr>
-              <a:t>Token exchange + auto-refresh. Output feeds directly into ParsingAgent.</a:t>
+              <a:t>Configured via [claude] / [openai] / [grok] / [gemini] INI sections.</a:t>
+            </a:r>
+            <a:endParaRPr lang="en-US" sz="950" dirty="0"/>
+          </a:p>
+          <a:p>
+            <a:pPr indent="0" marL="0">
+              <a:buNone/>
+            </a:pPr>
+            <a:r>
+              <a:rPr lang="en-US" sz="950" dirty="0">
+                <a:solidFill>
+                  <a:srgbClr val="94A3B8"/>
+                </a:solidFill>
+                <a:latin typeface="Calibri" pitchFamily="34" charset="0"/>
+                <a:ea typeface="Calibri" pitchFamily="34" charset="-122"/>
+                <a:cs typeface="Calibri" pitchFamily="34" charset="-120"/>
+              </a:rPr>
+              <a:t>Used by ResearchAgent, ParsingAgent, and ReportDraftingAssistant.</a:t>
             </a:r>
             <a:endParaRPr lang="en-US" sz="950" dirty="0"/>
           </a:p>
@@ -33861,7 +33878,7 @@
         <p:spPr>
           <a:xfrm>
             <a:off x="502920" y="3227832"/>
-            <a:ext cx="2743200" cy="228600"/>
+            <a:ext cx="4114800" cy="228600"/>
           </a:xfrm>
           <a:prstGeom prst="rect">
             <a:avLst/>
@@ -33885,7 +33902,7 @@
                 <a:ea typeface="Calibri" pitchFamily="34" charset="-122"/>
                 <a:cs typeface="Calibri" pitchFamily="34" charset="-120"/>
               </a:rPr>
-              <a:t>⚠  AI Trust Model</a:t>
+              <a:t>⚠  AI Trust Model · CopilotReader</a:t>
             </a:r>
             <a:endParaRPr lang="en-US" sz="1000" dirty="0"/>
           </a:p>
@@ -33924,7 +33941,7 @@
                 <a:ea typeface="Calibri" pitchFamily="34" charset="-122"/>
                 <a:cs typeface="Calibri" pitchFamily="34" charset="-120"/>
               </a:rPr>
-              <a:t>confidence_ceiling = 60 (configurable) prevents AI-extracted intel from reaching EDLs without analyst review. All AI objects tagged x_source_type='ai_extracted'. Export pipelines default to ConfidenceFilter(min=70), which excludes AI intel until promoted.</a:t>
+              <a:t>confidence_ceiling = 60 (configurable) prevents AI-extracted intel from reaching EDLs without analyst review. All AI objects tagged x_source_type='ai_extracted'. Export pipelines default to ConfidenceFilter(min=70), which excludes AI intel until promoted. CopilotReader queries Microsoft Copilot via DirectLine (SharePoint, mailboxes, Teams) and feeds output directly into ParsingAgent.</a:t>
             </a:r>
             <a:endParaRPr lang="en-US" sz="900" dirty="0"/>
           </a:p>

--- a/GNAT-Presentation.pptx
+++ b/GNAT-Presentation.pptx
@@ -3909,7 +3909,7 @@
                 <a:ea typeface="Calibri" pitchFamily="34" charset="-122"/>
                 <a:cs typeface="Calibri" pitchFamily="34" charset="-120"/>
               </a:rPr>
-              <a:t>99 Connectors</a:t>
+              <a:t>158 Connectors</a:t>
             </a:r>
             <a:endParaRPr lang="en-US" sz="1000" dirty="0"/>
           </a:p>
@@ -4243,7 +4243,7 @@
                 <a:ea typeface="Calibri" pitchFamily="34" charset="-122"/>
                 <a:cs typeface="Calibri" pitchFamily="34" charset="-120"/>
               </a:rPr>
-              <a:t>Version 1.5.0  ·  Python 3.9+  ·  STIX 2.1  ·  99 Platform Connectors  ·  2,000+ Tests</a:t>
+              <a:t>Version 1.5.0  ·  Python 3.9+  ·  STIX 2.1  ·  158 Platform Connectors  ·  4,600+ Tests</a:t>
             </a:r>
             <a:endParaRPr lang="en-US" sz="1000" dirty="0"/>
           </a:p>
@@ -28074,7 +28074,7 @@
                 <a:ea typeface="Calibri" pitchFamily="34" charset="-122"/>
                 <a:cs typeface="Calibri" pitchFamily="34" charset="-120"/>
               </a:rPr>
-              <a:t>TRUST_LEVEL on all 99 connectors</a:t>
+              <a:t>TRUST_LEVEL on all 158 connectors</a:t>
             </a:r>
             <a:endParaRPr lang="en-US" sz="900" dirty="0"/>
           </a:p>
@@ -28732,7 +28732,7 @@
                 <a:ea typeface="Calibri" pitchFamily="34" charset="-122"/>
                 <a:cs typeface="Calibri" pitchFamily="34" charset="-120"/>
               </a:rPr>
-              <a:t>ADRs 0039–0049  ·  TRUST_LEVEL on all 99 connectors  ·  Alembic migrations 0004–0008  ·  SimulationConnector · ReplayRunner · AgentTestHarness</a:t>
+              <a:t>ADRs 0039–0049  ·  TRUST_LEVEL on all 158 connectors  ·  Alembic migrations 0004–0008  ·  SimulationConnector · ReplayRunner · AgentTestHarness</a:t>
             </a:r>
             <a:endParaRPr lang="en-US" sz="800" dirty="0"/>
           </a:p>
@@ -29258,7 +29258,7 @@
                 <a:ea typeface="Calibri" pitchFamily="34" charset="-122"/>
                 <a:cs typeface="Calibri" pitchFamily="34" charset="-120"/>
               </a:rPr>
-              <a:t>Every platform exposes get_object(), list_objects(), upsert_object(), to_stix(), from_stix(). Analysts learn one mental model once and it works across 99 platforms.</a:t>
+              <a:t>Every platform exposes get_object(), list_objects(), upsert_object(), to_stix(), from_stix(). Analysts learn one mental model once and it works across 158 platforms.</a:t>
             </a:r>
             <a:endParaRPr lang="en-US" sz="950" dirty="0"/>
           </a:p>
@@ -29663,7 +29663,7 @@
                 <a:ea typeface="Calibri" pitchFamily="34" charset="-122"/>
                 <a:cs typeface="Calibri" pitchFamily="34" charset="-120"/>
               </a:rPr>
-              <a:t>2,000+ unit tests across 30+ test files. Every connector, every pipeline stage, every renderer, every scheduler, every new v1.4/1.5 module. Confidence in changes without regression fear.</a:t>
+              <a:t>4,600+ unit tests across 40+ test files. Every connector, every pipeline stage, every renderer, every scheduler, every new v1.4/1.5 module. Confidence in changes without regression fear.</a:t>
             </a:r>
             <a:endParaRPr lang="en-US" sz="950" dirty="0"/>
           </a:p>
@@ -30477,7 +30477,7 @@
                 <a:ea typeface="Calibri" pitchFamily="34" charset="-122"/>
                 <a:cs typeface="Calibri" pitchFamily="34" charset="-120"/>
               </a:rPr>
-              <a:t>2,000+ unit tests across 30+ files</a:t>
+              <a:t>4,600+ unit tests across 40+ files</a:t>
             </a:r>
             <a:endParaRPr lang="en-US" sz="950" dirty="0"/>
           </a:p>
@@ -31825,7 +31825,7 @@
                 <a:ea typeface="Calibri" pitchFamily="34" charset="-122"/>
                 <a:cs typeface="Calibri" pitchFamily="34" charset="-120"/>
               </a:rPr>
-              <a:t>99</a:t>
+              <a:t>158</a:t>
             </a:r>
             <a:endParaRPr lang="en-US" sz="4200" dirty="0"/>
           </a:p>
@@ -31977,7 +31977,7 @@
                 <a:ea typeface="Calibri" pitchFamily="34" charset="-122"/>
                 <a:cs typeface="Calibri" pitchFamily="34" charset="-120"/>
               </a:rPr>
-              <a:t>3,865+</a:t>
+              <a:t>4,600+</a:t>
             </a:r>
             <a:endParaRPr lang="en-US" sz="4200" dirty="0"/>
           </a:p>
@@ -32129,7 +32129,7 @@
                 <a:ea typeface="Calibri" pitchFamily="34" charset="-122"/>
                 <a:cs typeface="Calibri" pitchFamily="34" charset="-120"/>
               </a:rPr>
-              <a:t>200+</a:t>
+              <a:t>250+</a:t>
             </a:r>
             <a:endParaRPr lang="en-US" sz="4200" dirty="0"/>
           </a:p>
@@ -36955,7 +36955,7 @@
                 <a:ea typeface="Calibri" pitchFamily="34" charset="-122"/>
                 <a:cs typeface="Calibri" pitchFamily="34" charset="-120"/>
               </a:rPr>
-              <a:t>99 connectors total in CLIENT_REGISTRY</a:t>
+              <a:t>158 connectors total in CLIENT_REGISTRY</a:t>
             </a:r>
             <a:endParaRPr lang="en-US" sz="800" dirty="0"/>
           </a:p>
@@ -38018,7 +38018,7 @@
                 <a:ea typeface="Calibri" pitchFamily="34" charset="-122"/>
                 <a:cs typeface="Calibri" pitchFamily="34" charset="-120"/>
               </a:rPr>
-              <a:t>99 connectors · STIX 2.1 ORM · Ingest + Export pipelines</a:t>
+              <a:t>158 connectors · STIX 2.1 ORM · Ingest + Export pipelines</a:t>
             </a:r>
             <a:endParaRPr lang="en-US" sz="1300" dirty="0"/>
           </a:p>
@@ -38072,7 +38072,7 @@
                 <a:ea typeface="Calibri" pitchFamily="34" charset="-122"/>
                 <a:cs typeface="Calibri" pitchFamily="34" charset="-120"/>
               </a:rPr>
-              <a:t>Phase 4: ExecutionContext · HypothesisEngine · AgentGovernor · HITL  ·  3,865+ tests · ~$50/month Azure</a:t>
+              <a:t>Phase 4: ExecutionContext · HypothesisEngine · AgentGovernor · HITL  ·  4,600+ tests · ~$50/month Azure</a:t>
             </a:r>
             <a:endParaRPr lang="en-US" sz="1300" dirty="0"/>
           </a:p>
@@ -38700,7 +38700,7 @@
                 <a:ea typeface="Calibri" pitchFamily="34" charset="-122"/>
                 <a:cs typeface="Calibri" pitchFamily="34" charset="-120"/>
               </a:rPr>
-              <a:t>CONNECTOR LAYER (99 platforms)</a:t>
+              <a:t>CONNECTOR LAYER (158 platforms)</a:t>
             </a:r>
             <a:endParaRPr lang="en-US" sz="1000" dirty="0"/>
           </a:p>
@@ -38739,7 +38739,7 @@
                 <a:ea typeface="Calibri" pitchFamily="34" charset="-122"/>
                 <a:cs typeface="Calibri" pitchFamily="34" charset="-120"/>
               </a:rPr>
-              <a:t>ThreatQ · CrowdStrike · Splunk · Elastic · Wazuh · QRadar · Sentinel · VirusTotal · Mandiant · Orca · Wiz · MISP · ...</a:t>
+              <a:t>ThreatQ · CrowdStrike · Splunk · Sentinel · VirusTotal · Mandiant · Orca · Wiz · MISP · MITRE ATT&amp;CK · Joe Sandbox · Velociraptor · Code42 · Okta · Entra ID · Dataminr · HackerOne · ...</a:t>
             </a:r>
             <a:endParaRPr lang="en-US" sz="850" dirty="0"/>
           </a:p>
@@ -39090,7 +39090,7 @@
                 <a:ea typeface="Calibri" pitchFamily="34" charset="-122"/>
                 <a:cs typeface="Calibri" pitchFamily="34" charset="-120"/>
               </a:rPr>
-              <a:t>99 Platform Connectors — One Interface</a:t>
+              <a:t>158 Platform Connectors — One Interface</a:t>
             </a:r>
             <a:endParaRPr lang="en-US" sz="2000" dirty="0"/>
           </a:p>
@@ -39105,7 +39105,7 @@
         <p:spPr>
           <a:xfrm>
             <a:off x="182880" y="804672"/>
-            <a:ext cx="4160520" cy="1024128"/>
+            <a:ext cx="2862072" cy="950976"/>
           </a:xfrm>
           <a:prstGeom prst="rect">
             <a:avLst/>
@@ -39137,7 +39137,7 @@
         <p:spPr>
           <a:xfrm>
             <a:off x="182880" y="804672"/>
-            <a:ext cx="4160520" cy="54864"/>
+            <a:ext cx="2862072" cy="54864"/>
           </a:xfrm>
           <a:prstGeom prst="rect">
             <a:avLst/>
@@ -39161,24 +39161,24 @@
         </p:nvSpPr>
         <p:spPr>
           <a:xfrm>
-            <a:off x="292608" y="896112"/>
-            <a:ext cx="3941064" cy="201168"/>
-          </a:xfrm>
-          <a:prstGeom prst="rect">
-            <a:avLst/>
-          </a:prstGeom>
-          <a:noFill/>
-          <a:ln/>
-        </p:spPr>
-        <p:txBody>
-          <a:bodyPr wrap="square" lIns="0" tIns="0" rIns="0" bIns="0" rtlCol="0" anchor="ctr"/>
-          <a:lstStyle/>
-          <a:p>
-            <a:pPr indent="0" marL="0">
-              <a:buNone/>
-            </a:pPr>
-            <a:r>
-              <a:rPr lang="en-US" sz="850" b="1" dirty="0">
+            <a:off x="274320" y="896112"/>
+            <a:ext cx="2679192" cy="201168"/>
+          </a:xfrm>
+          <a:prstGeom prst="rect">
+            <a:avLst/>
+          </a:prstGeom>
+          <a:noFill/>
+          <a:ln/>
+        </p:spPr>
+        <p:txBody>
+          <a:bodyPr wrap="square" lIns="0" tIns="0" rIns="0" bIns="0" rtlCol="0" anchor="ctr"/>
+          <a:lstStyle/>
+          <a:p>
+            <a:pPr indent="0" marL="0">
+              <a:buNone/>
+            </a:pPr>
+            <a:r>
+              <a:rPr lang="en-US" sz="750" b="1" dirty="0">
                 <a:solidFill>
                   <a:srgbClr val="0891B2"/>
                 </a:solidFill>
@@ -39186,9 +39186,9 @@
                 <a:ea typeface="Calibri" pitchFamily="34" charset="-122"/>
                 <a:cs typeface="Calibri" pitchFamily="34" charset="-120"/>
               </a:rPr>
-              <a:t>THREAT INTELLIGENCE</a:t>
-            </a:r>
-            <a:endParaRPr lang="en-US" sz="850" dirty="0"/>
+              <a:t>COMMERCIAL THREAT INTEL</a:t>
+            </a:r>
+            <a:endParaRPr lang="en-US" sz="750" dirty="0"/>
           </a:p>
         </p:txBody>
       </p:sp>
@@ -39200,8 +39200,8 @@
         </p:nvSpPr>
         <p:spPr>
           <a:xfrm>
-            <a:off x="292608" y="1124712"/>
-            <a:ext cx="3941064" cy="612648"/>
+            <a:off x="274320" y="1106424"/>
+            <a:ext cx="2679192" cy="566928"/>
           </a:xfrm>
           <a:prstGeom prst="rect">
             <a:avLst/>
@@ -39217,7 +39217,7 @@
               <a:buNone/>
             </a:pPr>
             <a:r>
-              <a:rPr lang="en-US" sz="800" dirty="0">
+              <a:rPr lang="en-US" sz="650" dirty="0">
                 <a:solidFill>
                   <a:srgbClr val="94A3B8"/>
                 </a:solidFill>
@@ -39225,9 +39225,9 @@
                 <a:ea typeface="Calibri" pitchFamily="34" charset="-122"/>
                 <a:cs typeface="Calibri" pitchFamily="34" charset="-120"/>
               </a:rPr>
-              <a:t>ThreatQ · CrowdStrike · Recorded Future · AlienVault OTX · VirusTotal · ThreatConnect · Mandiant · MS Defender TI · ThreatStream · SOCRadar · PulseDive · FLARE · Yeti · CloudSEK · Feedly · MISP · OpenCTI · Group-IB · Cyble Vision · ZeroFox · ShadowServer · BitSight · Flashpoint · HudsonRock · Intel 471 · UpGuard · Shodan · GreyNoise · CISA KEV · OSINT Feed</a:t>
-            </a:r>
-            <a:endParaRPr lang="en-US" sz="800" dirty="0"/>
+              <a:t>ThreatQ · CrowdStrike · Recorded Future · VirusTotal · Mandiant · MS Defender TI · ThreatStream · SOCRadar · Feedly · CloudSEK · PulseDive · ThreatConnect</a:t>
+            </a:r>
+            <a:endParaRPr lang="en-US" sz="650" dirty="0"/>
           </a:p>
         </p:txBody>
       </p:sp>
@@ -39239,8 +39239,8 @@
         </p:nvSpPr>
         <p:spPr>
           <a:xfrm>
-            <a:off x="4434840" y="804672"/>
-            <a:ext cx="4160520" cy="1024128"/>
+            <a:off x="3136392" y="804672"/>
+            <a:ext cx="2862072" cy="950976"/>
           </a:xfrm>
           <a:prstGeom prst="rect">
             <a:avLst/>
@@ -39271,14 +39271,14 @@
         </p:nvSpPr>
         <p:spPr>
           <a:xfrm>
-            <a:off x="4434840" y="804672"/>
-            <a:ext cx="4160520" cy="54864"/>
+            <a:off x="3136392" y="804672"/>
+            <a:ext cx="2862072" cy="54864"/>
           </a:xfrm>
           <a:prstGeom prst="rect">
             <a:avLst/>
           </a:prstGeom>
           <a:solidFill>
-            <a:srgbClr val="5B93D9"/>
+            <a:srgbClr val="06B6D4"/>
           </a:solidFill>
           <a:ln w="12700">
             <a:solidFill>
@@ -39296,34 +39296,34 @@
         </p:nvSpPr>
         <p:spPr>
           <a:xfrm>
-            <a:off x="4544568" y="896112"/>
-            <a:ext cx="3941064" cy="201168"/>
-          </a:xfrm>
-          <a:prstGeom prst="rect">
-            <a:avLst/>
-          </a:prstGeom>
-          <a:noFill/>
-          <a:ln/>
-        </p:spPr>
-        <p:txBody>
-          <a:bodyPr wrap="square" lIns="0" tIns="0" rIns="0" bIns="0" rtlCol="0" anchor="ctr"/>
-          <a:lstStyle/>
-          <a:p>
-            <a:pPr indent="0" marL="0">
-              <a:buNone/>
-            </a:pPr>
-            <a:r>
-              <a:rPr lang="en-US" sz="850" b="1" dirty="0">
-                <a:solidFill>
-                  <a:srgbClr val="5B93D9"/>
-                </a:solidFill>
-                <a:latin typeface="Calibri" pitchFamily="34" charset="0"/>
-                <a:ea typeface="Calibri" pitchFamily="34" charset="-122"/>
-                <a:cs typeface="Calibri" pitchFamily="34" charset="-120"/>
-              </a:rPr>
-              <a:t>SIEM &amp; LOG ANALYTICS</a:t>
-            </a:r>
-            <a:endParaRPr lang="en-US" sz="850" dirty="0"/>
+            <a:off x="3227832" y="896112"/>
+            <a:ext cx="2679192" cy="201168"/>
+          </a:xfrm>
+          <a:prstGeom prst="rect">
+            <a:avLst/>
+          </a:prstGeom>
+          <a:noFill/>
+          <a:ln/>
+        </p:spPr>
+        <p:txBody>
+          <a:bodyPr wrap="square" lIns="0" tIns="0" rIns="0" bIns="0" rtlCol="0" anchor="ctr"/>
+          <a:lstStyle/>
+          <a:p>
+            <a:pPr indent="0" marL="0">
+              <a:buNone/>
+            </a:pPr>
+            <a:r>
+              <a:rPr lang="en-US" sz="750" b="1" dirty="0">
+                <a:solidFill>
+                  <a:srgbClr val="06B6D4"/>
+                </a:solidFill>
+                <a:latin typeface="Calibri" pitchFamily="34" charset="0"/>
+                <a:ea typeface="Calibri" pitchFamily="34" charset="-122"/>
+                <a:cs typeface="Calibri" pitchFamily="34" charset="-120"/>
+              </a:rPr>
+              <a:t>DARK WEB / CYBERCRIME INTEL</a:t>
+            </a:r>
+            <a:endParaRPr lang="en-US" sz="750" dirty="0"/>
           </a:p>
         </p:txBody>
       </p:sp>
@@ -39335,8 +39335,8 @@
         </p:nvSpPr>
         <p:spPr>
           <a:xfrm>
-            <a:off x="4544568" y="1124712"/>
-            <a:ext cx="3941064" cy="612648"/>
+            <a:off x="3227832" y="1106424"/>
+            <a:ext cx="2679192" cy="566928"/>
           </a:xfrm>
           <a:prstGeom prst="rect">
             <a:avLst/>
@@ -39352,7 +39352,7 @@
               <a:buNone/>
             </a:pPr>
             <a:r>
-              <a:rPr lang="en-US" sz="800" dirty="0">
+              <a:rPr lang="en-US" sz="650" dirty="0">
                 <a:solidFill>
                   <a:srgbClr val="94A3B8"/>
                 </a:solidFill>
@@ -39360,9 +39360,9 @@
                 <a:ea typeface="Calibri" pitchFamily="34" charset="-122"/>
                 <a:cs typeface="Calibri" pitchFamily="34" charset="-120"/>
               </a:rPr>
-              <a:t>Splunk · Elastic SIEM · IBM QRadar · Microsoft Sentinel · Graylog · OSSIM · Security Onion · Wazuh · Google Chronicle · LogRhythm · Datadog</a:t>
-            </a:r>
-            <a:endParaRPr lang="en-US" sz="800" dirty="0"/>
+              <a:t>Flashpoint · Intel 471 · Group-IB · HudsonRock · Cyble Vision · ZeroFox · FLARE · Yeti · Cofense Intelligence</a:t>
+            </a:r>
+            <a:endParaRPr lang="en-US" sz="650" dirty="0"/>
           </a:p>
         </p:txBody>
       </p:sp>
@@ -39374,8 +39374,8 @@
         </p:nvSpPr>
         <p:spPr>
           <a:xfrm>
-            <a:off x="182880" y="1920240"/>
-            <a:ext cx="4160520" cy="1024128"/>
+            <a:off x="6089904" y="804672"/>
+            <a:ext cx="2862072" cy="950976"/>
           </a:xfrm>
           <a:prstGeom prst="rect">
             <a:avLst/>
@@ -39406,14 +39406,14 @@
         </p:nvSpPr>
         <p:spPr>
           <a:xfrm>
-            <a:off x="182880" y="1920240"/>
-            <a:ext cx="4160520" cy="54864"/>
+            <a:off x="6089904" y="804672"/>
+            <a:ext cx="2862072" cy="54864"/>
           </a:xfrm>
           <a:prstGeom prst="rect">
             <a:avLst/>
           </a:prstGeom>
           <a:solidFill>
-            <a:srgbClr val="0891B2"/>
+            <a:srgbClr val="5B93D9"/>
           </a:solidFill>
           <a:ln w="12700">
             <a:solidFill>
@@ -39431,34 +39431,34 @@
         </p:nvSpPr>
         <p:spPr>
           <a:xfrm>
-            <a:off x="292608" y="2011680"/>
-            <a:ext cx="3941064" cy="201168"/>
-          </a:xfrm>
-          <a:prstGeom prst="rect">
-            <a:avLst/>
-          </a:prstGeom>
-          <a:noFill/>
-          <a:ln/>
-        </p:spPr>
-        <p:txBody>
-          <a:bodyPr wrap="square" lIns="0" tIns="0" rIns="0" bIns="0" rtlCol="0" anchor="ctr"/>
-          <a:lstStyle/>
-          <a:p>
-            <a:pPr indent="0" marL="0">
-              <a:buNone/>
-            </a:pPr>
-            <a:r>
-              <a:rPr lang="en-US" sz="850" b="1" dirty="0">
-                <a:solidFill>
-                  <a:srgbClr val="0891B2"/>
-                </a:solidFill>
-                <a:latin typeface="Calibri" pitchFamily="34" charset="0"/>
-                <a:ea typeface="Calibri" pitchFamily="34" charset="-122"/>
-                <a:cs typeface="Calibri" pitchFamily="34" charset="-120"/>
-              </a:rPr>
-              <a:t>SOAR &amp; INCIDENT RESPONSE</a:t>
-            </a:r>
-            <a:endParaRPr lang="en-US" sz="850" dirty="0"/>
+            <a:off x="6181344" y="896112"/>
+            <a:ext cx="2679192" cy="201168"/>
+          </a:xfrm>
+          <a:prstGeom prst="rect">
+            <a:avLst/>
+          </a:prstGeom>
+          <a:noFill/>
+          <a:ln/>
+        </p:spPr>
+        <p:txBody>
+          <a:bodyPr wrap="square" lIns="0" tIns="0" rIns="0" bIns="0" rtlCol="0" anchor="ctr"/>
+          <a:lstStyle/>
+          <a:p>
+            <a:pPr indent="0" marL="0">
+              <a:buNone/>
+            </a:pPr>
+            <a:r>
+              <a:rPr lang="en-US" sz="750" b="1" dirty="0">
+                <a:solidFill>
+                  <a:srgbClr val="5B93D9"/>
+                </a:solidFill>
+                <a:latin typeface="Calibri" pitchFamily="34" charset="0"/>
+                <a:ea typeface="Calibri" pitchFamily="34" charset="-122"/>
+                <a:cs typeface="Calibri" pitchFamily="34" charset="-120"/>
+              </a:rPr>
+              <a:t>PUBLIC FEEDS &amp; VENDOR REPUTATION</a:t>
+            </a:r>
+            <a:endParaRPr lang="en-US" sz="750" dirty="0"/>
           </a:p>
         </p:txBody>
       </p:sp>
@@ -39470,8 +39470,8 @@
         </p:nvSpPr>
         <p:spPr>
           <a:xfrm>
-            <a:off x="292608" y="2240280"/>
-            <a:ext cx="3941064" cy="612648"/>
+            <a:off x="6181344" y="1106424"/>
+            <a:ext cx="2679192" cy="566928"/>
           </a:xfrm>
           <a:prstGeom prst="rect">
             <a:avLst/>
@@ -39487,7 +39487,7 @@
               <a:buNone/>
             </a:pPr>
             <a:r>
-              <a:rPr lang="en-US" sz="800" dirty="0">
+              <a:rPr lang="en-US" sz="650" dirty="0">
                 <a:solidFill>
                   <a:srgbClr val="94A3B8"/>
                 </a:solidFill>
@@ -39495,9 +39495,9 @@
                 <a:ea typeface="Calibri" pitchFamily="34" charset="-122"/>
                 <a:cs typeface="Calibri" pitchFamily="34" charset="-120"/>
               </a:rPr>
-              <a:t>Palo Alto XSOAR · TheHive · GreyMatter · ServiceNow · Jira · Synapse · FortiSOAR</a:t>
-            </a:r>
-            <a:endParaRPr lang="en-US" sz="800" dirty="0"/>
+              <a:t>AlienVault OTX · MISP · OpenCTI · HIBP · Synapse · OSINT Feed · MITRE ATT&amp;CK · Abuse.ch (5 feeds) · OSV · VulnCheck · CISA KEV · Shodan · GreyNoise · Shadowserver · AbuseIPDB · Project Honey Pot · crt.sh · Google CT · Cisco Talos · FortiGuard · Kaspersky OpenTIP · ESET TI · Bitdefender IZ · Cloudflare Intel · TRM Labs</a:t>
+            </a:r>
+            <a:endParaRPr lang="en-US" sz="650" dirty="0"/>
           </a:p>
         </p:txBody>
       </p:sp>
@@ -39509,8 +39509,8 @@
         </p:nvSpPr>
         <p:spPr>
           <a:xfrm>
-            <a:off x="4434840" y="1920240"/>
-            <a:ext cx="4160520" cy="1024128"/>
+            <a:off x="182880" y="1847088"/>
+            <a:ext cx="2862072" cy="950976"/>
           </a:xfrm>
           <a:prstGeom prst="rect">
             <a:avLst/>
@@ -39541,14 +39541,14 @@
         </p:nvSpPr>
         <p:spPr>
           <a:xfrm>
-            <a:off x="4434840" y="1920240"/>
-            <a:ext cx="4160520" cy="54864"/>
+            <a:off x="182880" y="1847088"/>
+            <a:ext cx="2862072" cy="54864"/>
           </a:xfrm>
           <a:prstGeom prst="rect">
             <a:avLst/>
           </a:prstGeom>
           <a:solidFill>
-            <a:srgbClr val="5B93D9"/>
+            <a:srgbClr val="1E4D8C"/>
           </a:solidFill>
           <a:ln w="12700">
             <a:solidFill>
@@ -39566,34 +39566,34 @@
         </p:nvSpPr>
         <p:spPr>
           <a:xfrm>
-            <a:off x="4544568" y="2011680"/>
-            <a:ext cx="3941064" cy="201168"/>
-          </a:xfrm>
-          <a:prstGeom prst="rect">
-            <a:avLst/>
-          </a:prstGeom>
-          <a:noFill/>
-          <a:ln/>
-        </p:spPr>
-        <p:txBody>
-          <a:bodyPr wrap="square" lIns="0" tIns="0" rIns="0" bIns="0" rtlCol="0" anchor="ctr"/>
-          <a:lstStyle/>
-          <a:p>
-            <a:pPr indent="0" marL="0">
-              <a:buNone/>
-            </a:pPr>
-            <a:r>
-              <a:rPr lang="en-US" sz="850" b="1" dirty="0">
-                <a:solidFill>
-                  <a:srgbClr val="5B93D9"/>
-                </a:solidFill>
-                <a:latin typeface="Calibri" pitchFamily="34" charset="0"/>
-                <a:ea typeface="Calibri" pitchFamily="34" charset="-122"/>
-                <a:cs typeface="Calibri" pitchFamily="34" charset="-120"/>
-              </a:rPr>
-              <a:t>VULNERABILITY &amp; CLOUD SECURITY</a:t>
-            </a:r>
-            <a:endParaRPr lang="en-US" sz="850" dirty="0"/>
+            <a:off x="274320" y="1938528"/>
+            <a:ext cx="2679192" cy="201168"/>
+          </a:xfrm>
+          <a:prstGeom prst="rect">
+            <a:avLst/>
+          </a:prstGeom>
+          <a:noFill/>
+          <a:ln/>
+        </p:spPr>
+        <p:txBody>
+          <a:bodyPr wrap="square" lIns="0" tIns="0" rIns="0" bIns="0" rtlCol="0" anchor="ctr"/>
+          <a:lstStyle/>
+          <a:p>
+            <a:pPr indent="0" marL="0">
+              <a:buNone/>
+            </a:pPr>
+            <a:r>
+              <a:rPr lang="en-US" sz="750" b="1" dirty="0">
+                <a:solidFill>
+                  <a:srgbClr val="1E4D8C"/>
+                </a:solidFill>
+                <a:latin typeface="Calibri" pitchFamily="34" charset="0"/>
+                <a:ea typeface="Calibri" pitchFamily="34" charset="-122"/>
+                <a:cs typeface="Calibri" pitchFamily="34" charset="-120"/>
+              </a:rPr>
+              <a:t>SIEM &amp; LOG ANALYTICS</a:t>
+            </a:r>
+            <a:endParaRPr lang="en-US" sz="750" dirty="0"/>
           </a:p>
         </p:txBody>
       </p:sp>
@@ -39605,8 +39605,8 @@
         </p:nvSpPr>
         <p:spPr>
           <a:xfrm>
-            <a:off x="4544568" y="2240280"/>
-            <a:ext cx="3941064" cy="612648"/>
+            <a:off x="274320" y="2148840"/>
+            <a:ext cx="2679192" cy="566928"/>
           </a:xfrm>
           <a:prstGeom prst="rect">
             <a:avLst/>
@@ -39622,7 +39622,7 @@
               <a:buNone/>
             </a:pPr>
             <a:r>
-              <a:rPr lang="en-US" sz="800" dirty="0">
+              <a:rPr lang="en-US" sz="650" dirty="0">
                 <a:solidFill>
                   <a:srgbClr val="94A3B8"/>
                 </a:solidFill>
@@ -39630,9 +39630,9 @@
                 <a:ea typeface="Calibri" pitchFamily="34" charset="-122"/>
                 <a:cs typeface="Calibri" pitchFamily="34" charset="-120"/>
               </a:rPr>
-              <a:t>Rapid7 InsightVM/IDR · Nucleus Security · Tenable One · Qualys VMDR · Greenbone/OpenVAS · DefectDojo · Orca Security · Wiz CNAPP · Cortex Xpanse · CyCognito · RiskRecon · Armis Centrix · Axonius · Prisma Cloud · AWS Security Hub · JupiterOne · SecurityScorecard · Censys</a:t>
-            </a:r>
-            <a:endParaRPr lang="en-US" sz="800" dirty="0"/>
+              <a:t>Splunk · Elastic SIEM · IBM QRadar · Microsoft Sentinel · Graylog · OSSIM · Security Onion · Wazuh · Google Chronicle · LogRhythm · Datadog · Cribl Stream</a:t>
+            </a:r>
+            <a:endParaRPr lang="en-US" sz="650" dirty="0"/>
           </a:p>
         </p:txBody>
       </p:sp>
@@ -39644,8 +39644,8 @@
         </p:nvSpPr>
         <p:spPr>
           <a:xfrm>
-            <a:off x="182880" y="3035808"/>
-            <a:ext cx="4160520" cy="1024128"/>
+            <a:off x="3136392" y="1847088"/>
+            <a:ext cx="2862072" cy="950976"/>
           </a:xfrm>
           <a:prstGeom prst="rect">
             <a:avLst/>
@@ -39676,8 +39676,8 @@
         </p:nvSpPr>
         <p:spPr>
           <a:xfrm>
-            <a:off x="182880" y="3035808"/>
-            <a:ext cx="4160520" cy="54864"/>
+            <a:off x="3136392" y="1847088"/>
+            <a:ext cx="2862072" cy="54864"/>
           </a:xfrm>
           <a:prstGeom prst="rect">
             <a:avLst/>
@@ -39701,24 +39701,24 @@
         </p:nvSpPr>
         <p:spPr>
           <a:xfrm>
-            <a:off x="292608" y="3127248"/>
-            <a:ext cx="3941064" cy="201168"/>
-          </a:xfrm>
-          <a:prstGeom prst="rect">
-            <a:avLst/>
-          </a:prstGeom>
-          <a:noFill/>
-          <a:ln/>
-        </p:spPr>
-        <p:txBody>
-          <a:bodyPr wrap="square" lIns="0" tIns="0" rIns="0" bIns="0" rtlCol="0" anchor="ctr"/>
-          <a:lstStyle/>
-          <a:p>
-            <a:pPr indent="0" marL="0">
-              <a:buNone/>
-            </a:pPr>
-            <a:r>
-              <a:rPr lang="en-US" sz="850" b="1" dirty="0">
+            <a:off x="3227832" y="1938528"/>
+            <a:ext cx="2679192" cy="201168"/>
+          </a:xfrm>
+          <a:prstGeom prst="rect">
+            <a:avLst/>
+          </a:prstGeom>
+          <a:noFill/>
+          <a:ln/>
+        </p:spPr>
+        <p:txBody>
+          <a:bodyPr wrap="square" lIns="0" tIns="0" rIns="0" bIns="0" rtlCol="0" anchor="ctr"/>
+          <a:lstStyle/>
+          <a:p>
+            <a:pPr indent="0" marL="0">
+              <a:buNone/>
+            </a:pPr>
+            <a:r>
+              <a:rPr lang="en-US" sz="750" b="1" dirty="0">
                 <a:solidFill>
                   <a:srgbClr val="0891B2"/>
                 </a:solidFill>
@@ -39726,9 +39726,9 @@
                 <a:ea typeface="Calibri" pitchFamily="34" charset="-122"/>
                 <a:cs typeface="Calibri" pitchFamily="34" charset="-120"/>
               </a:rPr>
-              <a:t>NETWORK DETECTION &amp; ENDPOINT</a:t>
-            </a:r>
-            <a:endParaRPr lang="en-US" sz="850" dirty="0"/>
+              <a:t>SOAR, CASE MGMT &amp; DFIR</a:t>
+            </a:r>
+            <a:endParaRPr lang="en-US" sz="750" dirty="0"/>
           </a:p>
         </p:txBody>
       </p:sp>
@@ -39740,8 +39740,8 @@
         </p:nvSpPr>
         <p:spPr>
           <a:xfrm>
-            <a:off x="292608" y="3355848"/>
-            <a:ext cx="3941064" cy="612648"/>
+            <a:off x="3227832" y="2148840"/>
+            <a:ext cx="2679192" cy="566928"/>
           </a:xfrm>
           <a:prstGeom prst="rect">
             <a:avLst/>
@@ -39757,7 +39757,7 @@
               <a:buNone/>
             </a:pPr>
             <a:r>
-              <a:rPr lang="en-US" sz="800" dirty="0">
+              <a:rPr lang="en-US" sz="650" dirty="0">
                 <a:solidFill>
                   <a:srgbClr val="94A3B8"/>
                 </a:solidFill>
@@ -39765,9 +39765,9 @@
                 <a:ea typeface="Calibri" pitchFamily="34" charset="-122"/>
                 <a:cs typeface="Calibri" pitchFamily="34" charset="-120"/>
               </a:rPr>
-              <a:t>Snort IDS · Suricata · Zeek · SentinelOne · Stellar Cyber · Netskope · ControlUp DEX · Whistic · Proofpoint · Darktrace · ExtraHop · Lansweeper · Vectra AI · Sophos · Trellix · Carbon Black · Tanium · Trend Micro Vision One · Cisco Umbrella · Cortex XDR · FortiEDR · FortiSIEM</a:t>
-            </a:r>
-            <a:endParaRPr lang="en-US" sz="800" dirty="0"/>
+              <a:t>Palo Alto XSOAR · TheHive · GreyMatter · ServiceNow · ServiceNow SecOps · Jira · FortiSOAR · Vertex Synapse · Velociraptor · Magnet AXIOM · HackerOne · Bugcrowd</a:t>
+            </a:r>
+            <a:endParaRPr lang="en-US" sz="650" dirty="0"/>
           </a:p>
         </p:txBody>
       </p:sp>
@@ -39779,8 +39779,8 @@
         </p:nvSpPr>
         <p:spPr>
           <a:xfrm>
-            <a:off x="4434840" y="3035808"/>
-            <a:ext cx="4160520" cy="1024128"/>
+            <a:off x="6089904" y="1847088"/>
+            <a:ext cx="2862072" cy="950976"/>
           </a:xfrm>
           <a:prstGeom prst="rect">
             <a:avLst/>
@@ -39811,8 +39811,8 @@
         </p:nvSpPr>
         <p:spPr>
           <a:xfrm>
-            <a:off x="4434840" y="3035808"/>
-            <a:ext cx="4160520" cy="54864"/>
+            <a:off x="6089904" y="1847088"/>
+            <a:ext cx="2862072" cy="54864"/>
           </a:xfrm>
           <a:prstGeom prst="rect">
             <a:avLst/>
@@ -39836,24 +39836,24 @@
         </p:nvSpPr>
         <p:spPr>
           <a:xfrm>
-            <a:off x="4544568" y="3127248"/>
-            <a:ext cx="3941064" cy="201168"/>
-          </a:xfrm>
-          <a:prstGeom prst="rect">
-            <a:avLst/>
-          </a:prstGeom>
-          <a:noFill/>
-          <a:ln/>
-        </p:spPr>
-        <p:txBody>
-          <a:bodyPr wrap="square" lIns="0" tIns="0" rIns="0" bIns="0" rtlCol="0" anchor="ctr"/>
-          <a:lstStyle/>
-          <a:p>
-            <a:pPr indent="0" marL="0">
-              <a:buNone/>
-            </a:pPr>
-            <a:r>
-              <a:rPr lang="en-US" sz="850" b="1" dirty="0">
+            <a:off x="6181344" y="1938528"/>
+            <a:ext cx="2679192" cy="201168"/>
+          </a:xfrm>
+          <a:prstGeom prst="rect">
+            <a:avLst/>
+          </a:prstGeom>
+          <a:noFill/>
+          <a:ln/>
+        </p:spPr>
+        <p:txBody>
+          <a:bodyPr wrap="square" lIns="0" tIns="0" rIns="0" bIns="0" rtlCol="0" anchor="ctr"/>
+          <a:lstStyle/>
+          <a:p>
+            <a:pPr indent="0" marL="0">
+              <a:buNone/>
+            </a:pPr>
+            <a:r>
+              <a:rPr lang="en-US" sz="750" b="1" dirty="0">
                 <a:solidFill>
                   <a:srgbClr val="5B93D9"/>
                 </a:solidFill>
@@ -39861,9 +39861,9 @@
                 <a:ea typeface="Calibri" pitchFamily="34" charset="-122"/>
                 <a:cs typeface="Calibri" pitchFamily="34" charset="-120"/>
               </a:rPr>
-              <a:t>OT/ICS &amp; INDUSTRY</a:t>
-            </a:r>
-            <a:endParaRPr lang="en-US" sz="850" dirty="0"/>
+              <a:t>NETWORK DETECTION &amp; OT/ICS</a:t>
+            </a:r>
+            <a:endParaRPr lang="en-US" sz="750" dirty="0"/>
           </a:p>
         </p:txBody>
       </p:sp>
@@ -39875,8 +39875,8 @@
         </p:nvSpPr>
         <p:spPr>
           <a:xfrm>
-            <a:off x="4544568" y="3355848"/>
-            <a:ext cx="3941064" cy="612648"/>
+            <a:off x="6181344" y="2148840"/>
+            <a:ext cx="2679192" cy="566928"/>
           </a:xfrm>
           <a:prstGeom prst="rect">
             <a:avLst/>
@@ -39892,7 +39892,7 @@
               <a:buNone/>
             </a:pPr>
             <a:r>
-              <a:rPr lang="en-US" sz="800" dirty="0">
+              <a:rPr lang="en-US" sz="650" dirty="0">
                 <a:solidFill>
                   <a:srgbClr val="94A3B8"/>
                 </a:solidFill>
@@ -39900,9 +39900,9 @@
                 <a:ea typeface="Calibri" pitchFamily="34" charset="-122"/>
                 <a:cs typeface="Calibri" pitchFamily="34" charset="-120"/>
               </a:rPr>
-              <a:t>Dragos Platform · Claroty · Nozomi Networks · Cribl Stream</a:t>
-            </a:r>
-            <a:endParaRPr lang="en-US" sz="800" dirty="0"/>
+              <a:t>Snort IDS · Suricata · Zeek · Vectra AI NDR · ExtraHop Reveal(x) · Darktrace · Cisco Umbrella · Nozomi Networks · Dragos Platform · Claroty</a:t>
+            </a:r>
+            <a:endParaRPr lang="en-US" sz="650" dirty="0"/>
           </a:p>
         </p:txBody>
       </p:sp>
@@ -39914,8 +39914,8 @@
         </p:nvSpPr>
         <p:spPr>
           <a:xfrm>
-            <a:off x="182880" y="4151376"/>
-            <a:ext cx="4160520" cy="1024128"/>
+            <a:off x="182880" y="2889504"/>
+            <a:ext cx="2862072" cy="950976"/>
           </a:xfrm>
           <a:prstGeom prst="rect">
             <a:avLst/>
@@ -39946,14 +39946,14 @@
         </p:nvSpPr>
         <p:spPr>
           <a:xfrm>
-            <a:off x="182880" y="4151376"/>
-            <a:ext cx="4160520" cy="54864"/>
+            <a:off x="182880" y="2889504"/>
+            <a:ext cx="2862072" cy="54864"/>
           </a:xfrm>
           <a:prstGeom prst="rect">
             <a:avLst/>
           </a:prstGeom>
           <a:solidFill>
-            <a:srgbClr val="06B6D4"/>
+            <a:srgbClr val="0891B2"/>
           </a:solidFill>
           <a:ln w="12700">
             <a:solidFill>
@@ -39971,34 +39971,34 @@
         </p:nvSpPr>
         <p:spPr>
           <a:xfrm>
-            <a:off x="292608" y="4242816"/>
-            <a:ext cx="3941064" cy="201168"/>
-          </a:xfrm>
-          <a:prstGeom prst="rect">
-            <a:avLst/>
-          </a:prstGeom>
-          <a:noFill/>
-          <a:ln/>
-        </p:spPr>
-        <p:txBody>
-          <a:bodyPr wrap="square" lIns="0" tIns="0" rIns="0" bIns="0" rtlCol="0" anchor="ctr"/>
-          <a:lstStyle/>
-          <a:p>
-            <a:pPr indent="0" marL="0">
-              <a:buNone/>
-            </a:pPr>
-            <a:r>
-              <a:rPr lang="en-US" sz="850" b="1" dirty="0">
-                <a:solidFill>
-                  <a:srgbClr val="06B6D4"/>
-                </a:solidFill>
-                <a:latin typeface="Calibri" pitchFamily="34" charset="0"/>
-                <a:ea typeface="Calibri" pitchFamily="34" charset="-122"/>
-                <a:cs typeface="Calibri" pitchFamily="34" charset="-120"/>
-              </a:rPr>
-              <a:t>AI ASSISTANTS</a:t>
-            </a:r>
-            <a:endParaRPr lang="en-US" sz="850" dirty="0"/>
+            <a:off x="274320" y="2980944"/>
+            <a:ext cx="2679192" cy="201168"/>
+          </a:xfrm>
+          <a:prstGeom prst="rect">
+            <a:avLst/>
+          </a:prstGeom>
+          <a:noFill/>
+          <a:ln/>
+        </p:spPr>
+        <p:txBody>
+          <a:bodyPr wrap="square" lIns="0" tIns="0" rIns="0" bIns="0" rtlCol="0" anchor="ctr"/>
+          <a:lstStyle/>
+          <a:p>
+            <a:pPr indent="0" marL="0">
+              <a:buNone/>
+            </a:pPr>
+            <a:r>
+              <a:rPr lang="en-US" sz="750" b="1" dirty="0">
+                <a:solidFill>
+                  <a:srgbClr val="0891B2"/>
+                </a:solidFill>
+                <a:latin typeface="Calibri" pitchFamily="34" charset="0"/>
+                <a:ea typeface="Calibri" pitchFamily="34" charset="-122"/>
+                <a:cs typeface="Calibri" pitchFamily="34" charset="-120"/>
+              </a:rPr>
+              <a:t>ENDPOINT, XDR &amp; MDR</a:t>
+            </a:r>
+            <a:endParaRPr lang="en-US" sz="750" dirty="0"/>
           </a:p>
         </p:txBody>
       </p:sp>
@@ -40010,8 +40010,8 @@
         </p:nvSpPr>
         <p:spPr>
           <a:xfrm>
-            <a:off x="292608" y="4471416"/>
-            <a:ext cx="3941064" cy="612648"/>
+            <a:off x="274320" y="3191256"/>
+            <a:ext cx="2679192" cy="566928"/>
           </a:xfrm>
           <a:prstGeom prst="rect">
             <a:avLst/>
@@ -40027,7 +40027,7 @@
               <a:buNone/>
             </a:pPr>
             <a:r>
-              <a:rPr lang="en-US" sz="800" dirty="0">
+              <a:rPr lang="en-US" sz="650" dirty="0">
                 <a:solidFill>
                   <a:srgbClr val="94A3B8"/>
                 </a:solidFill>
@@ -40035,9 +40035,9 @@
                 <a:ea typeface="Calibri" pitchFamily="34" charset="-122"/>
                 <a:cs typeface="Calibri" pitchFamily="34" charset="-120"/>
               </a:rPr>
-              <a:t>Microsoft Copilot for Security · OpenAI ChatGPT · Google Gemini · Grok AI · Discord</a:t>
-            </a:r>
-            <a:endParaRPr lang="en-US" sz="800" dirty="0"/>
+              <a:t>SentinelOne · Carbon Black · Trellix · Sophos · FortiEDR · FortiSIEM · Cortex XDR/XSIAM · Trend Micro Vision One · Tanium · Proofpoint · Huntress · Arctic Wolf · Red Canary</a:t>
+            </a:r>
+            <a:endParaRPr lang="en-US" sz="650" dirty="0"/>
           </a:p>
         </p:txBody>
       </p:sp>
@@ -40049,8 +40049,8 @@
         </p:nvSpPr>
         <p:spPr>
           <a:xfrm>
-            <a:off x="4434840" y="4151376"/>
-            <a:ext cx="4160520" cy="1024128"/>
+            <a:off x="3136392" y="2889504"/>
+            <a:ext cx="2862072" cy="950976"/>
           </a:xfrm>
           <a:prstGeom prst="rect">
             <a:avLst/>
@@ -40081,8 +40081,413 @@
         </p:nvSpPr>
         <p:spPr>
           <a:xfrm>
-            <a:off x="4434840" y="4151376"/>
-            <a:ext cx="4160520" cy="54864"/>
+            <a:off x="3136392" y="2889504"/>
+            <a:ext cx="2862072" cy="54864"/>
+          </a:xfrm>
+          <a:prstGeom prst="rect">
+            <a:avLst/>
+          </a:prstGeom>
+          <a:solidFill>
+            <a:srgbClr val="1E4D8C"/>
+          </a:solidFill>
+          <a:ln w="12700">
+            <a:solidFill>
+              <a:srgbClr val="333333"/>
+            </a:solidFill>
+            <a:prstDash val="solid"/>
+          </a:ln>
+        </p:spPr>
+      </p:sp>
+      <p:sp>
+        <p:nvSpPr>
+          <p:cNvPr id="35" name="Text 33"/>
+          <p:cNvSpPr/>
+          <p:nvPr/>
+        </p:nvSpPr>
+        <p:spPr>
+          <a:xfrm>
+            <a:off x="3227832" y="2980944"/>
+            <a:ext cx="2679192" cy="201168"/>
+          </a:xfrm>
+          <a:prstGeom prst="rect">
+            <a:avLst/>
+          </a:prstGeom>
+          <a:noFill/>
+          <a:ln/>
+        </p:spPr>
+        <p:txBody>
+          <a:bodyPr wrap="square" lIns="0" tIns="0" rIns="0" bIns="0" rtlCol="0" anchor="ctr"/>
+          <a:lstStyle/>
+          <a:p>
+            <a:pPr indent="0" marL="0">
+              <a:buNone/>
+            </a:pPr>
+            <a:r>
+              <a:rPr lang="en-US" sz="750" b="1" dirty="0">
+                <a:solidFill>
+                  <a:srgbClr val="1E4D8C"/>
+                </a:solidFill>
+                <a:latin typeface="Calibri" pitchFamily="34" charset="0"/>
+                <a:ea typeface="Calibri" pitchFamily="34" charset="-122"/>
+                <a:cs typeface="Calibri" pitchFamily="34" charset="-120"/>
+              </a:rPr>
+              <a:t>VULNERABILITY &amp; EXPOSURE MGMT</a:t>
+            </a:r>
+            <a:endParaRPr lang="en-US" sz="750" dirty="0"/>
+          </a:p>
+        </p:txBody>
+      </p:sp>
+      <p:sp>
+        <p:nvSpPr>
+          <p:cNvPr id="36" name="Text 34"/>
+          <p:cNvSpPr/>
+          <p:nvPr/>
+        </p:nvSpPr>
+        <p:spPr>
+          <a:xfrm>
+            <a:off x="3227832" y="3191256"/>
+            <a:ext cx="2679192" cy="566928"/>
+          </a:xfrm>
+          <a:prstGeom prst="rect">
+            <a:avLst/>
+          </a:prstGeom>
+          <a:noFill/>
+          <a:ln/>
+        </p:spPr>
+        <p:txBody>
+          <a:bodyPr wrap="square" lIns="0" tIns="0" rIns="0" bIns="0" rtlCol="0" anchor="t"/>
+          <a:lstStyle/>
+          <a:p>
+            <a:pPr indent="0" marL="0">
+              <a:buNone/>
+            </a:pPr>
+            <a:r>
+              <a:rPr lang="en-US" sz="650" dirty="0">
+                <a:solidFill>
+                  <a:srgbClr val="94A3B8"/>
+                </a:solidFill>
+                <a:latin typeface="Calibri" pitchFamily="34" charset="0"/>
+                <a:ea typeface="Calibri" pitchFamily="34" charset="-122"/>
+                <a:cs typeface="Calibri" pitchFamily="34" charset="-120"/>
+              </a:rPr>
+              <a:t>Rapid7 InsightVM/IDR · Nucleus Security · Tenable One · Qualys VMDR · Greenbone/OpenVAS · DefectDojo</a:t>
+            </a:r>
+            <a:endParaRPr lang="en-US" sz="650" dirty="0"/>
+          </a:p>
+        </p:txBody>
+      </p:sp>
+      <p:sp>
+        <p:nvSpPr>
+          <p:cNvPr id="37" name="Shape 35"/>
+          <p:cNvSpPr/>
+          <p:nvPr/>
+        </p:nvSpPr>
+        <p:spPr>
+          <a:xfrm>
+            <a:off x="6089904" y="2889504"/>
+            <a:ext cx="2862072" cy="950976"/>
+          </a:xfrm>
+          <a:prstGeom prst="rect">
+            <a:avLst/>
+          </a:prstGeom>
+          <a:solidFill>
+            <a:srgbClr val="162952"/>
+          </a:solidFill>
+          <a:ln w="6350">
+            <a:solidFill>
+              <a:srgbClr val="1E4D8C"/>
+            </a:solidFill>
+            <a:prstDash val="solid"/>
+          </a:ln>
+          <a:effectLst>
+            <a:outerShdw sx="100000" sy="100000" kx="0" ky="0" algn="bl" rotWithShape="0" blurRad="76200" dist="38100" dir="8100000">
+              <a:srgbClr val="000000">
+                <a:alpha val="30000"/>
+              </a:srgbClr>
+            </a:outerShdw>
+          </a:effectLst>
+        </p:spPr>
+      </p:sp>
+      <p:sp>
+        <p:nvSpPr>
+          <p:cNvPr id="38" name="Shape 36"/>
+          <p:cNvSpPr/>
+          <p:nvPr/>
+        </p:nvSpPr>
+        <p:spPr>
+          <a:xfrm>
+            <a:off x="6089904" y="2889504"/>
+            <a:ext cx="2862072" cy="54864"/>
+          </a:xfrm>
+          <a:prstGeom prst="rect">
+            <a:avLst/>
+          </a:prstGeom>
+          <a:solidFill>
+            <a:srgbClr val="06B6D4"/>
+          </a:solidFill>
+          <a:ln w="12700">
+            <a:solidFill>
+              <a:srgbClr val="333333"/>
+            </a:solidFill>
+            <a:prstDash val="solid"/>
+          </a:ln>
+        </p:spPr>
+      </p:sp>
+      <p:sp>
+        <p:nvSpPr>
+          <p:cNvPr id="39" name="Text 37"/>
+          <p:cNvSpPr/>
+          <p:nvPr/>
+        </p:nvSpPr>
+        <p:spPr>
+          <a:xfrm>
+            <a:off x="6181344" y="2980944"/>
+            <a:ext cx="2679192" cy="201168"/>
+          </a:xfrm>
+          <a:prstGeom prst="rect">
+            <a:avLst/>
+          </a:prstGeom>
+          <a:noFill/>
+          <a:ln/>
+        </p:spPr>
+        <p:txBody>
+          <a:bodyPr wrap="square" lIns="0" tIns="0" rIns="0" bIns="0" rtlCol="0" anchor="ctr"/>
+          <a:lstStyle/>
+          <a:p>
+            <a:pPr indent="0" marL="0">
+              <a:buNone/>
+            </a:pPr>
+            <a:r>
+              <a:rPr lang="en-US" sz="750" b="1" dirty="0">
+                <a:solidFill>
+                  <a:srgbClr val="06B6D4"/>
+                </a:solidFill>
+                <a:latin typeface="Calibri" pitchFamily="34" charset="0"/>
+                <a:ea typeface="Calibri" pitchFamily="34" charset="-122"/>
+                <a:cs typeface="Calibri" pitchFamily="34" charset="-120"/>
+              </a:rPr>
+              <a:t>CLOUD, ASM &amp; ASSET MGMT</a:t>
+            </a:r>
+            <a:endParaRPr lang="en-US" sz="750" dirty="0"/>
+          </a:p>
+        </p:txBody>
+      </p:sp>
+      <p:sp>
+        <p:nvSpPr>
+          <p:cNvPr id="40" name="Text 38"/>
+          <p:cNvSpPr/>
+          <p:nvPr/>
+        </p:nvSpPr>
+        <p:spPr>
+          <a:xfrm>
+            <a:off x="6181344" y="3191256"/>
+            <a:ext cx="2679192" cy="566928"/>
+          </a:xfrm>
+          <a:prstGeom prst="rect">
+            <a:avLst/>
+          </a:prstGeom>
+          <a:noFill/>
+          <a:ln/>
+        </p:spPr>
+        <p:txBody>
+          <a:bodyPr wrap="square" lIns="0" tIns="0" rIns="0" bIns="0" rtlCol="0" anchor="t"/>
+          <a:lstStyle/>
+          <a:p>
+            <a:pPr indent="0" marL="0">
+              <a:buNone/>
+            </a:pPr>
+            <a:r>
+              <a:rPr lang="en-US" sz="650" dirty="0">
+                <a:solidFill>
+                  <a:srgbClr val="94A3B8"/>
+                </a:solidFill>
+                <a:latin typeface="Calibri" pitchFamily="34" charset="0"/>
+                <a:ea typeface="Calibri" pitchFamily="34" charset="-122"/>
+                <a:cs typeface="Calibri" pitchFamily="34" charset="-120"/>
+              </a:rPr>
+              <a:t>Orca · Wiz CNAPP · Cortex Xpanse · Prisma Cloud · CyCognito · RiskRecon · Censys · BitSight · UpGuard · SecurityScorecard · AWS Security Hub · JupiterOne · Armis · Axonius · Lansweeper · ControlUp · Stellar Cyber · Whistic · Netskope · runZero · Dynatrace · SecurityTrails · DomainTools · Silent Push · ip-api</a:t>
+            </a:r>
+            <a:endParaRPr lang="en-US" sz="650" dirty="0"/>
+          </a:p>
+        </p:txBody>
+      </p:sp>
+      <p:sp>
+        <p:nvSpPr>
+          <p:cNvPr id="41" name="Shape 39"/>
+          <p:cNvSpPr/>
+          <p:nvPr/>
+        </p:nvSpPr>
+        <p:spPr>
+          <a:xfrm>
+            <a:off x="182880" y="3931920"/>
+            <a:ext cx="2862072" cy="950976"/>
+          </a:xfrm>
+          <a:prstGeom prst="rect">
+            <a:avLst/>
+          </a:prstGeom>
+          <a:solidFill>
+            <a:srgbClr val="162952"/>
+          </a:solidFill>
+          <a:ln w="6350">
+            <a:solidFill>
+              <a:srgbClr val="1E4D8C"/>
+            </a:solidFill>
+            <a:prstDash val="solid"/>
+          </a:ln>
+          <a:effectLst>
+            <a:outerShdw sx="100000" sy="100000" kx="0" ky="0" algn="bl" rotWithShape="0" blurRad="76200" dist="38100" dir="8100000">
+              <a:srgbClr val="000000">
+                <a:alpha val="30000"/>
+              </a:srgbClr>
+            </a:outerShdw>
+          </a:effectLst>
+        </p:spPr>
+      </p:sp>
+      <p:sp>
+        <p:nvSpPr>
+          <p:cNvPr id="42" name="Shape 40"/>
+          <p:cNvSpPr/>
+          <p:nvPr/>
+        </p:nvSpPr>
+        <p:spPr>
+          <a:xfrm>
+            <a:off x="182880" y="3931920"/>
+            <a:ext cx="2862072" cy="54864"/>
+          </a:xfrm>
+          <a:prstGeom prst="rect">
+            <a:avLst/>
+          </a:prstGeom>
+          <a:solidFill>
+            <a:srgbClr val="5B93D9"/>
+          </a:solidFill>
+          <a:ln w="12700">
+            <a:solidFill>
+              <a:srgbClr val="333333"/>
+            </a:solidFill>
+            <a:prstDash val="solid"/>
+          </a:ln>
+        </p:spPr>
+      </p:sp>
+      <p:sp>
+        <p:nvSpPr>
+          <p:cNvPr id="43" name="Text 41"/>
+          <p:cNvSpPr/>
+          <p:nvPr/>
+        </p:nvSpPr>
+        <p:spPr>
+          <a:xfrm>
+            <a:off x="274320" y="4023360"/>
+            <a:ext cx="2679192" cy="201168"/>
+          </a:xfrm>
+          <a:prstGeom prst="rect">
+            <a:avLst/>
+          </a:prstGeom>
+          <a:noFill/>
+          <a:ln/>
+        </p:spPr>
+        <p:txBody>
+          <a:bodyPr wrap="square" lIns="0" tIns="0" rIns="0" bIns="0" rtlCol="0" anchor="ctr"/>
+          <a:lstStyle/>
+          <a:p>
+            <a:pPr indent="0" marL="0">
+              <a:buNone/>
+            </a:pPr>
+            <a:r>
+              <a:rPr lang="en-US" sz="750" b="1" dirty="0">
+                <a:solidFill>
+                  <a:srgbClr val="5B93D9"/>
+                </a:solidFill>
+                <a:latin typeface="Calibri" pitchFamily="34" charset="0"/>
+                <a:ea typeface="Calibri" pitchFamily="34" charset="-122"/>
+                <a:cs typeface="Calibri" pitchFamily="34" charset="-120"/>
+              </a:rPr>
+              <a:t>IDENTITY, EMAIL &amp; INSIDER RISK</a:t>
+            </a:r>
+            <a:endParaRPr lang="en-US" sz="750" dirty="0"/>
+          </a:p>
+        </p:txBody>
+      </p:sp>
+      <p:sp>
+        <p:nvSpPr>
+          <p:cNvPr id="44" name="Text 42"/>
+          <p:cNvSpPr/>
+          <p:nvPr/>
+        </p:nvSpPr>
+        <p:spPr>
+          <a:xfrm>
+            <a:off x="274320" y="4233672"/>
+            <a:ext cx="2679192" cy="566928"/>
+          </a:xfrm>
+          <a:prstGeom prst="rect">
+            <a:avLst/>
+          </a:prstGeom>
+          <a:noFill/>
+          <a:ln/>
+        </p:spPr>
+        <p:txBody>
+          <a:bodyPr wrap="square" lIns="0" tIns="0" rIns="0" bIns="0" rtlCol="0" anchor="t"/>
+          <a:lstStyle/>
+          <a:p>
+            <a:pPr indent="0" marL="0">
+              <a:buNone/>
+            </a:pPr>
+            <a:r>
+              <a:rPr lang="en-US" sz="650" dirty="0">
+                <a:solidFill>
+                  <a:srgbClr val="94A3B8"/>
+                </a:solidFill>
+                <a:latin typeface="Calibri" pitchFamily="34" charset="0"/>
+                <a:ea typeface="Calibri" pitchFamily="34" charset="-122"/>
+                <a:cs typeface="Calibri" pitchFamily="34" charset="-120"/>
+              </a:rPr>
+              <a:t>Okta · Microsoft Entra ID · Ping Identity · Silverfort · Semperis DSP · Mimecast · IRONSCALES · Abnormal Security · Code42 Incydr · DTEX InTERCEPT · Gurucul UEBA · Exabeam · Securonix · GitGuardian</a:t>
+            </a:r>
+            <a:endParaRPr lang="en-US" sz="650" dirty="0"/>
+          </a:p>
+        </p:txBody>
+      </p:sp>
+      <p:sp>
+        <p:nvSpPr>
+          <p:cNvPr id="45" name="Shape 43"/>
+          <p:cNvSpPr/>
+          <p:nvPr/>
+        </p:nvSpPr>
+        <p:spPr>
+          <a:xfrm>
+            <a:off x="3136392" y="3931920"/>
+            <a:ext cx="2862072" cy="950976"/>
+          </a:xfrm>
+          <a:prstGeom prst="rect">
+            <a:avLst/>
+          </a:prstGeom>
+          <a:solidFill>
+            <a:srgbClr val="162952"/>
+          </a:solidFill>
+          <a:ln w="6350">
+            <a:solidFill>
+              <a:srgbClr val="1E4D8C"/>
+            </a:solidFill>
+            <a:prstDash val="solid"/>
+          </a:ln>
+          <a:effectLst>
+            <a:outerShdw sx="100000" sy="100000" kx="0" ky="0" algn="bl" rotWithShape="0" blurRad="76200" dist="38100" dir="8100000">
+              <a:srgbClr val="000000">
+                <a:alpha val="30000"/>
+              </a:srgbClr>
+            </a:outerShdw>
+          </a:effectLst>
+        </p:spPr>
+      </p:sp>
+      <p:sp>
+        <p:nvSpPr>
+          <p:cNvPr id="46" name="Shape 44"/>
+          <p:cNvSpPr/>
+          <p:nvPr/>
+        </p:nvSpPr>
+        <p:spPr>
+          <a:xfrm>
+            <a:off x="3136392" y="3931920"/>
+            <a:ext cx="2862072" cy="54864"/>
           </a:xfrm>
           <a:prstGeom prst="rect">
             <a:avLst/>
@@ -40100,30 +40505,30 @@
       </p:sp>
       <p:sp>
         <p:nvSpPr>
-          <p:cNvPr id="35" name="Text 33"/>
-          <p:cNvSpPr/>
-          <p:nvPr/>
-        </p:nvSpPr>
-        <p:spPr>
-          <a:xfrm>
-            <a:off x="4544568" y="4242816"/>
-            <a:ext cx="3941064" cy="201168"/>
-          </a:xfrm>
-          <a:prstGeom prst="rect">
-            <a:avLst/>
-          </a:prstGeom>
-          <a:noFill/>
-          <a:ln/>
-        </p:spPr>
-        <p:txBody>
-          <a:bodyPr wrap="square" lIns="0" tIns="0" rIns="0" bIns="0" rtlCol="0" anchor="ctr"/>
-          <a:lstStyle/>
-          <a:p>
-            <a:pPr indent="0" marL="0">
-              <a:buNone/>
-            </a:pPr>
-            <a:r>
-              <a:rPr lang="en-US" sz="850" b="1" dirty="0">
+          <p:cNvPr id="47" name="Text 45"/>
+          <p:cNvSpPr/>
+          <p:nvPr/>
+        </p:nvSpPr>
+        <p:spPr>
+          <a:xfrm>
+            <a:off x="3227832" y="4023360"/>
+            <a:ext cx="2679192" cy="201168"/>
+          </a:xfrm>
+          <a:prstGeom prst="rect">
+            <a:avLst/>
+          </a:prstGeom>
+          <a:noFill/>
+          <a:ln/>
+        </p:spPr>
+        <p:txBody>
+          <a:bodyPr wrap="square" lIns="0" tIns="0" rIns="0" bIns="0" rtlCol="0" anchor="ctr"/>
+          <a:lstStyle/>
+          <a:p>
+            <a:pPr indent="0" marL="0">
+              <a:buNone/>
+            </a:pPr>
+            <a:r>
+              <a:rPr lang="en-US" sz="750" b="1" dirty="0">
                 <a:solidFill>
                   <a:srgbClr val="F59E0B"/>
                 </a:solidFill>
@@ -40131,22 +40536,22 @@
                 <a:ea typeface="Calibri" pitchFamily="34" charset="-122"/>
                 <a:cs typeface="Calibri" pitchFamily="34" charset="-120"/>
               </a:rPr>
-              <a:t>ITSM &amp; TICKETING</a:t>
-            </a:r>
-            <a:endParaRPr lang="en-US" sz="850" dirty="0"/>
-          </a:p>
-        </p:txBody>
-      </p:sp>
-      <p:sp>
-        <p:nvSpPr>
-          <p:cNvPr id="36" name="Text 34"/>
-          <p:cNvSpPr/>
-          <p:nvPr/>
-        </p:nvSpPr>
-        <p:spPr>
-          <a:xfrm>
-            <a:off x="4544568" y="4471416"/>
-            <a:ext cx="3941064" cy="612648"/>
+              <a:t>SANDBOXES, BAS &amp; VALIDATION</a:t>
+            </a:r>
+            <a:endParaRPr lang="en-US" sz="750" dirty="0"/>
+          </a:p>
+        </p:txBody>
+      </p:sp>
+      <p:sp>
+        <p:nvSpPr>
+          <p:cNvPr id="48" name="Text 46"/>
+          <p:cNvSpPr/>
+          <p:nvPr/>
+        </p:nvSpPr>
+        <p:spPr>
+          <a:xfrm>
+            <a:off x="3227832" y="4233672"/>
+            <a:ext cx="2679192" cy="566928"/>
           </a:xfrm>
           <a:prstGeom prst="rect">
             <a:avLst/>
@@ -40162,7 +40567,7 @@
               <a:buNone/>
             </a:pPr>
             <a:r>
-              <a:rPr lang="en-US" sz="800" dirty="0">
+              <a:rPr lang="en-US" sz="650" dirty="0">
                 <a:solidFill>
                   <a:srgbClr val="94A3B8"/>
                 </a:solidFill>
@@ -40170,15 +40575,150 @@
                 <a:ea typeface="Calibri" pitchFamily="34" charset="-122"/>
                 <a:cs typeface="Calibri" pitchFamily="34" charset="-120"/>
               </a:rPr>
-              <a:t>ServiceNow SecOps · Atlassian Jira</a:t>
-            </a:r>
-            <a:endParaRPr lang="en-US" sz="800" dirty="0"/>
-          </a:p>
-        </p:txBody>
-      </p:sp>
-      <p:sp>
-        <p:nvSpPr>
-          <p:cNvPr id="37" name="Text 35"/>
+              <a:t>Joe Sandbox · ANY.RUN · Hybrid Analysis · VMRay · Intezer · SafeBreach · AttackIQ · Cymulate · Picus · Pentera · XM Cyber</a:t>
+            </a:r>
+            <a:endParaRPr lang="en-US" sz="650" dirty="0"/>
+          </a:p>
+        </p:txBody>
+      </p:sp>
+      <p:sp>
+        <p:nvSpPr>
+          <p:cNvPr id="49" name="Shape 47"/>
+          <p:cNvSpPr/>
+          <p:nvPr/>
+        </p:nvSpPr>
+        <p:spPr>
+          <a:xfrm>
+            <a:off x="6089904" y="3931920"/>
+            <a:ext cx="2862072" cy="950976"/>
+          </a:xfrm>
+          <a:prstGeom prst="rect">
+            <a:avLst/>
+          </a:prstGeom>
+          <a:solidFill>
+            <a:srgbClr val="162952"/>
+          </a:solidFill>
+          <a:ln w="6350">
+            <a:solidFill>
+              <a:srgbClr val="1E4D8C"/>
+            </a:solidFill>
+            <a:prstDash val="solid"/>
+          </a:ln>
+          <a:effectLst>
+            <a:outerShdw sx="100000" sy="100000" kx="0" ky="0" algn="bl" rotWithShape="0" blurRad="76200" dist="38100" dir="8100000">
+              <a:srgbClr val="000000">
+                <a:alpha val="30000"/>
+              </a:srgbClr>
+            </a:outerShdw>
+          </a:effectLst>
+        </p:spPr>
+      </p:sp>
+      <p:sp>
+        <p:nvSpPr>
+          <p:cNvPr id="50" name="Shape 48"/>
+          <p:cNvSpPr/>
+          <p:nvPr/>
+        </p:nvSpPr>
+        <p:spPr>
+          <a:xfrm>
+            <a:off x="6089904" y="3931920"/>
+            <a:ext cx="2862072" cy="54864"/>
+          </a:xfrm>
+          <a:prstGeom prst="rect">
+            <a:avLst/>
+          </a:prstGeom>
+          <a:solidFill>
+            <a:srgbClr val="06B6D4"/>
+          </a:solidFill>
+          <a:ln w="12700">
+            <a:solidFill>
+              <a:srgbClr val="333333"/>
+            </a:solidFill>
+            <a:prstDash val="solid"/>
+          </a:ln>
+        </p:spPr>
+      </p:sp>
+      <p:sp>
+        <p:nvSpPr>
+          <p:cNvPr id="51" name="Text 49"/>
+          <p:cNvSpPr/>
+          <p:nvPr/>
+        </p:nvSpPr>
+        <p:spPr>
+          <a:xfrm>
+            <a:off x="6181344" y="4023360"/>
+            <a:ext cx="2679192" cy="201168"/>
+          </a:xfrm>
+          <a:prstGeom prst="rect">
+            <a:avLst/>
+          </a:prstGeom>
+          <a:noFill/>
+          <a:ln/>
+        </p:spPr>
+        <p:txBody>
+          <a:bodyPr wrap="square" lIns="0" tIns="0" rIns="0" bIns="0" rtlCol="0" anchor="ctr"/>
+          <a:lstStyle/>
+          <a:p>
+            <a:pPr indent="0" marL="0">
+              <a:buNone/>
+            </a:pPr>
+            <a:r>
+              <a:rPr lang="en-US" sz="750" b="1" dirty="0">
+                <a:solidFill>
+                  <a:srgbClr val="06B6D4"/>
+                </a:solidFill>
+                <a:latin typeface="Calibri" pitchFamily="34" charset="0"/>
+                <a:ea typeface="Calibri" pitchFamily="34" charset="-122"/>
+                <a:cs typeface="Calibri" pitchFamily="34" charset="-120"/>
+              </a:rPr>
+              <a:t>REAL-TIME OSINT, AI &amp; FEDERATION</a:t>
+            </a:r>
+            <a:endParaRPr lang="en-US" sz="750" dirty="0"/>
+          </a:p>
+        </p:txBody>
+      </p:sp>
+      <p:sp>
+        <p:nvSpPr>
+          <p:cNvPr id="52" name="Text 50"/>
+          <p:cNvSpPr/>
+          <p:nvPr/>
+        </p:nvSpPr>
+        <p:spPr>
+          <a:xfrm>
+            <a:off x="6181344" y="4233672"/>
+            <a:ext cx="2679192" cy="566928"/>
+          </a:xfrm>
+          <a:prstGeom prst="rect">
+            <a:avLst/>
+          </a:prstGeom>
+          <a:noFill/>
+          <a:ln/>
+        </p:spPr>
+        <p:txBody>
+          <a:bodyPr wrap="square" lIns="0" tIns="0" rIns="0" bIns="0" rtlCol="0" anchor="t"/>
+          <a:lstStyle/>
+          <a:p>
+            <a:pPr indent="0" marL="0">
+              <a:buNone/>
+            </a:pPr>
+            <a:r>
+              <a:rPr lang="en-US" sz="650" dirty="0">
+                <a:solidFill>
+                  <a:srgbClr val="94A3B8"/>
+                </a:solidFill>
+                <a:latin typeface="Calibri" pitchFamily="34" charset="0"/>
+                <a:ea typeface="Calibri" pitchFamily="34" charset="-122"/>
+                <a:cs typeface="Calibri" pitchFamily="34" charset="-120"/>
+              </a:rPr>
+              <a:t>Dataminr Pulse · Factal · Samdesk · HUMAN Security · Microsoft Copilot · OpenAI ChatGPT · Google Gemini · Grok AI · Discord · GNAT Federation</a:t>
+            </a:r>
+            <a:endParaRPr lang="en-US" sz="650" dirty="0"/>
+          </a:p>
+        </p:txBody>
+      </p:sp>
+      <p:sp>
+        <p:nvSpPr>
+          <p:cNvPr id="53" name="Text 51"/>
           <p:cNvSpPr/>
           <p:nvPr/>
         </p:nvSpPr>

--- a/GNAT-Presentation.pptx
+++ b/GNAT-Presentation.pptx
@@ -4243,7 +4243,7 @@
                 <a:ea typeface="Calibri" pitchFamily="34" charset="-122"/>
                 <a:cs typeface="Calibri" pitchFamily="34" charset="-120"/>
               </a:rPr>
-              <a:t>Version 1.5.0  ·  Python 3.9+  ·  STIX 2.1  ·  158 Platform Connectors  ·  4,600+ Tests</a:t>
+              <a:t>Version 1.5.0  ·  Python 3.9+  ·  STIX 2.1  ·  158 Platform Connectors  ·  5,100+ Tests</a:t>
             </a:r>
             <a:endParaRPr lang="en-US" sz="1000" dirty="0"/>
           </a:p>
@@ -29663,7 +29663,7 @@
                 <a:ea typeface="Calibri" pitchFamily="34" charset="-122"/>
                 <a:cs typeface="Calibri" pitchFamily="34" charset="-120"/>
               </a:rPr>
-              <a:t>4,600+ unit tests across 40+ test files. Every connector, every pipeline stage, every renderer, every scheduler, every new v1.4/1.5 module. Confidence in changes without regression fear.</a:t>
+              <a:t>5,100+ unit tests across 40+ test files. Every connector, every pipeline stage, every renderer, every scheduler, every new v1.4/1.5 module. Confidence in changes without regression fear.</a:t>
             </a:r>
             <a:endParaRPr lang="en-US" sz="950" dirty="0"/>
           </a:p>
@@ -30477,7 +30477,7 @@
                 <a:ea typeface="Calibri" pitchFamily="34" charset="-122"/>
                 <a:cs typeface="Calibri" pitchFamily="34" charset="-120"/>
               </a:rPr>
-              <a:t>4,600+ unit tests across 40+ files</a:t>
+              <a:t>5,100+ unit tests across 40+ files</a:t>
             </a:r>
             <a:endParaRPr lang="en-US" sz="950" dirty="0"/>
           </a:p>
@@ -31977,7 +31977,7 @@
                 <a:ea typeface="Calibri" pitchFamily="34" charset="-122"/>
                 <a:cs typeface="Calibri" pitchFamily="34" charset="-120"/>
               </a:rPr>
-              <a:t>4,600+</a:t>
+              <a:t>5,100+</a:t>
             </a:r>
             <a:endParaRPr lang="en-US" sz="4200" dirty="0"/>
           </a:p>
@@ -38018,7 +38018,7 @@
                 <a:ea typeface="Calibri" pitchFamily="34" charset="-122"/>
                 <a:cs typeface="Calibri" pitchFamily="34" charset="-120"/>
               </a:rPr>
-              <a:t>158 connectors · STIX 2.1 ORM · Ingest + Export pipelines</a:t>
+              <a:t>158 connectors · STIX 2.1 ORM · Ingest + Export pipelines · Kafka telemetry ingestion</a:t>
             </a:r>
             <a:endParaRPr lang="en-US" sz="1300" dirty="0"/>
           </a:p>
@@ -38036,7 +38036,7 @@
                 <a:ea typeface="Calibri" pitchFamily="34" charset="-122"/>
                 <a:cs typeface="Calibri" pitchFamily="34" charset="-120"/>
               </a:rPr>
-              <a:t>AI agents (LLMClient: Claude · OpenAI · Grok · Gemini) · WorkflowEngine DAG · NLP queries · Research library</a:t>
+              <a:t>HuntGNAT: STIX → Sigma/YARA/Suricata/Snort · Hunt packages · ATT&amp;CK coverage · Drift detection</a:t>
             </a:r>
             <a:endParaRPr lang="en-US" sz="1300" dirty="0"/>
           </a:p>
@@ -38054,7 +38054,7 @@
                 <a:ea typeface="Calibri" pitchFamily="34" charset="-122"/>
                 <a:cs typeface="Calibri" pitchFamily="34" charset="-120"/>
               </a:rPr>
-              <a:t>TAXII 2.1 read+write · STIX validator · Policy RBAC · Plugins · Lineage · Metrics · Review Queue</a:t>
+              <a:t>Attribution: Campaign tracking · Diamond Model · Kill-chain · Actor profiles · Infrastructure classification</a:t>
             </a:r>
             <a:endParaRPr lang="en-US" sz="1300" dirty="0"/>
           </a:p>
@@ -38072,7 +38072,7 @@
                 <a:ea typeface="Calibri" pitchFamily="34" charset="-122"/>
                 <a:cs typeface="Calibri" pitchFamily="34" charset="-120"/>
               </a:rPr>
-              <a:t>Phase 4: ExecutionContext · HypothesisEngine · AgentGovernor · HITL  ·  4,600+ tests · ~$50/month Azure</a:t>
+              <a:t>AI agents (Claude · OpenAI · Grok · Gemini) · TAXII 2.1 · Policy RBAC  ·  5,100+ tests · ~$50/month Azure</a:t>
             </a:r>
             <a:endParaRPr lang="en-US" sz="1300" dirty="0"/>
           </a:p>

--- a/GNAT-Presentation.pptx
+++ b/GNAT-Presentation.pptx
@@ -3909,7 +3909,7 @@
                 <a:ea typeface="Calibri" pitchFamily="34" charset="-122"/>
                 <a:cs typeface="Calibri" pitchFamily="34" charset="-120"/>
               </a:rPr>
-              <a:t>158 Connectors</a:t>
+              <a:t>159 Connectors</a:t>
             </a:r>
             <a:endParaRPr lang="en-US" sz="1000" dirty="0"/>
           </a:p>
@@ -4243,7 +4243,7 @@
                 <a:ea typeface="Calibri" pitchFamily="34" charset="-122"/>
                 <a:cs typeface="Calibri" pitchFamily="34" charset="-120"/>
               </a:rPr>
-              <a:t>Version 1.5.0  ·  Python 3.9+  ·  STIX 2.1  ·  158 Platform Connectors  ·  5,100+ Tests</a:t>
+              <a:t>Version 1.9.0  ·  Python 3.9+  ·  STIX 2.1  ·  159 Platform Connectors  ·  5,100+ Tests</a:t>
             </a:r>
             <a:endParaRPr lang="en-US" sz="1000" dirty="0"/>
           </a:p>
@@ -28074,7 +28074,7 @@
                 <a:ea typeface="Calibri" pitchFamily="34" charset="-122"/>
                 <a:cs typeface="Calibri" pitchFamily="34" charset="-120"/>
               </a:rPr>
-              <a:t>TRUST_LEVEL on all 158 connectors</a:t>
+              <a:t>TRUST_LEVEL on all 159 connectors</a:t>
             </a:r>
             <a:endParaRPr lang="en-US" sz="900" dirty="0"/>
           </a:p>
@@ -28732,7 +28732,7 @@
                 <a:ea typeface="Calibri" pitchFamily="34" charset="-122"/>
                 <a:cs typeface="Calibri" pitchFamily="34" charset="-120"/>
               </a:rPr>
-              <a:t>ADRs 0039–0049  ·  TRUST_LEVEL on all 158 connectors  ·  Alembic migrations 0004–0008  ·  SimulationConnector · ReplayRunner · AgentTestHarness</a:t>
+              <a:t>ADRs 0039–0049  ·  TRUST_LEVEL on all 159 connectors  ·  Alembic migrations 0004–0008  ·  SimulationConnector · ReplayRunner · AgentTestHarness</a:t>
             </a:r>
             <a:endParaRPr lang="en-US" sz="800" dirty="0"/>
           </a:p>
@@ -29258,7 +29258,7 @@
                 <a:ea typeface="Calibri" pitchFamily="34" charset="-122"/>
                 <a:cs typeface="Calibri" pitchFamily="34" charset="-120"/>
               </a:rPr>
-              <a:t>Every platform exposes get_object(), list_objects(), upsert_object(), to_stix(), from_stix(). Analysts learn one mental model once and it works across 158 platforms.</a:t>
+              <a:t>Every platform exposes get_object(), list_objects(), upsert_object(), to_stix(), from_stix(). Analysts learn one mental model once and it works across 159 platforms.</a:t>
             </a:r>
             <a:endParaRPr lang="en-US" sz="950" dirty="0"/>
           </a:p>
@@ -31825,7 +31825,7 @@
                 <a:ea typeface="Calibri" pitchFamily="34" charset="-122"/>
                 <a:cs typeface="Calibri" pitchFamily="34" charset="-120"/>
               </a:rPr>
-              <a:t>158</a:t>
+              <a:t>159</a:t>
             </a:r>
             <a:endParaRPr lang="en-US" sz="4200" dirty="0"/>
           </a:p>
@@ -34380,7 +34380,7 @@
                 <a:ea typeface="Calibri" pitchFamily="34" charset="-122"/>
                 <a:cs typeface="Calibri" pitchFamily="34" charset="-120"/>
               </a:rPr>
-              <a:t>✓  Every pending item has shipped  —  v1.5.0 complete  ·  Phase 4 (v1.6) shipped</a:t>
+              <a:t>✓  Every pending item has shipped  —  v1.9.0 complete  ·  Phase 4 (v1.6) shipped</a:t>
             </a:r>
             <a:endParaRPr lang="en-US" sz="1300" dirty="0"/>
           </a:p>
@@ -36955,7 +36955,7 @@
                 <a:ea typeface="Calibri" pitchFamily="34" charset="-122"/>
                 <a:cs typeface="Calibri" pitchFamily="34" charset="-120"/>
               </a:rPr>
-              <a:t>158 connectors total in CLIENT_REGISTRY</a:t>
+              <a:t>159 connectors total in CLIENT_REGISTRY</a:t>
             </a:r>
             <a:endParaRPr lang="en-US" sz="800" dirty="0"/>
           </a:p>
@@ -38018,7 +38018,7 @@
                 <a:ea typeface="Calibri" pitchFamily="34" charset="-122"/>
                 <a:cs typeface="Calibri" pitchFamily="34" charset="-120"/>
               </a:rPr>
-              <a:t>158 connectors · STIX 2.1 ORM · Ingest + Export pipelines · Kafka telemetry ingestion</a:t>
+              <a:t>159 connectors · STIX 2.1 ORM · Ingest + Export pipelines · Kafka telemetry ingestion</a:t>
             </a:r>
             <a:endParaRPr lang="en-US" sz="1300" dirty="0"/>
           </a:p>
@@ -38134,7 +38134,7 @@
                 <a:ea typeface="Calibri" pitchFamily="34" charset="-122"/>
                 <a:cs typeface="Calibri" pitchFamily="34" charset="-120"/>
               </a:rPr>
-              <a:t>Version 1.5.0  |  Python 3.9+  |  Apache 2.0  |  EXAMPLES.md · IMPLEMENTATION_PLAN.md · README.md</a:t>
+              <a:t>Version 1.9.0  |  Python 3.9+  |  Apache 2.0  |  EXAMPLES.md · IMPLEMENTATION_PLAN.md · README.md</a:t>
             </a:r>
             <a:endParaRPr lang="en-US" sz="1000" dirty="0"/>
           </a:p>
@@ -38700,7 +38700,7 @@
                 <a:ea typeface="Calibri" pitchFamily="34" charset="-122"/>
                 <a:cs typeface="Calibri" pitchFamily="34" charset="-120"/>
               </a:rPr>
-              <a:t>CONNECTOR LAYER (158 platforms)</a:t>
+              <a:t>CONNECTOR LAYER (159 platforms)</a:t>
             </a:r>
             <a:endParaRPr lang="en-US" sz="1000" dirty="0"/>
           </a:p>
@@ -39090,7 +39090,7 @@
                 <a:ea typeface="Calibri" pitchFamily="34" charset="-122"/>
                 <a:cs typeface="Calibri" pitchFamily="34" charset="-120"/>
               </a:rPr>
-              <a:t>158 Platform Connectors — One Interface</a:t>
+              <a:t>159 Platform Connectors — One Interface</a:t>
             </a:r>
             <a:endParaRPr lang="en-US" sz="2000" dirty="0"/>
           </a:p>
